--- a/statistics_16_for_hackers.pptx
+++ b/statistics_16_for_hackers.pptx
@@ -5,10 +5,13 @@
     <p:sldMasterId id="2147483659" r:id="rId1"/>
   </p:sldMasterIdLst>
   <p:notesMasterIdLst>
-    <p:notesMasterId r:id="rId3"/>
+    <p:notesMasterId r:id="rId6"/>
   </p:notesMasterIdLst>
   <p:sldIdLst>
     <p:sldId id="310" r:id="rId2"/>
+    <p:sldId id="311" r:id="rId3"/>
+    <p:sldId id="312" r:id="rId4"/>
+    <p:sldId id="313" r:id="rId5"/>
   </p:sldIdLst>
   <p:sldSz cx="12192000" cy="6858000"/>
   <p:notesSz cx="6858000" cy="9144000"/>
@@ -14121,6 +14124,3025 @@
 </p:sld>
 </file>
 
+<file path=ppt/slides/slide2.xml><?xml version="1.0" encoding="utf-8"?>
+<p:sld xmlns:a="http://schemas.openxmlformats.org/drawingml/2006/main" xmlns:r="http://schemas.openxmlformats.org/officeDocument/2006/relationships" xmlns:p="http://schemas.openxmlformats.org/presentationml/2006/main">
+  <p:cSld>
+    <p:spTree>
+      <p:nvGrpSpPr>
+        <p:cNvPr id="1" name=""/>
+        <p:cNvGrpSpPr/>
+        <p:nvPr/>
+      </p:nvGrpSpPr>
+      <p:grpSpPr>
+        <a:xfrm>
+          <a:off x="0" y="0"/>
+          <a:ext cx="0" cy="0"/>
+          <a:chOff x="0" y="0"/>
+          <a:chExt cx="0" cy="0"/>
+        </a:xfrm>
+      </p:grpSpPr>
+      <p:sp>
+        <p:nvSpPr>
+          <p:cNvPr id="2" name="TextBox 1">
+            <a:extLst>
+              <a:ext uri="{FF2B5EF4-FFF2-40B4-BE49-F238E27FC236}">
+                <a16:creationId xmlns:a16="http://schemas.microsoft.com/office/drawing/2014/main" id="{FFF755FE-9EC5-2243-8B9B-E4A9E7CEC3D9}"/>
+              </a:ext>
+            </a:extLst>
+          </p:cNvPr>
+          <p:cNvSpPr txBox="1"/>
+          <p:nvPr/>
+        </p:nvSpPr>
+        <p:spPr>
+          <a:xfrm>
+            <a:off x="0" y="0"/>
+            <a:ext cx="7656576" cy="523220"/>
+          </a:xfrm>
+          <a:prstGeom prst="rect">
+            <a:avLst/>
+          </a:prstGeom>
+          <a:noFill/>
+        </p:spPr>
+        <p:txBody>
+          <a:bodyPr wrap="square" rtlCol="0">
+            <a:spAutoFit/>
+          </a:bodyPr>
+          <a:lstStyle/>
+          <a:p>
+            <a:r>
+              <a:rPr lang="en-US" sz="2800" b="1" dirty="0"/>
+              <a:t>Example – direct simulation to find P-value</a:t>
+            </a:r>
+          </a:p>
+        </p:txBody>
+      </p:sp>
+      <p:sp>
+        <p:nvSpPr>
+          <p:cNvPr id="3" name="TextBox 2">
+            <a:extLst>
+              <a:ext uri="{FF2B5EF4-FFF2-40B4-BE49-F238E27FC236}">
+                <a16:creationId xmlns:a16="http://schemas.microsoft.com/office/drawing/2014/main" id="{B4214305-FB5A-AA42-89E0-5393ADEB579E}"/>
+              </a:ext>
+            </a:extLst>
+          </p:cNvPr>
+          <p:cNvSpPr txBox="1"/>
+          <p:nvPr/>
+        </p:nvSpPr>
+        <p:spPr>
+          <a:xfrm>
+            <a:off x="1376975" y="1291772"/>
+            <a:ext cx="5589881" cy="2308324"/>
+          </a:xfrm>
+          <a:prstGeom prst="rect">
+            <a:avLst/>
+          </a:prstGeom>
+          <a:noFill/>
+        </p:spPr>
+        <p:txBody>
+          <a:bodyPr wrap="square" rtlCol="0">
+            <a:spAutoFit/>
+          </a:bodyPr>
+          <a:lstStyle/>
+          <a:p>
+            <a:r>
+              <a:rPr lang="en-US" sz="1800" dirty="0">
+                <a:solidFill>
+                  <a:srgbClr val="0070C0"/>
+                </a:solidFill>
+                <a:latin typeface="Menlo" panose="020B0609030804020204" pitchFamily="49" charset="0"/>
+                <a:ea typeface="Menlo" panose="020B0609030804020204" pitchFamily="49" charset="0"/>
+                <a:cs typeface="Menlo" panose="020B0609030804020204" pitchFamily="49" charset="0"/>
+              </a:rPr>
+              <a:t>counter=0</a:t>
+            </a:r>
+          </a:p>
+          <a:p>
+            <a:r>
+              <a:rPr lang="en-US" sz="1800" dirty="0">
+                <a:solidFill>
+                  <a:srgbClr val="0070C0"/>
+                </a:solidFill>
+                <a:latin typeface="Menlo" panose="020B0609030804020204" pitchFamily="49" charset="0"/>
+                <a:ea typeface="Menlo" panose="020B0609030804020204" pitchFamily="49" charset="0"/>
+                <a:cs typeface="Menlo" panose="020B0609030804020204" pitchFamily="49" charset="0"/>
+              </a:rPr>
+              <a:t>N=10000</a:t>
+            </a:r>
+          </a:p>
+          <a:p>
+            <a:r>
+              <a:rPr lang="en-US" sz="1800" dirty="0">
+                <a:solidFill>
+                  <a:srgbClr val="0070C0"/>
+                </a:solidFill>
+                <a:latin typeface="Menlo" panose="020B0609030804020204" pitchFamily="49" charset="0"/>
+                <a:ea typeface="Menlo" panose="020B0609030804020204" pitchFamily="49" charset="0"/>
+                <a:cs typeface="Menlo" panose="020B0609030804020204" pitchFamily="49" charset="0"/>
+              </a:rPr>
+              <a:t>for ii in range(N):</a:t>
+            </a:r>
+          </a:p>
+          <a:p>
+            <a:r>
+              <a:rPr lang="en-US" sz="1800" dirty="0">
+                <a:solidFill>
+                  <a:srgbClr val="0070C0"/>
+                </a:solidFill>
+                <a:latin typeface="Menlo" panose="020B0609030804020204" pitchFamily="49" charset="0"/>
+                <a:ea typeface="Menlo" panose="020B0609030804020204" pitchFamily="49" charset="0"/>
+                <a:cs typeface="Menlo" panose="020B0609030804020204" pitchFamily="49" charset="0"/>
+              </a:rPr>
+              <a:t>    trials = </a:t>
+            </a:r>
+            <a:r>
+              <a:rPr lang="en-US" sz="1800" dirty="0" err="1">
+                <a:solidFill>
+                  <a:srgbClr val="0070C0"/>
+                </a:solidFill>
+                <a:latin typeface="Menlo" panose="020B0609030804020204" pitchFamily="49" charset="0"/>
+                <a:ea typeface="Menlo" panose="020B0609030804020204" pitchFamily="49" charset="0"/>
+                <a:cs typeface="Menlo" panose="020B0609030804020204" pitchFamily="49" charset="0"/>
+              </a:rPr>
+              <a:t>randint</a:t>
+            </a:r>
+            <a:r>
+              <a:rPr lang="en-US" sz="1800" dirty="0">
+                <a:solidFill>
+                  <a:srgbClr val="0070C0"/>
+                </a:solidFill>
+                <a:latin typeface="Menlo" panose="020B0609030804020204" pitchFamily="49" charset="0"/>
+                <a:ea typeface="Menlo" panose="020B0609030804020204" pitchFamily="49" charset="0"/>
+                <a:cs typeface="Menlo" panose="020B0609030804020204" pitchFamily="49" charset="0"/>
+              </a:rPr>
+              <a:t>(2, size=30)</a:t>
+            </a:r>
+          </a:p>
+          <a:p>
+            <a:r>
+              <a:rPr lang="en-US" sz="1800" dirty="0">
+                <a:solidFill>
+                  <a:srgbClr val="0070C0"/>
+                </a:solidFill>
+                <a:latin typeface="Menlo" panose="020B0609030804020204" pitchFamily="49" charset="0"/>
+                <a:ea typeface="Menlo" panose="020B0609030804020204" pitchFamily="49" charset="0"/>
+                <a:cs typeface="Menlo" panose="020B0609030804020204" pitchFamily="49" charset="0"/>
+              </a:rPr>
+              <a:t>    if </a:t>
+            </a:r>
+            <a:r>
+              <a:rPr lang="en-US" sz="1800" dirty="0" err="1">
+                <a:solidFill>
+                  <a:srgbClr val="0070C0"/>
+                </a:solidFill>
+                <a:latin typeface="Menlo" panose="020B0609030804020204" pitchFamily="49" charset="0"/>
+                <a:ea typeface="Menlo" panose="020B0609030804020204" pitchFamily="49" charset="0"/>
+                <a:cs typeface="Menlo" panose="020B0609030804020204" pitchFamily="49" charset="0"/>
+              </a:rPr>
+              <a:t>trials.sum</a:t>
+            </a:r>
+            <a:r>
+              <a:rPr lang="en-US" sz="1800" dirty="0">
+                <a:solidFill>
+                  <a:srgbClr val="0070C0"/>
+                </a:solidFill>
+                <a:latin typeface="Menlo" panose="020B0609030804020204" pitchFamily="49" charset="0"/>
+                <a:ea typeface="Menlo" panose="020B0609030804020204" pitchFamily="49" charset="0"/>
+                <a:cs typeface="Menlo" panose="020B0609030804020204" pitchFamily="49" charset="0"/>
+              </a:rPr>
+              <a:t>() &gt;= 22:</a:t>
+            </a:r>
+          </a:p>
+          <a:p>
+            <a:r>
+              <a:rPr lang="en-US" sz="1800" dirty="0">
+                <a:solidFill>
+                  <a:srgbClr val="0070C0"/>
+                </a:solidFill>
+                <a:latin typeface="Menlo" panose="020B0609030804020204" pitchFamily="49" charset="0"/>
+                <a:ea typeface="Menlo" panose="020B0609030804020204" pitchFamily="49" charset="0"/>
+                <a:cs typeface="Menlo" panose="020B0609030804020204" pitchFamily="49" charset="0"/>
+              </a:rPr>
+              <a:t>        counter += 1</a:t>
+            </a:r>
+          </a:p>
+          <a:p>
+            <a:endParaRPr lang="en-US" sz="1800" dirty="0">
+              <a:solidFill>
+                <a:srgbClr val="0070C0"/>
+              </a:solidFill>
+              <a:latin typeface="Menlo" panose="020B0609030804020204" pitchFamily="49" charset="0"/>
+              <a:ea typeface="Menlo" panose="020B0609030804020204" pitchFamily="49" charset="0"/>
+              <a:cs typeface="Menlo" panose="020B0609030804020204" pitchFamily="49" charset="0"/>
+            </a:endParaRPr>
+          </a:p>
+          <a:p>
+            <a:r>
+              <a:rPr lang="en-US" sz="1800" dirty="0" err="1">
+                <a:solidFill>
+                  <a:srgbClr val="0070C0"/>
+                </a:solidFill>
+                <a:latin typeface="Menlo" panose="020B0609030804020204" pitchFamily="49" charset="0"/>
+                <a:ea typeface="Menlo" panose="020B0609030804020204" pitchFamily="49" charset="0"/>
+                <a:cs typeface="Menlo" panose="020B0609030804020204" pitchFamily="49" charset="0"/>
+              </a:rPr>
+              <a:t>P_val</a:t>
+            </a:r>
+            <a:r>
+              <a:rPr lang="en-US" sz="1800" dirty="0">
+                <a:solidFill>
+                  <a:srgbClr val="0070C0"/>
+                </a:solidFill>
+                <a:latin typeface="Menlo" panose="020B0609030804020204" pitchFamily="49" charset="0"/>
+                <a:ea typeface="Menlo" panose="020B0609030804020204" pitchFamily="49" charset="0"/>
+                <a:cs typeface="Menlo" panose="020B0609030804020204" pitchFamily="49" charset="0"/>
+              </a:rPr>
+              <a:t> = counter / N     </a:t>
+            </a:r>
+            <a:r>
+              <a:rPr lang="en-US" sz="1800" dirty="0">
+                <a:solidFill>
+                  <a:srgbClr val="00B050"/>
+                </a:solidFill>
+                <a:latin typeface="Menlo" panose="020B0609030804020204" pitchFamily="49" charset="0"/>
+                <a:ea typeface="Menlo" panose="020B0609030804020204" pitchFamily="49" charset="0"/>
+                <a:cs typeface="Menlo" panose="020B0609030804020204" pitchFamily="49" charset="0"/>
+              </a:rPr>
+              <a:t># 0.008</a:t>
+            </a:r>
+            <a:endParaRPr lang="en-US" sz="1800" dirty="0">
+              <a:solidFill>
+                <a:srgbClr val="0070C0"/>
+              </a:solidFill>
+              <a:latin typeface="Menlo" panose="020B0609030804020204" pitchFamily="49" charset="0"/>
+              <a:ea typeface="Menlo" panose="020B0609030804020204" pitchFamily="49" charset="0"/>
+              <a:cs typeface="Menlo" panose="020B0609030804020204" pitchFamily="49" charset="0"/>
+            </a:endParaRPr>
+          </a:p>
+        </p:txBody>
+      </p:sp>
+    </p:spTree>
+    <p:extLst>
+      <p:ext uri="{BB962C8B-B14F-4D97-AF65-F5344CB8AC3E}">
+        <p14:creationId xmlns:p14="http://schemas.microsoft.com/office/powerpoint/2010/main" val="534501902"/>
+      </p:ext>
+    </p:extLst>
+  </p:cSld>
+  <p:clrMapOvr>
+    <a:masterClrMapping/>
+  </p:clrMapOvr>
+</p:sld>
+</file>
+
+<file path=ppt/slides/slide3.xml><?xml version="1.0" encoding="utf-8"?>
+<p:sld xmlns:a="http://schemas.openxmlformats.org/drawingml/2006/main" xmlns:r="http://schemas.openxmlformats.org/officeDocument/2006/relationships" xmlns:p="http://schemas.openxmlformats.org/presentationml/2006/main">
+  <p:cSld>
+    <p:spTree>
+      <p:nvGrpSpPr>
+        <p:cNvPr id="1" name=""/>
+        <p:cNvGrpSpPr/>
+        <p:nvPr/>
+      </p:nvGrpSpPr>
+      <p:grpSpPr>
+        <a:xfrm>
+          <a:off x="0" y="0"/>
+          <a:ext cx="0" cy="0"/>
+          <a:chOff x="0" y="0"/>
+          <a:chExt cx="0" cy="0"/>
+        </a:xfrm>
+      </p:grpSpPr>
+      <p:sp>
+        <p:nvSpPr>
+          <p:cNvPr id="2" name="TextBox 1">
+            <a:extLst>
+              <a:ext uri="{FF2B5EF4-FFF2-40B4-BE49-F238E27FC236}">
+                <a16:creationId xmlns:a16="http://schemas.microsoft.com/office/drawing/2014/main" id="{FFF755FE-9EC5-2243-8B9B-E4A9E7CEC3D9}"/>
+              </a:ext>
+            </a:extLst>
+          </p:cNvPr>
+          <p:cNvSpPr txBox="1"/>
+          <p:nvPr/>
+        </p:nvSpPr>
+        <p:spPr>
+          <a:xfrm>
+            <a:off x="0" y="0"/>
+            <a:ext cx="7656576" cy="523220"/>
+          </a:xfrm>
+          <a:prstGeom prst="rect">
+            <a:avLst/>
+          </a:prstGeom>
+          <a:noFill/>
+        </p:spPr>
+        <p:txBody>
+          <a:bodyPr wrap="square" rtlCol="0">
+            <a:spAutoFit/>
+          </a:bodyPr>
+          <a:lstStyle/>
+          <a:p>
+            <a:r>
+              <a:rPr lang="en-US" sz="2800" b="1" dirty="0"/>
+              <a:t>Example – Shuffling</a:t>
+            </a:r>
+          </a:p>
+        </p:txBody>
+      </p:sp>
+      <p:sp>
+        <p:nvSpPr>
+          <p:cNvPr id="3" name="TextBox 2">
+            <a:extLst>
+              <a:ext uri="{FF2B5EF4-FFF2-40B4-BE49-F238E27FC236}">
+                <a16:creationId xmlns:a16="http://schemas.microsoft.com/office/drawing/2014/main" id="{B4214305-FB5A-AA42-89E0-5393ADEB579E}"/>
+              </a:ext>
+            </a:extLst>
+          </p:cNvPr>
+          <p:cNvSpPr txBox="1"/>
+          <p:nvPr/>
+        </p:nvSpPr>
+        <p:spPr>
+          <a:xfrm>
+            <a:off x="31775" y="523220"/>
+            <a:ext cx="8417282" cy="738664"/>
+          </a:xfrm>
+          <a:prstGeom prst="rect">
+            <a:avLst/>
+          </a:prstGeom>
+          <a:noFill/>
+        </p:spPr>
+        <p:txBody>
+          <a:bodyPr wrap="square" rtlCol="0">
+            <a:spAutoFit/>
+          </a:bodyPr>
+          <a:lstStyle/>
+          <a:p>
+            <a:pPr marL="285750" indent="-285750">
+              <a:buFont typeface="Arial" panose="020B0604020202020204" pitchFamily="34" charset="0"/>
+              <a:buChar char="•"/>
+            </a:pPr>
+            <a:r>
+              <a:rPr lang="en-US" dirty="0">
+                <a:solidFill>
+                  <a:srgbClr val="0070C0"/>
+                </a:solidFill>
+                <a:latin typeface="Menlo" panose="020B0609030804020204" pitchFamily="49" charset="0"/>
+                <a:ea typeface="Menlo" panose="020B0609030804020204" pitchFamily="49" charset="0"/>
+                <a:cs typeface="Menlo" panose="020B0609030804020204" pitchFamily="49" charset="0"/>
+              </a:rPr>
+              <a:t>Shuffling works when the Null Hypothesis assumes two groups are equivalent</a:t>
+            </a:r>
+          </a:p>
+          <a:p>
+            <a:pPr marL="285750" indent="-285750">
+              <a:buFont typeface="Arial" panose="020B0604020202020204" pitchFamily="34" charset="0"/>
+              <a:buChar char="•"/>
+            </a:pPr>
+            <a:r>
+              <a:rPr lang="en-US" dirty="0">
+                <a:solidFill>
+                  <a:srgbClr val="0070C0"/>
+                </a:solidFill>
+                <a:latin typeface="Menlo" panose="020B0609030804020204" pitchFamily="49" charset="0"/>
+                <a:ea typeface="Menlo" panose="020B0609030804020204" pitchFamily="49" charset="0"/>
+                <a:cs typeface="Menlo" panose="020B0609030804020204" pitchFamily="49" charset="0"/>
+              </a:rPr>
+              <a:t>Only works when there is no selection biases</a:t>
+            </a:r>
+          </a:p>
+          <a:p>
+            <a:pPr marL="285750" indent="-285750">
+              <a:buFont typeface="Arial" panose="020B0604020202020204" pitchFamily="34" charset="0"/>
+              <a:buChar char="•"/>
+            </a:pPr>
+            <a:r>
+              <a:rPr lang="en-US" dirty="0">
+                <a:solidFill>
+                  <a:srgbClr val="0070C0"/>
+                </a:solidFill>
+                <a:latin typeface="Menlo" panose="020B0609030804020204" pitchFamily="49" charset="0"/>
+                <a:ea typeface="Menlo" panose="020B0609030804020204" pitchFamily="49" charset="0"/>
+                <a:cs typeface="Menlo" panose="020B0609030804020204" pitchFamily="49" charset="0"/>
+              </a:rPr>
+              <a:t>The trials must be independent (!)</a:t>
+            </a:r>
+          </a:p>
+        </p:txBody>
+      </p:sp>
+      <p:sp>
+        <p:nvSpPr>
+          <p:cNvPr id="4" name="TextBox 3">
+            <a:extLst>
+              <a:ext uri="{FF2B5EF4-FFF2-40B4-BE49-F238E27FC236}">
+                <a16:creationId xmlns:a16="http://schemas.microsoft.com/office/drawing/2014/main" id="{70E595A3-403F-6749-95B4-96B9355C9FC4}"/>
+              </a:ext>
+            </a:extLst>
+          </p:cNvPr>
+          <p:cNvSpPr txBox="1"/>
+          <p:nvPr/>
+        </p:nvSpPr>
+        <p:spPr>
+          <a:xfrm>
+            <a:off x="1423491" y="1349187"/>
+            <a:ext cx="3566009" cy="369332"/>
+          </a:xfrm>
+          <a:prstGeom prst="rect">
+            <a:avLst/>
+          </a:prstGeom>
+          <a:noFill/>
+        </p:spPr>
+        <p:txBody>
+          <a:bodyPr wrap="square" rtlCol="0">
+            <a:spAutoFit/>
+          </a:bodyPr>
+          <a:lstStyle/>
+          <a:p>
+            <a:r>
+              <a:rPr lang="en-US" sz="1600" dirty="0">
+                <a:solidFill>
+                  <a:srgbClr val="0070C0"/>
+                </a:solidFill>
+                <a:latin typeface="Menlo" panose="020B0609030804020204" pitchFamily="49" charset="0"/>
+                <a:ea typeface="Menlo" panose="020B0609030804020204" pitchFamily="49" charset="0"/>
+                <a:cs typeface="Menlo" panose="020B0609030804020204" pitchFamily="49" charset="0"/>
+              </a:rPr>
+              <a:t>Example</a:t>
+            </a:r>
+            <a:r>
+              <a:rPr lang="en-US" sz="1800" dirty="0">
+                <a:solidFill>
+                  <a:srgbClr val="0070C0"/>
+                </a:solidFill>
+                <a:latin typeface="Menlo" panose="020B0609030804020204" pitchFamily="49" charset="0"/>
+                <a:ea typeface="Menlo" panose="020B0609030804020204" pitchFamily="49" charset="0"/>
+                <a:cs typeface="Menlo" panose="020B0609030804020204" pitchFamily="49" charset="0"/>
+              </a:rPr>
+              <a:t>: A/B Split Test</a:t>
+            </a:r>
+          </a:p>
+        </p:txBody>
+      </p:sp>
+      <p:pic>
+        <p:nvPicPr>
+          <p:cNvPr id="5" name="Picture 4">
+            <a:extLst>
+              <a:ext uri="{FF2B5EF4-FFF2-40B4-BE49-F238E27FC236}">
+                <a16:creationId xmlns:a16="http://schemas.microsoft.com/office/drawing/2014/main" id="{44670FF3-E80B-EB4A-8B34-22B9059C788F}"/>
+              </a:ext>
+            </a:extLst>
+          </p:cNvPr>
+          <p:cNvPicPr>
+            <a:picLocks noChangeAspect="1"/>
+          </p:cNvPicPr>
+          <p:nvPr/>
+        </p:nvPicPr>
+        <p:blipFill>
+          <a:blip r:embed="rId2" cstate="email">
+            <a:extLst>
+              <a:ext uri="{28A0092B-C50C-407E-A947-70E740481C1C}">
+                <a14:useLocalDpi xmlns:a14="http://schemas.microsoft.com/office/drawing/2010/main"/>
+              </a:ext>
+            </a:extLst>
+          </a:blip>
+          <a:stretch>
+            <a:fillRect/>
+          </a:stretch>
+        </p:blipFill>
+        <p:spPr>
+          <a:xfrm>
+            <a:off x="855614" y="1746504"/>
+            <a:ext cx="2079355" cy="1046718"/>
+          </a:xfrm>
+          <a:prstGeom prst="rect">
+            <a:avLst/>
+          </a:prstGeom>
+        </p:spPr>
+      </p:pic>
+      <p:pic>
+        <p:nvPicPr>
+          <p:cNvPr id="6" name="Picture 5">
+            <a:extLst>
+              <a:ext uri="{FF2B5EF4-FFF2-40B4-BE49-F238E27FC236}">
+                <a16:creationId xmlns:a16="http://schemas.microsoft.com/office/drawing/2014/main" id="{5996D345-1AD7-C44B-A5D5-921040892604}"/>
+              </a:ext>
+            </a:extLst>
+          </p:cNvPr>
+          <p:cNvPicPr>
+            <a:picLocks noChangeAspect="1"/>
+          </p:cNvPicPr>
+          <p:nvPr/>
+        </p:nvPicPr>
+        <p:blipFill>
+          <a:blip r:embed="rId3" cstate="email">
+            <a:extLst>
+              <a:ext uri="{28A0092B-C50C-407E-A947-70E740481C1C}">
+                <a14:useLocalDpi xmlns:a14="http://schemas.microsoft.com/office/drawing/2010/main"/>
+              </a:ext>
+            </a:extLst>
+          </a:blip>
+          <a:stretch>
+            <a:fillRect/>
+          </a:stretch>
+        </p:blipFill>
+        <p:spPr>
+          <a:xfrm>
+            <a:off x="3035808" y="1746504"/>
+            <a:ext cx="2079355" cy="1046718"/>
+          </a:xfrm>
+          <a:prstGeom prst="rect">
+            <a:avLst/>
+          </a:prstGeom>
+        </p:spPr>
+      </p:pic>
+      <p:sp>
+        <p:nvSpPr>
+          <p:cNvPr id="7" name="TextBox 6">
+            <a:extLst>
+              <a:ext uri="{FF2B5EF4-FFF2-40B4-BE49-F238E27FC236}">
+                <a16:creationId xmlns:a16="http://schemas.microsoft.com/office/drawing/2014/main" id="{BA7671ED-AC2B-434A-B53F-6906D1E2DAB3}"/>
+              </a:ext>
+            </a:extLst>
+          </p:cNvPr>
+          <p:cNvSpPr txBox="1"/>
+          <p:nvPr/>
+        </p:nvSpPr>
+        <p:spPr>
+          <a:xfrm>
+            <a:off x="415955" y="2071874"/>
+            <a:ext cx="411405" cy="369332"/>
+          </a:xfrm>
+          <a:prstGeom prst="rect">
+            <a:avLst/>
+          </a:prstGeom>
+          <a:noFill/>
+        </p:spPr>
+        <p:txBody>
+          <a:bodyPr wrap="square" rtlCol="0">
+            <a:spAutoFit/>
+          </a:bodyPr>
+          <a:lstStyle/>
+          <a:p>
+            <a:r>
+              <a:rPr lang="en-US" sz="1800" b="1" dirty="0">
+                <a:solidFill>
+                  <a:srgbClr val="00B050"/>
+                </a:solidFill>
+                <a:latin typeface="Menlo" panose="020B0609030804020204" pitchFamily="49" charset="0"/>
+                <a:ea typeface="Menlo" panose="020B0609030804020204" pitchFamily="49" charset="0"/>
+                <a:cs typeface="Menlo" panose="020B0609030804020204" pitchFamily="49" charset="0"/>
+              </a:rPr>
+              <a:t>A</a:t>
+            </a:r>
+          </a:p>
+        </p:txBody>
+      </p:sp>
+      <p:sp>
+        <p:nvSpPr>
+          <p:cNvPr id="8" name="TextBox 7">
+            <a:extLst>
+              <a:ext uri="{FF2B5EF4-FFF2-40B4-BE49-F238E27FC236}">
+                <a16:creationId xmlns:a16="http://schemas.microsoft.com/office/drawing/2014/main" id="{FEEB07CE-582A-044D-9FC6-EF4B1DC52B88}"/>
+              </a:ext>
+            </a:extLst>
+          </p:cNvPr>
+          <p:cNvSpPr txBox="1"/>
+          <p:nvPr/>
+        </p:nvSpPr>
+        <p:spPr>
+          <a:xfrm>
+            <a:off x="5224891" y="2071874"/>
+            <a:ext cx="411405" cy="369332"/>
+          </a:xfrm>
+          <a:prstGeom prst="rect">
+            <a:avLst/>
+          </a:prstGeom>
+          <a:noFill/>
+        </p:spPr>
+        <p:txBody>
+          <a:bodyPr wrap="square" rtlCol="0">
+            <a:spAutoFit/>
+          </a:bodyPr>
+          <a:lstStyle/>
+          <a:p>
+            <a:r>
+              <a:rPr lang="en-US" sz="1800" b="1" dirty="0">
+                <a:solidFill>
+                  <a:srgbClr val="00B050"/>
+                </a:solidFill>
+                <a:latin typeface="Menlo" panose="020B0609030804020204" pitchFamily="49" charset="0"/>
+                <a:ea typeface="Menlo" panose="020B0609030804020204" pitchFamily="49" charset="0"/>
+                <a:cs typeface="Menlo" panose="020B0609030804020204" pitchFamily="49" charset="0"/>
+              </a:rPr>
+              <a:t>B</a:t>
+            </a:r>
+          </a:p>
+        </p:txBody>
+      </p:sp>
+      <p:sp>
+        <p:nvSpPr>
+          <p:cNvPr id="10" name="Rectangle 9">
+            <a:extLst>
+              <a:ext uri="{FF2B5EF4-FFF2-40B4-BE49-F238E27FC236}">
+                <a16:creationId xmlns:a16="http://schemas.microsoft.com/office/drawing/2014/main" id="{9CD7ACBE-9D26-1F4C-A0EA-9DEA5B58888A}"/>
+              </a:ext>
+            </a:extLst>
+          </p:cNvPr>
+          <p:cNvSpPr/>
+          <p:nvPr/>
+        </p:nvSpPr>
+        <p:spPr>
+          <a:xfrm>
+            <a:off x="7074665" y="1349187"/>
+            <a:ext cx="5158912" cy="5170646"/>
+          </a:xfrm>
+          <a:prstGeom prst="rect">
+            <a:avLst/>
+          </a:prstGeom>
+        </p:spPr>
+        <p:txBody>
+          <a:bodyPr wrap="square">
+            <a:spAutoFit/>
+          </a:bodyPr>
+          <a:lstStyle/>
+          <a:p>
+            <a:r>
+              <a:rPr lang="en-US" sz="1100" dirty="0">
+                <a:solidFill>
+                  <a:srgbClr val="0070C0"/>
+                </a:solidFill>
+                <a:latin typeface="Menlo" panose="020B0609030804020204" pitchFamily="49" charset="0"/>
+                <a:ea typeface="Menlo" panose="020B0609030804020204" pitchFamily="49" charset="0"/>
+                <a:cs typeface="Menlo" panose="020B0609030804020204" pitchFamily="49" charset="0"/>
+              </a:rPr>
+              <a:t>N=10000</a:t>
+            </a:r>
+          </a:p>
+          <a:p>
+            <a:r>
+              <a:rPr lang="en-US" sz="1100" dirty="0">
+                <a:solidFill>
+                  <a:srgbClr val="0070C0"/>
+                </a:solidFill>
+                <a:latin typeface="Menlo" panose="020B0609030804020204" pitchFamily="49" charset="0"/>
+                <a:ea typeface="Menlo" panose="020B0609030804020204" pitchFamily="49" charset="0"/>
+                <a:cs typeface="Menlo" panose="020B0609030804020204" pitchFamily="49" charset="0"/>
+              </a:rPr>
+              <a:t>A = </a:t>
+            </a:r>
+            <a:r>
+              <a:rPr lang="en-US" sz="1100" dirty="0" err="1">
+                <a:solidFill>
+                  <a:srgbClr val="0070C0"/>
+                </a:solidFill>
+                <a:latin typeface="Menlo" panose="020B0609030804020204" pitchFamily="49" charset="0"/>
+                <a:ea typeface="Menlo" panose="020B0609030804020204" pitchFamily="49" charset="0"/>
+                <a:cs typeface="Menlo" panose="020B0609030804020204" pitchFamily="49" charset="0"/>
+              </a:rPr>
+              <a:t>np.random.exponential</a:t>
+            </a:r>
+            <a:r>
+              <a:rPr lang="en-US" sz="1100" dirty="0">
+                <a:solidFill>
+                  <a:srgbClr val="0070C0"/>
+                </a:solidFill>
+                <a:latin typeface="Menlo" panose="020B0609030804020204" pitchFamily="49" charset="0"/>
+                <a:ea typeface="Menlo" panose="020B0609030804020204" pitchFamily="49" charset="0"/>
+                <a:cs typeface="Menlo" panose="020B0609030804020204" pitchFamily="49" charset="0"/>
+              </a:rPr>
+              <a:t>(scale=2.0, size=N)</a:t>
+            </a:r>
+          </a:p>
+          <a:p>
+            <a:r>
+              <a:rPr lang="en-US" sz="1100" dirty="0">
+                <a:solidFill>
+                  <a:srgbClr val="0070C0"/>
+                </a:solidFill>
+                <a:latin typeface="Menlo" panose="020B0609030804020204" pitchFamily="49" charset="0"/>
+                <a:ea typeface="Menlo" panose="020B0609030804020204" pitchFamily="49" charset="0"/>
+                <a:cs typeface="Menlo" panose="020B0609030804020204" pitchFamily="49" charset="0"/>
+              </a:rPr>
+              <a:t>B = </a:t>
+            </a:r>
+            <a:r>
+              <a:rPr lang="en-US" sz="1100" dirty="0" err="1">
+                <a:solidFill>
+                  <a:srgbClr val="0070C0"/>
+                </a:solidFill>
+                <a:latin typeface="Menlo" panose="020B0609030804020204" pitchFamily="49" charset="0"/>
+                <a:ea typeface="Menlo" panose="020B0609030804020204" pitchFamily="49" charset="0"/>
+                <a:cs typeface="Menlo" panose="020B0609030804020204" pitchFamily="49" charset="0"/>
+              </a:rPr>
+              <a:t>np.random.exponential</a:t>
+            </a:r>
+            <a:r>
+              <a:rPr lang="en-US" sz="1100" dirty="0">
+                <a:solidFill>
+                  <a:srgbClr val="0070C0"/>
+                </a:solidFill>
+                <a:latin typeface="Menlo" panose="020B0609030804020204" pitchFamily="49" charset="0"/>
+                <a:ea typeface="Menlo" panose="020B0609030804020204" pitchFamily="49" charset="0"/>
+                <a:cs typeface="Menlo" panose="020B0609030804020204" pitchFamily="49" charset="0"/>
+              </a:rPr>
+              <a:t>(scale=2.4, size=N)</a:t>
+            </a:r>
+          </a:p>
+          <a:p>
+            <a:r>
+              <a:rPr lang="en-US" sz="1100" dirty="0">
+                <a:solidFill>
+                  <a:srgbClr val="0070C0"/>
+                </a:solidFill>
+                <a:latin typeface="Menlo" panose="020B0609030804020204" pitchFamily="49" charset="0"/>
+                <a:ea typeface="Menlo" panose="020B0609030804020204" pitchFamily="49" charset="0"/>
+                <a:cs typeface="Menlo" panose="020B0609030804020204" pitchFamily="49" charset="0"/>
+              </a:rPr>
+              <a:t>C = </a:t>
+            </a:r>
+            <a:r>
+              <a:rPr lang="en-US" sz="1100" dirty="0" err="1">
+                <a:solidFill>
+                  <a:srgbClr val="0070C0"/>
+                </a:solidFill>
+                <a:latin typeface="Menlo" panose="020B0609030804020204" pitchFamily="49" charset="0"/>
+                <a:ea typeface="Menlo" panose="020B0609030804020204" pitchFamily="49" charset="0"/>
+                <a:cs typeface="Menlo" panose="020B0609030804020204" pitchFamily="49" charset="0"/>
+              </a:rPr>
+              <a:t>np.concatenate</a:t>
+            </a:r>
+            <a:r>
+              <a:rPr lang="en-US" sz="1100" dirty="0">
+                <a:solidFill>
+                  <a:srgbClr val="0070C0"/>
+                </a:solidFill>
+                <a:latin typeface="Menlo" panose="020B0609030804020204" pitchFamily="49" charset="0"/>
+                <a:ea typeface="Menlo" panose="020B0609030804020204" pitchFamily="49" charset="0"/>
+                <a:cs typeface="Menlo" panose="020B0609030804020204" pitchFamily="49" charset="0"/>
+              </a:rPr>
+              <a:t>((A,B))</a:t>
+            </a:r>
+            <a:r>
+              <a:rPr lang="en-US" sz="1100" dirty="0">
+                <a:solidFill>
+                  <a:srgbClr val="00B050"/>
+                </a:solidFill>
+                <a:latin typeface="Menlo" panose="020B0609030804020204" pitchFamily="49" charset="0"/>
+                <a:ea typeface="Menlo" panose="020B0609030804020204" pitchFamily="49" charset="0"/>
+                <a:cs typeface="Menlo" panose="020B0609030804020204" pitchFamily="49" charset="0"/>
+              </a:rPr>
+              <a:t> # Combined</a:t>
+            </a:r>
+          </a:p>
+          <a:p>
+            <a:r>
+              <a:rPr lang="en-US" sz="1100" dirty="0" err="1">
+                <a:solidFill>
+                  <a:srgbClr val="0070C0"/>
+                </a:solidFill>
+                <a:latin typeface="Menlo" panose="020B0609030804020204" pitchFamily="49" charset="0"/>
+                <a:ea typeface="Menlo" panose="020B0609030804020204" pitchFamily="49" charset="0"/>
+                <a:cs typeface="Menlo" panose="020B0609030804020204" pitchFamily="49" charset="0"/>
+              </a:rPr>
+              <a:t>diff_AB</a:t>
+            </a:r>
+            <a:r>
+              <a:rPr lang="en-US" sz="1100" dirty="0">
+                <a:solidFill>
+                  <a:srgbClr val="0070C0"/>
+                </a:solidFill>
+                <a:latin typeface="Menlo" panose="020B0609030804020204" pitchFamily="49" charset="0"/>
+                <a:ea typeface="Menlo" panose="020B0609030804020204" pitchFamily="49" charset="0"/>
+                <a:cs typeface="Menlo" panose="020B0609030804020204" pitchFamily="49" charset="0"/>
+              </a:rPr>
+              <a:t> = </a:t>
+            </a:r>
+            <a:r>
+              <a:rPr lang="en-US" sz="1100" dirty="0" err="1">
+                <a:solidFill>
+                  <a:srgbClr val="0070C0"/>
+                </a:solidFill>
+                <a:latin typeface="Menlo" panose="020B0609030804020204" pitchFamily="49" charset="0"/>
+                <a:ea typeface="Menlo" panose="020B0609030804020204" pitchFamily="49" charset="0"/>
+                <a:cs typeface="Menlo" panose="020B0609030804020204" pitchFamily="49" charset="0"/>
+              </a:rPr>
+              <a:t>np.mean</a:t>
+            </a:r>
+            <a:r>
+              <a:rPr lang="en-US" sz="1100" dirty="0">
+                <a:solidFill>
+                  <a:srgbClr val="0070C0"/>
+                </a:solidFill>
+                <a:latin typeface="Menlo" panose="020B0609030804020204" pitchFamily="49" charset="0"/>
+                <a:ea typeface="Menlo" panose="020B0609030804020204" pitchFamily="49" charset="0"/>
+                <a:cs typeface="Menlo" panose="020B0609030804020204" pitchFamily="49" charset="0"/>
+              </a:rPr>
+              <a:t>(A) - </a:t>
+            </a:r>
+            <a:r>
+              <a:rPr lang="en-US" sz="1100" dirty="0" err="1">
+                <a:solidFill>
+                  <a:srgbClr val="0070C0"/>
+                </a:solidFill>
+                <a:latin typeface="Menlo" panose="020B0609030804020204" pitchFamily="49" charset="0"/>
+                <a:ea typeface="Menlo" panose="020B0609030804020204" pitchFamily="49" charset="0"/>
+                <a:cs typeface="Menlo" panose="020B0609030804020204" pitchFamily="49" charset="0"/>
+              </a:rPr>
+              <a:t>np.mean</a:t>
+            </a:r>
+            <a:r>
+              <a:rPr lang="en-US" sz="1100" dirty="0">
+                <a:solidFill>
+                  <a:srgbClr val="0070C0"/>
+                </a:solidFill>
+                <a:latin typeface="Menlo" panose="020B0609030804020204" pitchFamily="49" charset="0"/>
+                <a:ea typeface="Menlo" panose="020B0609030804020204" pitchFamily="49" charset="0"/>
+                <a:cs typeface="Menlo" panose="020B0609030804020204" pitchFamily="49" charset="0"/>
+              </a:rPr>
+              <a:t>(B)</a:t>
+            </a:r>
+          </a:p>
+          <a:p>
+            <a:endParaRPr lang="en-US" sz="1100" dirty="0">
+              <a:solidFill>
+                <a:srgbClr val="0070C0"/>
+              </a:solidFill>
+              <a:latin typeface="Menlo" panose="020B0609030804020204" pitchFamily="49" charset="0"/>
+              <a:ea typeface="Menlo" panose="020B0609030804020204" pitchFamily="49" charset="0"/>
+              <a:cs typeface="Menlo" panose="020B0609030804020204" pitchFamily="49" charset="0"/>
+            </a:endParaRPr>
+          </a:p>
+          <a:p>
+            <a:r>
+              <a:rPr lang="en-US" sz="1100" dirty="0" err="1">
+                <a:solidFill>
+                  <a:srgbClr val="0070C0"/>
+                </a:solidFill>
+                <a:latin typeface="Menlo" panose="020B0609030804020204" pitchFamily="49" charset="0"/>
+                <a:ea typeface="Menlo" panose="020B0609030804020204" pitchFamily="49" charset="0"/>
+                <a:cs typeface="Menlo" panose="020B0609030804020204" pitchFamily="49" charset="0"/>
+              </a:rPr>
+              <a:t>N_shuf</a:t>
+            </a:r>
+            <a:r>
+              <a:rPr lang="en-US" sz="1100" dirty="0">
+                <a:solidFill>
+                  <a:srgbClr val="0070C0"/>
+                </a:solidFill>
+                <a:latin typeface="Menlo" panose="020B0609030804020204" pitchFamily="49" charset="0"/>
+                <a:ea typeface="Menlo" panose="020B0609030804020204" pitchFamily="49" charset="0"/>
+                <a:cs typeface="Menlo" panose="020B0609030804020204" pitchFamily="49" charset="0"/>
+              </a:rPr>
+              <a:t> = 5000</a:t>
+            </a:r>
+          </a:p>
+          <a:p>
+            <a:r>
+              <a:rPr lang="en-US" sz="1100" dirty="0">
+                <a:solidFill>
+                  <a:srgbClr val="0070C0"/>
+                </a:solidFill>
+                <a:latin typeface="Menlo" panose="020B0609030804020204" pitchFamily="49" charset="0"/>
+                <a:ea typeface="Menlo" panose="020B0609030804020204" pitchFamily="49" charset="0"/>
+                <a:cs typeface="Menlo" panose="020B0609030804020204" pitchFamily="49" charset="0"/>
+              </a:rPr>
+              <a:t>counter = 1</a:t>
+            </a:r>
+          </a:p>
+          <a:p>
+            <a:r>
+              <a:rPr lang="en-US" sz="1100" dirty="0">
+                <a:solidFill>
+                  <a:srgbClr val="0070C0"/>
+                </a:solidFill>
+                <a:latin typeface="Menlo" panose="020B0609030804020204" pitchFamily="49" charset="0"/>
+                <a:ea typeface="Menlo" panose="020B0609030804020204" pitchFamily="49" charset="0"/>
+                <a:cs typeface="Menlo" panose="020B0609030804020204" pitchFamily="49" charset="0"/>
+              </a:rPr>
+              <a:t>diffs = </a:t>
+            </a:r>
+            <a:r>
+              <a:rPr lang="en-US" sz="1100" dirty="0" err="1">
+                <a:solidFill>
+                  <a:srgbClr val="0070C0"/>
+                </a:solidFill>
+                <a:latin typeface="Menlo" panose="020B0609030804020204" pitchFamily="49" charset="0"/>
+                <a:ea typeface="Menlo" panose="020B0609030804020204" pitchFamily="49" charset="0"/>
+                <a:cs typeface="Menlo" panose="020B0609030804020204" pitchFamily="49" charset="0"/>
+              </a:rPr>
+              <a:t>np.zeros</a:t>
+            </a:r>
+            <a:r>
+              <a:rPr lang="en-US" sz="1100" dirty="0">
+                <a:solidFill>
+                  <a:srgbClr val="0070C0"/>
+                </a:solidFill>
+                <a:latin typeface="Menlo" panose="020B0609030804020204" pitchFamily="49" charset="0"/>
+                <a:ea typeface="Menlo" panose="020B0609030804020204" pitchFamily="49" charset="0"/>
+                <a:cs typeface="Menlo" panose="020B0609030804020204" pitchFamily="49" charset="0"/>
+              </a:rPr>
+              <a:t>(</a:t>
+            </a:r>
+            <a:r>
+              <a:rPr lang="en-US" sz="1100" dirty="0" err="1">
+                <a:solidFill>
+                  <a:srgbClr val="0070C0"/>
+                </a:solidFill>
+                <a:latin typeface="Menlo" panose="020B0609030804020204" pitchFamily="49" charset="0"/>
+                <a:ea typeface="Menlo" panose="020B0609030804020204" pitchFamily="49" charset="0"/>
+                <a:cs typeface="Menlo" panose="020B0609030804020204" pitchFamily="49" charset="0"/>
+              </a:rPr>
+              <a:t>N_shuf</a:t>
+            </a:r>
+            <a:r>
+              <a:rPr lang="en-US" sz="1100" dirty="0">
+                <a:solidFill>
+                  <a:srgbClr val="0070C0"/>
+                </a:solidFill>
+                <a:latin typeface="Menlo" panose="020B0609030804020204" pitchFamily="49" charset="0"/>
+                <a:ea typeface="Menlo" panose="020B0609030804020204" pitchFamily="49" charset="0"/>
+                <a:cs typeface="Menlo" panose="020B0609030804020204" pitchFamily="49" charset="0"/>
+              </a:rPr>
+              <a:t>, </a:t>
+            </a:r>
+            <a:r>
+              <a:rPr lang="en-US" sz="1100" dirty="0" err="1">
+                <a:solidFill>
+                  <a:srgbClr val="0070C0"/>
+                </a:solidFill>
+                <a:latin typeface="Menlo" panose="020B0609030804020204" pitchFamily="49" charset="0"/>
+                <a:ea typeface="Menlo" panose="020B0609030804020204" pitchFamily="49" charset="0"/>
+                <a:cs typeface="Menlo" panose="020B0609030804020204" pitchFamily="49" charset="0"/>
+              </a:rPr>
+              <a:t>dtype</a:t>
+            </a:r>
+            <a:r>
+              <a:rPr lang="en-US" sz="1100" dirty="0">
+                <a:solidFill>
+                  <a:srgbClr val="0070C0"/>
+                </a:solidFill>
+                <a:latin typeface="Menlo" panose="020B0609030804020204" pitchFamily="49" charset="0"/>
+                <a:ea typeface="Menlo" panose="020B0609030804020204" pitchFamily="49" charset="0"/>
+                <a:cs typeface="Menlo" panose="020B0609030804020204" pitchFamily="49" charset="0"/>
+              </a:rPr>
+              <a:t>=float)</a:t>
+            </a:r>
+          </a:p>
+          <a:p>
+            <a:r>
+              <a:rPr lang="en-US" sz="1100" dirty="0" err="1">
+                <a:solidFill>
+                  <a:srgbClr val="0070C0"/>
+                </a:solidFill>
+                <a:latin typeface="Menlo" panose="020B0609030804020204" pitchFamily="49" charset="0"/>
+                <a:ea typeface="Menlo" panose="020B0609030804020204" pitchFamily="49" charset="0"/>
+                <a:cs typeface="Menlo" panose="020B0609030804020204" pitchFamily="49" charset="0"/>
+              </a:rPr>
+              <a:t>rng</a:t>
+            </a:r>
+            <a:r>
+              <a:rPr lang="en-US" sz="1100" dirty="0">
+                <a:solidFill>
+                  <a:srgbClr val="0070C0"/>
+                </a:solidFill>
+                <a:latin typeface="Menlo" panose="020B0609030804020204" pitchFamily="49" charset="0"/>
+                <a:ea typeface="Menlo" panose="020B0609030804020204" pitchFamily="49" charset="0"/>
+                <a:cs typeface="Menlo" panose="020B0609030804020204" pitchFamily="49" charset="0"/>
+              </a:rPr>
+              <a:t> = </a:t>
+            </a:r>
+            <a:r>
+              <a:rPr lang="en-US" sz="1100" dirty="0" err="1">
+                <a:solidFill>
+                  <a:srgbClr val="0070C0"/>
+                </a:solidFill>
+                <a:latin typeface="Menlo" panose="020B0609030804020204" pitchFamily="49" charset="0"/>
+                <a:ea typeface="Menlo" panose="020B0609030804020204" pitchFamily="49" charset="0"/>
+                <a:cs typeface="Menlo" panose="020B0609030804020204" pitchFamily="49" charset="0"/>
+              </a:rPr>
+              <a:t>np.random.default_rng</a:t>
+            </a:r>
+            <a:r>
+              <a:rPr lang="en-US" sz="1100" dirty="0">
+                <a:solidFill>
+                  <a:srgbClr val="0070C0"/>
+                </a:solidFill>
+                <a:latin typeface="Menlo" panose="020B0609030804020204" pitchFamily="49" charset="0"/>
+                <a:ea typeface="Menlo" panose="020B0609030804020204" pitchFamily="49" charset="0"/>
+                <a:cs typeface="Menlo" panose="020B0609030804020204" pitchFamily="49" charset="0"/>
+              </a:rPr>
+              <a:t>()</a:t>
+            </a:r>
+          </a:p>
+          <a:p>
+            <a:r>
+              <a:rPr lang="en-US" sz="1100" dirty="0">
+                <a:solidFill>
+                  <a:srgbClr val="0070C0"/>
+                </a:solidFill>
+                <a:latin typeface="Menlo" panose="020B0609030804020204" pitchFamily="49" charset="0"/>
+                <a:ea typeface="Menlo" panose="020B0609030804020204" pitchFamily="49" charset="0"/>
+                <a:cs typeface="Menlo" panose="020B0609030804020204" pitchFamily="49" charset="0"/>
+              </a:rPr>
+              <a:t>for ii in range(</a:t>
+            </a:r>
+            <a:r>
+              <a:rPr lang="en-US" sz="1100" dirty="0" err="1">
+                <a:solidFill>
+                  <a:srgbClr val="0070C0"/>
+                </a:solidFill>
+                <a:latin typeface="Menlo" panose="020B0609030804020204" pitchFamily="49" charset="0"/>
+                <a:ea typeface="Menlo" panose="020B0609030804020204" pitchFamily="49" charset="0"/>
+                <a:cs typeface="Menlo" panose="020B0609030804020204" pitchFamily="49" charset="0"/>
+              </a:rPr>
+              <a:t>N_shuf</a:t>
+            </a:r>
+            <a:r>
+              <a:rPr lang="en-US" sz="1100" dirty="0">
+                <a:solidFill>
+                  <a:srgbClr val="0070C0"/>
+                </a:solidFill>
+                <a:latin typeface="Menlo" panose="020B0609030804020204" pitchFamily="49" charset="0"/>
+                <a:ea typeface="Menlo" panose="020B0609030804020204" pitchFamily="49" charset="0"/>
+                <a:cs typeface="Menlo" panose="020B0609030804020204" pitchFamily="49" charset="0"/>
+              </a:rPr>
+              <a:t>):</a:t>
+            </a:r>
+          </a:p>
+          <a:p>
+            <a:r>
+              <a:rPr lang="en-US" sz="1100" dirty="0">
+                <a:solidFill>
+                  <a:srgbClr val="0070C0"/>
+                </a:solidFill>
+                <a:latin typeface="Menlo" panose="020B0609030804020204" pitchFamily="49" charset="0"/>
+                <a:ea typeface="Menlo" panose="020B0609030804020204" pitchFamily="49" charset="0"/>
+                <a:cs typeface="Menlo" panose="020B0609030804020204" pitchFamily="49" charset="0"/>
+              </a:rPr>
+              <a:t>    </a:t>
+            </a:r>
+            <a:r>
+              <a:rPr lang="en-US" sz="1100" dirty="0" err="1">
+                <a:solidFill>
+                  <a:srgbClr val="0070C0"/>
+                </a:solidFill>
+                <a:latin typeface="Menlo" panose="020B0609030804020204" pitchFamily="49" charset="0"/>
+                <a:ea typeface="Menlo" panose="020B0609030804020204" pitchFamily="49" charset="0"/>
+                <a:cs typeface="Menlo" panose="020B0609030804020204" pitchFamily="49" charset="0"/>
+              </a:rPr>
+              <a:t>rng.shuffle</a:t>
+            </a:r>
+            <a:r>
+              <a:rPr lang="en-US" sz="1100" dirty="0">
+                <a:solidFill>
+                  <a:srgbClr val="0070C0"/>
+                </a:solidFill>
+                <a:latin typeface="Menlo" panose="020B0609030804020204" pitchFamily="49" charset="0"/>
+                <a:ea typeface="Menlo" panose="020B0609030804020204" pitchFamily="49" charset="0"/>
+                <a:cs typeface="Menlo" panose="020B0609030804020204" pitchFamily="49" charset="0"/>
+              </a:rPr>
+              <a:t>(C, axis = 0)</a:t>
+            </a:r>
+          </a:p>
+          <a:p>
+            <a:r>
+              <a:rPr lang="en-US" sz="1100" dirty="0">
+                <a:solidFill>
+                  <a:srgbClr val="0070C0"/>
+                </a:solidFill>
+                <a:latin typeface="Menlo" panose="020B0609030804020204" pitchFamily="49" charset="0"/>
+                <a:ea typeface="Menlo" panose="020B0609030804020204" pitchFamily="49" charset="0"/>
+                <a:cs typeface="Menlo" panose="020B0609030804020204" pitchFamily="49" charset="0"/>
+              </a:rPr>
+              <a:t>    split1 = C[:N]</a:t>
+            </a:r>
+          </a:p>
+          <a:p>
+            <a:r>
+              <a:rPr lang="en-US" sz="1100" dirty="0">
+                <a:solidFill>
+                  <a:srgbClr val="0070C0"/>
+                </a:solidFill>
+                <a:latin typeface="Menlo" panose="020B0609030804020204" pitchFamily="49" charset="0"/>
+                <a:ea typeface="Menlo" panose="020B0609030804020204" pitchFamily="49" charset="0"/>
+                <a:cs typeface="Menlo" panose="020B0609030804020204" pitchFamily="49" charset="0"/>
+              </a:rPr>
+              <a:t>    split2 = C[N:]</a:t>
+            </a:r>
+          </a:p>
+          <a:p>
+            <a:r>
+              <a:rPr lang="en-US" sz="1100" dirty="0">
+                <a:solidFill>
+                  <a:srgbClr val="0070C0"/>
+                </a:solidFill>
+                <a:latin typeface="Menlo" panose="020B0609030804020204" pitchFamily="49" charset="0"/>
+                <a:ea typeface="Menlo" panose="020B0609030804020204" pitchFamily="49" charset="0"/>
+                <a:cs typeface="Menlo" panose="020B0609030804020204" pitchFamily="49" charset="0"/>
+              </a:rPr>
+              <a:t>    diffs[ii] = </a:t>
+            </a:r>
+            <a:r>
+              <a:rPr lang="en-US" sz="1100" dirty="0" err="1">
+                <a:solidFill>
+                  <a:srgbClr val="0070C0"/>
+                </a:solidFill>
+                <a:latin typeface="Menlo" panose="020B0609030804020204" pitchFamily="49" charset="0"/>
+                <a:ea typeface="Menlo" panose="020B0609030804020204" pitchFamily="49" charset="0"/>
+                <a:cs typeface="Menlo" panose="020B0609030804020204" pitchFamily="49" charset="0"/>
+              </a:rPr>
+              <a:t>np.mean</a:t>
+            </a:r>
+            <a:r>
+              <a:rPr lang="en-US" sz="1100" dirty="0">
+                <a:solidFill>
+                  <a:srgbClr val="0070C0"/>
+                </a:solidFill>
+                <a:latin typeface="Menlo" panose="020B0609030804020204" pitchFamily="49" charset="0"/>
+                <a:ea typeface="Menlo" panose="020B0609030804020204" pitchFamily="49" charset="0"/>
+                <a:cs typeface="Menlo" panose="020B0609030804020204" pitchFamily="49" charset="0"/>
+              </a:rPr>
+              <a:t>(split2) - </a:t>
+            </a:r>
+            <a:r>
+              <a:rPr lang="en-US" sz="1100" dirty="0" err="1">
+                <a:solidFill>
+                  <a:srgbClr val="0070C0"/>
+                </a:solidFill>
+                <a:latin typeface="Menlo" panose="020B0609030804020204" pitchFamily="49" charset="0"/>
+                <a:ea typeface="Menlo" panose="020B0609030804020204" pitchFamily="49" charset="0"/>
+                <a:cs typeface="Menlo" panose="020B0609030804020204" pitchFamily="49" charset="0"/>
+              </a:rPr>
+              <a:t>np.mean</a:t>
+            </a:r>
+            <a:r>
+              <a:rPr lang="en-US" sz="1100" dirty="0">
+                <a:solidFill>
+                  <a:srgbClr val="0070C0"/>
+                </a:solidFill>
+                <a:latin typeface="Menlo" panose="020B0609030804020204" pitchFamily="49" charset="0"/>
+                <a:ea typeface="Menlo" panose="020B0609030804020204" pitchFamily="49" charset="0"/>
+                <a:cs typeface="Menlo" panose="020B0609030804020204" pitchFamily="49" charset="0"/>
+              </a:rPr>
+              <a:t>(split1)</a:t>
+            </a:r>
+          </a:p>
+          <a:p>
+            <a:r>
+              <a:rPr lang="en-US" sz="1100" dirty="0">
+                <a:solidFill>
+                  <a:srgbClr val="0070C0"/>
+                </a:solidFill>
+                <a:latin typeface="Menlo" panose="020B0609030804020204" pitchFamily="49" charset="0"/>
+                <a:ea typeface="Menlo" panose="020B0609030804020204" pitchFamily="49" charset="0"/>
+                <a:cs typeface="Menlo" panose="020B0609030804020204" pitchFamily="49" charset="0"/>
+              </a:rPr>
+              <a:t>    if diffs[ii] &lt;= </a:t>
+            </a:r>
+            <a:r>
+              <a:rPr lang="en-US" sz="1100" dirty="0" err="1">
+                <a:solidFill>
+                  <a:srgbClr val="0070C0"/>
+                </a:solidFill>
+                <a:latin typeface="Menlo" panose="020B0609030804020204" pitchFamily="49" charset="0"/>
+                <a:ea typeface="Menlo" panose="020B0609030804020204" pitchFamily="49" charset="0"/>
+                <a:cs typeface="Menlo" panose="020B0609030804020204" pitchFamily="49" charset="0"/>
+              </a:rPr>
+              <a:t>diff_AB</a:t>
+            </a:r>
+            <a:r>
+              <a:rPr lang="en-US" sz="1100" dirty="0">
+                <a:solidFill>
+                  <a:srgbClr val="0070C0"/>
+                </a:solidFill>
+                <a:latin typeface="Menlo" panose="020B0609030804020204" pitchFamily="49" charset="0"/>
+                <a:ea typeface="Menlo" panose="020B0609030804020204" pitchFamily="49" charset="0"/>
+                <a:cs typeface="Menlo" panose="020B0609030804020204" pitchFamily="49" charset="0"/>
+              </a:rPr>
+              <a:t>:</a:t>
+            </a:r>
+          </a:p>
+          <a:p>
+            <a:r>
+              <a:rPr lang="en-US" sz="1100" dirty="0">
+                <a:solidFill>
+                  <a:srgbClr val="0070C0"/>
+                </a:solidFill>
+                <a:latin typeface="Menlo" panose="020B0609030804020204" pitchFamily="49" charset="0"/>
+                <a:ea typeface="Menlo" panose="020B0609030804020204" pitchFamily="49" charset="0"/>
+                <a:cs typeface="Menlo" panose="020B0609030804020204" pitchFamily="49" charset="0"/>
+              </a:rPr>
+              <a:t>        counter += 1</a:t>
+            </a:r>
+          </a:p>
+          <a:p>
+            <a:endParaRPr lang="en-US" sz="1100" dirty="0">
+              <a:solidFill>
+                <a:srgbClr val="0070C0"/>
+              </a:solidFill>
+              <a:latin typeface="Menlo" panose="020B0609030804020204" pitchFamily="49" charset="0"/>
+              <a:ea typeface="Menlo" panose="020B0609030804020204" pitchFamily="49" charset="0"/>
+              <a:cs typeface="Menlo" panose="020B0609030804020204" pitchFamily="49" charset="0"/>
+            </a:endParaRPr>
+          </a:p>
+          <a:p>
+            <a:r>
+              <a:rPr lang="en-US" sz="1100" dirty="0" err="1">
+                <a:solidFill>
+                  <a:srgbClr val="0070C0"/>
+                </a:solidFill>
+                <a:latin typeface="Menlo" panose="020B0609030804020204" pitchFamily="49" charset="0"/>
+                <a:ea typeface="Menlo" panose="020B0609030804020204" pitchFamily="49" charset="0"/>
+                <a:cs typeface="Menlo" panose="020B0609030804020204" pitchFamily="49" charset="0"/>
+              </a:rPr>
+              <a:t>diffs_mean</a:t>
+            </a:r>
+            <a:r>
+              <a:rPr lang="en-US" sz="1100" dirty="0">
+                <a:solidFill>
+                  <a:srgbClr val="0070C0"/>
+                </a:solidFill>
+                <a:latin typeface="Menlo" panose="020B0609030804020204" pitchFamily="49" charset="0"/>
+                <a:ea typeface="Menlo" panose="020B0609030804020204" pitchFamily="49" charset="0"/>
+                <a:cs typeface="Menlo" panose="020B0609030804020204" pitchFamily="49" charset="0"/>
+              </a:rPr>
+              <a:t> = </a:t>
+            </a:r>
+            <a:r>
+              <a:rPr lang="en-US" sz="1100" dirty="0" err="1">
+                <a:solidFill>
+                  <a:srgbClr val="0070C0"/>
+                </a:solidFill>
+                <a:latin typeface="Menlo" panose="020B0609030804020204" pitchFamily="49" charset="0"/>
+                <a:ea typeface="Menlo" panose="020B0609030804020204" pitchFamily="49" charset="0"/>
+                <a:cs typeface="Menlo" panose="020B0609030804020204" pitchFamily="49" charset="0"/>
+              </a:rPr>
+              <a:t>np.mean</a:t>
+            </a:r>
+            <a:r>
+              <a:rPr lang="en-US" sz="1100" dirty="0">
+                <a:solidFill>
+                  <a:srgbClr val="0070C0"/>
+                </a:solidFill>
+                <a:latin typeface="Menlo" panose="020B0609030804020204" pitchFamily="49" charset="0"/>
+                <a:ea typeface="Menlo" panose="020B0609030804020204" pitchFamily="49" charset="0"/>
+                <a:cs typeface="Menlo" panose="020B0609030804020204" pitchFamily="49" charset="0"/>
+              </a:rPr>
+              <a:t>(diffs)   </a:t>
+            </a:r>
+          </a:p>
+          <a:p>
+            <a:r>
+              <a:rPr lang="en-US" sz="1100" dirty="0" err="1">
+                <a:solidFill>
+                  <a:srgbClr val="0070C0"/>
+                </a:solidFill>
+                <a:latin typeface="Menlo" panose="020B0609030804020204" pitchFamily="49" charset="0"/>
+                <a:ea typeface="Menlo" panose="020B0609030804020204" pitchFamily="49" charset="0"/>
+                <a:cs typeface="Menlo" panose="020B0609030804020204" pitchFamily="49" charset="0"/>
+              </a:rPr>
+              <a:t>diffs_std</a:t>
+            </a:r>
+            <a:r>
+              <a:rPr lang="en-US" sz="1100" dirty="0">
+                <a:solidFill>
+                  <a:srgbClr val="0070C0"/>
+                </a:solidFill>
+                <a:latin typeface="Menlo" panose="020B0609030804020204" pitchFamily="49" charset="0"/>
+                <a:ea typeface="Menlo" panose="020B0609030804020204" pitchFamily="49" charset="0"/>
+                <a:cs typeface="Menlo" panose="020B0609030804020204" pitchFamily="49" charset="0"/>
+              </a:rPr>
+              <a:t>  = </a:t>
+            </a:r>
+            <a:r>
+              <a:rPr lang="en-US" sz="1100" dirty="0" err="1">
+                <a:solidFill>
+                  <a:srgbClr val="0070C0"/>
+                </a:solidFill>
+                <a:latin typeface="Menlo" panose="020B0609030804020204" pitchFamily="49" charset="0"/>
+                <a:ea typeface="Menlo" panose="020B0609030804020204" pitchFamily="49" charset="0"/>
+                <a:cs typeface="Menlo" panose="020B0609030804020204" pitchFamily="49" charset="0"/>
+              </a:rPr>
+              <a:t>np.std</a:t>
+            </a:r>
+            <a:r>
+              <a:rPr lang="en-US" sz="1100" dirty="0">
+                <a:solidFill>
+                  <a:srgbClr val="0070C0"/>
+                </a:solidFill>
+                <a:latin typeface="Menlo" panose="020B0609030804020204" pitchFamily="49" charset="0"/>
+                <a:ea typeface="Menlo" panose="020B0609030804020204" pitchFamily="49" charset="0"/>
+                <a:cs typeface="Menlo" panose="020B0609030804020204" pitchFamily="49" charset="0"/>
+              </a:rPr>
+              <a:t>(diffs)</a:t>
+            </a:r>
+          </a:p>
+          <a:p>
+            <a:r>
+              <a:rPr lang="en-US" sz="1100" dirty="0">
+                <a:solidFill>
+                  <a:srgbClr val="0070C0"/>
+                </a:solidFill>
+                <a:latin typeface="Menlo" panose="020B0609030804020204" pitchFamily="49" charset="0"/>
+                <a:ea typeface="Menlo" panose="020B0609030804020204" pitchFamily="49" charset="0"/>
+                <a:cs typeface="Menlo" panose="020B0609030804020204" pitchFamily="49" charset="0"/>
+              </a:rPr>
+              <a:t>print(</a:t>
+            </a:r>
+            <a:r>
+              <a:rPr lang="en-US" sz="1100" dirty="0" err="1">
+                <a:solidFill>
+                  <a:srgbClr val="0070C0"/>
+                </a:solidFill>
+                <a:latin typeface="Menlo" panose="020B0609030804020204" pitchFamily="49" charset="0"/>
+                <a:ea typeface="Menlo" panose="020B0609030804020204" pitchFamily="49" charset="0"/>
+                <a:cs typeface="Menlo" panose="020B0609030804020204" pitchFamily="49" charset="0"/>
+              </a:rPr>
+              <a:t>f"diff_AB</a:t>
+            </a:r>
+            <a:r>
+              <a:rPr lang="en-US" sz="1100" dirty="0">
+                <a:solidFill>
+                  <a:srgbClr val="0070C0"/>
+                </a:solidFill>
+                <a:latin typeface="Menlo" panose="020B0609030804020204" pitchFamily="49" charset="0"/>
+                <a:ea typeface="Menlo" panose="020B0609030804020204" pitchFamily="49" charset="0"/>
+                <a:cs typeface="Menlo" panose="020B0609030804020204" pitchFamily="49" charset="0"/>
+              </a:rPr>
+              <a:t>    = {diff_AB:.5f}")   </a:t>
+            </a:r>
+            <a:r>
+              <a:rPr lang="en-US" sz="1100" dirty="0">
+                <a:solidFill>
+                  <a:srgbClr val="00B050"/>
+                </a:solidFill>
+                <a:latin typeface="Menlo" panose="020B0609030804020204" pitchFamily="49" charset="0"/>
+                <a:ea typeface="Menlo" panose="020B0609030804020204" pitchFamily="49" charset="0"/>
+                <a:cs typeface="Menlo" panose="020B0609030804020204" pitchFamily="49" charset="0"/>
+              </a:rPr>
+              <a:t>  # 0.4</a:t>
+            </a:r>
+          </a:p>
+          <a:p>
+            <a:r>
+              <a:rPr lang="en-US" sz="1100" dirty="0">
+                <a:solidFill>
+                  <a:srgbClr val="0070C0"/>
+                </a:solidFill>
+                <a:latin typeface="Menlo" panose="020B0609030804020204" pitchFamily="49" charset="0"/>
+                <a:ea typeface="Menlo" panose="020B0609030804020204" pitchFamily="49" charset="0"/>
+                <a:cs typeface="Menlo" panose="020B0609030804020204" pitchFamily="49" charset="0"/>
+              </a:rPr>
+              <a:t>print(</a:t>
+            </a:r>
+            <a:r>
+              <a:rPr lang="en-US" sz="1100" dirty="0" err="1">
+                <a:solidFill>
+                  <a:srgbClr val="0070C0"/>
+                </a:solidFill>
+                <a:latin typeface="Menlo" panose="020B0609030804020204" pitchFamily="49" charset="0"/>
+                <a:ea typeface="Menlo" panose="020B0609030804020204" pitchFamily="49" charset="0"/>
+                <a:cs typeface="Menlo" panose="020B0609030804020204" pitchFamily="49" charset="0"/>
+              </a:rPr>
+              <a:t>f"diffs</a:t>
+            </a:r>
+            <a:r>
+              <a:rPr lang="en-US" sz="1100" dirty="0">
+                <a:solidFill>
+                  <a:srgbClr val="0070C0"/>
+                </a:solidFill>
+                <a:latin typeface="Menlo" panose="020B0609030804020204" pitchFamily="49" charset="0"/>
+                <a:ea typeface="Menlo" panose="020B0609030804020204" pitchFamily="49" charset="0"/>
+                <a:cs typeface="Menlo" panose="020B0609030804020204" pitchFamily="49" charset="0"/>
+              </a:rPr>
+              <a:t> mean = {diffs_mean:.5f}")</a:t>
+            </a:r>
+            <a:r>
+              <a:rPr lang="en-US" sz="1100" dirty="0">
+                <a:solidFill>
+                  <a:srgbClr val="00B050"/>
+                </a:solidFill>
+                <a:latin typeface="Menlo" panose="020B0609030804020204" pitchFamily="49" charset="0"/>
+                <a:ea typeface="Menlo" panose="020B0609030804020204" pitchFamily="49" charset="0"/>
+                <a:cs typeface="Menlo" panose="020B0609030804020204" pitchFamily="49" charset="0"/>
+              </a:rPr>
+              <a:t>  # 0</a:t>
+            </a:r>
+          </a:p>
+          <a:p>
+            <a:r>
+              <a:rPr lang="en-US" sz="1100" dirty="0">
+                <a:solidFill>
+                  <a:srgbClr val="0070C0"/>
+                </a:solidFill>
+                <a:latin typeface="Menlo" panose="020B0609030804020204" pitchFamily="49" charset="0"/>
+                <a:ea typeface="Menlo" panose="020B0609030804020204" pitchFamily="49" charset="0"/>
+                <a:cs typeface="Menlo" panose="020B0609030804020204" pitchFamily="49" charset="0"/>
+              </a:rPr>
+              <a:t>print(</a:t>
+            </a:r>
+            <a:r>
+              <a:rPr lang="en-US" sz="1100" dirty="0" err="1">
+                <a:solidFill>
+                  <a:srgbClr val="0070C0"/>
+                </a:solidFill>
+                <a:latin typeface="Menlo" panose="020B0609030804020204" pitchFamily="49" charset="0"/>
+                <a:ea typeface="Menlo" panose="020B0609030804020204" pitchFamily="49" charset="0"/>
+                <a:cs typeface="Menlo" panose="020B0609030804020204" pitchFamily="49" charset="0"/>
+              </a:rPr>
+              <a:t>f"diffs</a:t>
+            </a:r>
+            <a:r>
+              <a:rPr lang="en-US" sz="1100" dirty="0">
+                <a:solidFill>
+                  <a:srgbClr val="0070C0"/>
+                </a:solidFill>
+                <a:latin typeface="Menlo" panose="020B0609030804020204" pitchFamily="49" charset="0"/>
+                <a:ea typeface="Menlo" panose="020B0609030804020204" pitchFamily="49" charset="0"/>
+                <a:cs typeface="Menlo" panose="020B0609030804020204" pitchFamily="49" charset="0"/>
+              </a:rPr>
+              <a:t> std  = {diffs_std:.5f}") </a:t>
+            </a:r>
+            <a:r>
+              <a:rPr lang="en-US" sz="1100" dirty="0">
+                <a:solidFill>
+                  <a:srgbClr val="00B050"/>
+                </a:solidFill>
+                <a:latin typeface="Menlo" panose="020B0609030804020204" pitchFamily="49" charset="0"/>
+                <a:ea typeface="Menlo" panose="020B0609030804020204" pitchFamily="49" charset="0"/>
+                <a:cs typeface="Menlo" panose="020B0609030804020204" pitchFamily="49" charset="0"/>
+              </a:rPr>
+              <a:t>  # 0.03</a:t>
+            </a:r>
+          </a:p>
+          <a:p>
+            <a:r>
+              <a:rPr lang="en-US" sz="1100" dirty="0">
+                <a:solidFill>
+                  <a:srgbClr val="0070C0"/>
+                </a:solidFill>
+                <a:latin typeface="Menlo" panose="020B0609030804020204" pitchFamily="49" charset="0"/>
+                <a:ea typeface="Menlo" panose="020B0609030804020204" pitchFamily="49" charset="0"/>
+                <a:cs typeface="Menlo" panose="020B0609030804020204" pitchFamily="49" charset="0"/>
+              </a:rPr>
+              <a:t>print(</a:t>
+            </a:r>
+            <a:r>
+              <a:rPr lang="en-US" sz="1100" dirty="0" err="1">
+                <a:solidFill>
+                  <a:srgbClr val="0070C0"/>
+                </a:solidFill>
+                <a:latin typeface="Menlo" panose="020B0609030804020204" pitchFamily="49" charset="0"/>
+                <a:ea typeface="Menlo" panose="020B0609030804020204" pitchFamily="49" charset="0"/>
+                <a:cs typeface="Menlo" panose="020B0609030804020204" pitchFamily="49" charset="0"/>
+              </a:rPr>
+              <a:t>f"P</a:t>
+            </a:r>
+            <a:r>
+              <a:rPr lang="en-US" sz="1100" dirty="0">
+                <a:solidFill>
+                  <a:srgbClr val="0070C0"/>
+                </a:solidFill>
+                <a:latin typeface="Menlo" panose="020B0609030804020204" pitchFamily="49" charset="0"/>
+                <a:ea typeface="Menlo" panose="020B0609030804020204" pitchFamily="49" charset="0"/>
+                <a:cs typeface="Menlo" panose="020B0609030804020204" pitchFamily="49" charset="0"/>
+              </a:rPr>
+              <a:t>-value    = {counter/</a:t>
+            </a:r>
+            <a:r>
+              <a:rPr lang="en-US" sz="1100" dirty="0" err="1">
+                <a:solidFill>
+                  <a:srgbClr val="0070C0"/>
+                </a:solidFill>
+                <a:latin typeface="Menlo" panose="020B0609030804020204" pitchFamily="49" charset="0"/>
+                <a:ea typeface="Menlo" panose="020B0609030804020204" pitchFamily="49" charset="0"/>
+                <a:cs typeface="Menlo" panose="020B0609030804020204" pitchFamily="49" charset="0"/>
+              </a:rPr>
+              <a:t>N_shuf</a:t>
+            </a:r>
+            <a:r>
+              <a:rPr lang="en-US" sz="1100" dirty="0">
+                <a:solidFill>
+                  <a:srgbClr val="0070C0"/>
+                </a:solidFill>
+                <a:latin typeface="Menlo" panose="020B0609030804020204" pitchFamily="49" charset="0"/>
+                <a:ea typeface="Menlo" panose="020B0609030804020204" pitchFamily="49" charset="0"/>
+                <a:cs typeface="Menlo" panose="020B0609030804020204" pitchFamily="49" charset="0"/>
+              </a:rPr>
+              <a:t>}") </a:t>
+            </a:r>
+            <a:r>
+              <a:rPr lang="en-US" sz="1100" dirty="0">
+                <a:solidFill>
+                  <a:srgbClr val="00B050"/>
+                </a:solidFill>
+                <a:latin typeface="Menlo" panose="020B0609030804020204" pitchFamily="49" charset="0"/>
+                <a:ea typeface="Menlo" panose="020B0609030804020204" pitchFamily="49" charset="0"/>
+                <a:cs typeface="Menlo" panose="020B0609030804020204" pitchFamily="49" charset="0"/>
+              </a:rPr>
+              <a:t> # 0.0002</a:t>
+            </a:r>
+          </a:p>
+          <a:p>
+            <a:endParaRPr lang="en-US" sz="1100" dirty="0">
+              <a:solidFill>
+                <a:srgbClr val="0070C0"/>
+              </a:solidFill>
+              <a:latin typeface="Menlo" panose="020B0609030804020204" pitchFamily="49" charset="0"/>
+              <a:ea typeface="Menlo" panose="020B0609030804020204" pitchFamily="49" charset="0"/>
+              <a:cs typeface="Menlo" panose="020B0609030804020204" pitchFamily="49" charset="0"/>
+            </a:endParaRPr>
+          </a:p>
+          <a:p>
+            <a:r>
+              <a:rPr lang="en-US" sz="1100" dirty="0" err="1">
+                <a:solidFill>
+                  <a:srgbClr val="0070C0"/>
+                </a:solidFill>
+                <a:latin typeface="Menlo" panose="020B0609030804020204" pitchFamily="49" charset="0"/>
+                <a:ea typeface="Menlo" panose="020B0609030804020204" pitchFamily="49" charset="0"/>
+                <a:cs typeface="Menlo" panose="020B0609030804020204" pitchFamily="49" charset="0"/>
+              </a:rPr>
+              <a:t>plt.rcParams</a:t>
+            </a:r>
+            <a:r>
+              <a:rPr lang="en-US" sz="1100" dirty="0">
+                <a:solidFill>
+                  <a:srgbClr val="0070C0"/>
+                </a:solidFill>
+                <a:latin typeface="Menlo" panose="020B0609030804020204" pitchFamily="49" charset="0"/>
+                <a:ea typeface="Menlo" panose="020B0609030804020204" pitchFamily="49" charset="0"/>
+                <a:cs typeface="Menlo" panose="020B0609030804020204" pitchFamily="49" charset="0"/>
+              </a:rPr>
+              <a:t>["</a:t>
+            </a:r>
+            <a:r>
+              <a:rPr lang="en-US" sz="1100" dirty="0" err="1">
+                <a:solidFill>
+                  <a:srgbClr val="0070C0"/>
+                </a:solidFill>
+                <a:latin typeface="Menlo" panose="020B0609030804020204" pitchFamily="49" charset="0"/>
+                <a:ea typeface="Menlo" panose="020B0609030804020204" pitchFamily="49" charset="0"/>
+                <a:cs typeface="Menlo" panose="020B0609030804020204" pitchFamily="49" charset="0"/>
+              </a:rPr>
+              <a:t>figure.figsize</a:t>
+            </a:r>
+            <a:r>
+              <a:rPr lang="en-US" sz="1100" dirty="0">
+                <a:solidFill>
+                  <a:srgbClr val="0070C0"/>
+                </a:solidFill>
+                <a:latin typeface="Menlo" panose="020B0609030804020204" pitchFamily="49" charset="0"/>
+                <a:ea typeface="Menlo" panose="020B0609030804020204" pitchFamily="49" charset="0"/>
+                <a:cs typeface="Menlo" panose="020B0609030804020204" pitchFamily="49" charset="0"/>
+              </a:rPr>
+              <a:t>"] = (8, 4) </a:t>
+            </a:r>
+            <a:r>
+              <a:rPr lang="en-US" sz="1100" dirty="0">
+                <a:solidFill>
+                  <a:srgbClr val="00B050"/>
+                </a:solidFill>
+                <a:latin typeface="Menlo" panose="020B0609030804020204" pitchFamily="49" charset="0"/>
+                <a:ea typeface="Menlo" panose="020B0609030804020204" pitchFamily="49" charset="0"/>
+                <a:cs typeface="Menlo" panose="020B0609030804020204" pitchFamily="49" charset="0"/>
+              </a:rPr>
+              <a:t># (width, height)</a:t>
+            </a:r>
+          </a:p>
+          <a:p>
+            <a:r>
+              <a:rPr lang="en-US" sz="1100" dirty="0">
+                <a:solidFill>
+                  <a:srgbClr val="0070C0"/>
+                </a:solidFill>
+                <a:latin typeface="Menlo" panose="020B0609030804020204" pitchFamily="49" charset="0"/>
+                <a:ea typeface="Menlo" panose="020B0609030804020204" pitchFamily="49" charset="0"/>
+                <a:cs typeface="Menlo" panose="020B0609030804020204" pitchFamily="49" charset="0"/>
+              </a:rPr>
+              <a:t>fig, ax = </a:t>
+            </a:r>
+            <a:r>
+              <a:rPr lang="en-US" sz="1100" dirty="0" err="1">
+                <a:solidFill>
+                  <a:srgbClr val="0070C0"/>
+                </a:solidFill>
+                <a:latin typeface="Menlo" panose="020B0609030804020204" pitchFamily="49" charset="0"/>
+                <a:ea typeface="Menlo" panose="020B0609030804020204" pitchFamily="49" charset="0"/>
+                <a:cs typeface="Menlo" panose="020B0609030804020204" pitchFamily="49" charset="0"/>
+              </a:rPr>
+              <a:t>plt.subplots</a:t>
+            </a:r>
+            <a:r>
+              <a:rPr lang="en-US" sz="1100" dirty="0">
+                <a:solidFill>
+                  <a:srgbClr val="0070C0"/>
+                </a:solidFill>
+                <a:latin typeface="Menlo" panose="020B0609030804020204" pitchFamily="49" charset="0"/>
+                <a:ea typeface="Menlo" panose="020B0609030804020204" pitchFamily="49" charset="0"/>
+                <a:cs typeface="Menlo" panose="020B0609030804020204" pitchFamily="49" charset="0"/>
+              </a:rPr>
+              <a:t>(</a:t>
+            </a:r>
+            <a:r>
+              <a:rPr lang="en-US" sz="1100" dirty="0" err="1">
+                <a:solidFill>
+                  <a:srgbClr val="0070C0"/>
+                </a:solidFill>
+                <a:latin typeface="Menlo" panose="020B0609030804020204" pitchFamily="49" charset="0"/>
+                <a:ea typeface="Menlo" panose="020B0609030804020204" pitchFamily="49" charset="0"/>
+                <a:cs typeface="Menlo" panose="020B0609030804020204" pitchFamily="49" charset="0"/>
+              </a:rPr>
+              <a:t>nrows</a:t>
+            </a:r>
+            <a:r>
+              <a:rPr lang="en-US" sz="1100" dirty="0">
+                <a:solidFill>
+                  <a:srgbClr val="0070C0"/>
+                </a:solidFill>
+                <a:latin typeface="Menlo" panose="020B0609030804020204" pitchFamily="49" charset="0"/>
+                <a:ea typeface="Menlo" panose="020B0609030804020204" pitchFamily="49" charset="0"/>
+                <a:cs typeface="Menlo" panose="020B0609030804020204" pitchFamily="49" charset="0"/>
+              </a:rPr>
+              <a:t>=1, </a:t>
+            </a:r>
+            <a:r>
+              <a:rPr lang="en-US" sz="1100" dirty="0" err="1">
+                <a:solidFill>
+                  <a:srgbClr val="0070C0"/>
+                </a:solidFill>
+                <a:latin typeface="Menlo" panose="020B0609030804020204" pitchFamily="49" charset="0"/>
+                <a:ea typeface="Menlo" panose="020B0609030804020204" pitchFamily="49" charset="0"/>
+                <a:cs typeface="Menlo" panose="020B0609030804020204" pitchFamily="49" charset="0"/>
+              </a:rPr>
+              <a:t>ncols</a:t>
+            </a:r>
+            <a:r>
+              <a:rPr lang="en-US" sz="1100" dirty="0">
+                <a:solidFill>
+                  <a:srgbClr val="0070C0"/>
+                </a:solidFill>
+                <a:latin typeface="Menlo" panose="020B0609030804020204" pitchFamily="49" charset="0"/>
+                <a:ea typeface="Menlo" panose="020B0609030804020204" pitchFamily="49" charset="0"/>
+                <a:cs typeface="Menlo" panose="020B0609030804020204" pitchFamily="49" charset="0"/>
+              </a:rPr>
+              <a:t>=1)</a:t>
+            </a:r>
+          </a:p>
+          <a:p>
+            <a:r>
+              <a:rPr lang="en-US" sz="1100" dirty="0" err="1">
+                <a:solidFill>
+                  <a:srgbClr val="0070C0"/>
+                </a:solidFill>
+                <a:latin typeface="Menlo" panose="020B0609030804020204" pitchFamily="49" charset="0"/>
+                <a:ea typeface="Menlo" panose="020B0609030804020204" pitchFamily="49" charset="0"/>
+                <a:cs typeface="Menlo" panose="020B0609030804020204" pitchFamily="49" charset="0"/>
+              </a:rPr>
+              <a:t>ax.hist</a:t>
+            </a:r>
+            <a:r>
+              <a:rPr lang="en-US" sz="1100" dirty="0">
+                <a:solidFill>
+                  <a:srgbClr val="0070C0"/>
+                </a:solidFill>
+                <a:latin typeface="Menlo" panose="020B0609030804020204" pitchFamily="49" charset="0"/>
+                <a:ea typeface="Menlo" panose="020B0609030804020204" pitchFamily="49" charset="0"/>
+                <a:cs typeface="Menlo" panose="020B0609030804020204" pitchFamily="49" charset="0"/>
+              </a:rPr>
+              <a:t>(</a:t>
+            </a:r>
+            <a:r>
+              <a:rPr lang="en-US" sz="1100" dirty="0" err="1">
+                <a:solidFill>
+                  <a:srgbClr val="0070C0"/>
+                </a:solidFill>
+                <a:latin typeface="Menlo" panose="020B0609030804020204" pitchFamily="49" charset="0"/>
+                <a:ea typeface="Menlo" panose="020B0609030804020204" pitchFamily="49" charset="0"/>
+                <a:cs typeface="Menlo" panose="020B0609030804020204" pitchFamily="49" charset="0"/>
+              </a:rPr>
+              <a:t>diffs,bins</a:t>
+            </a:r>
+            <a:r>
+              <a:rPr lang="en-US" sz="1100" dirty="0">
+                <a:solidFill>
+                  <a:srgbClr val="0070C0"/>
+                </a:solidFill>
+                <a:latin typeface="Menlo" panose="020B0609030804020204" pitchFamily="49" charset="0"/>
+                <a:ea typeface="Menlo" panose="020B0609030804020204" pitchFamily="49" charset="0"/>
+                <a:cs typeface="Menlo" panose="020B0609030804020204" pitchFamily="49" charset="0"/>
+              </a:rPr>
+              <a:t>=100)</a:t>
+            </a:r>
+          </a:p>
+          <a:p>
+            <a:r>
+              <a:rPr lang="en-US" sz="1100" dirty="0" err="1">
+                <a:solidFill>
+                  <a:srgbClr val="0070C0"/>
+                </a:solidFill>
+                <a:latin typeface="Menlo" panose="020B0609030804020204" pitchFamily="49" charset="0"/>
+                <a:ea typeface="Menlo" panose="020B0609030804020204" pitchFamily="49" charset="0"/>
+                <a:cs typeface="Menlo" panose="020B0609030804020204" pitchFamily="49" charset="0"/>
+              </a:rPr>
+              <a:t>ax.set_xlim</a:t>
+            </a:r>
+            <a:r>
+              <a:rPr lang="en-US" sz="1100" dirty="0">
+                <a:solidFill>
+                  <a:srgbClr val="0070C0"/>
+                </a:solidFill>
+                <a:latin typeface="Menlo" panose="020B0609030804020204" pitchFamily="49" charset="0"/>
+                <a:ea typeface="Menlo" panose="020B0609030804020204" pitchFamily="49" charset="0"/>
+                <a:cs typeface="Menlo" panose="020B0609030804020204" pitchFamily="49" charset="0"/>
+              </a:rPr>
+              <a:t>(left=0,right=0.2)</a:t>
+            </a:r>
+          </a:p>
+          <a:p>
+            <a:r>
+              <a:rPr lang="en-US" sz="1100" dirty="0" err="1">
+                <a:solidFill>
+                  <a:srgbClr val="0070C0"/>
+                </a:solidFill>
+                <a:latin typeface="Menlo" panose="020B0609030804020204" pitchFamily="49" charset="0"/>
+                <a:ea typeface="Menlo" panose="020B0609030804020204" pitchFamily="49" charset="0"/>
+                <a:cs typeface="Menlo" panose="020B0609030804020204" pitchFamily="49" charset="0"/>
+              </a:rPr>
+              <a:t>plt.show</a:t>
+            </a:r>
+            <a:r>
+              <a:rPr lang="en-US" sz="1100" dirty="0">
+                <a:solidFill>
+                  <a:srgbClr val="0070C0"/>
+                </a:solidFill>
+                <a:latin typeface="Menlo" panose="020B0609030804020204" pitchFamily="49" charset="0"/>
+                <a:ea typeface="Menlo" panose="020B0609030804020204" pitchFamily="49" charset="0"/>
+                <a:cs typeface="Menlo" panose="020B0609030804020204" pitchFamily="49" charset="0"/>
+              </a:rPr>
+              <a:t>();</a:t>
+            </a:r>
+          </a:p>
+        </p:txBody>
+      </p:sp>
+      <p:pic>
+        <p:nvPicPr>
+          <p:cNvPr id="11" name="Picture 10">
+            <a:extLst>
+              <a:ext uri="{FF2B5EF4-FFF2-40B4-BE49-F238E27FC236}">
+                <a16:creationId xmlns:a16="http://schemas.microsoft.com/office/drawing/2014/main" id="{819CECB9-FA40-2B4A-8E80-911C091D3BD6}"/>
+              </a:ext>
+            </a:extLst>
+          </p:cNvPr>
+          <p:cNvPicPr>
+            <a:picLocks noChangeAspect="1"/>
+          </p:cNvPicPr>
+          <p:nvPr/>
+        </p:nvPicPr>
+        <p:blipFill>
+          <a:blip r:embed="rId4" cstate="email">
+            <a:extLst>
+              <a:ext uri="{28A0092B-C50C-407E-A947-70E740481C1C}">
+                <a14:useLocalDpi xmlns:a14="http://schemas.microsoft.com/office/drawing/2010/main"/>
+              </a:ext>
+            </a:extLst>
+          </a:blip>
+          <a:stretch>
+            <a:fillRect/>
+          </a:stretch>
+        </p:blipFill>
+        <p:spPr>
+          <a:xfrm>
+            <a:off x="1970456" y="3158775"/>
+            <a:ext cx="2130703" cy="1072566"/>
+          </a:xfrm>
+          <a:prstGeom prst="rect">
+            <a:avLst/>
+          </a:prstGeom>
+        </p:spPr>
+      </p:pic>
+      <p:sp>
+        <p:nvSpPr>
+          <p:cNvPr id="12" name="TextBox 11">
+            <a:extLst>
+              <a:ext uri="{FF2B5EF4-FFF2-40B4-BE49-F238E27FC236}">
+                <a16:creationId xmlns:a16="http://schemas.microsoft.com/office/drawing/2014/main" id="{99770D08-03F1-D24C-A73C-37974E179C5F}"/>
+              </a:ext>
+            </a:extLst>
+          </p:cNvPr>
+          <p:cNvSpPr txBox="1"/>
+          <p:nvPr/>
+        </p:nvSpPr>
+        <p:spPr>
+          <a:xfrm>
+            <a:off x="1240611" y="2822110"/>
+            <a:ext cx="3566009" cy="307777"/>
+          </a:xfrm>
+          <a:prstGeom prst="rect">
+            <a:avLst/>
+          </a:prstGeom>
+          <a:noFill/>
+        </p:spPr>
+        <p:txBody>
+          <a:bodyPr wrap="square" rtlCol="0">
+            <a:spAutoFit/>
+          </a:bodyPr>
+          <a:lstStyle/>
+          <a:p>
+            <a:pPr algn="ctr"/>
+            <a:r>
+              <a:rPr lang="en-US" dirty="0">
+                <a:solidFill>
+                  <a:srgbClr val="0070C0"/>
+                </a:solidFill>
+                <a:latin typeface="+mj-lt"/>
+                <a:ea typeface="Menlo" panose="020B0609030804020204" pitchFamily="49" charset="0"/>
+                <a:cs typeface="Menlo" panose="020B0609030804020204" pitchFamily="49" charset="0"/>
+              </a:rPr>
+              <a:t>Distribution of diffs of shuffled parts</a:t>
+            </a:r>
+          </a:p>
+        </p:txBody>
+      </p:sp>
+      <p:sp>
+        <p:nvSpPr>
+          <p:cNvPr id="13" name="TextBox 12">
+            <a:extLst>
+              <a:ext uri="{FF2B5EF4-FFF2-40B4-BE49-F238E27FC236}">
+                <a16:creationId xmlns:a16="http://schemas.microsoft.com/office/drawing/2014/main" id="{86023C08-35C4-CF4E-B4AF-CFB2312D7594}"/>
+              </a:ext>
+            </a:extLst>
+          </p:cNvPr>
+          <p:cNvSpPr txBox="1"/>
+          <p:nvPr/>
+        </p:nvSpPr>
+        <p:spPr>
+          <a:xfrm>
+            <a:off x="5373441" y="3955130"/>
+            <a:ext cx="1625766" cy="461665"/>
+          </a:xfrm>
+          <a:prstGeom prst="rect">
+            <a:avLst/>
+          </a:prstGeom>
+          <a:noFill/>
+        </p:spPr>
+        <p:txBody>
+          <a:bodyPr wrap="none" rtlCol="0">
+            <a:spAutoFit/>
+          </a:bodyPr>
+          <a:lstStyle/>
+          <a:p>
+            <a:r>
+              <a:rPr lang="en-US" sz="1200" dirty="0">
+                <a:solidFill>
+                  <a:srgbClr val="00B050"/>
+                </a:solidFill>
+              </a:rPr>
+              <a:t>P-value is estimated </a:t>
+            </a:r>
+          </a:p>
+          <a:p>
+            <a:r>
+              <a:rPr lang="en-US" sz="1200" dirty="0">
+                <a:solidFill>
+                  <a:srgbClr val="00B050"/>
+                </a:solidFill>
+              </a:rPr>
+              <a:t>by counting</a:t>
+            </a:r>
+          </a:p>
+        </p:txBody>
+      </p:sp>
+      <p:sp>
+        <p:nvSpPr>
+          <p:cNvPr id="14" name="Right Arrow 13">
+            <a:extLst>
+              <a:ext uri="{FF2B5EF4-FFF2-40B4-BE49-F238E27FC236}">
+                <a16:creationId xmlns:a16="http://schemas.microsoft.com/office/drawing/2014/main" id="{36A8D943-90BE-FB4B-B711-182B969661B6}"/>
+              </a:ext>
+            </a:extLst>
+          </p:cNvPr>
+          <p:cNvSpPr/>
+          <p:nvPr/>
+        </p:nvSpPr>
+        <p:spPr>
+          <a:xfrm>
+            <a:off x="6946317" y="4117236"/>
+            <a:ext cx="457532" cy="178375"/>
+          </a:xfrm>
+          <a:prstGeom prst="rightArrow">
+            <a:avLst/>
+          </a:prstGeom>
+          <a:solidFill>
+            <a:srgbClr val="00B050"/>
+          </a:solidFill>
+          <a:ln>
+            <a:solidFill>
+              <a:srgbClr val="00B050"/>
+            </a:solidFill>
+          </a:ln>
+        </p:spPr>
+        <p:style>
+          <a:lnRef idx="2">
+            <a:schemeClr val="accent1">
+              <a:shade val="50000"/>
+            </a:schemeClr>
+          </a:lnRef>
+          <a:fillRef idx="1">
+            <a:schemeClr val="accent1"/>
+          </a:fillRef>
+          <a:effectRef idx="0">
+            <a:schemeClr val="accent1"/>
+          </a:effectRef>
+          <a:fontRef idx="minor">
+            <a:schemeClr val="lt1"/>
+          </a:fontRef>
+        </p:style>
+        <p:txBody>
+          <a:bodyPr rtlCol="0" anchor="ctr"/>
+          <a:lstStyle/>
+          <a:p>
+            <a:pPr algn="ctr"/>
+            <a:endParaRPr lang="en-US"/>
+          </a:p>
+        </p:txBody>
+      </p:sp>
+      <p:sp>
+        <p:nvSpPr>
+          <p:cNvPr id="15" name="TextBox 14">
+            <a:extLst>
+              <a:ext uri="{FF2B5EF4-FFF2-40B4-BE49-F238E27FC236}">
+                <a16:creationId xmlns:a16="http://schemas.microsoft.com/office/drawing/2014/main" id="{5A62F9F1-3396-C540-ACEF-C2F3ECF4FAA2}"/>
+              </a:ext>
+            </a:extLst>
+          </p:cNvPr>
+          <p:cNvSpPr txBox="1"/>
+          <p:nvPr/>
+        </p:nvSpPr>
+        <p:spPr>
+          <a:xfrm>
+            <a:off x="961992" y="4541883"/>
+            <a:ext cx="4904156" cy="2292935"/>
+          </a:xfrm>
+          <a:prstGeom prst="rect">
+            <a:avLst/>
+          </a:prstGeom>
+          <a:noFill/>
+        </p:spPr>
+        <p:txBody>
+          <a:bodyPr wrap="square" rtlCol="0">
+            <a:spAutoFit/>
+          </a:bodyPr>
+          <a:lstStyle/>
+          <a:p>
+            <a:r>
+              <a:rPr lang="en-US" sz="1100" dirty="0">
+                <a:solidFill>
+                  <a:srgbClr val="00B050"/>
+                </a:solidFill>
+                <a:latin typeface="Menlo" panose="020B0609030804020204" pitchFamily="49" charset="0"/>
+                <a:ea typeface="Menlo" panose="020B0609030804020204" pitchFamily="49" charset="0"/>
+                <a:cs typeface="Menlo" panose="020B0609030804020204" pitchFamily="49" charset="0"/>
+              </a:rPr>
+              <a:t># Note about other different ways to shuffle:</a:t>
+            </a:r>
+          </a:p>
+          <a:p>
+            <a:r>
+              <a:rPr lang="en-US" sz="1100" dirty="0">
+                <a:solidFill>
+                  <a:srgbClr val="0070C0"/>
+                </a:solidFill>
+                <a:latin typeface="Menlo" panose="020B0609030804020204" pitchFamily="49" charset="0"/>
+                <a:ea typeface="Menlo" panose="020B0609030804020204" pitchFamily="49" charset="0"/>
+                <a:cs typeface="Menlo" panose="020B0609030804020204" pitchFamily="49" charset="0"/>
+              </a:rPr>
+              <a:t>import </a:t>
+            </a:r>
+            <a:r>
+              <a:rPr lang="en-US" sz="1100" dirty="0" err="1">
+                <a:solidFill>
+                  <a:srgbClr val="0070C0"/>
+                </a:solidFill>
+                <a:latin typeface="Menlo" panose="020B0609030804020204" pitchFamily="49" charset="0"/>
+                <a:ea typeface="Menlo" panose="020B0609030804020204" pitchFamily="49" charset="0"/>
+                <a:cs typeface="Menlo" panose="020B0609030804020204" pitchFamily="49" charset="0"/>
+              </a:rPr>
+              <a:t>numpy</a:t>
+            </a:r>
+            <a:r>
+              <a:rPr lang="en-US" sz="1100" dirty="0">
+                <a:solidFill>
+                  <a:srgbClr val="0070C0"/>
+                </a:solidFill>
+                <a:latin typeface="Menlo" panose="020B0609030804020204" pitchFamily="49" charset="0"/>
+                <a:ea typeface="Menlo" panose="020B0609030804020204" pitchFamily="49" charset="0"/>
+                <a:cs typeface="Menlo" panose="020B0609030804020204" pitchFamily="49" charset="0"/>
+              </a:rPr>
+              <a:t> as np </a:t>
+            </a:r>
+          </a:p>
+          <a:p>
+            <a:r>
+              <a:rPr lang="en-US" sz="1100" dirty="0">
+                <a:solidFill>
+                  <a:srgbClr val="0070C0"/>
+                </a:solidFill>
+                <a:latin typeface="Menlo" panose="020B0609030804020204" pitchFamily="49" charset="0"/>
+                <a:ea typeface="Menlo" panose="020B0609030804020204" pitchFamily="49" charset="0"/>
+                <a:cs typeface="Menlo" panose="020B0609030804020204" pitchFamily="49" charset="0"/>
+              </a:rPr>
+              <a:t>from </a:t>
+            </a:r>
+            <a:r>
+              <a:rPr lang="en-US" sz="1100" dirty="0" err="1">
+                <a:solidFill>
+                  <a:srgbClr val="0070C0"/>
+                </a:solidFill>
+                <a:latin typeface="Menlo" panose="020B0609030804020204" pitchFamily="49" charset="0"/>
+                <a:ea typeface="Menlo" panose="020B0609030804020204" pitchFamily="49" charset="0"/>
+                <a:cs typeface="Menlo" panose="020B0609030804020204" pitchFamily="49" charset="0"/>
+              </a:rPr>
+              <a:t>sklearn.model_selection</a:t>
+            </a:r>
+            <a:r>
+              <a:rPr lang="en-US" sz="1100" dirty="0">
+                <a:solidFill>
+                  <a:srgbClr val="0070C0"/>
+                </a:solidFill>
+                <a:latin typeface="Menlo" panose="020B0609030804020204" pitchFamily="49" charset="0"/>
+                <a:ea typeface="Menlo" panose="020B0609030804020204" pitchFamily="49" charset="0"/>
+                <a:cs typeface="Menlo" panose="020B0609030804020204" pitchFamily="49" charset="0"/>
+              </a:rPr>
+              <a:t> import </a:t>
+            </a:r>
+            <a:r>
+              <a:rPr lang="en-US" sz="1100" dirty="0" err="1">
+                <a:solidFill>
+                  <a:srgbClr val="0070C0"/>
+                </a:solidFill>
+                <a:latin typeface="Menlo" panose="020B0609030804020204" pitchFamily="49" charset="0"/>
+                <a:ea typeface="Menlo" panose="020B0609030804020204" pitchFamily="49" charset="0"/>
+                <a:cs typeface="Menlo" panose="020B0609030804020204" pitchFamily="49" charset="0"/>
+              </a:rPr>
+              <a:t>train_test_split</a:t>
+            </a:r>
+            <a:r>
+              <a:rPr lang="en-US" sz="1100" dirty="0">
+                <a:solidFill>
+                  <a:srgbClr val="0070C0"/>
+                </a:solidFill>
+                <a:latin typeface="Menlo" panose="020B0609030804020204" pitchFamily="49" charset="0"/>
+                <a:ea typeface="Menlo" panose="020B0609030804020204" pitchFamily="49" charset="0"/>
+                <a:cs typeface="Menlo" panose="020B0609030804020204" pitchFamily="49" charset="0"/>
+              </a:rPr>
+              <a:t> </a:t>
+            </a:r>
+          </a:p>
+          <a:p>
+            <a:r>
+              <a:rPr lang="en-US" sz="1100" dirty="0">
+                <a:solidFill>
+                  <a:srgbClr val="0070C0"/>
+                </a:solidFill>
+                <a:latin typeface="Menlo" panose="020B0609030804020204" pitchFamily="49" charset="0"/>
+                <a:ea typeface="Menlo" panose="020B0609030804020204" pitchFamily="49" charset="0"/>
+                <a:cs typeface="Menlo" panose="020B0609030804020204" pitchFamily="49" charset="0"/>
+              </a:rPr>
+              <a:t>data = </a:t>
+            </a:r>
+            <a:r>
+              <a:rPr lang="en-US" sz="1100" dirty="0" err="1">
+                <a:solidFill>
+                  <a:srgbClr val="0070C0"/>
+                </a:solidFill>
+                <a:latin typeface="Menlo" panose="020B0609030804020204" pitchFamily="49" charset="0"/>
+                <a:ea typeface="Menlo" panose="020B0609030804020204" pitchFamily="49" charset="0"/>
+                <a:cs typeface="Menlo" panose="020B0609030804020204" pitchFamily="49" charset="0"/>
+              </a:rPr>
+              <a:t>np.random.random</a:t>
+            </a:r>
+            <a:r>
+              <a:rPr lang="en-US" sz="1100" dirty="0">
+                <a:solidFill>
+                  <a:srgbClr val="0070C0"/>
+                </a:solidFill>
+                <a:latin typeface="Menlo" panose="020B0609030804020204" pitchFamily="49" charset="0"/>
+                <a:ea typeface="Menlo" panose="020B0609030804020204" pitchFamily="49" charset="0"/>
+                <a:cs typeface="Menlo" panose="020B0609030804020204" pitchFamily="49" charset="0"/>
+              </a:rPr>
+              <a:t>(2*N)</a:t>
+            </a:r>
+          </a:p>
+          <a:p>
+            <a:endParaRPr lang="en-US" sz="1100" dirty="0">
+              <a:solidFill>
+                <a:srgbClr val="0070C0"/>
+              </a:solidFill>
+              <a:latin typeface="Menlo" panose="020B0609030804020204" pitchFamily="49" charset="0"/>
+              <a:ea typeface="Menlo" panose="020B0609030804020204" pitchFamily="49" charset="0"/>
+              <a:cs typeface="Menlo" panose="020B0609030804020204" pitchFamily="49" charset="0"/>
+            </a:endParaRPr>
+          </a:p>
+          <a:p>
+            <a:r>
+              <a:rPr lang="en-US" sz="1100" dirty="0">
+                <a:solidFill>
+                  <a:srgbClr val="00B050"/>
+                </a:solidFill>
+                <a:latin typeface="Menlo" panose="020B0609030804020204" pitchFamily="49" charset="0"/>
+                <a:ea typeface="Menlo" panose="020B0609030804020204" pitchFamily="49" charset="0"/>
+                <a:cs typeface="Menlo" panose="020B0609030804020204" pitchFamily="49" charset="0"/>
+              </a:rPr>
+              <a:t># using </a:t>
+            </a:r>
+            <a:r>
+              <a:rPr lang="en-US" sz="1100" dirty="0" err="1">
+                <a:solidFill>
+                  <a:srgbClr val="00B050"/>
+                </a:solidFill>
+                <a:latin typeface="Menlo" panose="020B0609030804020204" pitchFamily="49" charset="0"/>
+                <a:ea typeface="Menlo" panose="020B0609030804020204" pitchFamily="49" charset="0"/>
+                <a:cs typeface="Menlo" panose="020B0609030804020204" pitchFamily="49" charset="0"/>
+              </a:rPr>
+              <a:t>sklearn</a:t>
+            </a:r>
+            <a:r>
+              <a:rPr lang="en-US" sz="1100" dirty="0">
+                <a:solidFill>
+                  <a:srgbClr val="00B050"/>
+                </a:solidFill>
+                <a:latin typeface="Menlo" panose="020B0609030804020204" pitchFamily="49" charset="0"/>
+                <a:ea typeface="Menlo" panose="020B0609030804020204" pitchFamily="49" charset="0"/>
+                <a:cs typeface="Menlo" panose="020B0609030804020204" pitchFamily="49" charset="0"/>
+              </a:rPr>
+              <a:t> </a:t>
+            </a:r>
+            <a:r>
+              <a:rPr lang="en-US" sz="1100" dirty="0" err="1">
+                <a:solidFill>
+                  <a:srgbClr val="00B050"/>
+                </a:solidFill>
+                <a:latin typeface="Menlo" panose="020B0609030804020204" pitchFamily="49" charset="0"/>
+                <a:ea typeface="Menlo" panose="020B0609030804020204" pitchFamily="49" charset="0"/>
+                <a:cs typeface="Menlo" panose="020B0609030804020204" pitchFamily="49" charset="0"/>
+              </a:rPr>
+              <a:t>train_test_split</a:t>
+            </a:r>
+            <a:r>
+              <a:rPr lang="en-US" sz="1100" dirty="0">
+                <a:solidFill>
+                  <a:srgbClr val="00B050"/>
+                </a:solidFill>
+                <a:latin typeface="Menlo" panose="020B0609030804020204" pitchFamily="49" charset="0"/>
+                <a:ea typeface="Menlo" panose="020B0609030804020204" pitchFamily="49" charset="0"/>
+                <a:cs typeface="Menlo" panose="020B0609030804020204" pitchFamily="49" charset="0"/>
+              </a:rPr>
+              <a:t>()</a:t>
+            </a:r>
+          </a:p>
+          <a:p>
+            <a:r>
+              <a:rPr lang="en-US" sz="1100" dirty="0">
+                <a:solidFill>
+                  <a:srgbClr val="0070C0"/>
+                </a:solidFill>
+                <a:latin typeface="Menlo" panose="020B0609030804020204" pitchFamily="49" charset="0"/>
+                <a:ea typeface="Menlo" panose="020B0609030804020204" pitchFamily="49" charset="0"/>
+                <a:cs typeface="Menlo" panose="020B0609030804020204" pitchFamily="49" charset="0"/>
+              </a:rPr>
+              <a:t>X1, X2 = </a:t>
+            </a:r>
+            <a:r>
+              <a:rPr lang="en-US" sz="1100" dirty="0" err="1">
+                <a:solidFill>
+                  <a:srgbClr val="0070C0"/>
+                </a:solidFill>
+                <a:latin typeface="Menlo" panose="020B0609030804020204" pitchFamily="49" charset="0"/>
+                <a:ea typeface="Menlo" panose="020B0609030804020204" pitchFamily="49" charset="0"/>
+                <a:cs typeface="Menlo" panose="020B0609030804020204" pitchFamily="49" charset="0"/>
+              </a:rPr>
+              <a:t>train_test_split</a:t>
+            </a:r>
+            <a:r>
+              <a:rPr lang="en-US" sz="1100" dirty="0">
+                <a:solidFill>
+                  <a:srgbClr val="0070C0"/>
+                </a:solidFill>
+                <a:latin typeface="Menlo" panose="020B0609030804020204" pitchFamily="49" charset="0"/>
+                <a:ea typeface="Menlo" panose="020B0609030804020204" pitchFamily="49" charset="0"/>
+                <a:cs typeface="Menlo" panose="020B0609030804020204" pitchFamily="49" charset="0"/>
+              </a:rPr>
+              <a:t>(data, </a:t>
+            </a:r>
+            <a:r>
+              <a:rPr lang="en-US" sz="1100" dirty="0" err="1">
+                <a:solidFill>
+                  <a:srgbClr val="0070C0"/>
+                </a:solidFill>
+                <a:latin typeface="Menlo" panose="020B0609030804020204" pitchFamily="49" charset="0"/>
+                <a:ea typeface="Menlo" panose="020B0609030804020204" pitchFamily="49" charset="0"/>
+                <a:cs typeface="Menlo" panose="020B0609030804020204" pitchFamily="49" charset="0"/>
+              </a:rPr>
+              <a:t>test_size</a:t>
+            </a:r>
+            <a:r>
+              <a:rPr lang="en-US" sz="1100" dirty="0">
+                <a:solidFill>
+                  <a:srgbClr val="0070C0"/>
+                </a:solidFill>
+                <a:latin typeface="Menlo" panose="020B0609030804020204" pitchFamily="49" charset="0"/>
+                <a:ea typeface="Menlo" panose="020B0609030804020204" pitchFamily="49" charset="0"/>
+                <a:cs typeface="Menlo" panose="020B0609030804020204" pitchFamily="49" charset="0"/>
+              </a:rPr>
+              <a:t>=N)</a:t>
+            </a:r>
+          </a:p>
+          <a:p>
+            <a:endParaRPr lang="en-US" sz="1100" dirty="0">
+              <a:solidFill>
+                <a:srgbClr val="0070C0"/>
+              </a:solidFill>
+              <a:latin typeface="Menlo" panose="020B0609030804020204" pitchFamily="49" charset="0"/>
+              <a:ea typeface="Menlo" panose="020B0609030804020204" pitchFamily="49" charset="0"/>
+              <a:cs typeface="Menlo" panose="020B0609030804020204" pitchFamily="49" charset="0"/>
+            </a:endParaRPr>
+          </a:p>
+          <a:p>
+            <a:r>
+              <a:rPr lang="en-US" sz="1100" dirty="0">
+                <a:solidFill>
+                  <a:srgbClr val="00B050"/>
+                </a:solidFill>
+                <a:latin typeface="Menlo" panose="020B0609030804020204" pitchFamily="49" charset="0"/>
+                <a:ea typeface="Menlo" panose="020B0609030804020204" pitchFamily="49" charset="0"/>
+                <a:cs typeface="Menlo" panose="020B0609030804020204" pitchFamily="49" charset="0"/>
+              </a:rPr>
+              <a:t># using only </a:t>
+            </a:r>
+            <a:r>
+              <a:rPr lang="en-US" sz="1100" dirty="0" err="1">
+                <a:solidFill>
+                  <a:srgbClr val="00B050"/>
+                </a:solidFill>
+                <a:latin typeface="Menlo" panose="020B0609030804020204" pitchFamily="49" charset="0"/>
+                <a:ea typeface="Menlo" panose="020B0609030804020204" pitchFamily="49" charset="0"/>
+                <a:cs typeface="Menlo" panose="020B0609030804020204" pitchFamily="49" charset="0"/>
+              </a:rPr>
+              <a:t>Numpy</a:t>
+            </a:r>
+            <a:r>
+              <a:rPr lang="en-US" sz="1100" dirty="0">
+                <a:solidFill>
+                  <a:srgbClr val="00B050"/>
+                </a:solidFill>
+                <a:latin typeface="Menlo" panose="020B0609030804020204" pitchFamily="49" charset="0"/>
+                <a:ea typeface="Menlo" panose="020B0609030804020204" pitchFamily="49" charset="0"/>
+                <a:cs typeface="Menlo" panose="020B0609030804020204" pitchFamily="49" charset="0"/>
+              </a:rPr>
+              <a:t>:</a:t>
+            </a:r>
+          </a:p>
+          <a:p>
+            <a:r>
+              <a:rPr lang="en-US" sz="1100" dirty="0">
+                <a:solidFill>
+                  <a:srgbClr val="0070C0"/>
+                </a:solidFill>
+                <a:latin typeface="Menlo" panose="020B0609030804020204" pitchFamily="49" charset="0"/>
+                <a:ea typeface="Menlo" panose="020B0609030804020204" pitchFamily="49" charset="0"/>
+                <a:cs typeface="Menlo" panose="020B0609030804020204" pitchFamily="49" charset="0"/>
+              </a:rPr>
+              <a:t>s1 = </a:t>
+            </a:r>
+            <a:r>
+              <a:rPr lang="en-US" sz="1100" dirty="0" err="1">
+                <a:solidFill>
+                  <a:srgbClr val="0070C0"/>
+                </a:solidFill>
+                <a:latin typeface="Menlo" panose="020B0609030804020204" pitchFamily="49" charset="0"/>
+                <a:ea typeface="Menlo" panose="020B0609030804020204" pitchFamily="49" charset="0"/>
+                <a:cs typeface="Menlo" panose="020B0609030804020204" pitchFamily="49" charset="0"/>
+              </a:rPr>
+              <a:t>np.random.choice</a:t>
+            </a:r>
+            <a:r>
+              <a:rPr lang="en-US" sz="1100" dirty="0">
+                <a:solidFill>
+                  <a:srgbClr val="0070C0"/>
+                </a:solidFill>
+                <a:latin typeface="Menlo" panose="020B0609030804020204" pitchFamily="49" charset="0"/>
+                <a:ea typeface="Menlo" panose="020B0609030804020204" pitchFamily="49" charset="0"/>
+                <a:cs typeface="Menlo" panose="020B0609030804020204" pitchFamily="49" charset="0"/>
+              </a:rPr>
+              <a:t>(2*N, N, replace=False)</a:t>
+            </a:r>
+          </a:p>
+          <a:p>
+            <a:r>
+              <a:rPr lang="en-US" sz="1100" dirty="0">
+                <a:solidFill>
+                  <a:srgbClr val="0070C0"/>
+                </a:solidFill>
+                <a:latin typeface="Menlo" panose="020B0609030804020204" pitchFamily="49" charset="0"/>
+                <a:ea typeface="Menlo" panose="020B0609030804020204" pitchFamily="49" charset="0"/>
+                <a:cs typeface="Menlo" panose="020B0609030804020204" pitchFamily="49" charset="0"/>
+              </a:rPr>
+              <a:t>s2 = list( set(range(2*N)) - set(s1) )</a:t>
+            </a:r>
+          </a:p>
+          <a:p>
+            <a:r>
+              <a:rPr lang="en-US" sz="1100" dirty="0">
+                <a:solidFill>
+                  <a:srgbClr val="0070C0"/>
+                </a:solidFill>
+                <a:latin typeface="Menlo" panose="020B0609030804020204" pitchFamily="49" charset="0"/>
+                <a:ea typeface="Menlo" panose="020B0609030804020204" pitchFamily="49" charset="0"/>
+                <a:cs typeface="Menlo" panose="020B0609030804020204" pitchFamily="49" charset="0"/>
+              </a:rPr>
+              <a:t>split1 = data[s1]</a:t>
+            </a:r>
+          </a:p>
+          <a:p>
+            <a:r>
+              <a:rPr lang="en-US" sz="1100" dirty="0">
+                <a:solidFill>
+                  <a:srgbClr val="0070C0"/>
+                </a:solidFill>
+                <a:latin typeface="Menlo" panose="020B0609030804020204" pitchFamily="49" charset="0"/>
+                <a:ea typeface="Menlo" panose="020B0609030804020204" pitchFamily="49" charset="0"/>
+                <a:cs typeface="Menlo" panose="020B0609030804020204" pitchFamily="49" charset="0"/>
+              </a:rPr>
+              <a:t>split2 = data[s2]</a:t>
+            </a:r>
+          </a:p>
+        </p:txBody>
+      </p:sp>
+    </p:spTree>
+    <p:extLst>
+      <p:ext uri="{BB962C8B-B14F-4D97-AF65-F5344CB8AC3E}">
+        <p14:creationId xmlns:p14="http://schemas.microsoft.com/office/powerpoint/2010/main" val="274343235"/>
+      </p:ext>
+    </p:extLst>
+  </p:cSld>
+  <p:clrMapOvr>
+    <a:masterClrMapping/>
+  </p:clrMapOvr>
+</p:sld>
+</file>
+
+<file path=ppt/slides/slide4.xml><?xml version="1.0" encoding="utf-8"?>
+<p:sld xmlns:a="http://schemas.openxmlformats.org/drawingml/2006/main" xmlns:r="http://schemas.openxmlformats.org/officeDocument/2006/relationships" xmlns:p="http://schemas.openxmlformats.org/presentationml/2006/main">
+  <p:cSld>
+    <p:spTree>
+      <p:nvGrpSpPr>
+        <p:cNvPr id="1" name=""/>
+        <p:cNvGrpSpPr/>
+        <p:nvPr/>
+      </p:nvGrpSpPr>
+      <p:grpSpPr>
+        <a:xfrm>
+          <a:off x="0" y="0"/>
+          <a:ext cx="0" cy="0"/>
+          <a:chOff x="0" y="0"/>
+          <a:chExt cx="0" cy="0"/>
+        </a:xfrm>
+      </p:grpSpPr>
+      <p:sp>
+        <p:nvSpPr>
+          <p:cNvPr id="2" name="TextBox 1">
+            <a:extLst>
+              <a:ext uri="{FF2B5EF4-FFF2-40B4-BE49-F238E27FC236}">
+                <a16:creationId xmlns:a16="http://schemas.microsoft.com/office/drawing/2014/main" id="{FFF755FE-9EC5-2243-8B9B-E4A9E7CEC3D9}"/>
+              </a:ext>
+            </a:extLst>
+          </p:cNvPr>
+          <p:cNvSpPr txBox="1"/>
+          <p:nvPr/>
+        </p:nvSpPr>
+        <p:spPr>
+          <a:xfrm>
+            <a:off x="0" y="0"/>
+            <a:ext cx="7656576" cy="523220"/>
+          </a:xfrm>
+          <a:prstGeom prst="rect">
+            <a:avLst/>
+          </a:prstGeom>
+          <a:noFill/>
+        </p:spPr>
+        <p:txBody>
+          <a:bodyPr wrap="square" rtlCol="0">
+            <a:spAutoFit/>
+          </a:bodyPr>
+          <a:lstStyle/>
+          <a:p>
+            <a:r>
+              <a:rPr lang="en-US" sz="2800" b="1" dirty="0"/>
+              <a:t>Example – Bootstrapping</a:t>
+            </a:r>
+          </a:p>
+        </p:txBody>
+      </p:sp>
+      <p:sp>
+        <p:nvSpPr>
+          <p:cNvPr id="3" name="TextBox 2">
+            <a:extLst>
+              <a:ext uri="{FF2B5EF4-FFF2-40B4-BE49-F238E27FC236}">
+                <a16:creationId xmlns:a16="http://schemas.microsoft.com/office/drawing/2014/main" id="{B4214305-FB5A-AA42-89E0-5393ADEB579E}"/>
+              </a:ext>
+            </a:extLst>
+          </p:cNvPr>
+          <p:cNvSpPr txBox="1"/>
+          <p:nvPr/>
+        </p:nvSpPr>
+        <p:spPr>
+          <a:xfrm>
+            <a:off x="6492391" y="2996329"/>
+            <a:ext cx="5394809" cy="2862322"/>
+          </a:xfrm>
+          <a:prstGeom prst="rect">
+            <a:avLst/>
+          </a:prstGeom>
+          <a:noFill/>
+        </p:spPr>
+        <p:txBody>
+          <a:bodyPr wrap="square" rtlCol="0">
+            <a:spAutoFit/>
+          </a:bodyPr>
+          <a:lstStyle/>
+          <a:p>
+            <a:r>
+              <a:rPr lang="en-US" sz="1200" dirty="0">
+                <a:solidFill>
+                  <a:srgbClr val="00B050"/>
+                </a:solidFill>
+                <a:latin typeface="Menlo" panose="020B0609030804020204" pitchFamily="49" charset="0"/>
+                <a:ea typeface="Menlo" panose="020B0609030804020204" pitchFamily="49" charset="0"/>
+                <a:cs typeface="Menlo" panose="020B0609030804020204" pitchFamily="49" charset="0"/>
+              </a:rPr>
+              <a:t># Heights of turtle towers</a:t>
+            </a:r>
+          </a:p>
+          <a:p>
+            <a:endParaRPr lang="en-US" sz="1200" dirty="0">
+              <a:solidFill>
+                <a:srgbClr val="0070C0"/>
+              </a:solidFill>
+              <a:latin typeface="Menlo" panose="020B0609030804020204" pitchFamily="49" charset="0"/>
+              <a:ea typeface="Menlo" panose="020B0609030804020204" pitchFamily="49" charset="0"/>
+              <a:cs typeface="Menlo" panose="020B0609030804020204" pitchFamily="49" charset="0"/>
+            </a:endParaRPr>
+          </a:p>
+          <a:p>
+            <a:r>
+              <a:rPr lang="en-US" sz="1200" dirty="0">
+                <a:solidFill>
+                  <a:srgbClr val="0070C0"/>
+                </a:solidFill>
+                <a:latin typeface="Menlo" panose="020B0609030804020204" pitchFamily="49" charset="0"/>
+                <a:ea typeface="Menlo" panose="020B0609030804020204" pitchFamily="49" charset="0"/>
+                <a:cs typeface="Menlo" panose="020B0609030804020204" pitchFamily="49" charset="0"/>
+              </a:rPr>
+              <a:t>import </a:t>
+            </a:r>
+            <a:r>
+              <a:rPr lang="en-US" sz="1200" dirty="0" err="1">
+                <a:solidFill>
+                  <a:srgbClr val="0070C0"/>
+                </a:solidFill>
+                <a:latin typeface="Menlo" panose="020B0609030804020204" pitchFamily="49" charset="0"/>
+                <a:ea typeface="Menlo" panose="020B0609030804020204" pitchFamily="49" charset="0"/>
+                <a:cs typeface="Menlo" panose="020B0609030804020204" pitchFamily="49" charset="0"/>
+              </a:rPr>
+              <a:t>numpy</a:t>
+            </a:r>
+            <a:r>
+              <a:rPr lang="en-US" sz="1200" dirty="0">
+                <a:solidFill>
+                  <a:srgbClr val="0070C0"/>
+                </a:solidFill>
+                <a:latin typeface="Menlo" panose="020B0609030804020204" pitchFamily="49" charset="0"/>
+                <a:ea typeface="Menlo" panose="020B0609030804020204" pitchFamily="49" charset="0"/>
+                <a:cs typeface="Menlo" panose="020B0609030804020204" pitchFamily="49" charset="0"/>
+              </a:rPr>
+              <a:t> as np</a:t>
+            </a:r>
+          </a:p>
+          <a:p>
+            <a:endParaRPr lang="en-US" sz="1200" dirty="0">
+              <a:solidFill>
+                <a:srgbClr val="0070C0"/>
+              </a:solidFill>
+              <a:latin typeface="Menlo" panose="020B0609030804020204" pitchFamily="49" charset="0"/>
+              <a:ea typeface="Menlo" panose="020B0609030804020204" pitchFamily="49" charset="0"/>
+              <a:cs typeface="Menlo" panose="020B0609030804020204" pitchFamily="49" charset="0"/>
+            </a:endParaRPr>
+          </a:p>
+          <a:p>
+            <a:r>
+              <a:rPr lang="en-US" sz="1200" dirty="0">
+                <a:solidFill>
+                  <a:srgbClr val="0070C0"/>
+                </a:solidFill>
+                <a:latin typeface="Menlo" panose="020B0609030804020204" pitchFamily="49" charset="0"/>
+                <a:ea typeface="Menlo" panose="020B0609030804020204" pitchFamily="49" charset="0"/>
+                <a:cs typeface="Menlo" panose="020B0609030804020204" pitchFamily="49" charset="0"/>
+              </a:rPr>
+              <a:t>N=10000</a:t>
+            </a:r>
+          </a:p>
+          <a:p>
+            <a:r>
+              <a:rPr lang="en-US" sz="1200" dirty="0">
+                <a:solidFill>
+                  <a:srgbClr val="0070C0"/>
+                </a:solidFill>
+                <a:latin typeface="Menlo" panose="020B0609030804020204" pitchFamily="49" charset="0"/>
+                <a:ea typeface="Menlo" panose="020B0609030804020204" pitchFamily="49" charset="0"/>
+                <a:cs typeface="Menlo" panose="020B0609030804020204" pitchFamily="49" charset="0"/>
+              </a:rPr>
+              <a:t>heights = </a:t>
+            </a:r>
+            <a:r>
+              <a:rPr lang="en-US" sz="1200" dirty="0" err="1">
+                <a:solidFill>
+                  <a:srgbClr val="0070C0"/>
+                </a:solidFill>
+                <a:latin typeface="Menlo" panose="020B0609030804020204" pitchFamily="49" charset="0"/>
+                <a:ea typeface="Menlo" panose="020B0609030804020204" pitchFamily="49" charset="0"/>
+                <a:cs typeface="Menlo" panose="020B0609030804020204" pitchFamily="49" charset="0"/>
+              </a:rPr>
+              <a:t>np.zeros</a:t>
+            </a:r>
+            <a:r>
+              <a:rPr lang="en-US" sz="1200" dirty="0">
+                <a:solidFill>
+                  <a:srgbClr val="0070C0"/>
+                </a:solidFill>
+                <a:latin typeface="Menlo" panose="020B0609030804020204" pitchFamily="49" charset="0"/>
+                <a:ea typeface="Menlo" panose="020B0609030804020204" pitchFamily="49" charset="0"/>
+                <a:cs typeface="Menlo" panose="020B0609030804020204" pitchFamily="49" charset="0"/>
+              </a:rPr>
+              <a:t>(N, </a:t>
+            </a:r>
+            <a:r>
+              <a:rPr lang="en-US" sz="1200" dirty="0" err="1">
+                <a:solidFill>
+                  <a:srgbClr val="0070C0"/>
+                </a:solidFill>
+                <a:latin typeface="Menlo" panose="020B0609030804020204" pitchFamily="49" charset="0"/>
+                <a:ea typeface="Menlo" panose="020B0609030804020204" pitchFamily="49" charset="0"/>
+                <a:cs typeface="Menlo" panose="020B0609030804020204" pitchFamily="49" charset="0"/>
+              </a:rPr>
+              <a:t>dtype</a:t>
+            </a:r>
+            <a:r>
+              <a:rPr lang="en-US" sz="1200" dirty="0">
+                <a:solidFill>
+                  <a:srgbClr val="0070C0"/>
+                </a:solidFill>
+                <a:latin typeface="Menlo" panose="020B0609030804020204" pitchFamily="49" charset="0"/>
+                <a:ea typeface="Menlo" panose="020B0609030804020204" pitchFamily="49" charset="0"/>
+                <a:cs typeface="Menlo" panose="020B0609030804020204" pitchFamily="49" charset="0"/>
+              </a:rPr>
+              <a:t>=float)</a:t>
+            </a:r>
+          </a:p>
+          <a:p>
+            <a:endParaRPr lang="en-US" sz="1200" dirty="0">
+              <a:solidFill>
+                <a:srgbClr val="0070C0"/>
+              </a:solidFill>
+              <a:latin typeface="Menlo" panose="020B0609030804020204" pitchFamily="49" charset="0"/>
+              <a:ea typeface="Menlo" panose="020B0609030804020204" pitchFamily="49" charset="0"/>
+              <a:cs typeface="Menlo" panose="020B0609030804020204" pitchFamily="49" charset="0"/>
+            </a:endParaRPr>
+          </a:p>
+          <a:p>
+            <a:r>
+              <a:rPr lang="en-US" sz="1200" dirty="0">
+                <a:solidFill>
+                  <a:srgbClr val="0070C0"/>
+                </a:solidFill>
+                <a:latin typeface="Menlo" panose="020B0609030804020204" pitchFamily="49" charset="0"/>
+                <a:ea typeface="Menlo" panose="020B0609030804020204" pitchFamily="49" charset="0"/>
+                <a:cs typeface="Menlo" panose="020B0609030804020204" pitchFamily="49" charset="0"/>
+              </a:rPr>
+              <a:t>for ii in range(N):</a:t>
+            </a:r>
+          </a:p>
+          <a:p>
+            <a:r>
+              <a:rPr lang="en-US" sz="1200" dirty="0">
+                <a:solidFill>
+                  <a:srgbClr val="0070C0"/>
+                </a:solidFill>
+                <a:latin typeface="Menlo" panose="020B0609030804020204" pitchFamily="49" charset="0"/>
+                <a:ea typeface="Menlo" panose="020B0609030804020204" pitchFamily="49" charset="0"/>
+                <a:cs typeface="Menlo" panose="020B0609030804020204" pitchFamily="49" charset="0"/>
+              </a:rPr>
+              <a:t>    sample = </a:t>
+            </a:r>
+            <a:r>
+              <a:rPr lang="en-US" sz="1200" dirty="0" err="1">
+                <a:solidFill>
+                  <a:srgbClr val="0070C0"/>
+                </a:solidFill>
+                <a:latin typeface="Menlo" panose="020B0609030804020204" pitchFamily="49" charset="0"/>
+                <a:ea typeface="Menlo" panose="020B0609030804020204" pitchFamily="49" charset="0"/>
+                <a:cs typeface="Menlo" panose="020B0609030804020204" pitchFamily="49" charset="0"/>
+              </a:rPr>
+              <a:t>randint</a:t>
+            </a:r>
+            <a:r>
+              <a:rPr lang="en-US" sz="1200" dirty="0">
+                <a:solidFill>
+                  <a:srgbClr val="0070C0"/>
+                </a:solidFill>
+                <a:latin typeface="Menlo" panose="020B0609030804020204" pitchFamily="49" charset="0"/>
+                <a:ea typeface="Menlo" panose="020B0609030804020204" pitchFamily="49" charset="0"/>
+                <a:cs typeface="Menlo" panose="020B0609030804020204" pitchFamily="49" charset="0"/>
+              </a:rPr>
+              <a:t>(20,size=20)</a:t>
+            </a:r>
+            <a:r>
+              <a:rPr lang="en-US" sz="1200" dirty="0">
+                <a:solidFill>
+                  <a:srgbClr val="00B050"/>
+                </a:solidFill>
+                <a:latin typeface="Menlo" panose="020B0609030804020204" pitchFamily="49" charset="0"/>
+                <a:ea typeface="Menlo" panose="020B0609030804020204" pitchFamily="49" charset="0"/>
+                <a:cs typeface="Menlo" panose="020B0609030804020204" pitchFamily="49" charset="0"/>
+              </a:rPr>
+              <a:t> # bootstrap 20 numbers</a:t>
+            </a:r>
+          </a:p>
+          <a:p>
+            <a:r>
+              <a:rPr lang="en-US" sz="1200" dirty="0">
+                <a:solidFill>
+                  <a:srgbClr val="0070C0"/>
+                </a:solidFill>
+                <a:latin typeface="Menlo" panose="020B0609030804020204" pitchFamily="49" charset="0"/>
+                <a:ea typeface="Menlo" panose="020B0609030804020204" pitchFamily="49" charset="0"/>
+                <a:cs typeface="Menlo" panose="020B0609030804020204" pitchFamily="49" charset="0"/>
+              </a:rPr>
+              <a:t>    heights[ii] = </a:t>
+            </a:r>
+            <a:r>
+              <a:rPr lang="en-US" sz="1200" dirty="0" err="1">
+                <a:solidFill>
+                  <a:srgbClr val="0070C0"/>
+                </a:solidFill>
+                <a:latin typeface="Menlo" panose="020B0609030804020204" pitchFamily="49" charset="0"/>
+                <a:ea typeface="Menlo" panose="020B0609030804020204" pitchFamily="49" charset="0"/>
+                <a:cs typeface="Menlo" panose="020B0609030804020204" pitchFamily="49" charset="0"/>
+              </a:rPr>
+              <a:t>np.mean</a:t>
+            </a:r>
+            <a:r>
+              <a:rPr lang="en-US" sz="1200" dirty="0">
+                <a:solidFill>
+                  <a:srgbClr val="0070C0"/>
+                </a:solidFill>
+                <a:latin typeface="Menlo" panose="020B0609030804020204" pitchFamily="49" charset="0"/>
+                <a:ea typeface="Menlo" panose="020B0609030804020204" pitchFamily="49" charset="0"/>
+                <a:cs typeface="Menlo" panose="020B0609030804020204" pitchFamily="49" charset="0"/>
+              </a:rPr>
+              <a:t>(sample)</a:t>
+            </a:r>
+          </a:p>
+          <a:p>
+            <a:endParaRPr lang="en-US" sz="1200" dirty="0">
+              <a:solidFill>
+                <a:srgbClr val="0070C0"/>
+              </a:solidFill>
+              <a:latin typeface="Menlo" panose="020B0609030804020204" pitchFamily="49" charset="0"/>
+              <a:ea typeface="Menlo" panose="020B0609030804020204" pitchFamily="49" charset="0"/>
+              <a:cs typeface="Menlo" panose="020B0609030804020204" pitchFamily="49" charset="0"/>
+            </a:endParaRPr>
+          </a:p>
+          <a:p>
+            <a:r>
+              <a:rPr lang="en-US" sz="1200" dirty="0" err="1">
+                <a:solidFill>
+                  <a:srgbClr val="0070C0"/>
+                </a:solidFill>
+                <a:latin typeface="Menlo" panose="020B0609030804020204" pitchFamily="49" charset="0"/>
+                <a:ea typeface="Menlo" panose="020B0609030804020204" pitchFamily="49" charset="0"/>
+                <a:cs typeface="Menlo" panose="020B0609030804020204" pitchFamily="49" charset="0"/>
+              </a:rPr>
+              <a:t>heights_mean</a:t>
+            </a:r>
+            <a:r>
+              <a:rPr lang="en-US" sz="1200" dirty="0">
+                <a:solidFill>
+                  <a:srgbClr val="0070C0"/>
+                </a:solidFill>
+                <a:latin typeface="Menlo" panose="020B0609030804020204" pitchFamily="49" charset="0"/>
+                <a:ea typeface="Menlo" panose="020B0609030804020204" pitchFamily="49" charset="0"/>
+                <a:cs typeface="Menlo" panose="020B0609030804020204" pitchFamily="49" charset="0"/>
+              </a:rPr>
+              <a:t> = </a:t>
+            </a:r>
+            <a:r>
+              <a:rPr lang="en-US" sz="1200" dirty="0" err="1">
+                <a:solidFill>
+                  <a:srgbClr val="0070C0"/>
+                </a:solidFill>
+                <a:latin typeface="Menlo" panose="020B0609030804020204" pitchFamily="49" charset="0"/>
+                <a:ea typeface="Menlo" panose="020B0609030804020204" pitchFamily="49" charset="0"/>
+                <a:cs typeface="Menlo" panose="020B0609030804020204" pitchFamily="49" charset="0"/>
+              </a:rPr>
+              <a:t>np.mean</a:t>
+            </a:r>
+            <a:r>
+              <a:rPr lang="en-US" sz="1200" dirty="0">
+                <a:solidFill>
+                  <a:srgbClr val="0070C0"/>
+                </a:solidFill>
+                <a:latin typeface="Menlo" panose="020B0609030804020204" pitchFamily="49" charset="0"/>
+                <a:ea typeface="Menlo" panose="020B0609030804020204" pitchFamily="49" charset="0"/>
+                <a:cs typeface="Menlo" panose="020B0609030804020204" pitchFamily="49" charset="0"/>
+              </a:rPr>
+              <a:t>(heights)   </a:t>
+            </a:r>
+          </a:p>
+          <a:p>
+            <a:r>
+              <a:rPr lang="en-US" sz="1200" dirty="0" err="1">
+                <a:solidFill>
+                  <a:srgbClr val="0070C0"/>
+                </a:solidFill>
+                <a:latin typeface="Menlo" panose="020B0609030804020204" pitchFamily="49" charset="0"/>
+                <a:ea typeface="Menlo" panose="020B0609030804020204" pitchFamily="49" charset="0"/>
+                <a:cs typeface="Menlo" panose="020B0609030804020204" pitchFamily="49" charset="0"/>
+              </a:rPr>
+              <a:t>heights_std</a:t>
+            </a:r>
+            <a:r>
+              <a:rPr lang="en-US" sz="1200" dirty="0">
+                <a:solidFill>
+                  <a:srgbClr val="0070C0"/>
+                </a:solidFill>
+                <a:latin typeface="Menlo" panose="020B0609030804020204" pitchFamily="49" charset="0"/>
+                <a:ea typeface="Menlo" panose="020B0609030804020204" pitchFamily="49" charset="0"/>
+                <a:cs typeface="Menlo" panose="020B0609030804020204" pitchFamily="49" charset="0"/>
+              </a:rPr>
+              <a:t>  = </a:t>
+            </a:r>
+            <a:r>
+              <a:rPr lang="en-US" sz="1200" dirty="0" err="1">
+                <a:solidFill>
+                  <a:srgbClr val="0070C0"/>
+                </a:solidFill>
+                <a:latin typeface="Menlo" panose="020B0609030804020204" pitchFamily="49" charset="0"/>
+                <a:ea typeface="Menlo" panose="020B0609030804020204" pitchFamily="49" charset="0"/>
+                <a:cs typeface="Menlo" panose="020B0609030804020204" pitchFamily="49" charset="0"/>
+              </a:rPr>
+              <a:t>np.std</a:t>
+            </a:r>
+            <a:r>
+              <a:rPr lang="en-US" sz="1200" dirty="0">
+                <a:solidFill>
+                  <a:srgbClr val="0070C0"/>
+                </a:solidFill>
+                <a:latin typeface="Menlo" panose="020B0609030804020204" pitchFamily="49" charset="0"/>
+                <a:ea typeface="Menlo" panose="020B0609030804020204" pitchFamily="49" charset="0"/>
+                <a:cs typeface="Menlo" panose="020B0609030804020204" pitchFamily="49" charset="0"/>
+              </a:rPr>
+              <a:t>(heights)</a:t>
+            </a:r>
+          </a:p>
+          <a:p>
+            <a:r>
+              <a:rPr lang="en-US" sz="1200" dirty="0">
+                <a:solidFill>
+                  <a:srgbClr val="0070C0"/>
+                </a:solidFill>
+                <a:latin typeface="Menlo" panose="020B0609030804020204" pitchFamily="49" charset="0"/>
+                <a:ea typeface="Menlo" panose="020B0609030804020204" pitchFamily="49" charset="0"/>
+                <a:cs typeface="Menlo" panose="020B0609030804020204" pitchFamily="49" charset="0"/>
+              </a:rPr>
+              <a:t>print(</a:t>
+            </a:r>
+            <a:r>
+              <a:rPr lang="en-US" sz="1200" dirty="0" err="1">
+                <a:solidFill>
+                  <a:srgbClr val="0070C0"/>
+                </a:solidFill>
+                <a:latin typeface="Menlo" panose="020B0609030804020204" pitchFamily="49" charset="0"/>
+                <a:ea typeface="Menlo" panose="020B0609030804020204" pitchFamily="49" charset="0"/>
+                <a:cs typeface="Menlo" panose="020B0609030804020204" pitchFamily="49" charset="0"/>
+              </a:rPr>
+              <a:t>f"heights</a:t>
+            </a:r>
+            <a:r>
+              <a:rPr lang="en-US" sz="1200" dirty="0">
+                <a:solidFill>
+                  <a:srgbClr val="0070C0"/>
+                </a:solidFill>
+                <a:latin typeface="Menlo" panose="020B0609030804020204" pitchFamily="49" charset="0"/>
+                <a:ea typeface="Menlo" panose="020B0609030804020204" pitchFamily="49" charset="0"/>
+                <a:cs typeface="Menlo" panose="020B0609030804020204" pitchFamily="49" charset="0"/>
+              </a:rPr>
+              <a:t> mean = {heights_mean:.3f}")</a:t>
+            </a:r>
+            <a:r>
+              <a:rPr lang="en-US" sz="1200" dirty="0">
+                <a:solidFill>
+                  <a:srgbClr val="00B050"/>
+                </a:solidFill>
+                <a:latin typeface="Menlo" panose="020B0609030804020204" pitchFamily="49" charset="0"/>
+                <a:ea typeface="Menlo" panose="020B0609030804020204" pitchFamily="49" charset="0"/>
+                <a:cs typeface="Menlo" panose="020B0609030804020204" pitchFamily="49" charset="0"/>
+              </a:rPr>
+              <a:t>  # 9.52</a:t>
+            </a:r>
+          </a:p>
+          <a:p>
+            <a:r>
+              <a:rPr lang="en-US" sz="1200" dirty="0">
+                <a:solidFill>
+                  <a:srgbClr val="0070C0"/>
+                </a:solidFill>
+                <a:latin typeface="Menlo" panose="020B0609030804020204" pitchFamily="49" charset="0"/>
+                <a:ea typeface="Menlo" panose="020B0609030804020204" pitchFamily="49" charset="0"/>
+                <a:cs typeface="Menlo" panose="020B0609030804020204" pitchFamily="49" charset="0"/>
+              </a:rPr>
+              <a:t>print(</a:t>
+            </a:r>
+            <a:r>
+              <a:rPr lang="en-US" sz="1200" dirty="0" err="1">
+                <a:solidFill>
+                  <a:srgbClr val="0070C0"/>
+                </a:solidFill>
+                <a:latin typeface="Menlo" panose="020B0609030804020204" pitchFamily="49" charset="0"/>
+                <a:ea typeface="Menlo" panose="020B0609030804020204" pitchFamily="49" charset="0"/>
+                <a:cs typeface="Menlo" panose="020B0609030804020204" pitchFamily="49" charset="0"/>
+              </a:rPr>
+              <a:t>f"heights</a:t>
+            </a:r>
+            <a:r>
+              <a:rPr lang="en-US" sz="1200" dirty="0">
+                <a:solidFill>
+                  <a:srgbClr val="0070C0"/>
+                </a:solidFill>
+                <a:latin typeface="Menlo" panose="020B0609030804020204" pitchFamily="49" charset="0"/>
+                <a:ea typeface="Menlo" panose="020B0609030804020204" pitchFamily="49" charset="0"/>
+                <a:cs typeface="Menlo" panose="020B0609030804020204" pitchFamily="49" charset="0"/>
+              </a:rPr>
+              <a:t> std  = {heights_std:.3f}")</a:t>
+            </a:r>
+            <a:r>
+              <a:rPr lang="en-US" sz="1200" dirty="0">
+                <a:solidFill>
+                  <a:srgbClr val="00B050"/>
+                </a:solidFill>
+                <a:latin typeface="Menlo" panose="020B0609030804020204" pitchFamily="49" charset="0"/>
+                <a:ea typeface="Menlo" panose="020B0609030804020204" pitchFamily="49" charset="0"/>
+                <a:cs typeface="Menlo" panose="020B0609030804020204" pitchFamily="49" charset="0"/>
+              </a:rPr>
+              <a:t>   # 1.27</a:t>
+            </a:r>
+          </a:p>
+        </p:txBody>
+      </p:sp>
+      <p:sp>
+        <p:nvSpPr>
+          <p:cNvPr id="5" name="TextBox 4">
+            <a:extLst>
+              <a:ext uri="{FF2B5EF4-FFF2-40B4-BE49-F238E27FC236}">
+                <a16:creationId xmlns:a16="http://schemas.microsoft.com/office/drawing/2014/main" id="{BCBEE07D-A5DF-F74F-8D7F-9F8677072775}"/>
+              </a:ext>
+            </a:extLst>
+          </p:cNvPr>
+          <p:cNvSpPr txBox="1"/>
+          <p:nvPr/>
+        </p:nvSpPr>
+        <p:spPr>
+          <a:xfrm>
+            <a:off x="115673" y="885547"/>
+            <a:ext cx="4974336" cy="2246769"/>
+          </a:xfrm>
+          <a:prstGeom prst="rect">
+            <a:avLst/>
+          </a:prstGeom>
+          <a:noFill/>
+        </p:spPr>
+        <p:txBody>
+          <a:bodyPr wrap="square" rtlCol="0">
+            <a:spAutoFit/>
+          </a:bodyPr>
+          <a:lstStyle/>
+          <a:p>
+            <a:r>
+              <a:rPr lang="en-US" b="1" dirty="0">
+                <a:solidFill>
+                  <a:srgbClr val="FF0000"/>
+                </a:solidFill>
+              </a:rPr>
+              <a:t>Bootstrapping</a:t>
+            </a:r>
+            <a:r>
+              <a:rPr lang="en-US" dirty="0"/>
+              <a:t> (Bootstrap Sampling) is any test or metric that uses random sampling with replacement (e.g. mimicking the sampling process), </a:t>
+            </a:r>
+          </a:p>
+          <a:p>
+            <a:endParaRPr lang="en-US" dirty="0"/>
+          </a:p>
+          <a:p>
+            <a:r>
+              <a:rPr lang="en-US" dirty="0"/>
+              <a:t>Advantages of bootstrapping: </a:t>
+            </a:r>
+            <a:r>
+              <a:rPr lang="en-US" b="1" dirty="0">
+                <a:solidFill>
+                  <a:srgbClr val="FF0000"/>
+                </a:solidFill>
+              </a:rPr>
+              <a:t>simplicity</a:t>
+            </a:r>
+            <a:r>
+              <a:rPr lang="en-US" dirty="0"/>
+              <a:t>.</a:t>
+            </a:r>
+          </a:p>
+          <a:p>
+            <a:r>
+              <a:rPr lang="en-US" dirty="0"/>
+              <a:t>It is a simple way to estimate means, standard errors and confidence intervals for complex (non-linear) estimators.</a:t>
+            </a:r>
+          </a:p>
+          <a:p>
+            <a:endParaRPr lang="en-US" dirty="0"/>
+          </a:p>
+          <a:p>
+            <a:r>
+              <a:rPr lang="en-US" dirty="0"/>
+              <a:t>For example, for estimators like percentile points, proportions, odds ratio, and correlation coefficients.</a:t>
+            </a:r>
+          </a:p>
+        </p:txBody>
+      </p:sp>
+      <p:pic>
+        <p:nvPicPr>
+          <p:cNvPr id="1026" name="Picture 2" descr="Yertle the Turtle and Other Stories By Dr. Seuss | Used | 9780007173143 |  World of Books">
+            <a:extLst>
+              <a:ext uri="{FF2B5EF4-FFF2-40B4-BE49-F238E27FC236}">
+                <a16:creationId xmlns:a16="http://schemas.microsoft.com/office/drawing/2014/main" id="{056A484B-6B4B-CC46-81E3-8E9E0CA07831}"/>
+              </a:ext>
+            </a:extLst>
+          </p:cNvPr>
+          <p:cNvPicPr>
+            <a:picLocks noChangeAspect="1" noChangeArrowheads="1"/>
+          </p:cNvPicPr>
+          <p:nvPr/>
+        </p:nvPicPr>
+        <p:blipFill>
+          <a:blip r:embed="rId2" cstate="email">
+            <a:extLst>
+              <a:ext uri="{28A0092B-C50C-407E-A947-70E740481C1C}">
+                <a14:useLocalDpi xmlns:a14="http://schemas.microsoft.com/office/drawing/2010/main"/>
+              </a:ext>
+            </a:extLst>
+          </a:blip>
+          <a:srcRect/>
+          <a:stretch>
+            <a:fillRect/>
+          </a:stretch>
+        </p:blipFill>
+        <p:spPr bwMode="auto">
+          <a:xfrm>
+            <a:off x="10204189" y="109728"/>
+            <a:ext cx="1872138" cy="2629408"/>
+          </a:xfrm>
+          <a:prstGeom prst="rect">
+            <a:avLst/>
+          </a:prstGeom>
+          <a:noFill/>
+          <a:extLst>
+            <a:ext uri="{909E8E84-426E-40DD-AFC4-6F175D3DCCD1}">
+              <a14:hiddenFill xmlns:a14="http://schemas.microsoft.com/office/drawing/2010/main">
+                <a:solidFill>
+                  <a:srgbClr val="FFFFFF"/>
+                </a:solidFill>
+              </a14:hiddenFill>
+            </a:ext>
+          </a:extLst>
+        </p:spPr>
+      </p:pic>
+    </p:spTree>
+    <p:extLst>
+      <p:ext uri="{BB962C8B-B14F-4D97-AF65-F5344CB8AC3E}">
+        <p14:creationId xmlns:p14="http://schemas.microsoft.com/office/powerpoint/2010/main" val="1709940923"/>
+      </p:ext>
+    </p:extLst>
+  </p:cSld>
+  <p:clrMapOvr>
+    <a:masterClrMapping/>
+  </p:clrMapOvr>
+</p:sld>
+</file>
+
 <file path=ppt/theme/theme1.xml><?xml version="1.0" encoding="utf-8"?>
 <a:theme xmlns:a="http://schemas.openxmlformats.org/drawingml/2006/main" name="Office Theme">
   <a:themeElements>

--- a/statistics_16_for_hackers.pptx
+++ b/statistics_16_for_hackers.pptx
@@ -5,13 +5,14 @@
     <p:sldMasterId id="2147483659" r:id="rId1"/>
   </p:sldMasterIdLst>
   <p:notesMasterIdLst>
-    <p:notesMasterId r:id="rId6"/>
+    <p:notesMasterId r:id="rId7"/>
   </p:notesMasterIdLst>
   <p:sldIdLst>
     <p:sldId id="310" r:id="rId2"/>
     <p:sldId id="311" r:id="rId3"/>
     <p:sldId id="312" r:id="rId4"/>
-    <p:sldId id="313" r:id="rId5"/>
+    <p:sldId id="314" r:id="rId5"/>
+    <p:sldId id="313" r:id="rId6"/>
   </p:sldIdLst>
   <p:sldSz cx="12192000" cy="6858000"/>
   <p:notesSz cx="6858000" cy="9144000"/>
@@ -16077,7 +16078,7 @@
         <p:spPr>
           <a:xfrm>
             <a:off x="961992" y="4541883"/>
-            <a:ext cx="4904156" cy="2292935"/>
+            <a:ext cx="4904156" cy="2123658"/>
           </a:xfrm>
           <a:prstGeom prst="rect">
             <a:avLst/>
@@ -16093,19 +16094,6 @@
             <a:r>
               <a:rPr lang="en-US" sz="1100" dirty="0">
                 <a:solidFill>
-                  <a:srgbClr val="00B050"/>
-                </a:solidFill>
-                <a:latin typeface="Menlo" panose="020B0609030804020204" pitchFamily="49" charset="0"/>
-                <a:ea typeface="Menlo" panose="020B0609030804020204" pitchFamily="49" charset="0"/>
-                <a:cs typeface="Menlo" panose="020B0609030804020204" pitchFamily="49" charset="0"/>
-              </a:rPr>
-              <a:t># Note about other different ways to shuffle:</a:t>
-            </a:r>
-          </a:p>
-          <a:p>
-            <a:r>
-              <a:rPr lang="en-US" sz="1100" dirty="0">
-                <a:solidFill>
                   <a:srgbClr val="0070C0"/>
                 </a:solidFill>
                 <a:latin typeface="Menlo" panose="020B0609030804020204" pitchFamily="49" charset="0"/>
@@ -16249,7 +16237,7 @@
                 <a:ea typeface="Menlo" panose="020B0609030804020204" pitchFamily="49" charset="0"/>
                 <a:cs typeface="Menlo" panose="020B0609030804020204" pitchFamily="49" charset="0"/>
               </a:rPr>
-              <a:t># using </a:t>
+              <a:t># shuffle using </a:t>
             </a:r>
             <a:r>
               <a:rPr lang="en-US" sz="1100" dirty="0" err="1">
@@ -16373,7 +16361,7 @@
                 <a:ea typeface="Menlo" panose="020B0609030804020204" pitchFamily="49" charset="0"/>
                 <a:cs typeface="Menlo" panose="020B0609030804020204" pitchFamily="49" charset="0"/>
               </a:rPr>
-              <a:t># using only </a:t>
+              <a:t># shuffle using only </a:t>
             </a:r>
             <a:r>
               <a:rPr lang="en-US" sz="1100" dirty="0" err="1">
@@ -16488,6 +16476,2107 @@
 </file>
 
 <file path=ppt/slides/slide4.xml><?xml version="1.0" encoding="utf-8"?>
+<p:sld xmlns:a="http://schemas.openxmlformats.org/drawingml/2006/main" xmlns:r="http://schemas.openxmlformats.org/officeDocument/2006/relationships" xmlns:p="http://schemas.openxmlformats.org/presentationml/2006/main">
+  <p:cSld>
+    <p:spTree>
+      <p:nvGrpSpPr>
+        <p:cNvPr id="1" name=""/>
+        <p:cNvGrpSpPr/>
+        <p:nvPr/>
+      </p:nvGrpSpPr>
+      <p:grpSpPr>
+        <a:xfrm>
+          <a:off x="0" y="0"/>
+          <a:ext cx="0" cy="0"/>
+          <a:chOff x="0" y="0"/>
+          <a:chExt cx="0" cy="0"/>
+        </a:xfrm>
+      </p:grpSpPr>
+      <p:sp>
+        <p:nvSpPr>
+          <p:cNvPr id="2" name="TextBox 1">
+            <a:extLst>
+              <a:ext uri="{FF2B5EF4-FFF2-40B4-BE49-F238E27FC236}">
+                <a16:creationId xmlns:a16="http://schemas.microsoft.com/office/drawing/2014/main" id="{FFF755FE-9EC5-2243-8B9B-E4A9E7CEC3D9}"/>
+              </a:ext>
+            </a:extLst>
+          </p:cNvPr>
+          <p:cNvSpPr txBox="1"/>
+          <p:nvPr/>
+        </p:nvSpPr>
+        <p:spPr>
+          <a:xfrm>
+            <a:off x="0" y="0"/>
+            <a:ext cx="5833241" cy="830997"/>
+          </a:xfrm>
+          <a:prstGeom prst="rect">
+            <a:avLst/>
+          </a:prstGeom>
+          <a:noFill/>
+        </p:spPr>
+        <p:txBody>
+          <a:bodyPr wrap="square" rtlCol="0">
+            <a:spAutoFit/>
+          </a:bodyPr>
+          <a:lstStyle/>
+          <a:p>
+            <a:r>
+              <a:rPr lang="en-US" sz="2400" b="1" dirty="0">
+                <a:latin typeface="Calibri" panose="020F0502020204030204" pitchFamily="34" charset="0"/>
+                <a:cs typeface="Calibri" panose="020F0502020204030204" pitchFamily="34" charset="0"/>
+              </a:rPr>
+              <a:t>If A/B difference statistically significant?</a:t>
+            </a:r>
+            <a:br>
+              <a:rPr lang="en-US" sz="2400" b="1" dirty="0">
+                <a:latin typeface="Calibri" panose="020F0502020204030204" pitchFamily="34" charset="0"/>
+                <a:cs typeface="Calibri" panose="020F0502020204030204" pitchFamily="34" charset="0"/>
+              </a:rPr>
+            </a:br>
+            <a:r>
+              <a:rPr lang="en-US" sz="2400" b="1" dirty="0">
+                <a:latin typeface="Calibri" panose="020F0502020204030204" pitchFamily="34" charset="0"/>
+                <a:cs typeface="Calibri" panose="020F0502020204030204" pitchFamily="34" charset="0"/>
+              </a:rPr>
+              <a:t>Answer Using Shuffling (hacking !!)</a:t>
+            </a:r>
+          </a:p>
+        </p:txBody>
+      </p:sp>
+      <p:sp>
+        <p:nvSpPr>
+          <p:cNvPr id="3" name="TextBox 2">
+            <a:extLst>
+              <a:ext uri="{FF2B5EF4-FFF2-40B4-BE49-F238E27FC236}">
+                <a16:creationId xmlns:a16="http://schemas.microsoft.com/office/drawing/2014/main" id="{B4214305-FB5A-AA42-89E0-5393ADEB579E}"/>
+              </a:ext>
+            </a:extLst>
+          </p:cNvPr>
+          <p:cNvSpPr txBox="1"/>
+          <p:nvPr/>
+        </p:nvSpPr>
+        <p:spPr>
+          <a:xfrm>
+            <a:off x="31775" y="922609"/>
+            <a:ext cx="8417282" cy="738664"/>
+          </a:xfrm>
+          <a:prstGeom prst="rect">
+            <a:avLst/>
+          </a:prstGeom>
+          <a:noFill/>
+        </p:spPr>
+        <p:txBody>
+          <a:bodyPr wrap="square" rtlCol="0">
+            <a:spAutoFit/>
+          </a:bodyPr>
+          <a:lstStyle/>
+          <a:p>
+            <a:pPr marL="285750" indent="-285750">
+              <a:buFont typeface="Arial" panose="020B0604020202020204" pitchFamily="34" charset="0"/>
+              <a:buChar char="•"/>
+            </a:pPr>
+            <a:r>
+              <a:rPr lang="en-US" sz="1400" dirty="0">
+                <a:solidFill>
+                  <a:srgbClr val="00B050"/>
+                </a:solidFill>
+                <a:latin typeface="Menlo" panose="020B0609030804020204" pitchFamily="49" charset="0"/>
+                <a:ea typeface="Menlo" panose="020B0609030804020204" pitchFamily="49" charset="0"/>
+                <a:cs typeface="Menlo" panose="020B0609030804020204" pitchFamily="49" charset="0"/>
+              </a:rPr>
+              <a:t>Shuffling works when the Null Hypothesis assumes two groups are equivalent</a:t>
+            </a:r>
+          </a:p>
+          <a:p>
+            <a:pPr marL="285750" indent="-285750">
+              <a:buFont typeface="Arial" panose="020B0604020202020204" pitchFamily="34" charset="0"/>
+              <a:buChar char="•"/>
+            </a:pPr>
+            <a:r>
+              <a:rPr lang="en-US" sz="1400" dirty="0">
+                <a:solidFill>
+                  <a:srgbClr val="00B050"/>
+                </a:solidFill>
+                <a:latin typeface="Menlo" panose="020B0609030804020204" pitchFamily="49" charset="0"/>
+                <a:ea typeface="Menlo" panose="020B0609030804020204" pitchFamily="49" charset="0"/>
+                <a:cs typeface="Menlo" panose="020B0609030804020204" pitchFamily="49" charset="0"/>
+              </a:rPr>
+              <a:t>Only works when there is no selection biases</a:t>
+            </a:r>
+          </a:p>
+          <a:p>
+            <a:pPr marL="285750" indent="-285750">
+              <a:buFont typeface="Arial" panose="020B0604020202020204" pitchFamily="34" charset="0"/>
+              <a:buChar char="•"/>
+            </a:pPr>
+            <a:r>
+              <a:rPr lang="en-US" sz="1400" dirty="0">
+                <a:solidFill>
+                  <a:srgbClr val="00B050"/>
+                </a:solidFill>
+                <a:latin typeface="Menlo" panose="020B0609030804020204" pitchFamily="49" charset="0"/>
+                <a:ea typeface="Menlo" panose="020B0609030804020204" pitchFamily="49" charset="0"/>
+                <a:cs typeface="Menlo" panose="020B0609030804020204" pitchFamily="49" charset="0"/>
+              </a:rPr>
+              <a:t>The trials must be independent (!)</a:t>
+            </a:r>
+          </a:p>
+        </p:txBody>
+      </p:sp>
+      <p:sp>
+        <p:nvSpPr>
+          <p:cNvPr id="4" name="TextBox 3">
+            <a:extLst>
+              <a:ext uri="{FF2B5EF4-FFF2-40B4-BE49-F238E27FC236}">
+                <a16:creationId xmlns:a16="http://schemas.microsoft.com/office/drawing/2014/main" id="{70E595A3-403F-6749-95B4-96B9355C9FC4}"/>
+              </a:ext>
+            </a:extLst>
+          </p:cNvPr>
+          <p:cNvSpPr txBox="1"/>
+          <p:nvPr/>
+        </p:nvSpPr>
+        <p:spPr>
+          <a:xfrm>
+            <a:off x="1160734" y="1769600"/>
+            <a:ext cx="3566009" cy="369332"/>
+          </a:xfrm>
+          <a:prstGeom prst="rect">
+            <a:avLst/>
+          </a:prstGeom>
+          <a:noFill/>
+        </p:spPr>
+        <p:txBody>
+          <a:bodyPr wrap="square" rtlCol="0">
+            <a:spAutoFit/>
+          </a:bodyPr>
+          <a:lstStyle/>
+          <a:p>
+            <a:r>
+              <a:rPr lang="en-US" sz="1600" dirty="0">
+                <a:solidFill>
+                  <a:srgbClr val="0070C0"/>
+                </a:solidFill>
+                <a:latin typeface="Menlo" panose="020B0609030804020204" pitchFamily="49" charset="0"/>
+                <a:ea typeface="Menlo" panose="020B0609030804020204" pitchFamily="49" charset="0"/>
+                <a:cs typeface="Menlo" panose="020B0609030804020204" pitchFamily="49" charset="0"/>
+              </a:rPr>
+              <a:t>Example</a:t>
+            </a:r>
+            <a:r>
+              <a:rPr lang="en-US" sz="1800" dirty="0">
+                <a:solidFill>
+                  <a:srgbClr val="0070C0"/>
+                </a:solidFill>
+                <a:latin typeface="Menlo" panose="020B0609030804020204" pitchFamily="49" charset="0"/>
+                <a:ea typeface="Menlo" panose="020B0609030804020204" pitchFamily="49" charset="0"/>
+                <a:cs typeface="Menlo" panose="020B0609030804020204" pitchFamily="49" charset="0"/>
+              </a:rPr>
+              <a:t>: A/B Split Test</a:t>
+            </a:r>
+          </a:p>
+        </p:txBody>
+      </p:sp>
+      <p:pic>
+        <p:nvPicPr>
+          <p:cNvPr id="5" name="Picture 4">
+            <a:extLst>
+              <a:ext uri="{FF2B5EF4-FFF2-40B4-BE49-F238E27FC236}">
+                <a16:creationId xmlns:a16="http://schemas.microsoft.com/office/drawing/2014/main" id="{44670FF3-E80B-EB4A-8B34-22B9059C788F}"/>
+              </a:ext>
+            </a:extLst>
+          </p:cNvPr>
+          <p:cNvPicPr>
+            <a:picLocks noChangeAspect="1"/>
+          </p:cNvPicPr>
+          <p:nvPr/>
+        </p:nvPicPr>
+        <p:blipFill>
+          <a:blip r:embed="rId2" cstate="email">
+            <a:extLst>
+              <a:ext uri="{28A0092B-C50C-407E-A947-70E740481C1C}">
+                <a14:useLocalDpi xmlns:a14="http://schemas.microsoft.com/office/drawing/2010/main"/>
+              </a:ext>
+            </a:extLst>
+          </a:blip>
+          <a:stretch>
+            <a:fillRect/>
+          </a:stretch>
+        </p:blipFill>
+        <p:spPr>
+          <a:xfrm>
+            <a:off x="592857" y="2166917"/>
+            <a:ext cx="2079355" cy="1046718"/>
+          </a:xfrm>
+          <a:prstGeom prst="rect">
+            <a:avLst/>
+          </a:prstGeom>
+        </p:spPr>
+      </p:pic>
+      <p:pic>
+        <p:nvPicPr>
+          <p:cNvPr id="6" name="Picture 5">
+            <a:extLst>
+              <a:ext uri="{FF2B5EF4-FFF2-40B4-BE49-F238E27FC236}">
+                <a16:creationId xmlns:a16="http://schemas.microsoft.com/office/drawing/2014/main" id="{5996D345-1AD7-C44B-A5D5-921040892604}"/>
+              </a:ext>
+            </a:extLst>
+          </p:cNvPr>
+          <p:cNvPicPr>
+            <a:picLocks noChangeAspect="1"/>
+          </p:cNvPicPr>
+          <p:nvPr/>
+        </p:nvPicPr>
+        <p:blipFill>
+          <a:blip r:embed="rId3" cstate="email">
+            <a:extLst>
+              <a:ext uri="{28A0092B-C50C-407E-A947-70E740481C1C}">
+                <a14:useLocalDpi xmlns:a14="http://schemas.microsoft.com/office/drawing/2010/main"/>
+              </a:ext>
+            </a:extLst>
+          </a:blip>
+          <a:stretch>
+            <a:fillRect/>
+          </a:stretch>
+        </p:blipFill>
+        <p:spPr>
+          <a:xfrm>
+            <a:off x="2773051" y="2166917"/>
+            <a:ext cx="2079355" cy="1046718"/>
+          </a:xfrm>
+          <a:prstGeom prst="rect">
+            <a:avLst/>
+          </a:prstGeom>
+        </p:spPr>
+      </p:pic>
+      <p:sp>
+        <p:nvSpPr>
+          <p:cNvPr id="7" name="TextBox 6">
+            <a:extLst>
+              <a:ext uri="{FF2B5EF4-FFF2-40B4-BE49-F238E27FC236}">
+                <a16:creationId xmlns:a16="http://schemas.microsoft.com/office/drawing/2014/main" id="{BA7671ED-AC2B-434A-B53F-6906D1E2DAB3}"/>
+              </a:ext>
+            </a:extLst>
+          </p:cNvPr>
+          <p:cNvSpPr txBox="1"/>
+          <p:nvPr/>
+        </p:nvSpPr>
+        <p:spPr>
+          <a:xfrm>
+            <a:off x="153198" y="2492287"/>
+            <a:ext cx="411405" cy="369332"/>
+          </a:xfrm>
+          <a:prstGeom prst="rect">
+            <a:avLst/>
+          </a:prstGeom>
+          <a:noFill/>
+        </p:spPr>
+        <p:txBody>
+          <a:bodyPr wrap="square" rtlCol="0">
+            <a:spAutoFit/>
+          </a:bodyPr>
+          <a:lstStyle/>
+          <a:p>
+            <a:r>
+              <a:rPr lang="en-US" sz="1800" b="1" dirty="0">
+                <a:solidFill>
+                  <a:srgbClr val="00B050"/>
+                </a:solidFill>
+                <a:latin typeface="Menlo" panose="020B0609030804020204" pitchFamily="49" charset="0"/>
+                <a:ea typeface="Menlo" panose="020B0609030804020204" pitchFamily="49" charset="0"/>
+                <a:cs typeface="Menlo" panose="020B0609030804020204" pitchFamily="49" charset="0"/>
+              </a:rPr>
+              <a:t>A</a:t>
+            </a:r>
+          </a:p>
+        </p:txBody>
+      </p:sp>
+      <p:sp>
+        <p:nvSpPr>
+          <p:cNvPr id="8" name="TextBox 7">
+            <a:extLst>
+              <a:ext uri="{FF2B5EF4-FFF2-40B4-BE49-F238E27FC236}">
+                <a16:creationId xmlns:a16="http://schemas.microsoft.com/office/drawing/2014/main" id="{FEEB07CE-582A-044D-9FC6-EF4B1DC52B88}"/>
+              </a:ext>
+            </a:extLst>
+          </p:cNvPr>
+          <p:cNvSpPr txBox="1"/>
+          <p:nvPr/>
+        </p:nvSpPr>
+        <p:spPr>
+          <a:xfrm>
+            <a:off x="4962134" y="2492287"/>
+            <a:ext cx="411405" cy="369332"/>
+          </a:xfrm>
+          <a:prstGeom prst="rect">
+            <a:avLst/>
+          </a:prstGeom>
+          <a:noFill/>
+        </p:spPr>
+        <p:txBody>
+          <a:bodyPr wrap="square" rtlCol="0">
+            <a:spAutoFit/>
+          </a:bodyPr>
+          <a:lstStyle/>
+          <a:p>
+            <a:r>
+              <a:rPr lang="en-US" sz="1800" b="1" dirty="0">
+                <a:solidFill>
+                  <a:srgbClr val="00B050"/>
+                </a:solidFill>
+                <a:latin typeface="Menlo" panose="020B0609030804020204" pitchFamily="49" charset="0"/>
+                <a:ea typeface="Menlo" panose="020B0609030804020204" pitchFamily="49" charset="0"/>
+                <a:cs typeface="Menlo" panose="020B0609030804020204" pitchFamily="49" charset="0"/>
+              </a:rPr>
+              <a:t>B</a:t>
+            </a:r>
+          </a:p>
+        </p:txBody>
+      </p:sp>
+      <p:sp>
+        <p:nvSpPr>
+          <p:cNvPr id="10" name="Rectangle 9">
+            <a:extLst>
+              <a:ext uri="{FF2B5EF4-FFF2-40B4-BE49-F238E27FC236}">
+                <a16:creationId xmlns:a16="http://schemas.microsoft.com/office/drawing/2014/main" id="{9CD7ACBE-9D26-1F4C-A0EA-9DEA5B58888A}"/>
+              </a:ext>
+            </a:extLst>
+          </p:cNvPr>
+          <p:cNvSpPr/>
+          <p:nvPr/>
+        </p:nvSpPr>
+        <p:spPr>
+          <a:xfrm>
+            <a:off x="7074665" y="1675006"/>
+            <a:ext cx="5158912" cy="5170646"/>
+          </a:xfrm>
+          <a:prstGeom prst="rect">
+            <a:avLst/>
+          </a:prstGeom>
+        </p:spPr>
+        <p:txBody>
+          <a:bodyPr wrap="square">
+            <a:spAutoFit/>
+          </a:bodyPr>
+          <a:lstStyle/>
+          <a:p>
+            <a:r>
+              <a:rPr lang="en-US" sz="1100" dirty="0">
+                <a:solidFill>
+                  <a:srgbClr val="0070C0"/>
+                </a:solidFill>
+                <a:latin typeface="Menlo" panose="020B0609030804020204" pitchFamily="49" charset="0"/>
+                <a:ea typeface="Menlo" panose="020B0609030804020204" pitchFamily="49" charset="0"/>
+                <a:cs typeface="Menlo" panose="020B0609030804020204" pitchFamily="49" charset="0"/>
+              </a:rPr>
+              <a:t>N=10000</a:t>
+            </a:r>
+          </a:p>
+          <a:p>
+            <a:r>
+              <a:rPr lang="en-US" sz="1100" dirty="0">
+                <a:solidFill>
+                  <a:srgbClr val="0070C0"/>
+                </a:solidFill>
+                <a:latin typeface="Menlo" panose="020B0609030804020204" pitchFamily="49" charset="0"/>
+                <a:ea typeface="Menlo" panose="020B0609030804020204" pitchFamily="49" charset="0"/>
+                <a:cs typeface="Menlo" panose="020B0609030804020204" pitchFamily="49" charset="0"/>
+              </a:rPr>
+              <a:t>A = </a:t>
+            </a:r>
+            <a:r>
+              <a:rPr lang="en-US" sz="1100" dirty="0" err="1">
+                <a:solidFill>
+                  <a:srgbClr val="0070C0"/>
+                </a:solidFill>
+                <a:latin typeface="Menlo" panose="020B0609030804020204" pitchFamily="49" charset="0"/>
+                <a:ea typeface="Menlo" panose="020B0609030804020204" pitchFamily="49" charset="0"/>
+                <a:cs typeface="Menlo" panose="020B0609030804020204" pitchFamily="49" charset="0"/>
+              </a:rPr>
+              <a:t>np.random.exponential</a:t>
+            </a:r>
+            <a:r>
+              <a:rPr lang="en-US" sz="1100" dirty="0">
+                <a:solidFill>
+                  <a:srgbClr val="0070C0"/>
+                </a:solidFill>
+                <a:latin typeface="Menlo" panose="020B0609030804020204" pitchFamily="49" charset="0"/>
+                <a:ea typeface="Menlo" panose="020B0609030804020204" pitchFamily="49" charset="0"/>
+                <a:cs typeface="Menlo" panose="020B0609030804020204" pitchFamily="49" charset="0"/>
+              </a:rPr>
+              <a:t>(scale=2.0, size=N)</a:t>
+            </a:r>
+          </a:p>
+          <a:p>
+            <a:r>
+              <a:rPr lang="en-US" sz="1100" dirty="0">
+                <a:solidFill>
+                  <a:srgbClr val="0070C0"/>
+                </a:solidFill>
+                <a:latin typeface="Menlo" panose="020B0609030804020204" pitchFamily="49" charset="0"/>
+                <a:ea typeface="Menlo" panose="020B0609030804020204" pitchFamily="49" charset="0"/>
+                <a:cs typeface="Menlo" panose="020B0609030804020204" pitchFamily="49" charset="0"/>
+              </a:rPr>
+              <a:t>B = </a:t>
+            </a:r>
+            <a:r>
+              <a:rPr lang="en-US" sz="1100" dirty="0" err="1">
+                <a:solidFill>
+                  <a:srgbClr val="0070C0"/>
+                </a:solidFill>
+                <a:latin typeface="Menlo" panose="020B0609030804020204" pitchFamily="49" charset="0"/>
+                <a:ea typeface="Menlo" panose="020B0609030804020204" pitchFamily="49" charset="0"/>
+                <a:cs typeface="Menlo" panose="020B0609030804020204" pitchFamily="49" charset="0"/>
+              </a:rPr>
+              <a:t>np.random.exponential</a:t>
+            </a:r>
+            <a:r>
+              <a:rPr lang="en-US" sz="1100" dirty="0">
+                <a:solidFill>
+                  <a:srgbClr val="0070C0"/>
+                </a:solidFill>
+                <a:latin typeface="Menlo" panose="020B0609030804020204" pitchFamily="49" charset="0"/>
+                <a:ea typeface="Menlo" panose="020B0609030804020204" pitchFamily="49" charset="0"/>
+                <a:cs typeface="Menlo" panose="020B0609030804020204" pitchFamily="49" charset="0"/>
+              </a:rPr>
+              <a:t>(scale=2.4, size=N)</a:t>
+            </a:r>
+          </a:p>
+          <a:p>
+            <a:r>
+              <a:rPr lang="en-US" sz="1100" dirty="0">
+                <a:solidFill>
+                  <a:srgbClr val="0070C0"/>
+                </a:solidFill>
+                <a:latin typeface="Menlo" panose="020B0609030804020204" pitchFamily="49" charset="0"/>
+                <a:ea typeface="Menlo" panose="020B0609030804020204" pitchFamily="49" charset="0"/>
+                <a:cs typeface="Menlo" panose="020B0609030804020204" pitchFamily="49" charset="0"/>
+              </a:rPr>
+              <a:t>C = </a:t>
+            </a:r>
+            <a:r>
+              <a:rPr lang="en-US" sz="1100" dirty="0" err="1">
+                <a:solidFill>
+                  <a:srgbClr val="0070C0"/>
+                </a:solidFill>
+                <a:latin typeface="Menlo" panose="020B0609030804020204" pitchFamily="49" charset="0"/>
+                <a:ea typeface="Menlo" panose="020B0609030804020204" pitchFamily="49" charset="0"/>
+                <a:cs typeface="Menlo" panose="020B0609030804020204" pitchFamily="49" charset="0"/>
+              </a:rPr>
+              <a:t>np.concatenate</a:t>
+            </a:r>
+            <a:r>
+              <a:rPr lang="en-US" sz="1100" dirty="0">
+                <a:solidFill>
+                  <a:srgbClr val="0070C0"/>
+                </a:solidFill>
+                <a:latin typeface="Menlo" panose="020B0609030804020204" pitchFamily="49" charset="0"/>
+                <a:ea typeface="Menlo" panose="020B0609030804020204" pitchFamily="49" charset="0"/>
+                <a:cs typeface="Menlo" panose="020B0609030804020204" pitchFamily="49" charset="0"/>
+              </a:rPr>
+              <a:t>((A,B))</a:t>
+            </a:r>
+            <a:r>
+              <a:rPr lang="en-US" sz="1100" dirty="0">
+                <a:solidFill>
+                  <a:srgbClr val="00B050"/>
+                </a:solidFill>
+                <a:latin typeface="Menlo" panose="020B0609030804020204" pitchFamily="49" charset="0"/>
+                <a:ea typeface="Menlo" panose="020B0609030804020204" pitchFamily="49" charset="0"/>
+                <a:cs typeface="Menlo" panose="020B0609030804020204" pitchFamily="49" charset="0"/>
+              </a:rPr>
+              <a:t> # Combined</a:t>
+            </a:r>
+          </a:p>
+          <a:p>
+            <a:r>
+              <a:rPr lang="en-US" sz="1100" dirty="0" err="1">
+                <a:solidFill>
+                  <a:srgbClr val="0070C0"/>
+                </a:solidFill>
+                <a:latin typeface="Menlo" panose="020B0609030804020204" pitchFamily="49" charset="0"/>
+                <a:ea typeface="Menlo" panose="020B0609030804020204" pitchFamily="49" charset="0"/>
+                <a:cs typeface="Menlo" panose="020B0609030804020204" pitchFamily="49" charset="0"/>
+              </a:rPr>
+              <a:t>diff_AB</a:t>
+            </a:r>
+            <a:r>
+              <a:rPr lang="en-US" sz="1100" dirty="0">
+                <a:solidFill>
+                  <a:srgbClr val="0070C0"/>
+                </a:solidFill>
+                <a:latin typeface="Menlo" panose="020B0609030804020204" pitchFamily="49" charset="0"/>
+                <a:ea typeface="Menlo" panose="020B0609030804020204" pitchFamily="49" charset="0"/>
+                <a:cs typeface="Menlo" panose="020B0609030804020204" pitchFamily="49" charset="0"/>
+              </a:rPr>
+              <a:t> = </a:t>
+            </a:r>
+            <a:r>
+              <a:rPr lang="en-US" sz="1100" dirty="0" err="1">
+                <a:solidFill>
+                  <a:srgbClr val="0070C0"/>
+                </a:solidFill>
+                <a:latin typeface="Menlo" panose="020B0609030804020204" pitchFamily="49" charset="0"/>
+                <a:ea typeface="Menlo" panose="020B0609030804020204" pitchFamily="49" charset="0"/>
+                <a:cs typeface="Menlo" panose="020B0609030804020204" pitchFamily="49" charset="0"/>
+              </a:rPr>
+              <a:t>np.mean</a:t>
+            </a:r>
+            <a:r>
+              <a:rPr lang="en-US" sz="1100" dirty="0">
+                <a:solidFill>
+                  <a:srgbClr val="0070C0"/>
+                </a:solidFill>
+                <a:latin typeface="Menlo" panose="020B0609030804020204" pitchFamily="49" charset="0"/>
+                <a:ea typeface="Menlo" panose="020B0609030804020204" pitchFamily="49" charset="0"/>
+                <a:cs typeface="Menlo" panose="020B0609030804020204" pitchFamily="49" charset="0"/>
+              </a:rPr>
+              <a:t>(A) - </a:t>
+            </a:r>
+            <a:r>
+              <a:rPr lang="en-US" sz="1100" dirty="0" err="1">
+                <a:solidFill>
+                  <a:srgbClr val="0070C0"/>
+                </a:solidFill>
+                <a:latin typeface="Menlo" panose="020B0609030804020204" pitchFamily="49" charset="0"/>
+                <a:ea typeface="Menlo" panose="020B0609030804020204" pitchFamily="49" charset="0"/>
+                <a:cs typeface="Menlo" panose="020B0609030804020204" pitchFamily="49" charset="0"/>
+              </a:rPr>
+              <a:t>np.mean</a:t>
+            </a:r>
+            <a:r>
+              <a:rPr lang="en-US" sz="1100" dirty="0">
+                <a:solidFill>
+                  <a:srgbClr val="0070C0"/>
+                </a:solidFill>
+                <a:latin typeface="Menlo" panose="020B0609030804020204" pitchFamily="49" charset="0"/>
+                <a:ea typeface="Menlo" panose="020B0609030804020204" pitchFamily="49" charset="0"/>
+                <a:cs typeface="Menlo" panose="020B0609030804020204" pitchFamily="49" charset="0"/>
+              </a:rPr>
+              <a:t>(B)</a:t>
+            </a:r>
+          </a:p>
+          <a:p>
+            <a:endParaRPr lang="en-US" sz="1100" dirty="0">
+              <a:solidFill>
+                <a:srgbClr val="0070C0"/>
+              </a:solidFill>
+              <a:latin typeface="Menlo" panose="020B0609030804020204" pitchFamily="49" charset="0"/>
+              <a:ea typeface="Menlo" panose="020B0609030804020204" pitchFamily="49" charset="0"/>
+              <a:cs typeface="Menlo" panose="020B0609030804020204" pitchFamily="49" charset="0"/>
+            </a:endParaRPr>
+          </a:p>
+          <a:p>
+            <a:r>
+              <a:rPr lang="en-US" sz="1100" dirty="0" err="1">
+                <a:solidFill>
+                  <a:srgbClr val="0070C0"/>
+                </a:solidFill>
+                <a:latin typeface="Menlo" panose="020B0609030804020204" pitchFamily="49" charset="0"/>
+                <a:ea typeface="Menlo" panose="020B0609030804020204" pitchFamily="49" charset="0"/>
+                <a:cs typeface="Menlo" panose="020B0609030804020204" pitchFamily="49" charset="0"/>
+              </a:rPr>
+              <a:t>N_shuf</a:t>
+            </a:r>
+            <a:r>
+              <a:rPr lang="en-US" sz="1100" dirty="0">
+                <a:solidFill>
+                  <a:srgbClr val="0070C0"/>
+                </a:solidFill>
+                <a:latin typeface="Menlo" panose="020B0609030804020204" pitchFamily="49" charset="0"/>
+                <a:ea typeface="Menlo" panose="020B0609030804020204" pitchFamily="49" charset="0"/>
+                <a:cs typeface="Menlo" panose="020B0609030804020204" pitchFamily="49" charset="0"/>
+              </a:rPr>
+              <a:t> = 5000</a:t>
+            </a:r>
+          </a:p>
+          <a:p>
+            <a:r>
+              <a:rPr lang="en-US" sz="1100" dirty="0">
+                <a:solidFill>
+                  <a:srgbClr val="0070C0"/>
+                </a:solidFill>
+                <a:latin typeface="Menlo" panose="020B0609030804020204" pitchFamily="49" charset="0"/>
+                <a:ea typeface="Menlo" panose="020B0609030804020204" pitchFamily="49" charset="0"/>
+                <a:cs typeface="Menlo" panose="020B0609030804020204" pitchFamily="49" charset="0"/>
+              </a:rPr>
+              <a:t>counter = 1</a:t>
+            </a:r>
+          </a:p>
+          <a:p>
+            <a:r>
+              <a:rPr lang="en-US" sz="1100" dirty="0">
+                <a:solidFill>
+                  <a:srgbClr val="0070C0"/>
+                </a:solidFill>
+                <a:latin typeface="Menlo" panose="020B0609030804020204" pitchFamily="49" charset="0"/>
+                <a:ea typeface="Menlo" panose="020B0609030804020204" pitchFamily="49" charset="0"/>
+                <a:cs typeface="Menlo" panose="020B0609030804020204" pitchFamily="49" charset="0"/>
+              </a:rPr>
+              <a:t>diffs = </a:t>
+            </a:r>
+            <a:r>
+              <a:rPr lang="en-US" sz="1100" dirty="0" err="1">
+                <a:solidFill>
+                  <a:srgbClr val="0070C0"/>
+                </a:solidFill>
+                <a:latin typeface="Menlo" panose="020B0609030804020204" pitchFamily="49" charset="0"/>
+                <a:ea typeface="Menlo" panose="020B0609030804020204" pitchFamily="49" charset="0"/>
+                <a:cs typeface="Menlo" panose="020B0609030804020204" pitchFamily="49" charset="0"/>
+              </a:rPr>
+              <a:t>np.zeros</a:t>
+            </a:r>
+            <a:r>
+              <a:rPr lang="en-US" sz="1100" dirty="0">
+                <a:solidFill>
+                  <a:srgbClr val="0070C0"/>
+                </a:solidFill>
+                <a:latin typeface="Menlo" panose="020B0609030804020204" pitchFamily="49" charset="0"/>
+                <a:ea typeface="Menlo" panose="020B0609030804020204" pitchFamily="49" charset="0"/>
+                <a:cs typeface="Menlo" panose="020B0609030804020204" pitchFamily="49" charset="0"/>
+              </a:rPr>
+              <a:t>(</a:t>
+            </a:r>
+            <a:r>
+              <a:rPr lang="en-US" sz="1100" dirty="0" err="1">
+                <a:solidFill>
+                  <a:srgbClr val="0070C0"/>
+                </a:solidFill>
+                <a:latin typeface="Menlo" panose="020B0609030804020204" pitchFamily="49" charset="0"/>
+                <a:ea typeface="Menlo" panose="020B0609030804020204" pitchFamily="49" charset="0"/>
+                <a:cs typeface="Menlo" panose="020B0609030804020204" pitchFamily="49" charset="0"/>
+              </a:rPr>
+              <a:t>N_shuf</a:t>
+            </a:r>
+            <a:r>
+              <a:rPr lang="en-US" sz="1100" dirty="0">
+                <a:solidFill>
+                  <a:srgbClr val="0070C0"/>
+                </a:solidFill>
+                <a:latin typeface="Menlo" panose="020B0609030804020204" pitchFamily="49" charset="0"/>
+                <a:ea typeface="Menlo" panose="020B0609030804020204" pitchFamily="49" charset="0"/>
+                <a:cs typeface="Menlo" panose="020B0609030804020204" pitchFamily="49" charset="0"/>
+              </a:rPr>
+              <a:t>, </a:t>
+            </a:r>
+            <a:r>
+              <a:rPr lang="en-US" sz="1100" dirty="0" err="1">
+                <a:solidFill>
+                  <a:srgbClr val="0070C0"/>
+                </a:solidFill>
+                <a:latin typeface="Menlo" panose="020B0609030804020204" pitchFamily="49" charset="0"/>
+                <a:ea typeface="Menlo" panose="020B0609030804020204" pitchFamily="49" charset="0"/>
+                <a:cs typeface="Menlo" panose="020B0609030804020204" pitchFamily="49" charset="0"/>
+              </a:rPr>
+              <a:t>dtype</a:t>
+            </a:r>
+            <a:r>
+              <a:rPr lang="en-US" sz="1100" dirty="0">
+                <a:solidFill>
+                  <a:srgbClr val="0070C0"/>
+                </a:solidFill>
+                <a:latin typeface="Menlo" panose="020B0609030804020204" pitchFamily="49" charset="0"/>
+                <a:ea typeface="Menlo" panose="020B0609030804020204" pitchFamily="49" charset="0"/>
+                <a:cs typeface="Menlo" panose="020B0609030804020204" pitchFamily="49" charset="0"/>
+              </a:rPr>
+              <a:t>=float)</a:t>
+            </a:r>
+          </a:p>
+          <a:p>
+            <a:r>
+              <a:rPr lang="en-US" sz="1100" dirty="0" err="1">
+                <a:solidFill>
+                  <a:srgbClr val="0070C0"/>
+                </a:solidFill>
+                <a:latin typeface="Menlo" panose="020B0609030804020204" pitchFamily="49" charset="0"/>
+                <a:ea typeface="Menlo" panose="020B0609030804020204" pitchFamily="49" charset="0"/>
+                <a:cs typeface="Menlo" panose="020B0609030804020204" pitchFamily="49" charset="0"/>
+              </a:rPr>
+              <a:t>rng</a:t>
+            </a:r>
+            <a:r>
+              <a:rPr lang="en-US" sz="1100" dirty="0">
+                <a:solidFill>
+                  <a:srgbClr val="0070C0"/>
+                </a:solidFill>
+                <a:latin typeface="Menlo" panose="020B0609030804020204" pitchFamily="49" charset="0"/>
+                <a:ea typeface="Menlo" panose="020B0609030804020204" pitchFamily="49" charset="0"/>
+                <a:cs typeface="Menlo" panose="020B0609030804020204" pitchFamily="49" charset="0"/>
+              </a:rPr>
+              <a:t> = </a:t>
+            </a:r>
+            <a:r>
+              <a:rPr lang="en-US" sz="1100" dirty="0" err="1">
+                <a:solidFill>
+                  <a:srgbClr val="0070C0"/>
+                </a:solidFill>
+                <a:latin typeface="Menlo" panose="020B0609030804020204" pitchFamily="49" charset="0"/>
+                <a:ea typeface="Menlo" panose="020B0609030804020204" pitchFamily="49" charset="0"/>
+                <a:cs typeface="Menlo" panose="020B0609030804020204" pitchFamily="49" charset="0"/>
+              </a:rPr>
+              <a:t>np.random.default_rng</a:t>
+            </a:r>
+            <a:r>
+              <a:rPr lang="en-US" sz="1100" dirty="0">
+                <a:solidFill>
+                  <a:srgbClr val="0070C0"/>
+                </a:solidFill>
+                <a:latin typeface="Menlo" panose="020B0609030804020204" pitchFamily="49" charset="0"/>
+                <a:ea typeface="Menlo" panose="020B0609030804020204" pitchFamily="49" charset="0"/>
+                <a:cs typeface="Menlo" panose="020B0609030804020204" pitchFamily="49" charset="0"/>
+              </a:rPr>
+              <a:t>()</a:t>
+            </a:r>
+          </a:p>
+          <a:p>
+            <a:r>
+              <a:rPr lang="en-US" sz="1100" dirty="0">
+                <a:solidFill>
+                  <a:srgbClr val="0070C0"/>
+                </a:solidFill>
+                <a:latin typeface="Menlo" panose="020B0609030804020204" pitchFamily="49" charset="0"/>
+                <a:ea typeface="Menlo" panose="020B0609030804020204" pitchFamily="49" charset="0"/>
+                <a:cs typeface="Menlo" panose="020B0609030804020204" pitchFamily="49" charset="0"/>
+              </a:rPr>
+              <a:t>for ii in range(</a:t>
+            </a:r>
+            <a:r>
+              <a:rPr lang="en-US" sz="1100" dirty="0" err="1">
+                <a:solidFill>
+                  <a:srgbClr val="0070C0"/>
+                </a:solidFill>
+                <a:latin typeface="Menlo" panose="020B0609030804020204" pitchFamily="49" charset="0"/>
+                <a:ea typeface="Menlo" panose="020B0609030804020204" pitchFamily="49" charset="0"/>
+                <a:cs typeface="Menlo" panose="020B0609030804020204" pitchFamily="49" charset="0"/>
+              </a:rPr>
+              <a:t>N_shuf</a:t>
+            </a:r>
+            <a:r>
+              <a:rPr lang="en-US" sz="1100" dirty="0">
+                <a:solidFill>
+                  <a:srgbClr val="0070C0"/>
+                </a:solidFill>
+                <a:latin typeface="Menlo" panose="020B0609030804020204" pitchFamily="49" charset="0"/>
+                <a:ea typeface="Menlo" panose="020B0609030804020204" pitchFamily="49" charset="0"/>
+                <a:cs typeface="Menlo" panose="020B0609030804020204" pitchFamily="49" charset="0"/>
+              </a:rPr>
+              <a:t>):</a:t>
+            </a:r>
+          </a:p>
+          <a:p>
+            <a:r>
+              <a:rPr lang="en-US" sz="1100" dirty="0">
+                <a:solidFill>
+                  <a:srgbClr val="0070C0"/>
+                </a:solidFill>
+                <a:latin typeface="Menlo" panose="020B0609030804020204" pitchFamily="49" charset="0"/>
+                <a:ea typeface="Menlo" panose="020B0609030804020204" pitchFamily="49" charset="0"/>
+                <a:cs typeface="Menlo" panose="020B0609030804020204" pitchFamily="49" charset="0"/>
+              </a:rPr>
+              <a:t>    </a:t>
+            </a:r>
+            <a:r>
+              <a:rPr lang="en-US" sz="1100" dirty="0" err="1">
+                <a:solidFill>
+                  <a:srgbClr val="0070C0"/>
+                </a:solidFill>
+                <a:latin typeface="Menlo" panose="020B0609030804020204" pitchFamily="49" charset="0"/>
+                <a:ea typeface="Menlo" panose="020B0609030804020204" pitchFamily="49" charset="0"/>
+                <a:cs typeface="Menlo" panose="020B0609030804020204" pitchFamily="49" charset="0"/>
+              </a:rPr>
+              <a:t>rng.shuffle</a:t>
+            </a:r>
+            <a:r>
+              <a:rPr lang="en-US" sz="1100" dirty="0">
+                <a:solidFill>
+                  <a:srgbClr val="0070C0"/>
+                </a:solidFill>
+                <a:latin typeface="Menlo" panose="020B0609030804020204" pitchFamily="49" charset="0"/>
+                <a:ea typeface="Menlo" panose="020B0609030804020204" pitchFamily="49" charset="0"/>
+                <a:cs typeface="Menlo" panose="020B0609030804020204" pitchFamily="49" charset="0"/>
+              </a:rPr>
+              <a:t>(C, axis = 0)</a:t>
+            </a:r>
+          </a:p>
+          <a:p>
+            <a:r>
+              <a:rPr lang="en-US" sz="1100" dirty="0">
+                <a:solidFill>
+                  <a:srgbClr val="0070C0"/>
+                </a:solidFill>
+                <a:latin typeface="Menlo" panose="020B0609030804020204" pitchFamily="49" charset="0"/>
+                <a:ea typeface="Menlo" panose="020B0609030804020204" pitchFamily="49" charset="0"/>
+                <a:cs typeface="Menlo" panose="020B0609030804020204" pitchFamily="49" charset="0"/>
+              </a:rPr>
+              <a:t>    split1 = C[:N]</a:t>
+            </a:r>
+          </a:p>
+          <a:p>
+            <a:r>
+              <a:rPr lang="en-US" sz="1100" dirty="0">
+                <a:solidFill>
+                  <a:srgbClr val="0070C0"/>
+                </a:solidFill>
+                <a:latin typeface="Menlo" panose="020B0609030804020204" pitchFamily="49" charset="0"/>
+                <a:ea typeface="Menlo" panose="020B0609030804020204" pitchFamily="49" charset="0"/>
+                <a:cs typeface="Menlo" panose="020B0609030804020204" pitchFamily="49" charset="0"/>
+              </a:rPr>
+              <a:t>    split2 = C[N:]</a:t>
+            </a:r>
+          </a:p>
+          <a:p>
+            <a:r>
+              <a:rPr lang="en-US" sz="1100" dirty="0">
+                <a:solidFill>
+                  <a:srgbClr val="0070C0"/>
+                </a:solidFill>
+                <a:latin typeface="Menlo" panose="020B0609030804020204" pitchFamily="49" charset="0"/>
+                <a:ea typeface="Menlo" panose="020B0609030804020204" pitchFamily="49" charset="0"/>
+                <a:cs typeface="Menlo" panose="020B0609030804020204" pitchFamily="49" charset="0"/>
+              </a:rPr>
+              <a:t>    diffs[ii] = </a:t>
+            </a:r>
+            <a:r>
+              <a:rPr lang="en-US" sz="1100" dirty="0" err="1">
+                <a:solidFill>
+                  <a:srgbClr val="0070C0"/>
+                </a:solidFill>
+                <a:latin typeface="Menlo" panose="020B0609030804020204" pitchFamily="49" charset="0"/>
+                <a:ea typeface="Menlo" panose="020B0609030804020204" pitchFamily="49" charset="0"/>
+                <a:cs typeface="Menlo" panose="020B0609030804020204" pitchFamily="49" charset="0"/>
+              </a:rPr>
+              <a:t>np.mean</a:t>
+            </a:r>
+            <a:r>
+              <a:rPr lang="en-US" sz="1100" dirty="0">
+                <a:solidFill>
+                  <a:srgbClr val="0070C0"/>
+                </a:solidFill>
+                <a:latin typeface="Menlo" panose="020B0609030804020204" pitchFamily="49" charset="0"/>
+                <a:ea typeface="Menlo" panose="020B0609030804020204" pitchFamily="49" charset="0"/>
+                <a:cs typeface="Menlo" panose="020B0609030804020204" pitchFamily="49" charset="0"/>
+              </a:rPr>
+              <a:t>(split2) - </a:t>
+            </a:r>
+            <a:r>
+              <a:rPr lang="en-US" sz="1100" dirty="0" err="1">
+                <a:solidFill>
+                  <a:srgbClr val="0070C0"/>
+                </a:solidFill>
+                <a:latin typeface="Menlo" panose="020B0609030804020204" pitchFamily="49" charset="0"/>
+                <a:ea typeface="Menlo" panose="020B0609030804020204" pitchFamily="49" charset="0"/>
+                <a:cs typeface="Menlo" panose="020B0609030804020204" pitchFamily="49" charset="0"/>
+              </a:rPr>
+              <a:t>np.mean</a:t>
+            </a:r>
+            <a:r>
+              <a:rPr lang="en-US" sz="1100" dirty="0">
+                <a:solidFill>
+                  <a:srgbClr val="0070C0"/>
+                </a:solidFill>
+                <a:latin typeface="Menlo" panose="020B0609030804020204" pitchFamily="49" charset="0"/>
+                <a:ea typeface="Menlo" panose="020B0609030804020204" pitchFamily="49" charset="0"/>
+                <a:cs typeface="Menlo" panose="020B0609030804020204" pitchFamily="49" charset="0"/>
+              </a:rPr>
+              <a:t>(split1)</a:t>
+            </a:r>
+          </a:p>
+          <a:p>
+            <a:r>
+              <a:rPr lang="en-US" sz="1100" dirty="0">
+                <a:solidFill>
+                  <a:srgbClr val="0070C0"/>
+                </a:solidFill>
+                <a:latin typeface="Menlo" panose="020B0609030804020204" pitchFamily="49" charset="0"/>
+                <a:ea typeface="Menlo" panose="020B0609030804020204" pitchFamily="49" charset="0"/>
+                <a:cs typeface="Menlo" panose="020B0609030804020204" pitchFamily="49" charset="0"/>
+              </a:rPr>
+              <a:t>    if diffs[ii] &lt;= </a:t>
+            </a:r>
+            <a:r>
+              <a:rPr lang="en-US" sz="1100" dirty="0" err="1">
+                <a:solidFill>
+                  <a:srgbClr val="0070C0"/>
+                </a:solidFill>
+                <a:latin typeface="Menlo" panose="020B0609030804020204" pitchFamily="49" charset="0"/>
+                <a:ea typeface="Menlo" panose="020B0609030804020204" pitchFamily="49" charset="0"/>
+                <a:cs typeface="Menlo" panose="020B0609030804020204" pitchFamily="49" charset="0"/>
+              </a:rPr>
+              <a:t>diff_AB</a:t>
+            </a:r>
+            <a:r>
+              <a:rPr lang="en-US" sz="1100" dirty="0">
+                <a:solidFill>
+                  <a:srgbClr val="0070C0"/>
+                </a:solidFill>
+                <a:latin typeface="Menlo" panose="020B0609030804020204" pitchFamily="49" charset="0"/>
+                <a:ea typeface="Menlo" panose="020B0609030804020204" pitchFamily="49" charset="0"/>
+                <a:cs typeface="Menlo" panose="020B0609030804020204" pitchFamily="49" charset="0"/>
+              </a:rPr>
+              <a:t>:</a:t>
+            </a:r>
+          </a:p>
+          <a:p>
+            <a:r>
+              <a:rPr lang="en-US" sz="1100" dirty="0">
+                <a:solidFill>
+                  <a:srgbClr val="0070C0"/>
+                </a:solidFill>
+                <a:latin typeface="Menlo" panose="020B0609030804020204" pitchFamily="49" charset="0"/>
+                <a:ea typeface="Menlo" panose="020B0609030804020204" pitchFamily="49" charset="0"/>
+                <a:cs typeface="Menlo" panose="020B0609030804020204" pitchFamily="49" charset="0"/>
+              </a:rPr>
+              <a:t>        counter += 1</a:t>
+            </a:r>
+          </a:p>
+          <a:p>
+            <a:endParaRPr lang="en-US" sz="1100" dirty="0">
+              <a:solidFill>
+                <a:srgbClr val="0070C0"/>
+              </a:solidFill>
+              <a:latin typeface="Menlo" panose="020B0609030804020204" pitchFamily="49" charset="0"/>
+              <a:ea typeface="Menlo" panose="020B0609030804020204" pitchFamily="49" charset="0"/>
+              <a:cs typeface="Menlo" panose="020B0609030804020204" pitchFamily="49" charset="0"/>
+            </a:endParaRPr>
+          </a:p>
+          <a:p>
+            <a:r>
+              <a:rPr lang="en-US" sz="1100" dirty="0" err="1">
+                <a:solidFill>
+                  <a:srgbClr val="0070C0"/>
+                </a:solidFill>
+                <a:latin typeface="Menlo" panose="020B0609030804020204" pitchFamily="49" charset="0"/>
+                <a:ea typeface="Menlo" panose="020B0609030804020204" pitchFamily="49" charset="0"/>
+                <a:cs typeface="Menlo" panose="020B0609030804020204" pitchFamily="49" charset="0"/>
+              </a:rPr>
+              <a:t>diffs_mean</a:t>
+            </a:r>
+            <a:r>
+              <a:rPr lang="en-US" sz="1100" dirty="0">
+                <a:solidFill>
+                  <a:srgbClr val="0070C0"/>
+                </a:solidFill>
+                <a:latin typeface="Menlo" panose="020B0609030804020204" pitchFamily="49" charset="0"/>
+                <a:ea typeface="Menlo" panose="020B0609030804020204" pitchFamily="49" charset="0"/>
+                <a:cs typeface="Menlo" panose="020B0609030804020204" pitchFamily="49" charset="0"/>
+              </a:rPr>
+              <a:t> = </a:t>
+            </a:r>
+            <a:r>
+              <a:rPr lang="en-US" sz="1100" dirty="0" err="1">
+                <a:solidFill>
+                  <a:srgbClr val="0070C0"/>
+                </a:solidFill>
+                <a:latin typeface="Menlo" panose="020B0609030804020204" pitchFamily="49" charset="0"/>
+                <a:ea typeface="Menlo" panose="020B0609030804020204" pitchFamily="49" charset="0"/>
+                <a:cs typeface="Menlo" panose="020B0609030804020204" pitchFamily="49" charset="0"/>
+              </a:rPr>
+              <a:t>np.mean</a:t>
+            </a:r>
+            <a:r>
+              <a:rPr lang="en-US" sz="1100" dirty="0">
+                <a:solidFill>
+                  <a:srgbClr val="0070C0"/>
+                </a:solidFill>
+                <a:latin typeface="Menlo" panose="020B0609030804020204" pitchFamily="49" charset="0"/>
+                <a:ea typeface="Menlo" panose="020B0609030804020204" pitchFamily="49" charset="0"/>
+                <a:cs typeface="Menlo" panose="020B0609030804020204" pitchFamily="49" charset="0"/>
+              </a:rPr>
+              <a:t>(diffs)   </a:t>
+            </a:r>
+          </a:p>
+          <a:p>
+            <a:r>
+              <a:rPr lang="en-US" sz="1100" dirty="0" err="1">
+                <a:solidFill>
+                  <a:srgbClr val="0070C0"/>
+                </a:solidFill>
+                <a:latin typeface="Menlo" panose="020B0609030804020204" pitchFamily="49" charset="0"/>
+                <a:ea typeface="Menlo" panose="020B0609030804020204" pitchFamily="49" charset="0"/>
+                <a:cs typeface="Menlo" panose="020B0609030804020204" pitchFamily="49" charset="0"/>
+              </a:rPr>
+              <a:t>diffs_std</a:t>
+            </a:r>
+            <a:r>
+              <a:rPr lang="en-US" sz="1100" dirty="0">
+                <a:solidFill>
+                  <a:srgbClr val="0070C0"/>
+                </a:solidFill>
+                <a:latin typeface="Menlo" panose="020B0609030804020204" pitchFamily="49" charset="0"/>
+                <a:ea typeface="Menlo" panose="020B0609030804020204" pitchFamily="49" charset="0"/>
+                <a:cs typeface="Menlo" panose="020B0609030804020204" pitchFamily="49" charset="0"/>
+              </a:rPr>
+              <a:t>  = </a:t>
+            </a:r>
+            <a:r>
+              <a:rPr lang="en-US" sz="1100" dirty="0" err="1">
+                <a:solidFill>
+                  <a:srgbClr val="0070C0"/>
+                </a:solidFill>
+                <a:latin typeface="Menlo" panose="020B0609030804020204" pitchFamily="49" charset="0"/>
+                <a:ea typeface="Menlo" panose="020B0609030804020204" pitchFamily="49" charset="0"/>
+                <a:cs typeface="Menlo" panose="020B0609030804020204" pitchFamily="49" charset="0"/>
+              </a:rPr>
+              <a:t>np.std</a:t>
+            </a:r>
+            <a:r>
+              <a:rPr lang="en-US" sz="1100" dirty="0">
+                <a:solidFill>
+                  <a:srgbClr val="0070C0"/>
+                </a:solidFill>
+                <a:latin typeface="Menlo" panose="020B0609030804020204" pitchFamily="49" charset="0"/>
+                <a:ea typeface="Menlo" panose="020B0609030804020204" pitchFamily="49" charset="0"/>
+                <a:cs typeface="Menlo" panose="020B0609030804020204" pitchFamily="49" charset="0"/>
+              </a:rPr>
+              <a:t>(diffs)</a:t>
+            </a:r>
+          </a:p>
+          <a:p>
+            <a:r>
+              <a:rPr lang="en-US" sz="1100" dirty="0">
+                <a:solidFill>
+                  <a:srgbClr val="0070C0"/>
+                </a:solidFill>
+                <a:latin typeface="Menlo" panose="020B0609030804020204" pitchFamily="49" charset="0"/>
+                <a:ea typeface="Menlo" panose="020B0609030804020204" pitchFamily="49" charset="0"/>
+                <a:cs typeface="Menlo" panose="020B0609030804020204" pitchFamily="49" charset="0"/>
+              </a:rPr>
+              <a:t>print(</a:t>
+            </a:r>
+            <a:r>
+              <a:rPr lang="en-US" sz="1100" dirty="0" err="1">
+                <a:solidFill>
+                  <a:srgbClr val="0070C0"/>
+                </a:solidFill>
+                <a:latin typeface="Menlo" panose="020B0609030804020204" pitchFamily="49" charset="0"/>
+                <a:ea typeface="Menlo" panose="020B0609030804020204" pitchFamily="49" charset="0"/>
+                <a:cs typeface="Menlo" panose="020B0609030804020204" pitchFamily="49" charset="0"/>
+              </a:rPr>
+              <a:t>f"diff_AB</a:t>
+            </a:r>
+            <a:r>
+              <a:rPr lang="en-US" sz="1100" dirty="0">
+                <a:solidFill>
+                  <a:srgbClr val="0070C0"/>
+                </a:solidFill>
+                <a:latin typeface="Menlo" panose="020B0609030804020204" pitchFamily="49" charset="0"/>
+                <a:ea typeface="Menlo" panose="020B0609030804020204" pitchFamily="49" charset="0"/>
+                <a:cs typeface="Menlo" panose="020B0609030804020204" pitchFamily="49" charset="0"/>
+              </a:rPr>
+              <a:t>    = {diff_AB:.5f}")   </a:t>
+            </a:r>
+            <a:r>
+              <a:rPr lang="en-US" sz="1100" dirty="0">
+                <a:solidFill>
+                  <a:srgbClr val="00B050"/>
+                </a:solidFill>
+                <a:latin typeface="Menlo" panose="020B0609030804020204" pitchFamily="49" charset="0"/>
+                <a:ea typeface="Menlo" panose="020B0609030804020204" pitchFamily="49" charset="0"/>
+                <a:cs typeface="Menlo" panose="020B0609030804020204" pitchFamily="49" charset="0"/>
+              </a:rPr>
+              <a:t>  # 0.4</a:t>
+            </a:r>
+          </a:p>
+          <a:p>
+            <a:r>
+              <a:rPr lang="en-US" sz="1100" dirty="0">
+                <a:solidFill>
+                  <a:srgbClr val="0070C0"/>
+                </a:solidFill>
+                <a:latin typeface="Menlo" panose="020B0609030804020204" pitchFamily="49" charset="0"/>
+                <a:ea typeface="Menlo" panose="020B0609030804020204" pitchFamily="49" charset="0"/>
+                <a:cs typeface="Menlo" panose="020B0609030804020204" pitchFamily="49" charset="0"/>
+              </a:rPr>
+              <a:t>print(</a:t>
+            </a:r>
+            <a:r>
+              <a:rPr lang="en-US" sz="1100" dirty="0" err="1">
+                <a:solidFill>
+                  <a:srgbClr val="0070C0"/>
+                </a:solidFill>
+                <a:latin typeface="Menlo" panose="020B0609030804020204" pitchFamily="49" charset="0"/>
+                <a:ea typeface="Menlo" panose="020B0609030804020204" pitchFamily="49" charset="0"/>
+                <a:cs typeface="Menlo" panose="020B0609030804020204" pitchFamily="49" charset="0"/>
+              </a:rPr>
+              <a:t>f"diffs</a:t>
+            </a:r>
+            <a:r>
+              <a:rPr lang="en-US" sz="1100" dirty="0">
+                <a:solidFill>
+                  <a:srgbClr val="0070C0"/>
+                </a:solidFill>
+                <a:latin typeface="Menlo" panose="020B0609030804020204" pitchFamily="49" charset="0"/>
+                <a:ea typeface="Menlo" panose="020B0609030804020204" pitchFamily="49" charset="0"/>
+                <a:cs typeface="Menlo" panose="020B0609030804020204" pitchFamily="49" charset="0"/>
+              </a:rPr>
+              <a:t> mean = {diffs_mean:.5f}")</a:t>
+            </a:r>
+            <a:r>
+              <a:rPr lang="en-US" sz="1100" dirty="0">
+                <a:solidFill>
+                  <a:srgbClr val="00B050"/>
+                </a:solidFill>
+                <a:latin typeface="Menlo" panose="020B0609030804020204" pitchFamily="49" charset="0"/>
+                <a:ea typeface="Menlo" panose="020B0609030804020204" pitchFamily="49" charset="0"/>
+                <a:cs typeface="Menlo" panose="020B0609030804020204" pitchFamily="49" charset="0"/>
+              </a:rPr>
+              <a:t>  # 0</a:t>
+            </a:r>
+          </a:p>
+          <a:p>
+            <a:r>
+              <a:rPr lang="en-US" sz="1100" dirty="0">
+                <a:solidFill>
+                  <a:srgbClr val="0070C0"/>
+                </a:solidFill>
+                <a:latin typeface="Menlo" panose="020B0609030804020204" pitchFamily="49" charset="0"/>
+                <a:ea typeface="Menlo" panose="020B0609030804020204" pitchFamily="49" charset="0"/>
+                <a:cs typeface="Menlo" panose="020B0609030804020204" pitchFamily="49" charset="0"/>
+              </a:rPr>
+              <a:t>print(</a:t>
+            </a:r>
+            <a:r>
+              <a:rPr lang="en-US" sz="1100" dirty="0" err="1">
+                <a:solidFill>
+                  <a:srgbClr val="0070C0"/>
+                </a:solidFill>
+                <a:latin typeface="Menlo" panose="020B0609030804020204" pitchFamily="49" charset="0"/>
+                <a:ea typeface="Menlo" panose="020B0609030804020204" pitchFamily="49" charset="0"/>
+                <a:cs typeface="Menlo" panose="020B0609030804020204" pitchFamily="49" charset="0"/>
+              </a:rPr>
+              <a:t>f"diffs</a:t>
+            </a:r>
+            <a:r>
+              <a:rPr lang="en-US" sz="1100" dirty="0">
+                <a:solidFill>
+                  <a:srgbClr val="0070C0"/>
+                </a:solidFill>
+                <a:latin typeface="Menlo" panose="020B0609030804020204" pitchFamily="49" charset="0"/>
+                <a:ea typeface="Menlo" panose="020B0609030804020204" pitchFamily="49" charset="0"/>
+                <a:cs typeface="Menlo" panose="020B0609030804020204" pitchFamily="49" charset="0"/>
+              </a:rPr>
+              <a:t> std  = {diffs_std:.5f}") </a:t>
+            </a:r>
+            <a:r>
+              <a:rPr lang="en-US" sz="1100" dirty="0">
+                <a:solidFill>
+                  <a:srgbClr val="00B050"/>
+                </a:solidFill>
+                <a:latin typeface="Menlo" panose="020B0609030804020204" pitchFamily="49" charset="0"/>
+                <a:ea typeface="Menlo" panose="020B0609030804020204" pitchFamily="49" charset="0"/>
+                <a:cs typeface="Menlo" panose="020B0609030804020204" pitchFamily="49" charset="0"/>
+              </a:rPr>
+              <a:t>  # 0.03</a:t>
+            </a:r>
+          </a:p>
+          <a:p>
+            <a:r>
+              <a:rPr lang="en-US" sz="1100" dirty="0">
+                <a:solidFill>
+                  <a:srgbClr val="0070C0"/>
+                </a:solidFill>
+                <a:latin typeface="Menlo" panose="020B0609030804020204" pitchFamily="49" charset="0"/>
+                <a:ea typeface="Menlo" panose="020B0609030804020204" pitchFamily="49" charset="0"/>
+                <a:cs typeface="Menlo" panose="020B0609030804020204" pitchFamily="49" charset="0"/>
+              </a:rPr>
+              <a:t>print(</a:t>
+            </a:r>
+            <a:r>
+              <a:rPr lang="en-US" sz="1100" dirty="0" err="1">
+                <a:solidFill>
+                  <a:srgbClr val="0070C0"/>
+                </a:solidFill>
+                <a:latin typeface="Menlo" panose="020B0609030804020204" pitchFamily="49" charset="0"/>
+                <a:ea typeface="Menlo" panose="020B0609030804020204" pitchFamily="49" charset="0"/>
+                <a:cs typeface="Menlo" panose="020B0609030804020204" pitchFamily="49" charset="0"/>
+              </a:rPr>
+              <a:t>f"P</a:t>
+            </a:r>
+            <a:r>
+              <a:rPr lang="en-US" sz="1100" dirty="0">
+                <a:solidFill>
+                  <a:srgbClr val="0070C0"/>
+                </a:solidFill>
+                <a:latin typeface="Menlo" panose="020B0609030804020204" pitchFamily="49" charset="0"/>
+                <a:ea typeface="Menlo" panose="020B0609030804020204" pitchFamily="49" charset="0"/>
+                <a:cs typeface="Menlo" panose="020B0609030804020204" pitchFamily="49" charset="0"/>
+              </a:rPr>
+              <a:t>-value    = {counter/</a:t>
+            </a:r>
+            <a:r>
+              <a:rPr lang="en-US" sz="1100" dirty="0" err="1">
+                <a:solidFill>
+                  <a:srgbClr val="0070C0"/>
+                </a:solidFill>
+                <a:latin typeface="Menlo" panose="020B0609030804020204" pitchFamily="49" charset="0"/>
+                <a:ea typeface="Menlo" panose="020B0609030804020204" pitchFamily="49" charset="0"/>
+                <a:cs typeface="Menlo" panose="020B0609030804020204" pitchFamily="49" charset="0"/>
+              </a:rPr>
+              <a:t>N_shuf</a:t>
+            </a:r>
+            <a:r>
+              <a:rPr lang="en-US" sz="1100" dirty="0">
+                <a:solidFill>
+                  <a:srgbClr val="0070C0"/>
+                </a:solidFill>
+                <a:latin typeface="Menlo" panose="020B0609030804020204" pitchFamily="49" charset="0"/>
+                <a:ea typeface="Menlo" panose="020B0609030804020204" pitchFamily="49" charset="0"/>
+                <a:cs typeface="Menlo" panose="020B0609030804020204" pitchFamily="49" charset="0"/>
+              </a:rPr>
+              <a:t>}") </a:t>
+            </a:r>
+            <a:r>
+              <a:rPr lang="en-US" sz="1100" dirty="0">
+                <a:solidFill>
+                  <a:srgbClr val="00B050"/>
+                </a:solidFill>
+                <a:latin typeface="Menlo" panose="020B0609030804020204" pitchFamily="49" charset="0"/>
+                <a:ea typeface="Menlo" panose="020B0609030804020204" pitchFamily="49" charset="0"/>
+                <a:cs typeface="Menlo" panose="020B0609030804020204" pitchFamily="49" charset="0"/>
+              </a:rPr>
+              <a:t> # 0.0002</a:t>
+            </a:r>
+          </a:p>
+          <a:p>
+            <a:endParaRPr lang="en-US" sz="1100" dirty="0">
+              <a:solidFill>
+                <a:srgbClr val="0070C0"/>
+              </a:solidFill>
+              <a:latin typeface="Menlo" panose="020B0609030804020204" pitchFamily="49" charset="0"/>
+              <a:ea typeface="Menlo" panose="020B0609030804020204" pitchFamily="49" charset="0"/>
+              <a:cs typeface="Menlo" panose="020B0609030804020204" pitchFamily="49" charset="0"/>
+            </a:endParaRPr>
+          </a:p>
+          <a:p>
+            <a:r>
+              <a:rPr lang="en-US" sz="1100" dirty="0" err="1">
+                <a:solidFill>
+                  <a:srgbClr val="0070C0"/>
+                </a:solidFill>
+                <a:latin typeface="Menlo" panose="020B0609030804020204" pitchFamily="49" charset="0"/>
+                <a:ea typeface="Menlo" panose="020B0609030804020204" pitchFamily="49" charset="0"/>
+                <a:cs typeface="Menlo" panose="020B0609030804020204" pitchFamily="49" charset="0"/>
+              </a:rPr>
+              <a:t>plt.rcParams</a:t>
+            </a:r>
+            <a:r>
+              <a:rPr lang="en-US" sz="1100" dirty="0">
+                <a:solidFill>
+                  <a:srgbClr val="0070C0"/>
+                </a:solidFill>
+                <a:latin typeface="Menlo" panose="020B0609030804020204" pitchFamily="49" charset="0"/>
+                <a:ea typeface="Menlo" panose="020B0609030804020204" pitchFamily="49" charset="0"/>
+                <a:cs typeface="Menlo" panose="020B0609030804020204" pitchFamily="49" charset="0"/>
+              </a:rPr>
+              <a:t>["</a:t>
+            </a:r>
+            <a:r>
+              <a:rPr lang="en-US" sz="1100" dirty="0" err="1">
+                <a:solidFill>
+                  <a:srgbClr val="0070C0"/>
+                </a:solidFill>
+                <a:latin typeface="Menlo" panose="020B0609030804020204" pitchFamily="49" charset="0"/>
+                <a:ea typeface="Menlo" panose="020B0609030804020204" pitchFamily="49" charset="0"/>
+                <a:cs typeface="Menlo" panose="020B0609030804020204" pitchFamily="49" charset="0"/>
+              </a:rPr>
+              <a:t>figure.figsize</a:t>
+            </a:r>
+            <a:r>
+              <a:rPr lang="en-US" sz="1100" dirty="0">
+                <a:solidFill>
+                  <a:srgbClr val="0070C0"/>
+                </a:solidFill>
+                <a:latin typeface="Menlo" panose="020B0609030804020204" pitchFamily="49" charset="0"/>
+                <a:ea typeface="Menlo" panose="020B0609030804020204" pitchFamily="49" charset="0"/>
+                <a:cs typeface="Menlo" panose="020B0609030804020204" pitchFamily="49" charset="0"/>
+              </a:rPr>
+              <a:t>"] = (8, 4) </a:t>
+            </a:r>
+            <a:r>
+              <a:rPr lang="en-US" sz="1100" dirty="0">
+                <a:solidFill>
+                  <a:srgbClr val="00B050"/>
+                </a:solidFill>
+                <a:latin typeface="Menlo" panose="020B0609030804020204" pitchFamily="49" charset="0"/>
+                <a:ea typeface="Menlo" panose="020B0609030804020204" pitchFamily="49" charset="0"/>
+                <a:cs typeface="Menlo" panose="020B0609030804020204" pitchFamily="49" charset="0"/>
+              </a:rPr>
+              <a:t># (width, height)</a:t>
+            </a:r>
+          </a:p>
+          <a:p>
+            <a:r>
+              <a:rPr lang="en-US" sz="1100" dirty="0">
+                <a:solidFill>
+                  <a:srgbClr val="0070C0"/>
+                </a:solidFill>
+                <a:latin typeface="Menlo" panose="020B0609030804020204" pitchFamily="49" charset="0"/>
+                <a:ea typeface="Menlo" panose="020B0609030804020204" pitchFamily="49" charset="0"/>
+                <a:cs typeface="Menlo" panose="020B0609030804020204" pitchFamily="49" charset="0"/>
+              </a:rPr>
+              <a:t>fig, ax = </a:t>
+            </a:r>
+            <a:r>
+              <a:rPr lang="en-US" sz="1100" dirty="0" err="1">
+                <a:solidFill>
+                  <a:srgbClr val="0070C0"/>
+                </a:solidFill>
+                <a:latin typeface="Menlo" panose="020B0609030804020204" pitchFamily="49" charset="0"/>
+                <a:ea typeface="Menlo" panose="020B0609030804020204" pitchFamily="49" charset="0"/>
+                <a:cs typeface="Menlo" panose="020B0609030804020204" pitchFamily="49" charset="0"/>
+              </a:rPr>
+              <a:t>plt.subplots</a:t>
+            </a:r>
+            <a:r>
+              <a:rPr lang="en-US" sz="1100" dirty="0">
+                <a:solidFill>
+                  <a:srgbClr val="0070C0"/>
+                </a:solidFill>
+                <a:latin typeface="Menlo" panose="020B0609030804020204" pitchFamily="49" charset="0"/>
+                <a:ea typeface="Menlo" panose="020B0609030804020204" pitchFamily="49" charset="0"/>
+                <a:cs typeface="Menlo" panose="020B0609030804020204" pitchFamily="49" charset="0"/>
+              </a:rPr>
+              <a:t>(</a:t>
+            </a:r>
+            <a:r>
+              <a:rPr lang="en-US" sz="1100" dirty="0" err="1">
+                <a:solidFill>
+                  <a:srgbClr val="0070C0"/>
+                </a:solidFill>
+                <a:latin typeface="Menlo" panose="020B0609030804020204" pitchFamily="49" charset="0"/>
+                <a:ea typeface="Menlo" panose="020B0609030804020204" pitchFamily="49" charset="0"/>
+                <a:cs typeface="Menlo" panose="020B0609030804020204" pitchFamily="49" charset="0"/>
+              </a:rPr>
+              <a:t>nrows</a:t>
+            </a:r>
+            <a:r>
+              <a:rPr lang="en-US" sz="1100" dirty="0">
+                <a:solidFill>
+                  <a:srgbClr val="0070C0"/>
+                </a:solidFill>
+                <a:latin typeface="Menlo" panose="020B0609030804020204" pitchFamily="49" charset="0"/>
+                <a:ea typeface="Menlo" panose="020B0609030804020204" pitchFamily="49" charset="0"/>
+                <a:cs typeface="Menlo" panose="020B0609030804020204" pitchFamily="49" charset="0"/>
+              </a:rPr>
+              <a:t>=1, </a:t>
+            </a:r>
+            <a:r>
+              <a:rPr lang="en-US" sz="1100" dirty="0" err="1">
+                <a:solidFill>
+                  <a:srgbClr val="0070C0"/>
+                </a:solidFill>
+                <a:latin typeface="Menlo" panose="020B0609030804020204" pitchFamily="49" charset="0"/>
+                <a:ea typeface="Menlo" panose="020B0609030804020204" pitchFamily="49" charset="0"/>
+                <a:cs typeface="Menlo" panose="020B0609030804020204" pitchFamily="49" charset="0"/>
+              </a:rPr>
+              <a:t>ncols</a:t>
+            </a:r>
+            <a:r>
+              <a:rPr lang="en-US" sz="1100" dirty="0">
+                <a:solidFill>
+                  <a:srgbClr val="0070C0"/>
+                </a:solidFill>
+                <a:latin typeface="Menlo" panose="020B0609030804020204" pitchFamily="49" charset="0"/>
+                <a:ea typeface="Menlo" panose="020B0609030804020204" pitchFamily="49" charset="0"/>
+                <a:cs typeface="Menlo" panose="020B0609030804020204" pitchFamily="49" charset="0"/>
+              </a:rPr>
+              <a:t>=1)</a:t>
+            </a:r>
+          </a:p>
+          <a:p>
+            <a:r>
+              <a:rPr lang="en-US" sz="1100" dirty="0" err="1">
+                <a:solidFill>
+                  <a:srgbClr val="0070C0"/>
+                </a:solidFill>
+                <a:latin typeface="Menlo" panose="020B0609030804020204" pitchFamily="49" charset="0"/>
+                <a:ea typeface="Menlo" panose="020B0609030804020204" pitchFamily="49" charset="0"/>
+                <a:cs typeface="Menlo" panose="020B0609030804020204" pitchFamily="49" charset="0"/>
+              </a:rPr>
+              <a:t>ax.hist</a:t>
+            </a:r>
+            <a:r>
+              <a:rPr lang="en-US" sz="1100" dirty="0">
+                <a:solidFill>
+                  <a:srgbClr val="0070C0"/>
+                </a:solidFill>
+                <a:latin typeface="Menlo" panose="020B0609030804020204" pitchFamily="49" charset="0"/>
+                <a:ea typeface="Menlo" panose="020B0609030804020204" pitchFamily="49" charset="0"/>
+                <a:cs typeface="Menlo" panose="020B0609030804020204" pitchFamily="49" charset="0"/>
+              </a:rPr>
+              <a:t>(</a:t>
+            </a:r>
+            <a:r>
+              <a:rPr lang="en-US" sz="1100" dirty="0" err="1">
+                <a:solidFill>
+                  <a:srgbClr val="0070C0"/>
+                </a:solidFill>
+                <a:latin typeface="Menlo" panose="020B0609030804020204" pitchFamily="49" charset="0"/>
+                <a:ea typeface="Menlo" panose="020B0609030804020204" pitchFamily="49" charset="0"/>
+                <a:cs typeface="Menlo" panose="020B0609030804020204" pitchFamily="49" charset="0"/>
+              </a:rPr>
+              <a:t>diffs,bins</a:t>
+            </a:r>
+            <a:r>
+              <a:rPr lang="en-US" sz="1100" dirty="0">
+                <a:solidFill>
+                  <a:srgbClr val="0070C0"/>
+                </a:solidFill>
+                <a:latin typeface="Menlo" panose="020B0609030804020204" pitchFamily="49" charset="0"/>
+                <a:ea typeface="Menlo" panose="020B0609030804020204" pitchFamily="49" charset="0"/>
+                <a:cs typeface="Menlo" panose="020B0609030804020204" pitchFamily="49" charset="0"/>
+              </a:rPr>
+              <a:t>=100)</a:t>
+            </a:r>
+          </a:p>
+          <a:p>
+            <a:r>
+              <a:rPr lang="en-US" sz="1100" dirty="0" err="1">
+                <a:solidFill>
+                  <a:srgbClr val="0070C0"/>
+                </a:solidFill>
+                <a:latin typeface="Menlo" panose="020B0609030804020204" pitchFamily="49" charset="0"/>
+                <a:ea typeface="Menlo" panose="020B0609030804020204" pitchFamily="49" charset="0"/>
+                <a:cs typeface="Menlo" panose="020B0609030804020204" pitchFamily="49" charset="0"/>
+              </a:rPr>
+              <a:t>ax.set_xlim</a:t>
+            </a:r>
+            <a:r>
+              <a:rPr lang="en-US" sz="1100" dirty="0">
+                <a:solidFill>
+                  <a:srgbClr val="0070C0"/>
+                </a:solidFill>
+                <a:latin typeface="Menlo" panose="020B0609030804020204" pitchFamily="49" charset="0"/>
+                <a:ea typeface="Menlo" panose="020B0609030804020204" pitchFamily="49" charset="0"/>
+                <a:cs typeface="Menlo" panose="020B0609030804020204" pitchFamily="49" charset="0"/>
+              </a:rPr>
+              <a:t>(left=0,right=0.2)</a:t>
+            </a:r>
+          </a:p>
+          <a:p>
+            <a:r>
+              <a:rPr lang="en-US" sz="1100" dirty="0" err="1">
+                <a:solidFill>
+                  <a:srgbClr val="0070C0"/>
+                </a:solidFill>
+                <a:latin typeface="Menlo" panose="020B0609030804020204" pitchFamily="49" charset="0"/>
+                <a:ea typeface="Menlo" panose="020B0609030804020204" pitchFamily="49" charset="0"/>
+                <a:cs typeface="Menlo" panose="020B0609030804020204" pitchFamily="49" charset="0"/>
+              </a:rPr>
+              <a:t>plt.show</a:t>
+            </a:r>
+            <a:r>
+              <a:rPr lang="en-US" sz="1100" dirty="0">
+                <a:solidFill>
+                  <a:srgbClr val="0070C0"/>
+                </a:solidFill>
+                <a:latin typeface="Menlo" panose="020B0609030804020204" pitchFamily="49" charset="0"/>
+                <a:ea typeface="Menlo" panose="020B0609030804020204" pitchFamily="49" charset="0"/>
+                <a:cs typeface="Menlo" panose="020B0609030804020204" pitchFamily="49" charset="0"/>
+              </a:rPr>
+              <a:t>();</a:t>
+            </a:r>
+          </a:p>
+        </p:txBody>
+      </p:sp>
+      <p:pic>
+        <p:nvPicPr>
+          <p:cNvPr id="11" name="Picture 10">
+            <a:extLst>
+              <a:ext uri="{FF2B5EF4-FFF2-40B4-BE49-F238E27FC236}">
+                <a16:creationId xmlns:a16="http://schemas.microsoft.com/office/drawing/2014/main" id="{819CECB9-FA40-2B4A-8E80-911C091D3BD6}"/>
+              </a:ext>
+            </a:extLst>
+          </p:cNvPr>
+          <p:cNvPicPr>
+            <a:picLocks noChangeAspect="1"/>
+          </p:cNvPicPr>
+          <p:nvPr/>
+        </p:nvPicPr>
+        <p:blipFill>
+          <a:blip r:embed="rId4" cstate="email">
+            <a:extLst>
+              <a:ext uri="{28A0092B-C50C-407E-A947-70E740481C1C}">
+                <a14:useLocalDpi xmlns:a14="http://schemas.microsoft.com/office/drawing/2010/main"/>
+              </a:ext>
+            </a:extLst>
+          </a:blip>
+          <a:stretch>
+            <a:fillRect/>
+          </a:stretch>
+        </p:blipFill>
+        <p:spPr>
+          <a:xfrm>
+            <a:off x="1707699" y="3579188"/>
+            <a:ext cx="2130703" cy="1072566"/>
+          </a:xfrm>
+          <a:prstGeom prst="rect">
+            <a:avLst/>
+          </a:prstGeom>
+        </p:spPr>
+      </p:pic>
+      <p:sp>
+        <p:nvSpPr>
+          <p:cNvPr id="12" name="TextBox 11">
+            <a:extLst>
+              <a:ext uri="{FF2B5EF4-FFF2-40B4-BE49-F238E27FC236}">
+                <a16:creationId xmlns:a16="http://schemas.microsoft.com/office/drawing/2014/main" id="{99770D08-03F1-D24C-A73C-37974E179C5F}"/>
+              </a:ext>
+            </a:extLst>
+          </p:cNvPr>
+          <p:cNvSpPr txBox="1"/>
+          <p:nvPr/>
+        </p:nvSpPr>
+        <p:spPr>
+          <a:xfrm>
+            <a:off x="977854" y="3242523"/>
+            <a:ext cx="3566009" cy="307777"/>
+          </a:xfrm>
+          <a:prstGeom prst="rect">
+            <a:avLst/>
+          </a:prstGeom>
+          <a:noFill/>
+        </p:spPr>
+        <p:txBody>
+          <a:bodyPr wrap="square" rtlCol="0">
+            <a:spAutoFit/>
+          </a:bodyPr>
+          <a:lstStyle/>
+          <a:p>
+            <a:pPr algn="ctr"/>
+            <a:r>
+              <a:rPr lang="en-US" dirty="0">
+                <a:solidFill>
+                  <a:srgbClr val="0070C0"/>
+                </a:solidFill>
+                <a:latin typeface="+mj-lt"/>
+                <a:ea typeface="Menlo" panose="020B0609030804020204" pitchFamily="49" charset="0"/>
+                <a:cs typeface="Menlo" panose="020B0609030804020204" pitchFamily="49" charset="0"/>
+              </a:rPr>
+              <a:t>Distribution of diffs of shuffled parts</a:t>
+            </a:r>
+          </a:p>
+        </p:txBody>
+      </p:sp>
+      <p:sp>
+        <p:nvSpPr>
+          <p:cNvPr id="13" name="TextBox 12">
+            <a:extLst>
+              <a:ext uri="{FF2B5EF4-FFF2-40B4-BE49-F238E27FC236}">
+                <a16:creationId xmlns:a16="http://schemas.microsoft.com/office/drawing/2014/main" id="{86023C08-35C4-CF4E-B4AF-CFB2312D7594}"/>
+              </a:ext>
+            </a:extLst>
+          </p:cNvPr>
+          <p:cNvSpPr txBox="1"/>
+          <p:nvPr/>
+        </p:nvSpPr>
+        <p:spPr>
+          <a:xfrm>
+            <a:off x="5520585" y="4322989"/>
+            <a:ext cx="1478290" cy="461665"/>
+          </a:xfrm>
+          <a:prstGeom prst="rect">
+            <a:avLst/>
+          </a:prstGeom>
+          <a:noFill/>
+        </p:spPr>
+        <p:txBody>
+          <a:bodyPr wrap="none" rtlCol="0">
+            <a:spAutoFit/>
+          </a:bodyPr>
+          <a:lstStyle/>
+          <a:p>
+            <a:r>
+              <a:rPr lang="en-US" sz="1200" dirty="0">
+                <a:solidFill>
+                  <a:srgbClr val="00B050"/>
+                </a:solidFill>
+                <a:latin typeface="Calibri" panose="020F0502020204030204" pitchFamily="34" charset="0"/>
+                <a:cs typeface="Calibri" panose="020F0502020204030204" pitchFamily="34" charset="0"/>
+              </a:rPr>
+              <a:t>P-value is estimated </a:t>
+            </a:r>
+          </a:p>
+          <a:p>
+            <a:r>
+              <a:rPr lang="en-US" sz="1200" dirty="0">
+                <a:solidFill>
+                  <a:srgbClr val="00B050"/>
+                </a:solidFill>
+                <a:latin typeface="Calibri" panose="020F0502020204030204" pitchFamily="34" charset="0"/>
+                <a:cs typeface="Calibri" panose="020F0502020204030204" pitchFamily="34" charset="0"/>
+              </a:rPr>
+              <a:t>by counting</a:t>
+            </a:r>
+          </a:p>
+        </p:txBody>
+      </p:sp>
+      <p:sp>
+        <p:nvSpPr>
+          <p:cNvPr id="14" name="Right Arrow 13">
+            <a:extLst>
+              <a:ext uri="{FF2B5EF4-FFF2-40B4-BE49-F238E27FC236}">
+                <a16:creationId xmlns:a16="http://schemas.microsoft.com/office/drawing/2014/main" id="{36A8D943-90BE-FB4B-B711-182B969661B6}"/>
+              </a:ext>
+            </a:extLst>
+          </p:cNvPr>
+          <p:cNvSpPr/>
+          <p:nvPr/>
+        </p:nvSpPr>
+        <p:spPr>
+          <a:xfrm>
+            <a:off x="6946317" y="4443055"/>
+            <a:ext cx="457532" cy="178375"/>
+          </a:xfrm>
+          <a:prstGeom prst="rightArrow">
+            <a:avLst/>
+          </a:prstGeom>
+          <a:solidFill>
+            <a:srgbClr val="00B050"/>
+          </a:solidFill>
+          <a:ln>
+            <a:solidFill>
+              <a:srgbClr val="00B050"/>
+            </a:solidFill>
+          </a:ln>
+        </p:spPr>
+        <p:style>
+          <a:lnRef idx="2">
+            <a:schemeClr val="accent1">
+              <a:shade val="50000"/>
+            </a:schemeClr>
+          </a:lnRef>
+          <a:fillRef idx="1">
+            <a:schemeClr val="accent1"/>
+          </a:fillRef>
+          <a:effectRef idx="0">
+            <a:schemeClr val="accent1"/>
+          </a:effectRef>
+          <a:fontRef idx="minor">
+            <a:schemeClr val="lt1"/>
+          </a:fontRef>
+        </p:style>
+        <p:txBody>
+          <a:bodyPr rtlCol="0" anchor="ctr"/>
+          <a:lstStyle/>
+          <a:p>
+            <a:pPr algn="ctr"/>
+            <a:endParaRPr lang="en-US"/>
+          </a:p>
+        </p:txBody>
+      </p:sp>
+      <p:sp>
+        <p:nvSpPr>
+          <p:cNvPr id="15" name="TextBox 14">
+            <a:extLst>
+              <a:ext uri="{FF2B5EF4-FFF2-40B4-BE49-F238E27FC236}">
+                <a16:creationId xmlns:a16="http://schemas.microsoft.com/office/drawing/2014/main" id="{5A62F9F1-3396-C540-ACEF-C2F3ECF4FAA2}"/>
+              </a:ext>
+            </a:extLst>
+          </p:cNvPr>
+          <p:cNvSpPr txBox="1"/>
+          <p:nvPr/>
+        </p:nvSpPr>
+        <p:spPr>
+          <a:xfrm>
+            <a:off x="85344" y="4734342"/>
+            <a:ext cx="4904156" cy="2123658"/>
+          </a:xfrm>
+          <a:prstGeom prst="rect">
+            <a:avLst/>
+          </a:prstGeom>
+          <a:noFill/>
+        </p:spPr>
+        <p:txBody>
+          <a:bodyPr wrap="square" rtlCol="0">
+            <a:spAutoFit/>
+          </a:bodyPr>
+          <a:lstStyle/>
+          <a:p>
+            <a:r>
+              <a:rPr lang="en-US" sz="1100" dirty="0">
+                <a:solidFill>
+                  <a:srgbClr val="0070C0"/>
+                </a:solidFill>
+                <a:latin typeface="Menlo" panose="020B0609030804020204" pitchFamily="49" charset="0"/>
+                <a:ea typeface="Menlo" panose="020B0609030804020204" pitchFamily="49" charset="0"/>
+                <a:cs typeface="Menlo" panose="020B0609030804020204" pitchFamily="49" charset="0"/>
+              </a:rPr>
+              <a:t>import </a:t>
+            </a:r>
+            <a:r>
+              <a:rPr lang="en-US" sz="1100" dirty="0" err="1">
+                <a:solidFill>
+                  <a:srgbClr val="0070C0"/>
+                </a:solidFill>
+                <a:latin typeface="Menlo" panose="020B0609030804020204" pitchFamily="49" charset="0"/>
+                <a:ea typeface="Menlo" panose="020B0609030804020204" pitchFamily="49" charset="0"/>
+                <a:cs typeface="Menlo" panose="020B0609030804020204" pitchFamily="49" charset="0"/>
+              </a:rPr>
+              <a:t>numpy</a:t>
+            </a:r>
+            <a:r>
+              <a:rPr lang="en-US" sz="1100" dirty="0">
+                <a:solidFill>
+                  <a:srgbClr val="0070C0"/>
+                </a:solidFill>
+                <a:latin typeface="Menlo" panose="020B0609030804020204" pitchFamily="49" charset="0"/>
+                <a:ea typeface="Menlo" panose="020B0609030804020204" pitchFamily="49" charset="0"/>
+                <a:cs typeface="Menlo" panose="020B0609030804020204" pitchFamily="49" charset="0"/>
+              </a:rPr>
+              <a:t> as np </a:t>
+            </a:r>
+          </a:p>
+          <a:p>
+            <a:r>
+              <a:rPr lang="en-US" sz="1100" dirty="0">
+                <a:solidFill>
+                  <a:srgbClr val="0070C0"/>
+                </a:solidFill>
+                <a:latin typeface="Menlo" panose="020B0609030804020204" pitchFamily="49" charset="0"/>
+                <a:ea typeface="Menlo" panose="020B0609030804020204" pitchFamily="49" charset="0"/>
+                <a:cs typeface="Menlo" panose="020B0609030804020204" pitchFamily="49" charset="0"/>
+              </a:rPr>
+              <a:t>from </a:t>
+            </a:r>
+            <a:r>
+              <a:rPr lang="en-US" sz="1100" dirty="0" err="1">
+                <a:solidFill>
+                  <a:srgbClr val="0070C0"/>
+                </a:solidFill>
+                <a:latin typeface="Menlo" panose="020B0609030804020204" pitchFamily="49" charset="0"/>
+                <a:ea typeface="Menlo" panose="020B0609030804020204" pitchFamily="49" charset="0"/>
+                <a:cs typeface="Menlo" panose="020B0609030804020204" pitchFamily="49" charset="0"/>
+              </a:rPr>
+              <a:t>sklearn.model_selection</a:t>
+            </a:r>
+            <a:r>
+              <a:rPr lang="en-US" sz="1100" dirty="0">
+                <a:solidFill>
+                  <a:srgbClr val="0070C0"/>
+                </a:solidFill>
+                <a:latin typeface="Menlo" panose="020B0609030804020204" pitchFamily="49" charset="0"/>
+                <a:ea typeface="Menlo" panose="020B0609030804020204" pitchFamily="49" charset="0"/>
+                <a:cs typeface="Menlo" panose="020B0609030804020204" pitchFamily="49" charset="0"/>
+              </a:rPr>
+              <a:t> import </a:t>
+            </a:r>
+            <a:r>
+              <a:rPr lang="en-US" sz="1100" dirty="0" err="1">
+                <a:solidFill>
+                  <a:srgbClr val="0070C0"/>
+                </a:solidFill>
+                <a:latin typeface="Menlo" panose="020B0609030804020204" pitchFamily="49" charset="0"/>
+                <a:ea typeface="Menlo" panose="020B0609030804020204" pitchFamily="49" charset="0"/>
+                <a:cs typeface="Menlo" panose="020B0609030804020204" pitchFamily="49" charset="0"/>
+              </a:rPr>
+              <a:t>train_test_split</a:t>
+            </a:r>
+            <a:r>
+              <a:rPr lang="en-US" sz="1100" dirty="0">
+                <a:solidFill>
+                  <a:srgbClr val="0070C0"/>
+                </a:solidFill>
+                <a:latin typeface="Menlo" panose="020B0609030804020204" pitchFamily="49" charset="0"/>
+                <a:ea typeface="Menlo" panose="020B0609030804020204" pitchFamily="49" charset="0"/>
+                <a:cs typeface="Menlo" panose="020B0609030804020204" pitchFamily="49" charset="0"/>
+              </a:rPr>
+              <a:t> </a:t>
+            </a:r>
+          </a:p>
+          <a:p>
+            <a:r>
+              <a:rPr lang="en-US" sz="1100" dirty="0">
+                <a:solidFill>
+                  <a:srgbClr val="0070C0"/>
+                </a:solidFill>
+                <a:latin typeface="Menlo" panose="020B0609030804020204" pitchFamily="49" charset="0"/>
+                <a:ea typeface="Menlo" panose="020B0609030804020204" pitchFamily="49" charset="0"/>
+                <a:cs typeface="Menlo" panose="020B0609030804020204" pitchFamily="49" charset="0"/>
+              </a:rPr>
+              <a:t>data = </a:t>
+            </a:r>
+            <a:r>
+              <a:rPr lang="en-US" sz="1100" dirty="0" err="1">
+                <a:solidFill>
+                  <a:srgbClr val="0070C0"/>
+                </a:solidFill>
+                <a:latin typeface="Menlo" panose="020B0609030804020204" pitchFamily="49" charset="0"/>
+                <a:ea typeface="Menlo" panose="020B0609030804020204" pitchFamily="49" charset="0"/>
+                <a:cs typeface="Menlo" panose="020B0609030804020204" pitchFamily="49" charset="0"/>
+              </a:rPr>
+              <a:t>np.random.random</a:t>
+            </a:r>
+            <a:r>
+              <a:rPr lang="en-US" sz="1100" dirty="0">
+                <a:solidFill>
+                  <a:srgbClr val="0070C0"/>
+                </a:solidFill>
+                <a:latin typeface="Menlo" panose="020B0609030804020204" pitchFamily="49" charset="0"/>
+                <a:ea typeface="Menlo" panose="020B0609030804020204" pitchFamily="49" charset="0"/>
+                <a:cs typeface="Menlo" panose="020B0609030804020204" pitchFamily="49" charset="0"/>
+              </a:rPr>
+              <a:t>(2*N)</a:t>
+            </a:r>
+          </a:p>
+          <a:p>
+            <a:endParaRPr lang="en-US" sz="1100" dirty="0">
+              <a:solidFill>
+                <a:srgbClr val="0070C0"/>
+              </a:solidFill>
+              <a:latin typeface="Menlo" panose="020B0609030804020204" pitchFamily="49" charset="0"/>
+              <a:ea typeface="Menlo" panose="020B0609030804020204" pitchFamily="49" charset="0"/>
+              <a:cs typeface="Menlo" panose="020B0609030804020204" pitchFamily="49" charset="0"/>
+            </a:endParaRPr>
+          </a:p>
+          <a:p>
+            <a:r>
+              <a:rPr lang="en-US" sz="1100" dirty="0">
+                <a:solidFill>
+                  <a:srgbClr val="00B050"/>
+                </a:solidFill>
+                <a:latin typeface="Menlo" panose="020B0609030804020204" pitchFamily="49" charset="0"/>
+                <a:ea typeface="Menlo" panose="020B0609030804020204" pitchFamily="49" charset="0"/>
+                <a:cs typeface="Menlo" panose="020B0609030804020204" pitchFamily="49" charset="0"/>
+              </a:rPr>
+              <a:t># how to shuffle using </a:t>
+            </a:r>
+            <a:r>
+              <a:rPr lang="en-US" sz="1100" dirty="0" err="1">
+                <a:solidFill>
+                  <a:srgbClr val="00B050"/>
+                </a:solidFill>
+                <a:latin typeface="Menlo" panose="020B0609030804020204" pitchFamily="49" charset="0"/>
+                <a:ea typeface="Menlo" panose="020B0609030804020204" pitchFamily="49" charset="0"/>
+                <a:cs typeface="Menlo" panose="020B0609030804020204" pitchFamily="49" charset="0"/>
+              </a:rPr>
+              <a:t>sklearn</a:t>
+            </a:r>
+            <a:r>
+              <a:rPr lang="en-US" sz="1100" dirty="0">
+                <a:solidFill>
+                  <a:srgbClr val="00B050"/>
+                </a:solidFill>
+                <a:latin typeface="Menlo" panose="020B0609030804020204" pitchFamily="49" charset="0"/>
+                <a:ea typeface="Menlo" panose="020B0609030804020204" pitchFamily="49" charset="0"/>
+                <a:cs typeface="Menlo" panose="020B0609030804020204" pitchFamily="49" charset="0"/>
+              </a:rPr>
+              <a:t> </a:t>
+            </a:r>
+            <a:r>
+              <a:rPr lang="en-US" sz="1100" dirty="0" err="1">
+                <a:solidFill>
+                  <a:srgbClr val="00B050"/>
+                </a:solidFill>
+                <a:latin typeface="Menlo" panose="020B0609030804020204" pitchFamily="49" charset="0"/>
+                <a:ea typeface="Menlo" panose="020B0609030804020204" pitchFamily="49" charset="0"/>
+                <a:cs typeface="Menlo" panose="020B0609030804020204" pitchFamily="49" charset="0"/>
+              </a:rPr>
+              <a:t>train_test_split</a:t>
+            </a:r>
+            <a:r>
+              <a:rPr lang="en-US" sz="1100" dirty="0">
+                <a:solidFill>
+                  <a:srgbClr val="00B050"/>
+                </a:solidFill>
+                <a:latin typeface="Menlo" panose="020B0609030804020204" pitchFamily="49" charset="0"/>
+                <a:ea typeface="Menlo" panose="020B0609030804020204" pitchFamily="49" charset="0"/>
+                <a:cs typeface="Menlo" panose="020B0609030804020204" pitchFamily="49" charset="0"/>
+              </a:rPr>
+              <a:t>()</a:t>
+            </a:r>
+          </a:p>
+          <a:p>
+            <a:r>
+              <a:rPr lang="en-US" sz="1100" dirty="0">
+                <a:solidFill>
+                  <a:srgbClr val="0070C0"/>
+                </a:solidFill>
+                <a:latin typeface="Menlo" panose="020B0609030804020204" pitchFamily="49" charset="0"/>
+                <a:ea typeface="Menlo" panose="020B0609030804020204" pitchFamily="49" charset="0"/>
+                <a:cs typeface="Menlo" panose="020B0609030804020204" pitchFamily="49" charset="0"/>
+              </a:rPr>
+              <a:t>X1, X2 = </a:t>
+            </a:r>
+            <a:r>
+              <a:rPr lang="en-US" sz="1100" dirty="0" err="1">
+                <a:solidFill>
+                  <a:srgbClr val="0070C0"/>
+                </a:solidFill>
+                <a:latin typeface="Menlo" panose="020B0609030804020204" pitchFamily="49" charset="0"/>
+                <a:ea typeface="Menlo" panose="020B0609030804020204" pitchFamily="49" charset="0"/>
+                <a:cs typeface="Menlo" panose="020B0609030804020204" pitchFamily="49" charset="0"/>
+              </a:rPr>
+              <a:t>train_test_split</a:t>
+            </a:r>
+            <a:r>
+              <a:rPr lang="en-US" sz="1100" dirty="0">
+                <a:solidFill>
+                  <a:srgbClr val="0070C0"/>
+                </a:solidFill>
+                <a:latin typeface="Menlo" panose="020B0609030804020204" pitchFamily="49" charset="0"/>
+                <a:ea typeface="Menlo" panose="020B0609030804020204" pitchFamily="49" charset="0"/>
+                <a:cs typeface="Menlo" panose="020B0609030804020204" pitchFamily="49" charset="0"/>
+              </a:rPr>
+              <a:t>(data, </a:t>
+            </a:r>
+            <a:r>
+              <a:rPr lang="en-US" sz="1100" dirty="0" err="1">
+                <a:solidFill>
+                  <a:srgbClr val="0070C0"/>
+                </a:solidFill>
+                <a:latin typeface="Menlo" panose="020B0609030804020204" pitchFamily="49" charset="0"/>
+                <a:ea typeface="Menlo" panose="020B0609030804020204" pitchFamily="49" charset="0"/>
+                <a:cs typeface="Menlo" panose="020B0609030804020204" pitchFamily="49" charset="0"/>
+              </a:rPr>
+              <a:t>test_size</a:t>
+            </a:r>
+            <a:r>
+              <a:rPr lang="en-US" sz="1100" dirty="0">
+                <a:solidFill>
+                  <a:srgbClr val="0070C0"/>
+                </a:solidFill>
+                <a:latin typeface="Menlo" panose="020B0609030804020204" pitchFamily="49" charset="0"/>
+                <a:ea typeface="Menlo" panose="020B0609030804020204" pitchFamily="49" charset="0"/>
+                <a:cs typeface="Menlo" panose="020B0609030804020204" pitchFamily="49" charset="0"/>
+              </a:rPr>
+              <a:t>=N)</a:t>
+            </a:r>
+          </a:p>
+          <a:p>
+            <a:endParaRPr lang="en-US" sz="1100" dirty="0">
+              <a:solidFill>
+                <a:srgbClr val="0070C0"/>
+              </a:solidFill>
+              <a:latin typeface="Menlo" panose="020B0609030804020204" pitchFamily="49" charset="0"/>
+              <a:ea typeface="Menlo" panose="020B0609030804020204" pitchFamily="49" charset="0"/>
+              <a:cs typeface="Menlo" panose="020B0609030804020204" pitchFamily="49" charset="0"/>
+            </a:endParaRPr>
+          </a:p>
+          <a:p>
+            <a:r>
+              <a:rPr lang="en-US" sz="1100" dirty="0">
+                <a:solidFill>
+                  <a:srgbClr val="00B050"/>
+                </a:solidFill>
+                <a:latin typeface="Menlo" panose="020B0609030804020204" pitchFamily="49" charset="0"/>
+                <a:ea typeface="Menlo" panose="020B0609030804020204" pitchFamily="49" charset="0"/>
+                <a:cs typeface="Menlo" panose="020B0609030804020204" pitchFamily="49" charset="0"/>
+              </a:rPr>
+              <a:t># how to shuffle using only </a:t>
+            </a:r>
+            <a:r>
+              <a:rPr lang="en-US" sz="1100" dirty="0" err="1">
+                <a:solidFill>
+                  <a:srgbClr val="00B050"/>
+                </a:solidFill>
+                <a:latin typeface="Menlo" panose="020B0609030804020204" pitchFamily="49" charset="0"/>
+                <a:ea typeface="Menlo" panose="020B0609030804020204" pitchFamily="49" charset="0"/>
+                <a:cs typeface="Menlo" panose="020B0609030804020204" pitchFamily="49" charset="0"/>
+              </a:rPr>
+              <a:t>Numpy</a:t>
+            </a:r>
+            <a:r>
+              <a:rPr lang="en-US" sz="1100" dirty="0">
+                <a:solidFill>
+                  <a:srgbClr val="00B050"/>
+                </a:solidFill>
+                <a:latin typeface="Menlo" panose="020B0609030804020204" pitchFamily="49" charset="0"/>
+                <a:ea typeface="Menlo" panose="020B0609030804020204" pitchFamily="49" charset="0"/>
+                <a:cs typeface="Menlo" panose="020B0609030804020204" pitchFamily="49" charset="0"/>
+              </a:rPr>
+              <a:t>:</a:t>
+            </a:r>
+          </a:p>
+          <a:p>
+            <a:r>
+              <a:rPr lang="en-US" sz="1100" dirty="0">
+                <a:solidFill>
+                  <a:srgbClr val="0070C0"/>
+                </a:solidFill>
+                <a:latin typeface="Menlo" panose="020B0609030804020204" pitchFamily="49" charset="0"/>
+                <a:ea typeface="Menlo" panose="020B0609030804020204" pitchFamily="49" charset="0"/>
+                <a:cs typeface="Menlo" panose="020B0609030804020204" pitchFamily="49" charset="0"/>
+              </a:rPr>
+              <a:t>s1 = </a:t>
+            </a:r>
+            <a:r>
+              <a:rPr lang="en-US" sz="1100" dirty="0" err="1">
+                <a:solidFill>
+                  <a:srgbClr val="0070C0"/>
+                </a:solidFill>
+                <a:latin typeface="Menlo" panose="020B0609030804020204" pitchFamily="49" charset="0"/>
+                <a:ea typeface="Menlo" panose="020B0609030804020204" pitchFamily="49" charset="0"/>
+                <a:cs typeface="Menlo" panose="020B0609030804020204" pitchFamily="49" charset="0"/>
+              </a:rPr>
+              <a:t>np.random.choice</a:t>
+            </a:r>
+            <a:r>
+              <a:rPr lang="en-US" sz="1100" dirty="0">
+                <a:solidFill>
+                  <a:srgbClr val="0070C0"/>
+                </a:solidFill>
+                <a:latin typeface="Menlo" panose="020B0609030804020204" pitchFamily="49" charset="0"/>
+                <a:ea typeface="Menlo" panose="020B0609030804020204" pitchFamily="49" charset="0"/>
+                <a:cs typeface="Menlo" panose="020B0609030804020204" pitchFamily="49" charset="0"/>
+              </a:rPr>
+              <a:t>(2*N, N, replace=False)</a:t>
+            </a:r>
+          </a:p>
+          <a:p>
+            <a:r>
+              <a:rPr lang="en-US" sz="1100" dirty="0">
+                <a:solidFill>
+                  <a:srgbClr val="0070C0"/>
+                </a:solidFill>
+                <a:latin typeface="Menlo" panose="020B0609030804020204" pitchFamily="49" charset="0"/>
+                <a:ea typeface="Menlo" panose="020B0609030804020204" pitchFamily="49" charset="0"/>
+                <a:cs typeface="Menlo" panose="020B0609030804020204" pitchFamily="49" charset="0"/>
+              </a:rPr>
+              <a:t>s2 = list( set(range(2*N)) - set(s1) )</a:t>
+            </a:r>
+          </a:p>
+          <a:p>
+            <a:r>
+              <a:rPr lang="en-US" sz="1100" dirty="0">
+                <a:solidFill>
+                  <a:srgbClr val="0070C0"/>
+                </a:solidFill>
+                <a:latin typeface="Menlo" panose="020B0609030804020204" pitchFamily="49" charset="0"/>
+                <a:ea typeface="Menlo" panose="020B0609030804020204" pitchFamily="49" charset="0"/>
+                <a:cs typeface="Menlo" panose="020B0609030804020204" pitchFamily="49" charset="0"/>
+              </a:rPr>
+              <a:t>split1 = data[s1]</a:t>
+            </a:r>
+          </a:p>
+          <a:p>
+            <a:r>
+              <a:rPr lang="en-US" sz="1100" dirty="0">
+                <a:solidFill>
+                  <a:srgbClr val="0070C0"/>
+                </a:solidFill>
+                <a:latin typeface="Menlo" panose="020B0609030804020204" pitchFamily="49" charset="0"/>
+                <a:ea typeface="Menlo" panose="020B0609030804020204" pitchFamily="49" charset="0"/>
+                <a:cs typeface="Menlo" panose="020B0609030804020204" pitchFamily="49" charset="0"/>
+              </a:rPr>
+              <a:t>split2 = data[s2]</a:t>
+            </a:r>
+          </a:p>
+        </p:txBody>
+      </p:sp>
+    </p:spTree>
+    <p:extLst>
+      <p:ext uri="{BB962C8B-B14F-4D97-AF65-F5344CB8AC3E}">
+        <p14:creationId xmlns:p14="http://schemas.microsoft.com/office/powerpoint/2010/main" val="2505485813"/>
+      </p:ext>
+    </p:extLst>
+  </p:cSld>
+  <p:clrMapOvr>
+    <a:masterClrMapping/>
+  </p:clrMapOvr>
+</p:sld>
+</file>
+
+<file path=ppt/slides/slide5.xml><?xml version="1.0" encoding="utf-8"?>
 <p:sld xmlns:a="http://schemas.openxmlformats.org/drawingml/2006/main" xmlns:r="http://schemas.openxmlformats.org/officeDocument/2006/relationships" xmlns:p="http://schemas.openxmlformats.org/presentationml/2006/main">
   <p:cSld>
     <p:spTree>

--- a/statistics_16_for_hackers.pptx
+++ b/statistics_16_for_hackers.pptx
@@ -5,14 +5,13 @@
     <p:sldMasterId id="2147483659" r:id="rId1"/>
   </p:sldMasterIdLst>
   <p:notesMasterIdLst>
-    <p:notesMasterId r:id="rId7"/>
+    <p:notesMasterId r:id="rId6"/>
   </p:notesMasterIdLst>
   <p:sldIdLst>
     <p:sldId id="310" r:id="rId2"/>
     <p:sldId id="311" r:id="rId3"/>
-    <p:sldId id="312" r:id="rId4"/>
-    <p:sldId id="314" r:id="rId5"/>
-    <p:sldId id="313" r:id="rId6"/>
+    <p:sldId id="314" r:id="rId4"/>
+    <p:sldId id="313" r:id="rId5"/>
   </p:sldIdLst>
   <p:sldSz cx="12192000" cy="6858000"/>
   <p:notesSz cx="6858000" cy="9144000"/>
@@ -14191,8 +14190,8 @@
         </p:nvSpPr>
         <p:spPr>
           <a:xfrm>
-            <a:off x="1376975" y="1291772"/>
-            <a:ext cx="5589881" cy="2308324"/>
+            <a:off x="1368097" y="2274838"/>
+            <a:ext cx="7367530" cy="2585323"/>
           </a:xfrm>
           <a:prstGeom prst="rect">
             <a:avLst/>
@@ -14275,7 +14274,18 @@
                 <a:ea typeface="Menlo" panose="020B0609030804020204" pitchFamily="49" charset="0"/>
                 <a:cs typeface="Menlo" panose="020B0609030804020204" pitchFamily="49" charset="0"/>
               </a:rPr>
-              <a:t>(2, size=30)</a:t>
+              <a:t>(2, size=30) </a:t>
+            </a:r>
+            <a:r>
+              <a:rPr lang="en-US" sz="1800" dirty="0">
+                <a:solidFill>
+                  <a:srgbClr val="00B050"/>
+                </a:solidFill>
+                <a:latin typeface="Menlo" panose="020B0609030804020204" pitchFamily="49" charset="0"/>
+                <a:ea typeface="Menlo" panose="020B0609030804020204" pitchFamily="49" charset="0"/>
+                <a:cs typeface="Menlo" panose="020B0609030804020204" pitchFamily="49" charset="0"/>
+              </a:rPr>
+              <a:t># toss 30 times</a:t>
             </a:r>
           </a:p>
           <a:p>
@@ -14370,14 +14380,88 @@
               </a:rPr>
               <a:t># 0.008</a:t>
             </a:r>
-            <a:endParaRPr lang="en-US" sz="1800" dirty="0">
-              <a:solidFill>
-                <a:srgbClr val="0070C0"/>
-              </a:solidFill>
-              <a:latin typeface="Menlo" panose="020B0609030804020204" pitchFamily="49" charset="0"/>
-              <a:ea typeface="Menlo" panose="020B0609030804020204" pitchFamily="49" charset="0"/>
-              <a:cs typeface="Menlo" panose="020B0609030804020204" pitchFamily="49" charset="0"/>
-            </a:endParaRPr>
+          </a:p>
+          <a:p>
+            <a:r>
+              <a:rPr lang="en-US" sz="1800" dirty="0">
+                <a:solidFill>
+                  <a:srgbClr val="0070C0"/>
+                </a:solidFill>
+                <a:latin typeface="Menlo" panose="020B0609030804020204" pitchFamily="49" charset="0"/>
+                <a:ea typeface="Menlo" panose="020B0609030804020204" pitchFamily="49" charset="0"/>
+                <a:cs typeface="Menlo" panose="020B0609030804020204" pitchFamily="49" charset="0"/>
+              </a:rPr>
+              <a:t>print(</a:t>
+            </a:r>
+            <a:r>
+              <a:rPr lang="en-US" sz="1800" dirty="0" err="1">
+                <a:solidFill>
+                  <a:srgbClr val="0070C0"/>
+                </a:solidFill>
+                <a:latin typeface="Menlo" panose="020B0609030804020204" pitchFamily="49" charset="0"/>
+                <a:ea typeface="Menlo" panose="020B0609030804020204" pitchFamily="49" charset="0"/>
+                <a:cs typeface="Menlo" panose="020B0609030804020204" pitchFamily="49" charset="0"/>
+              </a:rPr>
+              <a:t>f"P_val</a:t>
+            </a:r>
+            <a:r>
+              <a:rPr lang="en-US" sz="1800" dirty="0">
+                <a:solidFill>
+                  <a:srgbClr val="0070C0"/>
+                </a:solidFill>
+                <a:latin typeface="Menlo" panose="020B0609030804020204" pitchFamily="49" charset="0"/>
+                <a:ea typeface="Menlo" panose="020B0609030804020204" pitchFamily="49" charset="0"/>
+                <a:cs typeface="Menlo" panose="020B0609030804020204" pitchFamily="49" charset="0"/>
+              </a:rPr>
+              <a:t> = {P_val:.4f}")</a:t>
+            </a:r>
+          </a:p>
+        </p:txBody>
+      </p:sp>
+      <p:sp>
+        <p:nvSpPr>
+          <p:cNvPr id="4" name="TextBox 3">
+            <a:extLst>
+              <a:ext uri="{FF2B5EF4-FFF2-40B4-BE49-F238E27FC236}">
+                <a16:creationId xmlns:a16="http://schemas.microsoft.com/office/drawing/2014/main" id="{5889D379-17A1-EF42-887E-1928F5FBF644}"/>
+              </a:ext>
+            </a:extLst>
+          </p:cNvPr>
+          <p:cNvSpPr txBox="1"/>
+          <p:nvPr/>
+        </p:nvSpPr>
+        <p:spPr>
+          <a:xfrm>
+            <a:off x="1368097" y="937364"/>
+            <a:ext cx="4650963" cy="923330"/>
+          </a:xfrm>
+          <a:prstGeom prst="rect">
+            <a:avLst/>
+          </a:prstGeom>
+          <a:noFill/>
+        </p:spPr>
+        <p:txBody>
+          <a:bodyPr wrap="square" rtlCol="0">
+            <a:spAutoFit/>
+          </a:bodyPr>
+          <a:lstStyle/>
+          <a:p>
+            <a:r>
+              <a:rPr lang="en-US" sz="1800" dirty="0"/>
+              <a:t>We tossing coin 30 times.</a:t>
+            </a:r>
+          </a:p>
+          <a:p>
+            <a:r>
+              <a:rPr lang="en-US" sz="1800" dirty="0"/>
+              <a:t>What is the P value of getting 22 heads?</a:t>
+            </a:r>
+          </a:p>
+          <a:p>
+            <a:r>
+              <a:rPr lang="en-US" sz="1800" dirty="0"/>
+              <a:t>We can simply count it.</a:t>
+            </a:r>
           </a:p>
         </p:txBody>
       </p:sp>
@@ -14426,7 +14510,7 @@
         <p:spPr>
           <a:xfrm>
             <a:off x="0" y="0"/>
-            <a:ext cx="7656576" cy="523220"/>
+            <a:ext cx="5833241" cy="830997"/>
           </a:xfrm>
           <a:prstGeom prst="rect">
             <a:avLst/>
@@ -14440,8 +14524,24 @@
           <a:lstStyle/>
           <a:p>
             <a:r>
-              <a:rPr lang="en-US" sz="2800" b="1" dirty="0"/>
-              <a:t>Example – Shuffling</a:t>
+              <a:rPr lang="en-US" sz="2400" b="1" dirty="0">
+                <a:latin typeface="Calibri" panose="020F0502020204030204" pitchFamily="34" charset="0"/>
+                <a:cs typeface="Calibri" panose="020F0502020204030204" pitchFamily="34" charset="0"/>
+              </a:rPr>
+              <a:t>If A/B difference statistically significant?</a:t>
+            </a:r>
+            <a:br>
+              <a:rPr lang="en-US" sz="2400" b="1" dirty="0">
+                <a:latin typeface="Calibri" panose="020F0502020204030204" pitchFamily="34" charset="0"/>
+                <a:cs typeface="Calibri" panose="020F0502020204030204" pitchFamily="34" charset="0"/>
+              </a:rPr>
+            </a:br>
+            <a:r>
+              <a:rPr lang="en-US" sz="2400" b="1" dirty="0">
+                <a:latin typeface="Calibri" panose="020F0502020204030204" pitchFamily="34" charset="0"/>
+                <a:cs typeface="Calibri" panose="020F0502020204030204" pitchFamily="34" charset="0"/>
+              </a:rPr>
+              <a:t>Answer Using Shuffling (hacking !!)</a:t>
             </a:r>
           </a:p>
         </p:txBody>
@@ -14460,8 +14560,8 @@
         </p:nvSpPr>
         <p:spPr>
           <a:xfrm>
-            <a:off x="31775" y="523220"/>
-            <a:ext cx="8417282" cy="738664"/>
+            <a:off x="6665263" y="130222"/>
+            <a:ext cx="5373539" cy="830997"/>
           </a:xfrm>
           <a:prstGeom prst="rect">
             <a:avLst/>
@@ -14479,9 +14579,9 @@
               <a:buChar char="•"/>
             </a:pPr>
             <a:r>
-              <a:rPr lang="en-US" dirty="0">
-                <a:solidFill>
-                  <a:srgbClr val="0070C0"/>
+              <a:rPr lang="en-US" sz="1200" dirty="0">
+                <a:solidFill>
+                  <a:srgbClr val="00B050"/>
                 </a:solidFill>
                 <a:latin typeface="Menlo" panose="020B0609030804020204" pitchFamily="49" charset="0"/>
                 <a:ea typeface="Menlo" panose="020B0609030804020204" pitchFamily="49" charset="0"/>
@@ -14496,9 +14596,9 @@
               <a:buChar char="•"/>
             </a:pPr>
             <a:r>
-              <a:rPr lang="en-US" dirty="0">
-                <a:solidFill>
-                  <a:srgbClr val="0070C0"/>
+              <a:rPr lang="en-US" sz="1200" dirty="0">
+                <a:solidFill>
+                  <a:srgbClr val="00B050"/>
                 </a:solidFill>
                 <a:latin typeface="Menlo" panose="020B0609030804020204" pitchFamily="49" charset="0"/>
                 <a:ea typeface="Menlo" panose="020B0609030804020204" pitchFamily="49" charset="0"/>
@@ -14513,9 +14613,9 @@
               <a:buChar char="•"/>
             </a:pPr>
             <a:r>
-              <a:rPr lang="en-US" dirty="0">
-                <a:solidFill>
-                  <a:srgbClr val="0070C0"/>
+              <a:rPr lang="en-US" sz="1200" dirty="0">
+                <a:solidFill>
+                  <a:srgbClr val="00B050"/>
                 </a:solidFill>
                 <a:latin typeface="Menlo" panose="020B0609030804020204" pitchFamily="49" charset="0"/>
                 <a:ea typeface="Menlo" panose="020B0609030804020204" pitchFamily="49" charset="0"/>
@@ -14540,7 +14640,7 @@
         </p:nvSpPr>
         <p:spPr>
           <a:xfrm>
-            <a:off x="1423491" y="1349187"/>
+            <a:off x="1036442" y="1769600"/>
             <a:ext cx="3566009" cy="369332"/>
           </a:xfrm>
           <a:prstGeom prst="rect">
@@ -14607,7 +14707,7 @@
         </p:blipFill>
         <p:spPr>
           <a:xfrm>
-            <a:off x="855614" y="1746504"/>
+            <a:off x="468565" y="2166917"/>
             <a:ext cx="2079355" cy="1046718"/>
           </a:xfrm>
           <a:prstGeom prst="rect">
@@ -14643,7 +14743,7 @@
         </p:blipFill>
         <p:spPr>
           <a:xfrm>
-            <a:off x="3035808" y="1746504"/>
+            <a:off x="2648759" y="2166917"/>
             <a:ext cx="2079355" cy="1046718"/>
           </a:xfrm>
           <a:prstGeom prst="rect">
@@ -14665,7 +14765,7 @@
         </p:nvSpPr>
         <p:spPr>
           <a:xfrm>
-            <a:off x="415955" y="2071874"/>
+            <a:off x="28906" y="2492287"/>
             <a:ext cx="411405" cy="369332"/>
           </a:xfrm>
           <a:prstGeom prst="rect">
@@ -14707,7 +14807,7 @@
         </p:nvSpPr>
         <p:spPr>
           <a:xfrm>
-            <a:off x="5224891" y="2071874"/>
+            <a:off x="4837842" y="2492287"/>
             <a:ext cx="411405" cy="369332"/>
           </a:xfrm>
           <a:prstGeom prst="rect">
@@ -14749,8 +14849,8 @@
         </p:nvSpPr>
         <p:spPr>
           <a:xfrm>
-            <a:off x="7074665" y="1349187"/>
-            <a:ext cx="5158912" cy="5170646"/>
+            <a:off x="6839493" y="1095467"/>
+            <a:ext cx="5158912" cy="5786199"/>
           </a:xfrm>
           <a:prstGeom prst="rect">
             <a:avLst/>
@@ -14763,7 +14863,7 @@
           <a:lstStyle/>
           <a:p>
             <a:r>
-              <a:rPr lang="en-US" sz="1100" dirty="0">
+              <a:rPr lang="en-US" sz="1000" dirty="0">
                 <a:solidFill>
                   <a:srgbClr val="0070C0"/>
                 </a:solidFill>
@@ -14776,7 +14876,7 @@
           </a:p>
           <a:p>
             <a:r>
-              <a:rPr lang="en-US" sz="1100" dirty="0">
+              <a:rPr lang="en-US" sz="1000" dirty="0" err="1">
                 <a:solidFill>
                   <a:srgbClr val="0070C0"/>
                 </a:solidFill>
@@ -14784,10 +14884,10 @@
                 <a:ea typeface="Menlo" panose="020B0609030804020204" pitchFamily="49" charset="0"/>
                 <a:cs typeface="Menlo" panose="020B0609030804020204" pitchFamily="49" charset="0"/>
               </a:rPr>
-              <a:t>A = </a:t>
-            </a:r>
-            <a:r>
-              <a:rPr lang="en-US" sz="1100" dirty="0" err="1">
+              <a:t>scale_A</a:t>
+            </a:r>
+            <a:r>
+              <a:rPr lang="en-US" sz="1000" dirty="0">
                 <a:solidFill>
                   <a:srgbClr val="0070C0"/>
                 </a:solidFill>
@@ -14795,23 +14895,12 @@
                 <a:ea typeface="Menlo" panose="020B0609030804020204" pitchFamily="49" charset="0"/>
                 <a:cs typeface="Menlo" panose="020B0609030804020204" pitchFamily="49" charset="0"/>
               </a:rPr>
-              <a:t>np.random.exponential</a:t>
-            </a:r>
-            <a:r>
-              <a:rPr lang="en-US" sz="1100" dirty="0">
-                <a:solidFill>
-                  <a:srgbClr val="0070C0"/>
-                </a:solidFill>
-                <a:latin typeface="Menlo" panose="020B0609030804020204" pitchFamily="49" charset="0"/>
-                <a:ea typeface="Menlo" panose="020B0609030804020204" pitchFamily="49" charset="0"/>
-                <a:cs typeface="Menlo" panose="020B0609030804020204" pitchFamily="49" charset="0"/>
-              </a:rPr>
-              <a:t>(scale=2.0, size=N)</a:t>
+              <a:t> = 2.0</a:t>
             </a:r>
           </a:p>
           <a:p>
             <a:r>
-              <a:rPr lang="en-US" sz="1100" dirty="0">
+              <a:rPr lang="en-US" sz="1000" dirty="0" err="1">
                 <a:solidFill>
                   <a:srgbClr val="0070C0"/>
                 </a:solidFill>
@@ -14819,10 +14908,10 @@
                 <a:ea typeface="Menlo" panose="020B0609030804020204" pitchFamily="49" charset="0"/>
                 <a:cs typeface="Menlo" panose="020B0609030804020204" pitchFamily="49" charset="0"/>
               </a:rPr>
-              <a:t>B = </a:t>
-            </a:r>
-            <a:r>
-              <a:rPr lang="en-US" sz="1100" dirty="0" err="1">
+              <a:t>scale_B</a:t>
+            </a:r>
+            <a:r>
+              <a:rPr lang="en-US" sz="1000" dirty="0">
                 <a:solidFill>
                   <a:srgbClr val="0070C0"/>
                 </a:solidFill>
@@ -14830,23 +14919,12 @@
                 <a:ea typeface="Menlo" panose="020B0609030804020204" pitchFamily="49" charset="0"/>
                 <a:cs typeface="Menlo" panose="020B0609030804020204" pitchFamily="49" charset="0"/>
               </a:rPr>
-              <a:t>np.random.exponential</a:t>
-            </a:r>
-            <a:r>
-              <a:rPr lang="en-US" sz="1100" dirty="0">
-                <a:solidFill>
-                  <a:srgbClr val="0070C0"/>
-                </a:solidFill>
-                <a:latin typeface="Menlo" panose="020B0609030804020204" pitchFamily="49" charset="0"/>
-                <a:ea typeface="Menlo" panose="020B0609030804020204" pitchFamily="49" charset="0"/>
-                <a:cs typeface="Menlo" panose="020B0609030804020204" pitchFamily="49" charset="0"/>
-              </a:rPr>
-              <a:t>(scale=2.4, size=N)</a:t>
+              <a:t> = 2.08</a:t>
             </a:r>
           </a:p>
           <a:p>
             <a:r>
-              <a:rPr lang="en-US" sz="1100" dirty="0">
+              <a:rPr lang="en-US" sz="1000" dirty="0">
                 <a:solidFill>
                   <a:srgbClr val="0070C0"/>
                 </a:solidFill>
@@ -14854,10 +14932,10 @@
                 <a:ea typeface="Menlo" panose="020B0609030804020204" pitchFamily="49" charset="0"/>
                 <a:cs typeface="Menlo" panose="020B0609030804020204" pitchFamily="49" charset="0"/>
               </a:rPr>
-              <a:t>C = </a:t>
-            </a:r>
-            <a:r>
-              <a:rPr lang="en-US" sz="1100" dirty="0" err="1">
+              <a:t>A = </a:t>
+            </a:r>
+            <a:r>
+              <a:rPr lang="en-US" sz="1000" dirty="0" err="1">
                 <a:solidFill>
                   <a:srgbClr val="0070C0"/>
                 </a:solidFill>
@@ -14865,10 +14943,10 @@
                 <a:ea typeface="Menlo" panose="020B0609030804020204" pitchFamily="49" charset="0"/>
                 <a:cs typeface="Menlo" panose="020B0609030804020204" pitchFamily="49" charset="0"/>
               </a:rPr>
-              <a:t>np.concatenate</a:t>
-            </a:r>
-            <a:r>
-              <a:rPr lang="en-US" sz="1100" dirty="0">
+              <a:t>np.random.exponential</a:t>
+            </a:r>
+            <a:r>
+              <a:rPr lang="en-US" sz="1000" dirty="0">
                 <a:solidFill>
                   <a:srgbClr val="0070C0"/>
                 </a:solidFill>
@@ -14876,23 +14954,34 @@
                 <a:ea typeface="Menlo" panose="020B0609030804020204" pitchFamily="49" charset="0"/>
                 <a:cs typeface="Menlo" panose="020B0609030804020204" pitchFamily="49" charset="0"/>
               </a:rPr>
-              <a:t>((A,B))</a:t>
-            </a:r>
-            <a:r>
-              <a:rPr lang="en-US" sz="1100" dirty="0">
-                <a:solidFill>
-                  <a:srgbClr val="00B050"/>
-                </a:solidFill>
-                <a:latin typeface="Menlo" panose="020B0609030804020204" pitchFamily="49" charset="0"/>
-                <a:ea typeface="Menlo" panose="020B0609030804020204" pitchFamily="49" charset="0"/>
-                <a:cs typeface="Menlo" panose="020B0609030804020204" pitchFamily="49" charset="0"/>
-              </a:rPr>
-              <a:t> # Combined</a:t>
+              <a:t>(scale=</a:t>
+            </a:r>
+            <a:r>
+              <a:rPr lang="en-US" sz="1000" dirty="0" err="1">
+                <a:solidFill>
+                  <a:srgbClr val="0070C0"/>
+                </a:solidFill>
+                <a:latin typeface="Menlo" panose="020B0609030804020204" pitchFamily="49" charset="0"/>
+                <a:ea typeface="Menlo" panose="020B0609030804020204" pitchFamily="49" charset="0"/>
+                <a:cs typeface="Menlo" panose="020B0609030804020204" pitchFamily="49" charset="0"/>
+              </a:rPr>
+              <a:t>scale_A</a:t>
+            </a:r>
+            <a:r>
+              <a:rPr lang="en-US" sz="1000" dirty="0">
+                <a:solidFill>
+                  <a:srgbClr val="0070C0"/>
+                </a:solidFill>
+                <a:latin typeface="Menlo" panose="020B0609030804020204" pitchFamily="49" charset="0"/>
+                <a:ea typeface="Menlo" panose="020B0609030804020204" pitchFamily="49" charset="0"/>
+                <a:cs typeface="Menlo" panose="020B0609030804020204" pitchFamily="49" charset="0"/>
+              </a:rPr>
+              <a:t>, size=N)</a:t>
             </a:r>
           </a:p>
           <a:p>
             <a:r>
-              <a:rPr lang="en-US" sz="1100" dirty="0" err="1">
+              <a:rPr lang="en-US" sz="1000" dirty="0">
                 <a:solidFill>
                   <a:srgbClr val="0070C0"/>
                 </a:solidFill>
@@ -14900,10 +14989,10 @@
                 <a:ea typeface="Menlo" panose="020B0609030804020204" pitchFamily="49" charset="0"/>
                 <a:cs typeface="Menlo" panose="020B0609030804020204" pitchFamily="49" charset="0"/>
               </a:rPr>
-              <a:t>diff_AB</a:t>
-            </a:r>
-            <a:r>
-              <a:rPr lang="en-US" sz="1100" dirty="0">
+              <a:t>B = </a:t>
+            </a:r>
+            <a:r>
+              <a:rPr lang="en-US" sz="1000" dirty="0" err="1">
                 <a:solidFill>
                   <a:srgbClr val="0070C0"/>
                 </a:solidFill>
@@ -14911,10 +15000,10 @@
                 <a:ea typeface="Menlo" panose="020B0609030804020204" pitchFamily="49" charset="0"/>
                 <a:cs typeface="Menlo" panose="020B0609030804020204" pitchFamily="49" charset="0"/>
               </a:rPr>
-              <a:t> = </a:t>
-            </a:r>
-            <a:r>
-              <a:rPr lang="en-US" sz="1100" dirty="0" err="1">
+              <a:t>np.random.exponential</a:t>
+            </a:r>
+            <a:r>
+              <a:rPr lang="en-US" sz="1000" dirty="0">
                 <a:solidFill>
                   <a:srgbClr val="0070C0"/>
                 </a:solidFill>
@@ -14922,10 +15011,10 @@
                 <a:ea typeface="Menlo" panose="020B0609030804020204" pitchFamily="49" charset="0"/>
                 <a:cs typeface="Menlo" panose="020B0609030804020204" pitchFamily="49" charset="0"/>
               </a:rPr>
-              <a:t>np.mean</a:t>
-            </a:r>
-            <a:r>
-              <a:rPr lang="en-US" sz="1100" dirty="0">
+              <a:t>(scale=</a:t>
+            </a:r>
+            <a:r>
+              <a:rPr lang="en-US" sz="1000" dirty="0" err="1">
                 <a:solidFill>
                   <a:srgbClr val="0070C0"/>
                 </a:solidFill>
@@ -14933,10 +15022,10 @@
                 <a:ea typeface="Menlo" panose="020B0609030804020204" pitchFamily="49" charset="0"/>
                 <a:cs typeface="Menlo" panose="020B0609030804020204" pitchFamily="49" charset="0"/>
               </a:rPr>
-              <a:t>(A) - </a:t>
-            </a:r>
-            <a:r>
-              <a:rPr lang="en-US" sz="1100" dirty="0" err="1">
+              <a:t>scale_B</a:t>
+            </a:r>
+            <a:r>
+              <a:rPr lang="en-US" sz="1000" dirty="0">
                 <a:solidFill>
                   <a:srgbClr val="0070C0"/>
                 </a:solidFill>
@@ -14944,22 +15033,11 @@
                 <a:ea typeface="Menlo" panose="020B0609030804020204" pitchFamily="49" charset="0"/>
                 <a:cs typeface="Menlo" panose="020B0609030804020204" pitchFamily="49" charset="0"/>
               </a:rPr>
-              <a:t>np.mean</a:t>
-            </a:r>
-            <a:r>
-              <a:rPr lang="en-US" sz="1100" dirty="0">
-                <a:solidFill>
-                  <a:srgbClr val="0070C0"/>
-                </a:solidFill>
-                <a:latin typeface="Menlo" panose="020B0609030804020204" pitchFamily="49" charset="0"/>
-                <a:ea typeface="Menlo" panose="020B0609030804020204" pitchFamily="49" charset="0"/>
-                <a:cs typeface="Menlo" panose="020B0609030804020204" pitchFamily="49" charset="0"/>
-              </a:rPr>
-              <a:t>(B)</a:t>
+              <a:t>, size=N)</a:t>
             </a:r>
           </a:p>
           <a:p>
-            <a:endParaRPr lang="en-US" sz="1100" dirty="0">
+            <a:endParaRPr lang="en-US" sz="1000" dirty="0">
               <a:solidFill>
                 <a:srgbClr val="0070C0"/>
               </a:solidFill>
@@ -14970,31 +15048,20 @@
           </a:p>
           <a:p>
             <a:r>
-              <a:rPr lang="en-US" sz="1100" dirty="0" err="1">
-                <a:solidFill>
-                  <a:srgbClr val="0070C0"/>
-                </a:solidFill>
-                <a:latin typeface="Menlo" panose="020B0609030804020204" pitchFamily="49" charset="0"/>
-                <a:ea typeface="Menlo" panose="020B0609030804020204" pitchFamily="49" charset="0"/>
-                <a:cs typeface="Menlo" panose="020B0609030804020204" pitchFamily="49" charset="0"/>
-              </a:rPr>
-              <a:t>N_shuf</a:t>
-            </a:r>
-            <a:r>
-              <a:rPr lang="en-US" sz="1100" dirty="0">
-                <a:solidFill>
-                  <a:srgbClr val="0070C0"/>
-                </a:solidFill>
-                <a:latin typeface="Menlo" panose="020B0609030804020204" pitchFamily="49" charset="0"/>
-                <a:ea typeface="Menlo" panose="020B0609030804020204" pitchFamily="49" charset="0"/>
-                <a:cs typeface="Menlo" panose="020B0609030804020204" pitchFamily="49" charset="0"/>
-              </a:rPr>
-              <a:t> = 5000</a:t>
+              <a:rPr lang="en-US" sz="1000" dirty="0">
+                <a:solidFill>
+                  <a:srgbClr val="00B050"/>
+                </a:solidFill>
+                <a:latin typeface="Menlo" panose="020B0609030804020204" pitchFamily="49" charset="0"/>
+                <a:ea typeface="Menlo" panose="020B0609030804020204" pitchFamily="49" charset="0"/>
+                <a:cs typeface="Menlo" panose="020B0609030804020204" pitchFamily="49" charset="0"/>
+              </a:rPr>
+              <a:t># actual difference</a:t>
             </a:r>
           </a:p>
           <a:p>
             <a:r>
-              <a:rPr lang="en-US" sz="1100" dirty="0">
+              <a:rPr lang="en-US" sz="1000" dirty="0" err="1">
                 <a:solidFill>
                   <a:srgbClr val="0070C0"/>
                 </a:solidFill>
@@ -15002,337 +15069,88 @@
                 <a:ea typeface="Menlo" panose="020B0609030804020204" pitchFamily="49" charset="0"/>
                 <a:cs typeface="Menlo" panose="020B0609030804020204" pitchFamily="49" charset="0"/>
               </a:rPr>
-              <a:t>counter = 1</a:t>
+              <a:t>diff_AB</a:t>
+            </a:r>
+            <a:r>
+              <a:rPr lang="en-US" sz="1000" dirty="0">
+                <a:solidFill>
+                  <a:srgbClr val="0070C0"/>
+                </a:solidFill>
+                <a:latin typeface="Menlo" panose="020B0609030804020204" pitchFamily="49" charset="0"/>
+                <a:ea typeface="Menlo" panose="020B0609030804020204" pitchFamily="49" charset="0"/>
+                <a:cs typeface="Menlo" panose="020B0609030804020204" pitchFamily="49" charset="0"/>
+              </a:rPr>
+              <a:t> = </a:t>
+            </a:r>
+            <a:r>
+              <a:rPr lang="en-US" sz="1000" dirty="0" err="1">
+                <a:solidFill>
+                  <a:srgbClr val="0070C0"/>
+                </a:solidFill>
+                <a:latin typeface="Menlo" panose="020B0609030804020204" pitchFamily="49" charset="0"/>
+                <a:ea typeface="Menlo" panose="020B0609030804020204" pitchFamily="49" charset="0"/>
+                <a:cs typeface="Menlo" panose="020B0609030804020204" pitchFamily="49" charset="0"/>
+              </a:rPr>
+              <a:t>np.abs</a:t>
+            </a:r>
+            <a:r>
+              <a:rPr lang="en-US" sz="1000" dirty="0">
+                <a:solidFill>
+                  <a:srgbClr val="0070C0"/>
+                </a:solidFill>
+                <a:latin typeface="Menlo" panose="020B0609030804020204" pitchFamily="49" charset="0"/>
+                <a:ea typeface="Menlo" panose="020B0609030804020204" pitchFamily="49" charset="0"/>
+                <a:cs typeface="Menlo" panose="020B0609030804020204" pitchFamily="49" charset="0"/>
+              </a:rPr>
+              <a:t>(</a:t>
+            </a:r>
+            <a:r>
+              <a:rPr lang="en-US" sz="1000" dirty="0" err="1">
+                <a:solidFill>
+                  <a:srgbClr val="0070C0"/>
+                </a:solidFill>
+                <a:latin typeface="Menlo" panose="020B0609030804020204" pitchFamily="49" charset="0"/>
+                <a:ea typeface="Menlo" panose="020B0609030804020204" pitchFamily="49" charset="0"/>
+                <a:cs typeface="Menlo" panose="020B0609030804020204" pitchFamily="49" charset="0"/>
+              </a:rPr>
+              <a:t>np.mean</a:t>
+            </a:r>
+            <a:r>
+              <a:rPr lang="en-US" sz="1000" dirty="0">
+                <a:solidFill>
+                  <a:srgbClr val="0070C0"/>
+                </a:solidFill>
+                <a:latin typeface="Menlo" panose="020B0609030804020204" pitchFamily="49" charset="0"/>
+                <a:ea typeface="Menlo" panose="020B0609030804020204" pitchFamily="49" charset="0"/>
+                <a:cs typeface="Menlo" panose="020B0609030804020204" pitchFamily="49" charset="0"/>
+              </a:rPr>
+              <a:t>(A) - </a:t>
+            </a:r>
+            <a:r>
+              <a:rPr lang="en-US" sz="1000" dirty="0" err="1">
+                <a:solidFill>
+                  <a:srgbClr val="0070C0"/>
+                </a:solidFill>
+                <a:latin typeface="Menlo" panose="020B0609030804020204" pitchFamily="49" charset="0"/>
+                <a:ea typeface="Menlo" panose="020B0609030804020204" pitchFamily="49" charset="0"/>
+                <a:cs typeface="Menlo" panose="020B0609030804020204" pitchFamily="49" charset="0"/>
+              </a:rPr>
+              <a:t>np.mean</a:t>
+            </a:r>
+            <a:r>
+              <a:rPr lang="en-US" sz="1000" dirty="0">
+                <a:solidFill>
+                  <a:srgbClr val="0070C0"/>
+                </a:solidFill>
+                <a:latin typeface="Menlo" panose="020B0609030804020204" pitchFamily="49" charset="0"/>
+                <a:ea typeface="Menlo" panose="020B0609030804020204" pitchFamily="49" charset="0"/>
+                <a:cs typeface="Menlo" panose="020B0609030804020204" pitchFamily="49" charset="0"/>
+              </a:rPr>
+              <a:t>(B)) </a:t>
             </a:r>
           </a:p>
           <a:p>
-            <a:r>
-              <a:rPr lang="en-US" sz="1100" dirty="0">
-                <a:solidFill>
-                  <a:srgbClr val="0070C0"/>
-                </a:solidFill>
-                <a:latin typeface="Menlo" panose="020B0609030804020204" pitchFamily="49" charset="0"/>
-                <a:ea typeface="Menlo" panose="020B0609030804020204" pitchFamily="49" charset="0"/>
-                <a:cs typeface="Menlo" panose="020B0609030804020204" pitchFamily="49" charset="0"/>
-              </a:rPr>
-              <a:t>diffs = </a:t>
-            </a:r>
-            <a:r>
-              <a:rPr lang="en-US" sz="1100" dirty="0" err="1">
-                <a:solidFill>
-                  <a:srgbClr val="0070C0"/>
-                </a:solidFill>
-                <a:latin typeface="Menlo" panose="020B0609030804020204" pitchFamily="49" charset="0"/>
-                <a:ea typeface="Menlo" panose="020B0609030804020204" pitchFamily="49" charset="0"/>
-                <a:cs typeface="Menlo" panose="020B0609030804020204" pitchFamily="49" charset="0"/>
-              </a:rPr>
-              <a:t>np.zeros</a:t>
-            </a:r>
-            <a:r>
-              <a:rPr lang="en-US" sz="1100" dirty="0">
-                <a:solidFill>
-                  <a:srgbClr val="0070C0"/>
-                </a:solidFill>
-                <a:latin typeface="Menlo" panose="020B0609030804020204" pitchFamily="49" charset="0"/>
-                <a:ea typeface="Menlo" panose="020B0609030804020204" pitchFamily="49" charset="0"/>
-                <a:cs typeface="Menlo" panose="020B0609030804020204" pitchFamily="49" charset="0"/>
-              </a:rPr>
-              <a:t>(</a:t>
-            </a:r>
-            <a:r>
-              <a:rPr lang="en-US" sz="1100" dirty="0" err="1">
-                <a:solidFill>
-                  <a:srgbClr val="0070C0"/>
-                </a:solidFill>
-                <a:latin typeface="Menlo" panose="020B0609030804020204" pitchFamily="49" charset="0"/>
-                <a:ea typeface="Menlo" panose="020B0609030804020204" pitchFamily="49" charset="0"/>
-                <a:cs typeface="Menlo" panose="020B0609030804020204" pitchFamily="49" charset="0"/>
-              </a:rPr>
-              <a:t>N_shuf</a:t>
-            </a:r>
-            <a:r>
-              <a:rPr lang="en-US" sz="1100" dirty="0">
-                <a:solidFill>
-                  <a:srgbClr val="0070C0"/>
-                </a:solidFill>
-                <a:latin typeface="Menlo" panose="020B0609030804020204" pitchFamily="49" charset="0"/>
-                <a:ea typeface="Menlo" panose="020B0609030804020204" pitchFamily="49" charset="0"/>
-                <a:cs typeface="Menlo" panose="020B0609030804020204" pitchFamily="49" charset="0"/>
-              </a:rPr>
-              <a:t>, </a:t>
-            </a:r>
-            <a:r>
-              <a:rPr lang="en-US" sz="1100" dirty="0" err="1">
-                <a:solidFill>
-                  <a:srgbClr val="0070C0"/>
-                </a:solidFill>
-                <a:latin typeface="Menlo" panose="020B0609030804020204" pitchFamily="49" charset="0"/>
-                <a:ea typeface="Menlo" panose="020B0609030804020204" pitchFamily="49" charset="0"/>
-                <a:cs typeface="Menlo" panose="020B0609030804020204" pitchFamily="49" charset="0"/>
-              </a:rPr>
-              <a:t>dtype</a:t>
-            </a:r>
-            <a:r>
-              <a:rPr lang="en-US" sz="1100" dirty="0">
-                <a:solidFill>
-                  <a:srgbClr val="0070C0"/>
-                </a:solidFill>
-                <a:latin typeface="Menlo" panose="020B0609030804020204" pitchFamily="49" charset="0"/>
-                <a:ea typeface="Menlo" panose="020B0609030804020204" pitchFamily="49" charset="0"/>
-                <a:cs typeface="Menlo" panose="020B0609030804020204" pitchFamily="49" charset="0"/>
-              </a:rPr>
-              <a:t>=float)</a:t>
-            </a:r>
-          </a:p>
-          <a:p>
-            <a:r>
-              <a:rPr lang="en-US" sz="1100" dirty="0" err="1">
-                <a:solidFill>
-                  <a:srgbClr val="0070C0"/>
-                </a:solidFill>
-                <a:latin typeface="Menlo" panose="020B0609030804020204" pitchFamily="49" charset="0"/>
-                <a:ea typeface="Menlo" panose="020B0609030804020204" pitchFamily="49" charset="0"/>
-                <a:cs typeface="Menlo" panose="020B0609030804020204" pitchFamily="49" charset="0"/>
-              </a:rPr>
-              <a:t>rng</a:t>
-            </a:r>
-            <a:r>
-              <a:rPr lang="en-US" sz="1100" dirty="0">
-                <a:solidFill>
-                  <a:srgbClr val="0070C0"/>
-                </a:solidFill>
-                <a:latin typeface="Menlo" panose="020B0609030804020204" pitchFamily="49" charset="0"/>
-                <a:ea typeface="Menlo" panose="020B0609030804020204" pitchFamily="49" charset="0"/>
-                <a:cs typeface="Menlo" panose="020B0609030804020204" pitchFamily="49" charset="0"/>
-              </a:rPr>
-              <a:t> = </a:t>
-            </a:r>
-            <a:r>
-              <a:rPr lang="en-US" sz="1100" dirty="0" err="1">
-                <a:solidFill>
-                  <a:srgbClr val="0070C0"/>
-                </a:solidFill>
-                <a:latin typeface="Menlo" panose="020B0609030804020204" pitchFamily="49" charset="0"/>
-                <a:ea typeface="Menlo" panose="020B0609030804020204" pitchFamily="49" charset="0"/>
-                <a:cs typeface="Menlo" panose="020B0609030804020204" pitchFamily="49" charset="0"/>
-              </a:rPr>
-              <a:t>np.random.default_rng</a:t>
-            </a:r>
-            <a:r>
-              <a:rPr lang="en-US" sz="1100" dirty="0">
-                <a:solidFill>
-                  <a:srgbClr val="0070C0"/>
-                </a:solidFill>
-                <a:latin typeface="Menlo" panose="020B0609030804020204" pitchFamily="49" charset="0"/>
-                <a:ea typeface="Menlo" panose="020B0609030804020204" pitchFamily="49" charset="0"/>
-                <a:cs typeface="Menlo" panose="020B0609030804020204" pitchFamily="49" charset="0"/>
-              </a:rPr>
-              <a:t>()</a:t>
-            </a:r>
-          </a:p>
-          <a:p>
-            <a:r>
-              <a:rPr lang="en-US" sz="1100" dirty="0">
-                <a:solidFill>
-                  <a:srgbClr val="0070C0"/>
-                </a:solidFill>
-                <a:latin typeface="Menlo" panose="020B0609030804020204" pitchFamily="49" charset="0"/>
-                <a:ea typeface="Menlo" panose="020B0609030804020204" pitchFamily="49" charset="0"/>
-                <a:cs typeface="Menlo" panose="020B0609030804020204" pitchFamily="49" charset="0"/>
-              </a:rPr>
-              <a:t>for ii in range(</a:t>
-            </a:r>
-            <a:r>
-              <a:rPr lang="en-US" sz="1100" dirty="0" err="1">
-                <a:solidFill>
-                  <a:srgbClr val="0070C0"/>
-                </a:solidFill>
-                <a:latin typeface="Menlo" panose="020B0609030804020204" pitchFamily="49" charset="0"/>
-                <a:ea typeface="Menlo" panose="020B0609030804020204" pitchFamily="49" charset="0"/>
-                <a:cs typeface="Menlo" panose="020B0609030804020204" pitchFamily="49" charset="0"/>
-              </a:rPr>
-              <a:t>N_shuf</a:t>
-            </a:r>
-            <a:r>
-              <a:rPr lang="en-US" sz="1100" dirty="0">
-                <a:solidFill>
-                  <a:srgbClr val="0070C0"/>
-                </a:solidFill>
-                <a:latin typeface="Menlo" panose="020B0609030804020204" pitchFamily="49" charset="0"/>
-                <a:ea typeface="Menlo" panose="020B0609030804020204" pitchFamily="49" charset="0"/>
-                <a:cs typeface="Menlo" panose="020B0609030804020204" pitchFamily="49" charset="0"/>
-              </a:rPr>
-              <a:t>):</a:t>
-            </a:r>
-          </a:p>
-          <a:p>
-            <a:r>
-              <a:rPr lang="en-US" sz="1100" dirty="0">
-                <a:solidFill>
-                  <a:srgbClr val="0070C0"/>
-                </a:solidFill>
-                <a:latin typeface="Menlo" panose="020B0609030804020204" pitchFamily="49" charset="0"/>
-                <a:ea typeface="Menlo" panose="020B0609030804020204" pitchFamily="49" charset="0"/>
-                <a:cs typeface="Menlo" panose="020B0609030804020204" pitchFamily="49" charset="0"/>
-              </a:rPr>
-              <a:t>    </a:t>
-            </a:r>
-            <a:r>
-              <a:rPr lang="en-US" sz="1100" dirty="0" err="1">
-                <a:solidFill>
-                  <a:srgbClr val="0070C0"/>
-                </a:solidFill>
-                <a:latin typeface="Menlo" panose="020B0609030804020204" pitchFamily="49" charset="0"/>
-                <a:ea typeface="Menlo" panose="020B0609030804020204" pitchFamily="49" charset="0"/>
-                <a:cs typeface="Menlo" panose="020B0609030804020204" pitchFamily="49" charset="0"/>
-              </a:rPr>
-              <a:t>rng.shuffle</a:t>
-            </a:r>
-            <a:r>
-              <a:rPr lang="en-US" sz="1100" dirty="0">
-                <a:solidFill>
-                  <a:srgbClr val="0070C0"/>
-                </a:solidFill>
-                <a:latin typeface="Menlo" panose="020B0609030804020204" pitchFamily="49" charset="0"/>
-                <a:ea typeface="Menlo" panose="020B0609030804020204" pitchFamily="49" charset="0"/>
-                <a:cs typeface="Menlo" panose="020B0609030804020204" pitchFamily="49" charset="0"/>
-              </a:rPr>
-              <a:t>(C, axis = 0)</a:t>
-            </a:r>
-          </a:p>
-          <a:p>
-            <a:r>
-              <a:rPr lang="en-US" sz="1100" dirty="0">
-                <a:solidFill>
-                  <a:srgbClr val="0070C0"/>
-                </a:solidFill>
-                <a:latin typeface="Menlo" panose="020B0609030804020204" pitchFamily="49" charset="0"/>
-                <a:ea typeface="Menlo" panose="020B0609030804020204" pitchFamily="49" charset="0"/>
-                <a:cs typeface="Menlo" panose="020B0609030804020204" pitchFamily="49" charset="0"/>
-              </a:rPr>
-              <a:t>    split1 = C[:N]</a:t>
-            </a:r>
-          </a:p>
-          <a:p>
-            <a:r>
-              <a:rPr lang="en-US" sz="1100" dirty="0">
-                <a:solidFill>
-                  <a:srgbClr val="0070C0"/>
-                </a:solidFill>
-                <a:latin typeface="Menlo" panose="020B0609030804020204" pitchFamily="49" charset="0"/>
-                <a:ea typeface="Menlo" panose="020B0609030804020204" pitchFamily="49" charset="0"/>
-                <a:cs typeface="Menlo" panose="020B0609030804020204" pitchFamily="49" charset="0"/>
-              </a:rPr>
-              <a:t>    split2 = C[N:]</a:t>
-            </a:r>
-          </a:p>
-          <a:p>
-            <a:r>
-              <a:rPr lang="en-US" sz="1100" dirty="0">
-                <a:solidFill>
-                  <a:srgbClr val="0070C0"/>
-                </a:solidFill>
-                <a:latin typeface="Menlo" panose="020B0609030804020204" pitchFamily="49" charset="0"/>
-                <a:ea typeface="Menlo" panose="020B0609030804020204" pitchFamily="49" charset="0"/>
-                <a:cs typeface="Menlo" panose="020B0609030804020204" pitchFamily="49" charset="0"/>
-              </a:rPr>
-              <a:t>    diffs[ii] = </a:t>
-            </a:r>
-            <a:r>
-              <a:rPr lang="en-US" sz="1100" dirty="0" err="1">
-                <a:solidFill>
-                  <a:srgbClr val="0070C0"/>
-                </a:solidFill>
-                <a:latin typeface="Menlo" panose="020B0609030804020204" pitchFamily="49" charset="0"/>
-                <a:ea typeface="Menlo" panose="020B0609030804020204" pitchFamily="49" charset="0"/>
-                <a:cs typeface="Menlo" panose="020B0609030804020204" pitchFamily="49" charset="0"/>
-              </a:rPr>
-              <a:t>np.mean</a:t>
-            </a:r>
-            <a:r>
-              <a:rPr lang="en-US" sz="1100" dirty="0">
-                <a:solidFill>
-                  <a:srgbClr val="0070C0"/>
-                </a:solidFill>
-                <a:latin typeface="Menlo" panose="020B0609030804020204" pitchFamily="49" charset="0"/>
-                <a:ea typeface="Menlo" panose="020B0609030804020204" pitchFamily="49" charset="0"/>
-                <a:cs typeface="Menlo" panose="020B0609030804020204" pitchFamily="49" charset="0"/>
-              </a:rPr>
-              <a:t>(split2) - </a:t>
-            </a:r>
-            <a:r>
-              <a:rPr lang="en-US" sz="1100" dirty="0" err="1">
-                <a:solidFill>
-                  <a:srgbClr val="0070C0"/>
-                </a:solidFill>
-                <a:latin typeface="Menlo" panose="020B0609030804020204" pitchFamily="49" charset="0"/>
-                <a:ea typeface="Menlo" panose="020B0609030804020204" pitchFamily="49" charset="0"/>
-                <a:cs typeface="Menlo" panose="020B0609030804020204" pitchFamily="49" charset="0"/>
-              </a:rPr>
-              <a:t>np.mean</a:t>
-            </a:r>
-            <a:r>
-              <a:rPr lang="en-US" sz="1100" dirty="0">
-                <a:solidFill>
-                  <a:srgbClr val="0070C0"/>
-                </a:solidFill>
-                <a:latin typeface="Menlo" panose="020B0609030804020204" pitchFamily="49" charset="0"/>
-                <a:ea typeface="Menlo" panose="020B0609030804020204" pitchFamily="49" charset="0"/>
-                <a:cs typeface="Menlo" panose="020B0609030804020204" pitchFamily="49" charset="0"/>
-              </a:rPr>
-              <a:t>(split1)</a:t>
-            </a:r>
-          </a:p>
-          <a:p>
-            <a:r>
-              <a:rPr lang="en-US" sz="1100" dirty="0">
-                <a:solidFill>
-                  <a:srgbClr val="0070C0"/>
-                </a:solidFill>
-                <a:latin typeface="Menlo" panose="020B0609030804020204" pitchFamily="49" charset="0"/>
-                <a:ea typeface="Menlo" panose="020B0609030804020204" pitchFamily="49" charset="0"/>
-                <a:cs typeface="Menlo" panose="020B0609030804020204" pitchFamily="49" charset="0"/>
-              </a:rPr>
-              <a:t>    if diffs[ii] &lt;= </a:t>
-            </a:r>
-            <a:r>
-              <a:rPr lang="en-US" sz="1100" dirty="0" err="1">
-                <a:solidFill>
-                  <a:srgbClr val="0070C0"/>
-                </a:solidFill>
-                <a:latin typeface="Menlo" panose="020B0609030804020204" pitchFamily="49" charset="0"/>
-                <a:ea typeface="Menlo" panose="020B0609030804020204" pitchFamily="49" charset="0"/>
-                <a:cs typeface="Menlo" panose="020B0609030804020204" pitchFamily="49" charset="0"/>
-              </a:rPr>
-              <a:t>diff_AB</a:t>
-            </a:r>
-            <a:r>
-              <a:rPr lang="en-US" sz="1100" dirty="0">
-                <a:solidFill>
-                  <a:srgbClr val="0070C0"/>
-                </a:solidFill>
-                <a:latin typeface="Menlo" panose="020B0609030804020204" pitchFamily="49" charset="0"/>
-                <a:ea typeface="Menlo" panose="020B0609030804020204" pitchFamily="49" charset="0"/>
-                <a:cs typeface="Menlo" panose="020B0609030804020204" pitchFamily="49" charset="0"/>
-              </a:rPr>
-              <a:t>:</a:t>
-            </a:r>
-          </a:p>
-          <a:p>
-            <a:r>
-              <a:rPr lang="en-US" sz="1100" dirty="0">
-                <a:solidFill>
-                  <a:srgbClr val="0070C0"/>
-                </a:solidFill>
-                <a:latin typeface="Menlo" panose="020B0609030804020204" pitchFamily="49" charset="0"/>
-                <a:ea typeface="Menlo" panose="020B0609030804020204" pitchFamily="49" charset="0"/>
-                <a:cs typeface="Menlo" panose="020B0609030804020204" pitchFamily="49" charset="0"/>
-              </a:rPr>
-              <a:t>        counter += 1</a:t>
-            </a:r>
-          </a:p>
-          <a:p>
-            <a:endParaRPr lang="en-US" sz="1100" dirty="0">
+            <a:endParaRPr lang="en-US" sz="1000" dirty="0">
               <a:solidFill>
                 <a:srgbClr val="0070C0"/>
               </a:solidFill>
@@ -15343,7 +15161,7 @@
           </a:p>
           <a:p>
             <a:r>
-              <a:rPr lang="en-US" sz="1100" dirty="0" err="1">
+              <a:rPr lang="en-US" sz="1000" dirty="0">
                 <a:solidFill>
                   <a:srgbClr val="0070C0"/>
                 </a:solidFill>
@@ -15351,10 +15169,10 @@
                 <a:ea typeface="Menlo" panose="020B0609030804020204" pitchFamily="49" charset="0"/>
                 <a:cs typeface="Menlo" panose="020B0609030804020204" pitchFamily="49" charset="0"/>
               </a:rPr>
-              <a:t>diffs_mean</a:t>
-            </a:r>
-            <a:r>
-              <a:rPr lang="en-US" sz="1100" dirty="0">
+              <a:t>C = </a:t>
+            </a:r>
+            <a:r>
+              <a:rPr lang="en-US" sz="1000" dirty="0" err="1">
                 <a:solidFill>
                   <a:srgbClr val="0070C0"/>
                 </a:solidFill>
@@ -15362,10 +15180,10 @@
                 <a:ea typeface="Menlo" panose="020B0609030804020204" pitchFamily="49" charset="0"/>
                 <a:cs typeface="Menlo" panose="020B0609030804020204" pitchFamily="49" charset="0"/>
               </a:rPr>
-              <a:t> = </a:t>
-            </a:r>
-            <a:r>
-              <a:rPr lang="en-US" sz="1100" dirty="0" err="1">
+              <a:t>np.concatenate</a:t>
+            </a:r>
+            <a:r>
+              <a:rPr lang="en-US" sz="1000" dirty="0">
                 <a:solidFill>
                   <a:srgbClr val="0070C0"/>
                 </a:solidFill>
@@ -15373,274 +15191,11 @@
                 <a:ea typeface="Menlo" panose="020B0609030804020204" pitchFamily="49" charset="0"/>
                 <a:cs typeface="Menlo" panose="020B0609030804020204" pitchFamily="49" charset="0"/>
               </a:rPr>
-              <a:t>np.mean</a:t>
-            </a:r>
-            <a:r>
-              <a:rPr lang="en-US" sz="1100" dirty="0">
-                <a:solidFill>
-                  <a:srgbClr val="0070C0"/>
-                </a:solidFill>
-                <a:latin typeface="Menlo" panose="020B0609030804020204" pitchFamily="49" charset="0"/>
-                <a:ea typeface="Menlo" panose="020B0609030804020204" pitchFamily="49" charset="0"/>
-                <a:cs typeface="Menlo" panose="020B0609030804020204" pitchFamily="49" charset="0"/>
-              </a:rPr>
-              <a:t>(diffs)   </a:t>
+              <a:t>((A,B)) # Combined</a:t>
             </a:r>
           </a:p>
           <a:p>
-            <a:r>
-              <a:rPr lang="en-US" sz="1100" dirty="0" err="1">
-                <a:solidFill>
-                  <a:srgbClr val="0070C0"/>
-                </a:solidFill>
-                <a:latin typeface="Menlo" panose="020B0609030804020204" pitchFamily="49" charset="0"/>
-                <a:ea typeface="Menlo" panose="020B0609030804020204" pitchFamily="49" charset="0"/>
-                <a:cs typeface="Menlo" panose="020B0609030804020204" pitchFamily="49" charset="0"/>
-              </a:rPr>
-              <a:t>diffs_std</a:t>
-            </a:r>
-            <a:r>
-              <a:rPr lang="en-US" sz="1100" dirty="0">
-                <a:solidFill>
-                  <a:srgbClr val="0070C0"/>
-                </a:solidFill>
-                <a:latin typeface="Menlo" panose="020B0609030804020204" pitchFamily="49" charset="0"/>
-                <a:ea typeface="Menlo" panose="020B0609030804020204" pitchFamily="49" charset="0"/>
-                <a:cs typeface="Menlo" panose="020B0609030804020204" pitchFamily="49" charset="0"/>
-              </a:rPr>
-              <a:t>  = </a:t>
-            </a:r>
-            <a:r>
-              <a:rPr lang="en-US" sz="1100" dirty="0" err="1">
-                <a:solidFill>
-                  <a:srgbClr val="0070C0"/>
-                </a:solidFill>
-                <a:latin typeface="Menlo" panose="020B0609030804020204" pitchFamily="49" charset="0"/>
-                <a:ea typeface="Menlo" panose="020B0609030804020204" pitchFamily="49" charset="0"/>
-                <a:cs typeface="Menlo" panose="020B0609030804020204" pitchFamily="49" charset="0"/>
-              </a:rPr>
-              <a:t>np.std</a:t>
-            </a:r>
-            <a:r>
-              <a:rPr lang="en-US" sz="1100" dirty="0">
-                <a:solidFill>
-                  <a:srgbClr val="0070C0"/>
-                </a:solidFill>
-                <a:latin typeface="Menlo" panose="020B0609030804020204" pitchFamily="49" charset="0"/>
-                <a:ea typeface="Menlo" panose="020B0609030804020204" pitchFamily="49" charset="0"/>
-                <a:cs typeface="Menlo" panose="020B0609030804020204" pitchFamily="49" charset="0"/>
-              </a:rPr>
-              <a:t>(diffs)</a:t>
-            </a:r>
-          </a:p>
-          <a:p>
-            <a:r>
-              <a:rPr lang="en-US" sz="1100" dirty="0">
-                <a:solidFill>
-                  <a:srgbClr val="0070C0"/>
-                </a:solidFill>
-                <a:latin typeface="Menlo" panose="020B0609030804020204" pitchFamily="49" charset="0"/>
-                <a:ea typeface="Menlo" panose="020B0609030804020204" pitchFamily="49" charset="0"/>
-                <a:cs typeface="Menlo" panose="020B0609030804020204" pitchFamily="49" charset="0"/>
-              </a:rPr>
-              <a:t>print(</a:t>
-            </a:r>
-            <a:r>
-              <a:rPr lang="en-US" sz="1100" dirty="0" err="1">
-                <a:solidFill>
-                  <a:srgbClr val="0070C0"/>
-                </a:solidFill>
-                <a:latin typeface="Menlo" panose="020B0609030804020204" pitchFamily="49" charset="0"/>
-                <a:ea typeface="Menlo" panose="020B0609030804020204" pitchFamily="49" charset="0"/>
-                <a:cs typeface="Menlo" panose="020B0609030804020204" pitchFamily="49" charset="0"/>
-              </a:rPr>
-              <a:t>f"diff_AB</a:t>
-            </a:r>
-            <a:r>
-              <a:rPr lang="en-US" sz="1100" dirty="0">
-                <a:solidFill>
-                  <a:srgbClr val="0070C0"/>
-                </a:solidFill>
-                <a:latin typeface="Menlo" panose="020B0609030804020204" pitchFamily="49" charset="0"/>
-                <a:ea typeface="Menlo" panose="020B0609030804020204" pitchFamily="49" charset="0"/>
-                <a:cs typeface="Menlo" panose="020B0609030804020204" pitchFamily="49" charset="0"/>
-              </a:rPr>
-              <a:t>    = {diff_AB:.5f}")   </a:t>
-            </a:r>
-            <a:r>
-              <a:rPr lang="en-US" sz="1100" dirty="0">
-                <a:solidFill>
-                  <a:srgbClr val="00B050"/>
-                </a:solidFill>
-                <a:latin typeface="Menlo" panose="020B0609030804020204" pitchFamily="49" charset="0"/>
-                <a:ea typeface="Menlo" panose="020B0609030804020204" pitchFamily="49" charset="0"/>
-                <a:cs typeface="Menlo" panose="020B0609030804020204" pitchFamily="49" charset="0"/>
-              </a:rPr>
-              <a:t>  # 0.4</a:t>
-            </a:r>
-          </a:p>
-          <a:p>
-            <a:r>
-              <a:rPr lang="en-US" sz="1100" dirty="0">
-                <a:solidFill>
-                  <a:srgbClr val="0070C0"/>
-                </a:solidFill>
-                <a:latin typeface="Menlo" panose="020B0609030804020204" pitchFamily="49" charset="0"/>
-                <a:ea typeface="Menlo" panose="020B0609030804020204" pitchFamily="49" charset="0"/>
-                <a:cs typeface="Menlo" panose="020B0609030804020204" pitchFamily="49" charset="0"/>
-              </a:rPr>
-              <a:t>print(</a:t>
-            </a:r>
-            <a:r>
-              <a:rPr lang="en-US" sz="1100" dirty="0" err="1">
-                <a:solidFill>
-                  <a:srgbClr val="0070C0"/>
-                </a:solidFill>
-                <a:latin typeface="Menlo" panose="020B0609030804020204" pitchFamily="49" charset="0"/>
-                <a:ea typeface="Menlo" panose="020B0609030804020204" pitchFamily="49" charset="0"/>
-                <a:cs typeface="Menlo" panose="020B0609030804020204" pitchFamily="49" charset="0"/>
-              </a:rPr>
-              <a:t>f"diffs</a:t>
-            </a:r>
-            <a:r>
-              <a:rPr lang="en-US" sz="1100" dirty="0">
-                <a:solidFill>
-                  <a:srgbClr val="0070C0"/>
-                </a:solidFill>
-                <a:latin typeface="Menlo" panose="020B0609030804020204" pitchFamily="49" charset="0"/>
-                <a:ea typeface="Menlo" panose="020B0609030804020204" pitchFamily="49" charset="0"/>
-                <a:cs typeface="Menlo" panose="020B0609030804020204" pitchFamily="49" charset="0"/>
-              </a:rPr>
-              <a:t> mean = {diffs_mean:.5f}")</a:t>
-            </a:r>
-            <a:r>
-              <a:rPr lang="en-US" sz="1100" dirty="0">
-                <a:solidFill>
-                  <a:srgbClr val="00B050"/>
-                </a:solidFill>
-                <a:latin typeface="Menlo" panose="020B0609030804020204" pitchFamily="49" charset="0"/>
-                <a:ea typeface="Menlo" panose="020B0609030804020204" pitchFamily="49" charset="0"/>
-                <a:cs typeface="Menlo" panose="020B0609030804020204" pitchFamily="49" charset="0"/>
-              </a:rPr>
-              <a:t>  # 0</a:t>
-            </a:r>
-          </a:p>
-          <a:p>
-            <a:r>
-              <a:rPr lang="en-US" sz="1100" dirty="0">
-                <a:solidFill>
-                  <a:srgbClr val="0070C0"/>
-                </a:solidFill>
-                <a:latin typeface="Menlo" panose="020B0609030804020204" pitchFamily="49" charset="0"/>
-                <a:ea typeface="Menlo" panose="020B0609030804020204" pitchFamily="49" charset="0"/>
-                <a:cs typeface="Menlo" panose="020B0609030804020204" pitchFamily="49" charset="0"/>
-              </a:rPr>
-              <a:t>print(</a:t>
-            </a:r>
-            <a:r>
-              <a:rPr lang="en-US" sz="1100" dirty="0" err="1">
-                <a:solidFill>
-                  <a:srgbClr val="0070C0"/>
-                </a:solidFill>
-                <a:latin typeface="Menlo" panose="020B0609030804020204" pitchFamily="49" charset="0"/>
-                <a:ea typeface="Menlo" panose="020B0609030804020204" pitchFamily="49" charset="0"/>
-                <a:cs typeface="Menlo" panose="020B0609030804020204" pitchFamily="49" charset="0"/>
-              </a:rPr>
-              <a:t>f"diffs</a:t>
-            </a:r>
-            <a:r>
-              <a:rPr lang="en-US" sz="1100" dirty="0">
-                <a:solidFill>
-                  <a:srgbClr val="0070C0"/>
-                </a:solidFill>
-                <a:latin typeface="Menlo" panose="020B0609030804020204" pitchFamily="49" charset="0"/>
-                <a:ea typeface="Menlo" panose="020B0609030804020204" pitchFamily="49" charset="0"/>
-                <a:cs typeface="Menlo" panose="020B0609030804020204" pitchFamily="49" charset="0"/>
-              </a:rPr>
-              <a:t> std  = {diffs_std:.5f}") </a:t>
-            </a:r>
-            <a:r>
-              <a:rPr lang="en-US" sz="1100" dirty="0">
-                <a:solidFill>
-                  <a:srgbClr val="00B050"/>
-                </a:solidFill>
-                <a:latin typeface="Menlo" panose="020B0609030804020204" pitchFamily="49" charset="0"/>
-                <a:ea typeface="Menlo" panose="020B0609030804020204" pitchFamily="49" charset="0"/>
-                <a:cs typeface="Menlo" panose="020B0609030804020204" pitchFamily="49" charset="0"/>
-              </a:rPr>
-              <a:t>  # 0.03</a:t>
-            </a:r>
-          </a:p>
-          <a:p>
-            <a:r>
-              <a:rPr lang="en-US" sz="1100" dirty="0">
-                <a:solidFill>
-                  <a:srgbClr val="0070C0"/>
-                </a:solidFill>
-                <a:latin typeface="Menlo" panose="020B0609030804020204" pitchFamily="49" charset="0"/>
-                <a:ea typeface="Menlo" panose="020B0609030804020204" pitchFamily="49" charset="0"/>
-                <a:cs typeface="Menlo" panose="020B0609030804020204" pitchFamily="49" charset="0"/>
-              </a:rPr>
-              <a:t>print(</a:t>
-            </a:r>
-            <a:r>
-              <a:rPr lang="en-US" sz="1100" dirty="0" err="1">
-                <a:solidFill>
-                  <a:srgbClr val="0070C0"/>
-                </a:solidFill>
-                <a:latin typeface="Menlo" panose="020B0609030804020204" pitchFamily="49" charset="0"/>
-                <a:ea typeface="Menlo" panose="020B0609030804020204" pitchFamily="49" charset="0"/>
-                <a:cs typeface="Menlo" panose="020B0609030804020204" pitchFamily="49" charset="0"/>
-              </a:rPr>
-              <a:t>f"P</a:t>
-            </a:r>
-            <a:r>
-              <a:rPr lang="en-US" sz="1100" dirty="0">
-                <a:solidFill>
-                  <a:srgbClr val="0070C0"/>
-                </a:solidFill>
-                <a:latin typeface="Menlo" panose="020B0609030804020204" pitchFamily="49" charset="0"/>
-                <a:ea typeface="Menlo" panose="020B0609030804020204" pitchFamily="49" charset="0"/>
-                <a:cs typeface="Menlo" panose="020B0609030804020204" pitchFamily="49" charset="0"/>
-              </a:rPr>
-              <a:t>-value    = {counter/</a:t>
-            </a:r>
-            <a:r>
-              <a:rPr lang="en-US" sz="1100" dirty="0" err="1">
-                <a:solidFill>
-                  <a:srgbClr val="0070C0"/>
-                </a:solidFill>
-                <a:latin typeface="Menlo" panose="020B0609030804020204" pitchFamily="49" charset="0"/>
-                <a:ea typeface="Menlo" panose="020B0609030804020204" pitchFamily="49" charset="0"/>
-                <a:cs typeface="Menlo" panose="020B0609030804020204" pitchFamily="49" charset="0"/>
-              </a:rPr>
-              <a:t>N_shuf</a:t>
-            </a:r>
-            <a:r>
-              <a:rPr lang="en-US" sz="1100" dirty="0">
-                <a:solidFill>
-                  <a:srgbClr val="0070C0"/>
-                </a:solidFill>
-                <a:latin typeface="Menlo" panose="020B0609030804020204" pitchFamily="49" charset="0"/>
-                <a:ea typeface="Menlo" panose="020B0609030804020204" pitchFamily="49" charset="0"/>
-                <a:cs typeface="Menlo" panose="020B0609030804020204" pitchFamily="49" charset="0"/>
-              </a:rPr>
-              <a:t>}") </a:t>
-            </a:r>
-            <a:r>
-              <a:rPr lang="en-US" sz="1100" dirty="0">
-                <a:solidFill>
-                  <a:srgbClr val="00B050"/>
-                </a:solidFill>
-                <a:latin typeface="Menlo" panose="020B0609030804020204" pitchFamily="49" charset="0"/>
-                <a:ea typeface="Menlo" panose="020B0609030804020204" pitchFamily="49" charset="0"/>
-                <a:cs typeface="Menlo" panose="020B0609030804020204" pitchFamily="49" charset="0"/>
-              </a:rPr>
-              <a:t> # 0.0002</a:t>
-            </a:r>
-          </a:p>
-          <a:p>
-            <a:endParaRPr lang="en-US" sz="1100" dirty="0">
+            <a:endParaRPr lang="en-US" sz="1000" dirty="0">
               <a:solidFill>
                 <a:srgbClr val="0070C0"/>
               </a:solidFill>
@@ -15651,7 +15206,7 @@
           </a:p>
           <a:p>
             <a:r>
-              <a:rPr lang="en-US" sz="1100" dirty="0" err="1">
+              <a:rPr lang="en-US" sz="1000" dirty="0" err="1">
                 <a:solidFill>
                   <a:srgbClr val="0070C0"/>
                 </a:solidFill>
@@ -15659,10 +15214,10 @@
                 <a:ea typeface="Menlo" panose="020B0609030804020204" pitchFamily="49" charset="0"/>
                 <a:cs typeface="Menlo" panose="020B0609030804020204" pitchFamily="49" charset="0"/>
               </a:rPr>
-              <a:t>plt.rcParams</a:t>
-            </a:r>
-            <a:r>
-              <a:rPr lang="en-US" sz="1100" dirty="0">
+              <a:t>N_shuf</a:t>
+            </a:r>
+            <a:r>
+              <a:rPr lang="en-US" sz="1000" dirty="0">
                 <a:solidFill>
                   <a:srgbClr val="0070C0"/>
                 </a:solidFill>
@@ -15670,45 +15225,12 @@
                 <a:ea typeface="Menlo" panose="020B0609030804020204" pitchFamily="49" charset="0"/>
                 <a:cs typeface="Menlo" panose="020B0609030804020204" pitchFamily="49" charset="0"/>
               </a:rPr>
-              <a:t>["</a:t>
-            </a:r>
-            <a:r>
-              <a:rPr lang="en-US" sz="1100" dirty="0" err="1">
-                <a:solidFill>
-                  <a:srgbClr val="0070C0"/>
-                </a:solidFill>
-                <a:latin typeface="Menlo" panose="020B0609030804020204" pitchFamily="49" charset="0"/>
-                <a:ea typeface="Menlo" panose="020B0609030804020204" pitchFamily="49" charset="0"/>
-                <a:cs typeface="Menlo" panose="020B0609030804020204" pitchFamily="49" charset="0"/>
-              </a:rPr>
-              <a:t>figure.figsize</a:t>
-            </a:r>
-            <a:r>
-              <a:rPr lang="en-US" sz="1100" dirty="0">
-                <a:solidFill>
-                  <a:srgbClr val="0070C0"/>
-                </a:solidFill>
-                <a:latin typeface="Menlo" panose="020B0609030804020204" pitchFamily="49" charset="0"/>
-                <a:ea typeface="Menlo" panose="020B0609030804020204" pitchFamily="49" charset="0"/>
-                <a:cs typeface="Menlo" panose="020B0609030804020204" pitchFamily="49" charset="0"/>
-              </a:rPr>
-              <a:t>"] = (8, 4) </a:t>
-            </a:r>
-            <a:r>
-              <a:rPr lang="en-US" sz="1100" dirty="0">
-                <a:solidFill>
-                  <a:srgbClr val="00B050"/>
-                </a:solidFill>
-                <a:latin typeface="Menlo" panose="020B0609030804020204" pitchFamily="49" charset="0"/>
-                <a:ea typeface="Menlo" panose="020B0609030804020204" pitchFamily="49" charset="0"/>
-                <a:cs typeface="Menlo" panose="020B0609030804020204" pitchFamily="49" charset="0"/>
-              </a:rPr>
-              <a:t># (width, height)</a:t>
+              <a:t> = 5000</a:t>
             </a:r>
           </a:p>
           <a:p>
             <a:r>
-              <a:rPr lang="en-US" sz="1100" dirty="0">
+              <a:rPr lang="en-US" sz="1000" dirty="0">
                 <a:solidFill>
                   <a:srgbClr val="0070C0"/>
                 </a:solidFill>
@@ -15716,78 +15238,12 @@
                 <a:ea typeface="Menlo" panose="020B0609030804020204" pitchFamily="49" charset="0"/>
                 <a:cs typeface="Menlo" panose="020B0609030804020204" pitchFamily="49" charset="0"/>
               </a:rPr>
-              <a:t>fig, ax = </a:t>
-            </a:r>
-            <a:r>
-              <a:rPr lang="en-US" sz="1100" dirty="0" err="1">
-                <a:solidFill>
-                  <a:srgbClr val="0070C0"/>
-                </a:solidFill>
-                <a:latin typeface="Menlo" panose="020B0609030804020204" pitchFamily="49" charset="0"/>
-                <a:ea typeface="Menlo" panose="020B0609030804020204" pitchFamily="49" charset="0"/>
-                <a:cs typeface="Menlo" panose="020B0609030804020204" pitchFamily="49" charset="0"/>
-              </a:rPr>
-              <a:t>plt.subplots</a:t>
-            </a:r>
-            <a:r>
-              <a:rPr lang="en-US" sz="1100" dirty="0">
-                <a:solidFill>
-                  <a:srgbClr val="0070C0"/>
-                </a:solidFill>
-                <a:latin typeface="Menlo" panose="020B0609030804020204" pitchFamily="49" charset="0"/>
-                <a:ea typeface="Menlo" panose="020B0609030804020204" pitchFamily="49" charset="0"/>
-                <a:cs typeface="Menlo" panose="020B0609030804020204" pitchFamily="49" charset="0"/>
-              </a:rPr>
-              <a:t>(</a:t>
-            </a:r>
-            <a:r>
-              <a:rPr lang="en-US" sz="1100" dirty="0" err="1">
-                <a:solidFill>
-                  <a:srgbClr val="0070C0"/>
-                </a:solidFill>
-                <a:latin typeface="Menlo" panose="020B0609030804020204" pitchFamily="49" charset="0"/>
-                <a:ea typeface="Menlo" panose="020B0609030804020204" pitchFamily="49" charset="0"/>
-                <a:cs typeface="Menlo" panose="020B0609030804020204" pitchFamily="49" charset="0"/>
-              </a:rPr>
-              <a:t>nrows</a:t>
-            </a:r>
-            <a:r>
-              <a:rPr lang="en-US" sz="1100" dirty="0">
-                <a:solidFill>
-                  <a:srgbClr val="0070C0"/>
-                </a:solidFill>
-                <a:latin typeface="Menlo" panose="020B0609030804020204" pitchFamily="49" charset="0"/>
-                <a:ea typeface="Menlo" panose="020B0609030804020204" pitchFamily="49" charset="0"/>
-                <a:cs typeface="Menlo" panose="020B0609030804020204" pitchFamily="49" charset="0"/>
-              </a:rPr>
-              <a:t>=1, </a:t>
-            </a:r>
-            <a:r>
-              <a:rPr lang="en-US" sz="1100" dirty="0" err="1">
-                <a:solidFill>
-                  <a:srgbClr val="0070C0"/>
-                </a:solidFill>
-                <a:latin typeface="Menlo" panose="020B0609030804020204" pitchFamily="49" charset="0"/>
-                <a:ea typeface="Menlo" panose="020B0609030804020204" pitchFamily="49" charset="0"/>
-                <a:cs typeface="Menlo" panose="020B0609030804020204" pitchFamily="49" charset="0"/>
-              </a:rPr>
-              <a:t>ncols</a:t>
-            </a:r>
-            <a:r>
-              <a:rPr lang="en-US" sz="1100" dirty="0">
-                <a:solidFill>
-                  <a:srgbClr val="0070C0"/>
-                </a:solidFill>
-                <a:latin typeface="Menlo" panose="020B0609030804020204" pitchFamily="49" charset="0"/>
-                <a:ea typeface="Menlo" panose="020B0609030804020204" pitchFamily="49" charset="0"/>
-                <a:cs typeface="Menlo" panose="020B0609030804020204" pitchFamily="49" charset="0"/>
-              </a:rPr>
-              <a:t>=1)</a:t>
+              <a:t>counter = 0 # count extreme diffs</a:t>
             </a:r>
           </a:p>
           <a:p>
             <a:r>
-              <a:rPr lang="en-US" sz="1100" dirty="0" err="1">
+              <a:rPr lang="en-US" sz="1000" dirty="0">
                 <a:solidFill>
                   <a:srgbClr val="0070C0"/>
                 </a:solidFill>
@@ -15795,10 +15251,10 @@
                 <a:ea typeface="Menlo" panose="020B0609030804020204" pitchFamily="49" charset="0"/>
                 <a:cs typeface="Menlo" panose="020B0609030804020204" pitchFamily="49" charset="0"/>
               </a:rPr>
-              <a:t>ax.hist</a:t>
-            </a:r>
-            <a:r>
-              <a:rPr lang="en-US" sz="1100" dirty="0">
+              <a:t>diffs = </a:t>
+            </a:r>
+            <a:r>
+              <a:rPr lang="en-US" sz="1000" dirty="0" err="1">
                 <a:solidFill>
                   <a:srgbClr val="0070C0"/>
                 </a:solidFill>
@@ -15806,10 +15262,21 @@
                 <a:ea typeface="Menlo" panose="020B0609030804020204" pitchFamily="49" charset="0"/>
                 <a:cs typeface="Menlo" panose="020B0609030804020204" pitchFamily="49" charset="0"/>
               </a:rPr>
+              <a:t>np.zeros</a:t>
+            </a:r>
+            <a:r>
+              <a:rPr lang="en-US" sz="1000" dirty="0">
+                <a:solidFill>
+                  <a:srgbClr val="0070C0"/>
+                </a:solidFill>
+                <a:latin typeface="Menlo" panose="020B0609030804020204" pitchFamily="49" charset="0"/>
+                <a:ea typeface="Menlo" panose="020B0609030804020204" pitchFamily="49" charset="0"/>
+                <a:cs typeface="Menlo" panose="020B0609030804020204" pitchFamily="49" charset="0"/>
+              </a:rPr>
               <a:t>(</a:t>
             </a:r>
             <a:r>
-              <a:rPr lang="en-US" sz="1100" dirty="0" err="1">
+              <a:rPr lang="en-US" sz="1000" dirty="0" err="1">
                 <a:solidFill>
                   <a:srgbClr val="0070C0"/>
                 </a:solidFill>
@@ -15817,10 +15284,10 @@
                 <a:ea typeface="Menlo" panose="020B0609030804020204" pitchFamily="49" charset="0"/>
                 <a:cs typeface="Menlo" panose="020B0609030804020204" pitchFamily="49" charset="0"/>
               </a:rPr>
-              <a:t>diffs,bins</a:t>
-            </a:r>
-            <a:r>
-              <a:rPr lang="en-US" sz="1100" dirty="0">
+              <a:t>N_shuf</a:t>
+            </a:r>
+            <a:r>
+              <a:rPr lang="en-US" sz="1000" dirty="0">
                 <a:solidFill>
                   <a:srgbClr val="0070C0"/>
                 </a:solidFill>
@@ -15828,12 +15295,34 @@
                 <a:ea typeface="Menlo" panose="020B0609030804020204" pitchFamily="49" charset="0"/>
                 <a:cs typeface="Menlo" panose="020B0609030804020204" pitchFamily="49" charset="0"/>
               </a:rPr>
-              <a:t>=100)</a:t>
+              <a:t>, </a:t>
+            </a:r>
+            <a:r>
+              <a:rPr lang="en-US" sz="1000" dirty="0" err="1">
+                <a:solidFill>
+                  <a:srgbClr val="0070C0"/>
+                </a:solidFill>
+                <a:latin typeface="Menlo" panose="020B0609030804020204" pitchFamily="49" charset="0"/>
+                <a:ea typeface="Menlo" panose="020B0609030804020204" pitchFamily="49" charset="0"/>
+                <a:cs typeface="Menlo" panose="020B0609030804020204" pitchFamily="49" charset="0"/>
+              </a:rPr>
+              <a:t>dtype</a:t>
+            </a:r>
+            <a:r>
+              <a:rPr lang="en-US" sz="1000" dirty="0">
+                <a:solidFill>
+                  <a:srgbClr val="0070C0"/>
+                </a:solidFill>
+                <a:latin typeface="Menlo" panose="020B0609030804020204" pitchFamily="49" charset="0"/>
+                <a:ea typeface="Menlo" panose="020B0609030804020204" pitchFamily="49" charset="0"/>
+                <a:cs typeface="Menlo" panose="020B0609030804020204" pitchFamily="49" charset="0"/>
+              </a:rPr>
+              <a:t>=float)</a:t>
             </a:r>
           </a:p>
           <a:p>
             <a:r>
-              <a:rPr lang="en-US" sz="1100" dirty="0" err="1">
+              <a:rPr lang="en-US" sz="1000" dirty="0" err="1">
                 <a:solidFill>
                   <a:srgbClr val="0070C0"/>
                 </a:solidFill>
@@ -15841,10 +15330,10 @@
                 <a:ea typeface="Menlo" panose="020B0609030804020204" pitchFamily="49" charset="0"/>
                 <a:cs typeface="Menlo" panose="020B0609030804020204" pitchFamily="49" charset="0"/>
               </a:rPr>
-              <a:t>ax.set_xlim</a:t>
-            </a:r>
-            <a:r>
-              <a:rPr lang="en-US" sz="1100" dirty="0">
+              <a:t>rng</a:t>
+            </a:r>
+            <a:r>
+              <a:rPr lang="en-US" sz="1000" dirty="0">
                 <a:solidFill>
                   <a:srgbClr val="0070C0"/>
                 </a:solidFill>
@@ -15852,12 +15341,34 @@
                 <a:ea typeface="Menlo" panose="020B0609030804020204" pitchFamily="49" charset="0"/>
                 <a:cs typeface="Menlo" panose="020B0609030804020204" pitchFamily="49" charset="0"/>
               </a:rPr>
-              <a:t>(left=0,right=0.2)</a:t>
+              <a:t> = </a:t>
+            </a:r>
+            <a:r>
+              <a:rPr lang="en-US" sz="1000" dirty="0" err="1">
+                <a:solidFill>
+                  <a:srgbClr val="0070C0"/>
+                </a:solidFill>
+                <a:latin typeface="Menlo" panose="020B0609030804020204" pitchFamily="49" charset="0"/>
+                <a:ea typeface="Menlo" panose="020B0609030804020204" pitchFamily="49" charset="0"/>
+                <a:cs typeface="Menlo" panose="020B0609030804020204" pitchFamily="49" charset="0"/>
+              </a:rPr>
+              <a:t>np.random.default_rng</a:t>
+            </a:r>
+            <a:r>
+              <a:rPr lang="en-US" sz="1000" dirty="0">
+                <a:solidFill>
+                  <a:srgbClr val="0070C0"/>
+                </a:solidFill>
+                <a:latin typeface="Menlo" panose="020B0609030804020204" pitchFamily="49" charset="0"/>
+                <a:ea typeface="Menlo" panose="020B0609030804020204" pitchFamily="49" charset="0"/>
+                <a:cs typeface="Menlo" panose="020B0609030804020204" pitchFamily="49" charset="0"/>
+              </a:rPr>
+              <a:t>()</a:t>
             </a:r>
           </a:p>
           <a:p>
             <a:r>
-              <a:rPr lang="en-US" sz="1100" dirty="0" err="1">
+              <a:rPr lang="en-US" sz="1000" dirty="0">
                 <a:solidFill>
                   <a:srgbClr val="0070C0"/>
                 </a:solidFill>
@@ -15865,10 +15376,759 @@
                 <a:ea typeface="Menlo" panose="020B0609030804020204" pitchFamily="49" charset="0"/>
                 <a:cs typeface="Menlo" panose="020B0609030804020204" pitchFamily="49" charset="0"/>
               </a:rPr>
+              <a:t>for ii in range(</a:t>
+            </a:r>
+            <a:r>
+              <a:rPr lang="en-US" sz="1000" dirty="0" err="1">
+                <a:solidFill>
+                  <a:srgbClr val="0070C0"/>
+                </a:solidFill>
+                <a:latin typeface="Menlo" panose="020B0609030804020204" pitchFamily="49" charset="0"/>
+                <a:ea typeface="Menlo" panose="020B0609030804020204" pitchFamily="49" charset="0"/>
+                <a:cs typeface="Menlo" panose="020B0609030804020204" pitchFamily="49" charset="0"/>
+              </a:rPr>
+              <a:t>N_shuf</a:t>
+            </a:r>
+            <a:r>
+              <a:rPr lang="en-US" sz="1000" dirty="0">
+                <a:solidFill>
+                  <a:srgbClr val="0070C0"/>
+                </a:solidFill>
+                <a:latin typeface="Menlo" panose="020B0609030804020204" pitchFamily="49" charset="0"/>
+                <a:ea typeface="Menlo" panose="020B0609030804020204" pitchFamily="49" charset="0"/>
+                <a:cs typeface="Menlo" panose="020B0609030804020204" pitchFamily="49" charset="0"/>
+              </a:rPr>
+              <a:t>):</a:t>
+            </a:r>
+          </a:p>
+          <a:p>
+            <a:r>
+              <a:rPr lang="en-US" sz="1000" dirty="0">
+                <a:solidFill>
+                  <a:srgbClr val="0070C0"/>
+                </a:solidFill>
+                <a:latin typeface="Menlo" panose="020B0609030804020204" pitchFamily="49" charset="0"/>
+                <a:ea typeface="Menlo" panose="020B0609030804020204" pitchFamily="49" charset="0"/>
+                <a:cs typeface="Menlo" panose="020B0609030804020204" pitchFamily="49" charset="0"/>
+              </a:rPr>
+              <a:t>    </a:t>
+            </a:r>
+            <a:r>
+              <a:rPr lang="en-US" sz="1000" dirty="0" err="1">
+                <a:solidFill>
+                  <a:srgbClr val="0070C0"/>
+                </a:solidFill>
+                <a:latin typeface="Menlo" panose="020B0609030804020204" pitchFamily="49" charset="0"/>
+                <a:ea typeface="Menlo" panose="020B0609030804020204" pitchFamily="49" charset="0"/>
+                <a:cs typeface="Menlo" panose="020B0609030804020204" pitchFamily="49" charset="0"/>
+              </a:rPr>
+              <a:t>rng.shuffle</a:t>
+            </a:r>
+            <a:r>
+              <a:rPr lang="en-US" sz="1000" dirty="0">
+                <a:solidFill>
+                  <a:srgbClr val="0070C0"/>
+                </a:solidFill>
+                <a:latin typeface="Menlo" panose="020B0609030804020204" pitchFamily="49" charset="0"/>
+                <a:ea typeface="Menlo" panose="020B0609030804020204" pitchFamily="49" charset="0"/>
+                <a:cs typeface="Menlo" panose="020B0609030804020204" pitchFamily="49" charset="0"/>
+              </a:rPr>
+              <a:t>(C, axis = 0)</a:t>
+            </a:r>
+          </a:p>
+          <a:p>
+            <a:r>
+              <a:rPr lang="en-US" sz="1000" dirty="0">
+                <a:solidFill>
+                  <a:srgbClr val="0070C0"/>
+                </a:solidFill>
+                <a:latin typeface="Menlo" panose="020B0609030804020204" pitchFamily="49" charset="0"/>
+                <a:ea typeface="Menlo" panose="020B0609030804020204" pitchFamily="49" charset="0"/>
+                <a:cs typeface="Menlo" panose="020B0609030804020204" pitchFamily="49" charset="0"/>
+              </a:rPr>
+              <a:t>    split1 = C[:N]</a:t>
+            </a:r>
+          </a:p>
+          <a:p>
+            <a:r>
+              <a:rPr lang="en-US" sz="1000" dirty="0">
+                <a:solidFill>
+                  <a:srgbClr val="0070C0"/>
+                </a:solidFill>
+                <a:latin typeface="Menlo" panose="020B0609030804020204" pitchFamily="49" charset="0"/>
+                <a:ea typeface="Menlo" panose="020B0609030804020204" pitchFamily="49" charset="0"/>
+                <a:cs typeface="Menlo" panose="020B0609030804020204" pitchFamily="49" charset="0"/>
+              </a:rPr>
+              <a:t>    split2 = C[N:]</a:t>
+            </a:r>
+          </a:p>
+          <a:p>
+            <a:r>
+              <a:rPr lang="en-US" sz="1000" dirty="0">
+                <a:solidFill>
+                  <a:srgbClr val="0070C0"/>
+                </a:solidFill>
+                <a:latin typeface="Menlo" panose="020B0609030804020204" pitchFamily="49" charset="0"/>
+                <a:ea typeface="Menlo" panose="020B0609030804020204" pitchFamily="49" charset="0"/>
+                <a:cs typeface="Menlo" panose="020B0609030804020204" pitchFamily="49" charset="0"/>
+              </a:rPr>
+              <a:t>    diffs[ii] = </a:t>
+            </a:r>
+            <a:r>
+              <a:rPr lang="en-US" sz="1000" dirty="0" err="1">
+                <a:solidFill>
+                  <a:srgbClr val="0070C0"/>
+                </a:solidFill>
+                <a:latin typeface="Menlo" panose="020B0609030804020204" pitchFamily="49" charset="0"/>
+                <a:ea typeface="Menlo" panose="020B0609030804020204" pitchFamily="49" charset="0"/>
+                <a:cs typeface="Menlo" panose="020B0609030804020204" pitchFamily="49" charset="0"/>
+              </a:rPr>
+              <a:t>np.abs</a:t>
+            </a:r>
+            <a:r>
+              <a:rPr lang="en-US" sz="1000" dirty="0">
+                <a:solidFill>
+                  <a:srgbClr val="0070C0"/>
+                </a:solidFill>
+                <a:latin typeface="Menlo" panose="020B0609030804020204" pitchFamily="49" charset="0"/>
+                <a:ea typeface="Menlo" panose="020B0609030804020204" pitchFamily="49" charset="0"/>
+                <a:cs typeface="Menlo" panose="020B0609030804020204" pitchFamily="49" charset="0"/>
+              </a:rPr>
+              <a:t>(</a:t>
+            </a:r>
+            <a:r>
+              <a:rPr lang="en-US" sz="1000" dirty="0" err="1">
+                <a:solidFill>
+                  <a:srgbClr val="0070C0"/>
+                </a:solidFill>
+                <a:latin typeface="Menlo" panose="020B0609030804020204" pitchFamily="49" charset="0"/>
+                <a:ea typeface="Menlo" panose="020B0609030804020204" pitchFamily="49" charset="0"/>
+                <a:cs typeface="Menlo" panose="020B0609030804020204" pitchFamily="49" charset="0"/>
+              </a:rPr>
+              <a:t>np.mean</a:t>
+            </a:r>
+            <a:r>
+              <a:rPr lang="en-US" sz="1000" dirty="0">
+                <a:solidFill>
+                  <a:srgbClr val="0070C0"/>
+                </a:solidFill>
+                <a:latin typeface="Menlo" panose="020B0609030804020204" pitchFamily="49" charset="0"/>
+                <a:ea typeface="Menlo" panose="020B0609030804020204" pitchFamily="49" charset="0"/>
+                <a:cs typeface="Menlo" panose="020B0609030804020204" pitchFamily="49" charset="0"/>
+              </a:rPr>
+              <a:t>(split2) - </a:t>
+            </a:r>
+            <a:r>
+              <a:rPr lang="en-US" sz="1000" dirty="0" err="1">
+                <a:solidFill>
+                  <a:srgbClr val="0070C0"/>
+                </a:solidFill>
+                <a:latin typeface="Menlo" panose="020B0609030804020204" pitchFamily="49" charset="0"/>
+                <a:ea typeface="Menlo" panose="020B0609030804020204" pitchFamily="49" charset="0"/>
+                <a:cs typeface="Menlo" panose="020B0609030804020204" pitchFamily="49" charset="0"/>
+              </a:rPr>
+              <a:t>np.mean</a:t>
+            </a:r>
+            <a:r>
+              <a:rPr lang="en-US" sz="1000" dirty="0">
+                <a:solidFill>
+                  <a:srgbClr val="0070C0"/>
+                </a:solidFill>
+                <a:latin typeface="Menlo" panose="020B0609030804020204" pitchFamily="49" charset="0"/>
+                <a:ea typeface="Menlo" panose="020B0609030804020204" pitchFamily="49" charset="0"/>
+                <a:cs typeface="Menlo" panose="020B0609030804020204" pitchFamily="49" charset="0"/>
+              </a:rPr>
+              <a:t>(split1))</a:t>
+            </a:r>
+          </a:p>
+          <a:p>
+            <a:r>
+              <a:rPr lang="en-US" sz="1000" dirty="0">
+                <a:solidFill>
+                  <a:srgbClr val="0070C0"/>
+                </a:solidFill>
+                <a:latin typeface="Menlo" panose="020B0609030804020204" pitchFamily="49" charset="0"/>
+                <a:ea typeface="Menlo" panose="020B0609030804020204" pitchFamily="49" charset="0"/>
+                <a:cs typeface="Menlo" panose="020B0609030804020204" pitchFamily="49" charset="0"/>
+              </a:rPr>
+              <a:t>        </a:t>
+            </a:r>
+          </a:p>
+          <a:p>
+            <a:r>
+              <a:rPr lang="en-US" sz="1000" dirty="0">
+                <a:solidFill>
+                  <a:srgbClr val="0070C0"/>
+                </a:solidFill>
+                <a:latin typeface="Menlo" panose="020B0609030804020204" pitchFamily="49" charset="0"/>
+                <a:ea typeface="Menlo" panose="020B0609030804020204" pitchFamily="49" charset="0"/>
+                <a:cs typeface="Menlo" panose="020B0609030804020204" pitchFamily="49" charset="0"/>
+              </a:rPr>
+              <a:t>    if diffs[ii] &gt;= </a:t>
+            </a:r>
+            <a:r>
+              <a:rPr lang="en-US" sz="1000" dirty="0" err="1">
+                <a:solidFill>
+                  <a:srgbClr val="0070C0"/>
+                </a:solidFill>
+                <a:latin typeface="Menlo" panose="020B0609030804020204" pitchFamily="49" charset="0"/>
+                <a:ea typeface="Menlo" panose="020B0609030804020204" pitchFamily="49" charset="0"/>
+                <a:cs typeface="Menlo" panose="020B0609030804020204" pitchFamily="49" charset="0"/>
+              </a:rPr>
+              <a:t>diff_AB</a:t>
+            </a:r>
+            <a:r>
+              <a:rPr lang="en-US" sz="1000" dirty="0">
+                <a:solidFill>
+                  <a:srgbClr val="0070C0"/>
+                </a:solidFill>
+                <a:latin typeface="Menlo" panose="020B0609030804020204" pitchFamily="49" charset="0"/>
+                <a:ea typeface="Menlo" panose="020B0609030804020204" pitchFamily="49" charset="0"/>
+                <a:cs typeface="Menlo" panose="020B0609030804020204" pitchFamily="49" charset="0"/>
+              </a:rPr>
+              <a:t>:</a:t>
+            </a:r>
+          </a:p>
+          <a:p>
+            <a:r>
+              <a:rPr lang="en-US" sz="1000" dirty="0">
+                <a:solidFill>
+                  <a:srgbClr val="0070C0"/>
+                </a:solidFill>
+                <a:latin typeface="Menlo" panose="020B0609030804020204" pitchFamily="49" charset="0"/>
+                <a:ea typeface="Menlo" panose="020B0609030804020204" pitchFamily="49" charset="0"/>
+                <a:cs typeface="Menlo" panose="020B0609030804020204" pitchFamily="49" charset="0"/>
+              </a:rPr>
+              <a:t>        counter += 1</a:t>
+            </a:r>
+          </a:p>
+          <a:p>
+            <a:endParaRPr lang="en-US" sz="1000" dirty="0">
+              <a:solidFill>
+                <a:srgbClr val="0070C0"/>
+              </a:solidFill>
+              <a:latin typeface="Menlo" panose="020B0609030804020204" pitchFamily="49" charset="0"/>
+              <a:ea typeface="Menlo" panose="020B0609030804020204" pitchFamily="49" charset="0"/>
+              <a:cs typeface="Menlo" panose="020B0609030804020204" pitchFamily="49" charset="0"/>
+            </a:endParaRPr>
+          </a:p>
+          <a:p>
+            <a:r>
+              <a:rPr lang="en-US" sz="1000" dirty="0" err="1">
+                <a:solidFill>
+                  <a:srgbClr val="0070C0"/>
+                </a:solidFill>
+                <a:latin typeface="Menlo" panose="020B0609030804020204" pitchFamily="49" charset="0"/>
+                <a:ea typeface="Menlo" panose="020B0609030804020204" pitchFamily="49" charset="0"/>
+                <a:cs typeface="Menlo" panose="020B0609030804020204" pitchFamily="49" charset="0"/>
+              </a:rPr>
+              <a:t>diffs_mean</a:t>
+            </a:r>
+            <a:r>
+              <a:rPr lang="en-US" sz="1000" dirty="0">
+                <a:solidFill>
+                  <a:srgbClr val="0070C0"/>
+                </a:solidFill>
+                <a:latin typeface="Menlo" panose="020B0609030804020204" pitchFamily="49" charset="0"/>
+                <a:ea typeface="Menlo" panose="020B0609030804020204" pitchFamily="49" charset="0"/>
+                <a:cs typeface="Menlo" panose="020B0609030804020204" pitchFamily="49" charset="0"/>
+              </a:rPr>
+              <a:t> = </a:t>
+            </a:r>
+            <a:r>
+              <a:rPr lang="en-US" sz="1000" dirty="0" err="1">
+                <a:solidFill>
+                  <a:srgbClr val="0070C0"/>
+                </a:solidFill>
+                <a:latin typeface="Menlo" panose="020B0609030804020204" pitchFamily="49" charset="0"/>
+                <a:ea typeface="Menlo" panose="020B0609030804020204" pitchFamily="49" charset="0"/>
+                <a:cs typeface="Menlo" panose="020B0609030804020204" pitchFamily="49" charset="0"/>
+              </a:rPr>
+              <a:t>np.mean</a:t>
+            </a:r>
+            <a:r>
+              <a:rPr lang="en-US" sz="1000" dirty="0">
+                <a:solidFill>
+                  <a:srgbClr val="0070C0"/>
+                </a:solidFill>
+                <a:latin typeface="Menlo" panose="020B0609030804020204" pitchFamily="49" charset="0"/>
+                <a:ea typeface="Menlo" panose="020B0609030804020204" pitchFamily="49" charset="0"/>
+                <a:cs typeface="Menlo" panose="020B0609030804020204" pitchFamily="49" charset="0"/>
+              </a:rPr>
+              <a:t>(diffs)   </a:t>
+            </a:r>
+          </a:p>
+          <a:p>
+            <a:r>
+              <a:rPr lang="en-US" sz="1000" dirty="0" err="1">
+                <a:solidFill>
+                  <a:srgbClr val="0070C0"/>
+                </a:solidFill>
+                <a:latin typeface="Menlo" panose="020B0609030804020204" pitchFamily="49" charset="0"/>
+                <a:ea typeface="Menlo" panose="020B0609030804020204" pitchFamily="49" charset="0"/>
+                <a:cs typeface="Menlo" panose="020B0609030804020204" pitchFamily="49" charset="0"/>
+              </a:rPr>
+              <a:t>diffs_std</a:t>
+            </a:r>
+            <a:r>
+              <a:rPr lang="en-US" sz="1000" dirty="0">
+                <a:solidFill>
+                  <a:srgbClr val="0070C0"/>
+                </a:solidFill>
+                <a:latin typeface="Menlo" panose="020B0609030804020204" pitchFamily="49" charset="0"/>
+                <a:ea typeface="Menlo" panose="020B0609030804020204" pitchFamily="49" charset="0"/>
+                <a:cs typeface="Menlo" panose="020B0609030804020204" pitchFamily="49" charset="0"/>
+              </a:rPr>
+              <a:t>  = </a:t>
+            </a:r>
+            <a:r>
+              <a:rPr lang="en-US" sz="1000" dirty="0" err="1">
+                <a:solidFill>
+                  <a:srgbClr val="0070C0"/>
+                </a:solidFill>
+                <a:latin typeface="Menlo" panose="020B0609030804020204" pitchFamily="49" charset="0"/>
+                <a:ea typeface="Menlo" panose="020B0609030804020204" pitchFamily="49" charset="0"/>
+                <a:cs typeface="Menlo" panose="020B0609030804020204" pitchFamily="49" charset="0"/>
+              </a:rPr>
+              <a:t>np.std</a:t>
+            </a:r>
+            <a:r>
+              <a:rPr lang="en-US" sz="1000" dirty="0">
+                <a:solidFill>
+                  <a:srgbClr val="0070C0"/>
+                </a:solidFill>
+                <a:latin typeface="Menlo" panose="020B0609030804020204" pitchFamily="49" charset="0"/>
+                <a:ea typeface="Menlo" panose="020B0609030804020204" pitchFamily="49" charset="0"/>
+                <a:cs typeface="Menlo" panose="020B0609030804020204" pitchFamily="49" charset="0"/>
+              </a:rPr>
+              <a:t>(diffs)</a:t>
+            </a:r>
+          </a:p>
+          <a:p>
+            <a:r>
+              <a:rPr lang="en-US" sz="1000" dirty="0">
+                <a:solidFill>
+                  <a:srgbClr val="0070C0"/>
+                </a:solidFill>
+                <a:latin typeface="Menlo" panose="020B0609030804020204" pitchFamily="49" charset="0"/>
+                <a:ea typeface="Menlo" panose="020B0609030804020204" pitchFamily="49" charset="0"/>
+                <a:cs typeface="Menlo" panose="020B0609030804020204" pitchFamily="49" charset="0"/>
+              </a:rPr>
+              <a:t>print(</a:t>
+            </a:r>
+            <a:r>
+              <a:rPr lang="en-US" sz="1000" dirty="0" err="1">
+                <a:solidFill>
+                  <a:srgbClr val="0070C0"/>
+                </a:solidFill>
+                <a:latin typeface="Menlo" panose="020B0609030804020204" pitchFamily="49" charset="0"/>
+                <a:ea typeface="Menlo" panose="020B0609030804020204" pitchFamily="49" charset="0"/>
+                <a:cs typeface="Menlo" panose="020B0609030804020204" pitchFamily="49" charset="0"/>
+              </a:rPr>
+              <a:t>f"diff_AB</a:t>
+            </a:r>
+            <a:r>
+              <a:rPr lang="en-US" sz="1000" dirty="0">
+                <a:solidFill>
+                  <a:srgbClr val="0070C0"/>
+                </a:solidFill>
+                <a:latin typeface="Menlo" panose="020B0609030804020204" pitchFamily="49" charset="0"/>
+                <a:ea typeface="Menlo" panose="020B0609030804020204" pitchFamily="49" charset="0"/>
+                <a:cs typeface="Menlo" panose="020B0609030804020204" pitchFamily="49" charset="0"/>
+              </a:rPr>
+              <a:t>    = {diff_AB:.5f}")    </a:t>
+            </a:r>
+            <a:r>
+              <a:rPr lang="en-US" sz="1000" dirty="0">
+                <a:solidFill>
+                  <a:srgbClr val="00B050"/>
+                </a:solidFill>
+                <a:latin typeface="Menlo" panose="020B0609030804020204" pitchFamily="49" charset="0"/>
+                <a:ea typeface="Menlo" panose="020B0609030804020204" pitchFamily="49" charset="0"/>
+                <a:cs typeface="Menlo" panose="020B0609030804020204" pitchFamily="49" charset="0"/>
+              </a:rPr>
+              <a:t> # 0.08455</a:t>
+            </a:r>
+          </a:p>
+          <a:p>
+            <a:r>
+              <a:rPr lang="en-US" sz="1000" dirty="0">
+                <a:solidFill>
+                  <a:srgbClr val="0070C0"/>
+                </a:solidFill>
+                <a:latin typeface="Menlo" panose="020B0609030804020204" pitchFamily="49" charset="0"/>
+                <a:ea typeface="Menlo" panose="020B0609030804020204" pitchFamily="49" charset="0"/>
+                <a:cs typeface="Menlo" panose="020B0609030804020204" pitchFamily="49" charset="0"/>
+              </a:rPr>
+              <a:t>print(</a:t>
+            </a:r>
+            <a:r>
+              <a:rPr lang="en-US" sz="1000" dirty="0" err="1">
+                <a:solidFill>
+                  <a:srgbClr val="0070C0"/>
+                </a:solidFill>
+                <a:latin typeface="Menlo" panose="020B0609030804020204" pitchFamily="49" charset="0"/>
+                <a:ea typeface="Menlo" panose="020B0609030804020204" pitchFamily="49" charset="0"/>
+                <a:cs typeface="Menlo" panose="020B0609030804020204" pitchFamily="49" charset="0"/>
+              </a:rPr>
+              <a:t>f"diffs</a:t>
+            </a:r>
+            <a:r>
+              <a:rPr lang="en-US" sz="1000" dirty="0">
+                <a:solidFill>
+                  <a:srgbClr val="0070C0"/>
+                </a:solidFill>
+                <a:latin typeface="Menlo" panose="020B0609030804020204" pitchFamily="49" charset="0"/>
+                <a:ea typeface="Menlo" panose="020B0609030804020204" pitchFamily="49" charset="0"/>
+                <a:cs typeface="Menlo" panose="020B0609030804020204" pitchFamily="49" charset="0"/>
+              </a:rPr>
+              <a:t> mean = {diffs_mean:.5f}") </a:t>
+            </a:r>
+            <a:r>
+              <a:rPr lang="en-US" sz="1000" dirty="0">
+                <a:solidFill>
+                  <a:srgbClr val="00B050"/>
+                </a:solidFill>
+                <a:latin typeface="Menlo" panose="020B0609030804020204" pitchFamily="49" charset="0"/>
+                <a:ea typeface="Menlo" panose="020B0609030804020204" pitchFamily="49" charset="0"/>
+                <a:cs typeface="Menlo" panose="020B0609030804020204" pitchFamily="49" charset="0"/>
+              </a:rPr>
+              <a:t> # 0.02254</a:t>
+            </a:r>
+          </a:p>
+          <a:p>
+            <a:r>
+              <a:rPr lang="en-US" sz="1000" dirty="0">
+                <a:solidFill>
+                  <a:srgbClr val="0070C0"/>
+                </a:solidFill>
+                <a:latin typeface="Menlo" panose="020B0609030804020204" pitchFamily="49" charset="0"/>
+                <a:ea typeface="Menlo" panose="020B0609030804020204" pitchFamily="49" charset="0"/>
+                <a:cs typeface="Menlo" panose="020B0609030804020204" pitchFamily="49" charset="0"/>
+              </a:rPr>
+              <a:t>print(</a:t>
+            </a:r>
+            <a:r>
+              <a:rPr lang="en-US" sz="1000" dirty="0" err="1">
+                <a:solidFill>
+                  <a:srgbClr val="0070C0"/>
+                </a:solidFill>
+                <a:latin typeface="Menlo" panose="020B0609030804020204" pitchFamily="49" charset="0"/>
+                <a:ea typeface="Menlo" panose="020B0609030804020204" pitchFamily="49" charset="0"/>
+                <a:cs typeface="Menlo" panose="020B0609030804020204" pitchFamily="49" charset="0"/>
+              </a:rPr>
+              <a:t>f"diffs</a:t>
+            </a:r>
+            <a:r>
+              <a:rPr lang="en-US" sz="1000" dirty="0">
+                <a:solidFill>
+                  <a:srgbClr val="0070C0"/>
+                </a:solidFill>
+                <a:latin typeface="Menlo" panose="020B0609030804020204" pitchFamily="49" charset="0"/>
+                <a:ea typeface="Menlo" panose="020B0609030804020204" pitchFamily="49" charset="0"/>
+                <a:cs typeface="Menlo" panose="020B0609030804020204" pitchFamily="49" charset="0"/>
+              </a:rPr>
+              <a:t> std  = {diffs_std:.5f}")   </a:t>
+            </a:r>
+            <a:r>
+              <a:rPr lang="en-US" sz="1000" dirty="0">
+                <a:solidFill>
+                  <a:srgbClr val="00B050"/>
+                </a:solidFill>
+                <a:latin typeface="Menlo" panose="020B0609030804020204" pitchFamily="49" charset="0"/>
+                <a:ea typeface="Menlo" panose="020B0609030804020204" pitchFamily="49" charset="0"/>
+                <a:cs typeface="Menlo" panose="020B0609030804020204" pitchFamily="49" charset="0"/>
+              </a:rPr>
+              <a:t># 0.01734</a:t>
+            </a:r>
+          </a:p>
+          <a:p>
+            <a:r>
+              <a:rPr lang="en-US" sz="1000" dirty="0">
+                <a:solidFill>
+                  <a:srgbClr val="0070C0"/>
+                </a:solidFill>
+                <a:latin typeface="Menlo" panose="020B0609030804020204" pitchFamily="49" charset="0"/>
+                <a:ea typeface="Menlo" panose="020B0609030804020204" pitchFamily="49" charset="0"/>
+                <a:cs typeface="Menlo" panose="020B0609030804020204" pitchFamily="49" charset="0"/>
+              </a:rPr>
+              <a:t>print(</a:t>
+            </a:r>
+            <a:r>
+              <a:rPr lang="en-US" sz="1000" dirty="0" err="1">
+                <a:solidFill>
+                  <a:srgbClr val="0070C0"/>
+                </a:solidFill>
+                <a:latin typeface="Menlo" panose="020B0609030804020204" pitchFamily="49" charset="0"/>
+                <a:ea typeface="Menlo" panose="020B0609030804020204" pitchFamily="49" charset="0"/>
+                <a:cs typeface="Menlo" panose="020B0609030804020204" pitchFamily="49" charset="0"/>
+              </a:rPr>
+              <a:t>f"P</a:t>
+            </a:r>
+            <a:r>
+              <a:rPr lang="en-US" sz="1000" dirty="0">
+                <a:solidFill>
+                  <a:srgbClr val="0070C0"/>
+                </a:solidFill>
+                <a:latin typeface="Menlo" panose="020B0609030804020204" pitchFamily="49" charset="0"/>
+                <a:ea typeface="Menlo" panose="020B0609030804020204" pitchFamily="49" charset="0"/>
+                <a:cs typeface="Menlo" panose="020B0609030804020204" pitchFamily="49" charset="0"/>
+              </a:rPr>
+              <a:t>-value    = {counter/</a:t>
+            </a:r>
+            <a:r>
+              <a:rPr lang="en-US" sz="1000" dirty="0" err="1">
+                <a:solidFill>
+                  <a:srgbClr val="0070C0"/>
+                </a:solidFill>
+                <a:latin typeface="Menlo" panose="020B0609030804020204" pitchFamily="49" charset="0"/>
+                <a:ea typeface="Menlo" panose="020B0609030804020204" pitchFamily="49" charset="0"/>
+                <a:cs typeface="Menlo" panose="020B0609030804020204" pitchFamily="49" charset="0"/>
+              </a:rPr>
+              <a:t>N_shuf</a:t>
+            </a:r>
+            <a:r>
+              <a:rPr lang="en-US" sz="1000" dirty="0">
+                <a:solidFill>
+                  <a:srgbClr val="0070C0"/>
+                </a:solidFill>
+                <a:latin typeface="Menlo" panose="020B0609030804020204" pitchFamily="49" charset="0"/>
+                <a:ea typeface="Menlo" panose="020B0609030804020204" pitchFamily="49" charset="0"/>
+                <a:cs typeface="Menlo" panose="020B0609030804020204" pitchFamily="49" charset="0"/>
+              </a:rPr>
+              <a:t>}") </a:t>
+            </a:r>
+            <a:r>
+              <a:rPr lang="en-US" sz="1000" dirty="0">
+                <a:solidFill>
+                  <a:srgbClr val="00B050"/>
+                </a:solidFill>
+                <a:latin typeface="Menlo" panose="020B0609030804020204" pitchFamily="49" charset="0"/>
+                <a:ea typeface="Menlo" panose="020B0609030804020204" pitchFamily="49" charset="0"/>
+                <a:cs typeface="Menlo" panose="020B0609030804020204" pitchFamily="49" charset="0"/>
+              </a:rPr>
+              <a:t> # 0.0026   &lt; 0.05 !!!</a:t>
+            </a:r>
+          </a:p>
+          <a:p>
+            <a:endParaRPr lang="en-US" sz="1000" dirty="0">
+              <a:solidFill>
+                <a:srgbClr val="0070C0"/>
+              </a:solidFill>
+              <a:latin typeface="Menlo" panose="020B0609030804020204" pitchFamily="49" charset="0"/>
+              <a:ea typeface="Menlo" panose="020B0609030804020204" pitchFamily="49" charset="0"/>
+              <a:cs typeface="Menlo" panose="020B0609030804020204" pitchFamily="49" charset="0"/>
+            </a:endParaRPr>
+          </a:p>
+          <a:p>
+            <a:r>
+              <a:rPr lang="en-US" sz="1000" dirty="0" err="1">
+                <a:solidFill>
+                  <a:srgbClr val="0070C0"/>
+                </a:solidFill>
+                <a:latin typeface="Menlo" panose="020B0609030804020204" pitchFamily="49" charset="0"/>
+                <a:ea typeface="Menlo" panose="020B0609030804020204" pitchFamily="49" charset="0"/>
+                <a:cs typeface="Menlo" panose="020B0609030804020204" pitchFamily="49" charset="0"/>
+              </a:rPr>
+              <a:t>plt.rcParams</a:t>
+            </a:r>
+            <a:r>
+              <a:rPr lang="en-US" sz="1000" dirty="0">
+                <a:solidFill>
+                  <a:srgbClr val="0070C0"/>
+                </a:solidFill>
+                <a:latin typeface="Menlo" panose="020B0609030804020204" pitchFamily="49" charset="0"/>
+                <a:ea typeface="Menlo" panose="020B0609030804020204" pitchFamily="49" charset="0"/>
+                <a:cs typeface="Menlo" panose="020B0609030804020204" pitchFamily="49" charset="0"/>
+              </a:rPr>
+              <a:t>["</a:t>
+            </a:r>
+            <a:r>
+              <a:rPr lang="en-US" sz="1000" dirty="0" err="1">
+                <a:solidFill>
+                  <a:srgbClr val="0070C0"/>
+                </a:solidFill>
+                <a:latin typeface="Menlo" panose="020B0609030804020204" pitchFamily="49" charset="0"/>
+                <a:ea typeface="Menlo" panose="020B0609030804020204" pitchFamily="49" charset="0"/>
+                <a:cs typeface="Menlo" panose="020B0609030804020204" pitchFamily="49" charset="0"/>
+              </a:rPr>
+              <a:t>figure.figsize</a:t>
+            </a:r>
+            <a:r>
+              <a:rPr lang="en-US" sz="1000" dirty="0">
+                <a:solidFill>
+                  <a:srgbClr val="0070C0"/>
+                </a:solidFill>
+                <a:latin typeface="Menlo" panose="020B0609030804020204" pitchFamily="49" charset="0"/>
+                <a:ea typeface="Menlo" panose="020B0609030804020204" pitchFamily="49" charset="0"/>
+                <a:cs typeface="Menlo" panose="020B0609030804020204" pitchFamily="49" charset="0"/>
+              </a:rPr>
+              <a:t>"] = (8, 4) # (width, height)</a:t>
+            </a:r>
+          </a:p>
+          <a:p>
+            <a:r>
+              <a:rPr lang="en-US" sz="1000" dirty="0">
+                <a:solidFill>
+                  <a:srgbClr val="0070C0"/>
+                </a:solidFill>
+                <a:latin typeface="Menlo" panose="020B0609030804020204" pitchFamily="49" charset="0"/>
+                <a:ea typeface="Menlo" panose="020B0609030804020204" pitchFamily="49" charset="0"/>
+                <a:cs typeface="Menlo" panose="020B0609030804020204" pitchFamily="49" charset="0"/>
+              </a:rPr>
+              <a:t>fig, ax = </a:t>
+            </a:r>
+            <a:r>
+              <a:rPr lang="en-US" sz="1000" dirty="0" err="1">
+                <a:solidFill>
+                  <a:srgbClr val="0070C0"/>
+                </a:solidFill>
+                <a:latin typeface="Menlo" panose="020B0609030804020204" pitchFamily="49" charset="0"/>
+                <a:ea typeface="Menlo" panose="020B0609030804020204" pitchFamily="49" charset="0"/>
+                <a:cs typeface="Menlo" panose="020B0609030804020204" pitchFamily="49" charset="0"/>
+              </a:rPr>
+              <a:t>plt.subplots</a:t>
+            </a:r>
+            <a:r>
+              <a:rPr lang="en-US" sz="1000" dirty="0">
+                <a:solidFill>
+                  <a:srgbClr val="0070C0"/>
+                </a:solidFill>
+                <a:latin typeface="Menlo" panose="020B0609030804020204" pitchFamily="49" charset="0"/>
+                <a:ea typeface="Menlo" panose="020B0609030804020204" pitchFamily="49" charset="0"/>
+                <a:cs typeface="Menlo" panose="020B0609030804020204" pitchFamily="49" charset="0"/>
+              </a:rPr>
+              <a:t>(</a:t>
+            </a:r>
+            <a:r>
+              <a:rPr lang="en-US" sz="1000" dirty="0" err="1">
+                <a:solidFill>
+                  <a:srgbClr val="0070C0"/>
+                </a:solidFill>
+                <a:latin typeface="Menlo" panose="020B0609030804020204" pitchFamily="49" charset="0"/>
+                <a:ea typeface="Menlo" panose="020B0609030804020204" pitchFamily="49" charset="0"/>
+                <a:cs typeface="Menlo" panose="020B0609030804020204" pitchFamily="49" charset="0"/>
+              </a:rPr>
+              <a:t>nrows</a:t>
+            </a:r>
+            <a:r>
+              <a:rPr lang="en-US" sz="1000" dirty="0">
+                <a:solidFill>
+                  <a:srgbClr val="0070C0"/>
+                </a:solidFill>
+                <a:latin typeface="Menlo" panose="020B0609030804020204" pitchFamily="49" charset="0"/>
+                <a:ea typeface="Menlo" panose="020B0609030804020204" pitchFamily="49" charset="0"/>
+                <a:cs typeface="Menlo" panose="020B0609030804020204" pitchFamily="49" charset="0"/>
+              </a:rPr>
+              <a:t>=1, </a:t>
+            </a:r>
+            <a:r>
+              <a:rPr lang="en-US" sz="1000" dirty="0" err="1">
+                <a:solidFill>
+                  <a:srgbClr val="0070C0"/>
+                </a:solidFill>
+                <a:latin typeface="Menlo" panose="020B0609030804020204" pitchFamily="49" charset="0"/>
+                <a:ea typeface="Menlo" panose="020B0609030804020204" pitchFamily="49" charset="0"/>
+                <a:cs typeface="Menlo" panose="020B0609030804020204" pitchFamily="49" charset="0"/>
+              </a:rPr>
+              <a:t>ncols</a:t>
+            </a:r>
+            <a:r>
+              <a:rPr lang="en-US" sz="1000" dirty="0">
+                <a:solidFill>
+                  <a:srgbClr val="0070C0"/>
+                </a:solidFill>
+                <a:latin typeface="Menlo" panose="020B0609030804020204" pitchFamily="49" charset="0"/>
+                <a:ea typeface="Menlo" panose="020B0609030804020204" pitchFamily="49" charset="0"/>
+                <a:cs typeface="Menlo" panose="020B0609030804020204" pitchFamily="49" charset="0"/>
+              </a:rPr>
+              <a:t>=1)</a:t>
+            </a:r>
+          </a:p>
+          <a:p>
+            <a:r>
+              <a:rPr lang="en-US" sz="1000" dirty="0" err="1">
+                <a:solidFill>
+                  <a:srgbClr val="0070C0"/>
+                </a:solidFill>
+                <a:latin typeface="Menlo" panose="020B0609030804020204" pitchFamily="49" charset="0"/>
+                <a:ea typeface="Menlo" panose="020B0609030804020204" pitchFamily="49" charset="0"/>
+                <a:cs typeface="Menlo" panose="020B0609030804020204" pitchFamily="49" charset="0"/>
+              </a:rPr>
+              <a:t>ax.hist</a:t>
+            </a:r>
+            <a:r>
+              <a:rPr lang="en-US" sz="1000" dirty="0">
+                <a:solidFill>
+                  <a:srgbClr val="0070C0"/>
+                </a:solidFill>
+                <a:latin typeface="Menlo" panose="020B0609030804020204" pitchFamily="49" charset="0"/>
+                <a:ea typeface="Menlo" panose="020B0609030804020204" pitchFamily="49" charset="0"/>
+                <a:cs typeface="Menlo" panose="020B0609030804020204" pitchFamily="49" charset="0"/>
+              </a:rPr>
+              <a:t>(</a:t>
+            </a:r>
+            <a:r>
+              <a:rPr lang="en-US" sz="1000" dirty="0" err="1">
+                <a:solidFill>
+                  <a:srgbClr val="0070C0"/>
+                </a:solidFill>
+                <a:latin typeface="Menlo" panose="020B0609030804020204" pitchFamily="49" charset="0"/>
+                <a:ea typeface="Menlo" panose="020B0609030804020204" pitchFamily="49" charset="0"/>
+                <a:cs typeface="Menlo" panose="020B0609030804020204" pitchFamily="49" charset="0"/>
+              </a:rPr>
+              <a:t>diffs,bins</a:t>
+            </a:r>
+            <a:r>
+              <a:rPr lang="en-US" sz="1000" dirty="0">
+                <a:solidFill>
+                  <a:srgbClr val="0070C0"/>
+                </a:solidFill>
+                <a:latin typeface="Menlo" panose="020B0609030804020204" pitchFamily="49" charset="0"/>
+                <a:ea typeface="Menlo" panose="020B0609030804020204" pitchFamily="49" charset="0"/>
+                <a:cs typeface="Menlo" panose="020B0609030804020204" pitchFamily="49" charset="0"/>
+              </a:rPr>
+              <a:t>=100)</a:t>
+            </a:r>
+          </a:p>
+          <a:p>
+            <a:r>
+              <a:rPr lang="en-US" sz="1000" dirty="0" err="1">
+                <a:solidFill>
+                  <a:srgbClr val="0070C0"/>
+                </a:solidFill>
+                <a:latin typeface="Menlo" panose="020B0609030804020204" pitchFamily="49" charset="0"/>
+                <a:ea typeface="Menlo" panose="020B0609030804020204" pitchFamily="49" charset="0"/>
+                <a:cs typeface="Menlo" panose="020B0609030804020204" pitchFamily="49" charset="0"/>
+              </a:rPr>
+              <a:t>ax.set_xlim</a:t>
+            </a:r>
+            <a:r>
+              <a:rPr lang="en-US" sz="1000" dirty="0">
+                <a:solidFill>
+                  <a:srgbClr val="0070C0"/>
+                </a:solidFill>
+                <a:latin typeface="Menlo" panose="020B0609030804020204" pitchFamily="49" charset="0"/>
+                <a:ea typeface="Menlo" panose="020B0609030804020204" pitchFamily="49" charset="0"/>
+                <a:cs typeface="Menlo" panose="020B0609030804020204" pitchFamily="49" charset="0"/>
+              </a:rPr>
+              <a:t>(left=0,right=0.2)</a:t>
+            </a:r>
+          </a:p>
+          <a:p>
+            <a:r>
+              <a:rPr lang="en-US" sz="1000" dirty="0" err="1">
+                <a:solidFill>
+                  <a:srgbClr val="0070C0"/>
+                </a:solidFill>
+                <a:latin typeface="Menlo" panose="020B0609030804020204" pitchFamily="49" charset="0"/>
+                <a:ea typeface="Menlo" panose="020B0609030804020204" pitchFamily="49" charset="0"/>
+                <a:cs typeface="Menlo" panose="020B0609030804020204" pitchFamily="49" charset="0"/>
+              </a:rPr>
               <a:t>plt.show</a:t>
             </a:r>
             <a:r>
-              <a:rPr lang="en-US" sz="1100" dirty="0">
+              <a:rPr lang="en-US" sz="1000" dirty="0">
                 <a:solidFill>
                   <a:srgbClr val="0070C0"/>
                 </a:solidFill>
@@ -15909,7 +16169,7 @@
         </p:blipFill>
         <p:spPr>
           <a:xfrm>
-            <a:off x="1970456" y="3158775"/>
+            <a:off x="1583407" y="3579188"/>
             <a:ext cx="2130703" cy="1072566"/>
           </a:xfrm>
           <a:prstGeom prst="rect">
@@ -15931,7 +16191,7 @@
         </p:nvSpPr>
         <p:spPr>
           <a:xfrm>
-            <a:off x="1240611" y="2822110"/>
+            <a:off x="853562" y="3242523"/>
             <a:ext cx="3566009" cy="307777"/>
           </a:xfrm>
           <a:prstGeom prst="rect">
@@ -15974,8 +16234,8 @@
         </p:nvSpPr>
         <p:spPr>
           <a:xfrm>
-            <a:off x="5373441" y="3955130"/>
-            <a:ext cx="1625766" cy="461665"/>
+            <a:off x="5316398" y="4322989"/>
+            <a:ext cx="1478290" cy="461665"/>
           </a:xfrm>
           <a:prstGeom prst="rect">
             <a:avLst/>
@@ -15993,6 +16253,8 @@
                 <a:solidFill>
                   <a:srgbClr val="00B050"/>
                 </a:solidFill>
+                <a:latin typeface="Calibri" panose="020F0502020204030204" pitchFamily="34" charset="0"/>
+                <a:cs typeface="Calibri" panose="020F0502020204030204" pitchFamily="34" charset="0"/>
               </a:rPr>
               <a:t>P-value is estimated </a:t>
             </a:r>
@@ -16003,6 +16265,8 @@
                 <a:solidFill>
                   <a:srgbClr val="00B050"/>
                 </a:solidFill>
+                <a:latin typeface="Calibri" panose="020F0502020204030204" pitchFamily="34" charset="0"/>
+                <a:cs typeface="Calibri" panose="020F0502020204030204" pitchFamily="34" charset="0"/>
               </a:rPr>
               <a:t>by counting</a:t>
             </a:r>
@@ -16023,2108 +16287,7 @@
         </p:nvSpPr>
         <p:spPr>
           <a:xfrm>
-            <a:off x="6946317" y="4117236"/>
-            <a:ext cx="457532" cy="178375"/>
-          </a:xfrm>
-          <a:prstGeom prst="rightArrow">
-            <a:avLst/>
-          </a:prstGeom>
-          <a:solidFill>
-            <a:srgbClr val="00B050"/>
-          </a:solidFill>
-          <a:ln>
-            <a:solidFill>
-              <a:srgbClr val="00B050"/>
-            </a:solidFill>
-          </a:ln>
-        </p:spPr>
-        <p:style>
-          <a:lnRef idx="2">
-            <a:schemeClr val="accent1">
-              <a:shade val="50000"/>
-            </a:schemeClr>
-          </a:lnRef>
-          <a:fillRef idx="1">
-            <a:schemeClr val="accent1"/>
-          </a:fillRef>
-          <a:effectRef idx="0">
-            <a:schemeClr val="accent1"/>
-          </a:effectRef>
-          <a:fontRef idx="minor">
-            <a:schemeClr val="lt1"/>
-          </a:fontRef>
-        </p:style>
-        <p:txBody>
-          <a:bodyPr rtlCol="0" anchor="ctr"/>
-          <a:lstStyle/>
-          <a:p>
-            <a:pPr algn="ctr"/>
-            <a:endParaRPr lang="en-US"/>
-          </a:p>
-        </p:txBody>
-      </p:sp>
-      <p:sp>
-        <p:nvSpPr>
-          <p:cNvPr id="15" name="TextBox 14">
-            <a:extLst>
-              <a:ext uri="{FF2B5EF4-FFF2-40B4-BE49-F238E27FC236}">
-                <a16:creationId xmlns:a16="http://schemas.microsoft.com/office/drawing/2014/main" id="{5A62F9F1-3396-C540-ACEF-C2F3ECF4FAA2}"/>
-              </a:ext>
-            </a:extLst>
-          </p:cNvPr>
-          <p:cNvSpPr txBox="1"/>
-          <p:nvPr/>
-        </p:nvSpPr>
-        <p:spPr>
-          <a:xfrm>
-            <a:off x="961992" y="4541883"/>
-            <a:ext cx="4904156" cy="2123658"/>
-          </a:xfrm>
-          <a:prstGeom prst="rect">
-            <a:avLst/>
-          </a:prstGeom>
-          <a:noFill/>
-        </p:spPr>
-        <p:txBody>
-          <a:bodyPr wrap="square" rtlCol="0">
-            <a:spAutoFit/>
-          </a:bodyPr>
-          <a:lstStyle/>
-          <a:p>
-            <a:r>
-              <a:rPr lang="en-US" sz="1100" dirty="0">
-                <a:solidFill>
-                  <a:srgbClr val="0070C0"/>
-                </a:solidFill>
-                <a:latin typeface="Menlo" panose="020B0609030804020204" pitchFamily="49" charset="0"/>
-                <a:ea typeface="Menlo" panose="020B0609030804020204" pitchFamily="49" charset="0"/>
-                <a:cs typeface="Menlo" panose="020B0609030804020204" pitchFamily="49" charset="0"/>
-              </a:rPr>
-              <a:t>import </a:t>
-            </a:r>
-            <a:r>
-              <a:rPr lang="en-US" sz="1100" dirty="0" err="1">
-                <a:solidFill>
-                  <a:srgbClr val="0070C0"/>
-                </a:solidFill>
-                <a:latin typeface="Menlo" panose="020B0609030804020204" pitchFamily="49" charset="0"/>
-                <a:ea typeface="Menlo" panose="020B0609030804020204" pitchFamily="49" charset="0"/>
-                <a:cs typeface="Menlo" panose="020B0609030804020204" pitchFamily="49" charset="0"/>
-              </a:rPr>
-              <a:t>numpy</a:t>
-            </a:r>
-            <a:r>
-              <a:rPr lang="en-US" sz="1100" dirty="0">
-                <a:solidFill>
-                  <a:srgbClr val="0070C0"/>
-                </a:solidFill>
-                <a:latin typeface="Menlo" panose="020B0609030804020204" pitchFamily="49" charset="0"/>
-                <a:ea typeface="Menlo" panose="020B0609030804020204" pitchFamily="49" charset="0"/>
-                <a:cs typeface="Menlo" panose="020B0609030804020204" pitchFamily="49" charset="0"/>
-              </a:rPr>
-              <a:t> as np </a:t>
-            </a:r>
-          </a:p>
-          <a:p>
-            <a:r>
-              <a:rPr lang="en-US" sz="1100" dirty="0">
-                <a:solidFill>
-                  <a:srgbClr val="0070C0"/>
-                </a:solidFill>
-                <a:latin typeface="Menlo" panose="020B0609030804020204" pitchFamily="49" charset="0"/>
-                <a:ea typeface="Menlo" panose="020B0609030804020204" pitchFamily="49" charset="0"/>
-                <a:cs typeface="Menlo" panose="020B0609030804020204" pitchFamily="49" charset="0"/>
-              </a:rPr>
-              <a:t>from </a:t>
-            </a:r>
-            <a:r>
-              <a:rPr lang="en-US" sz="1100" dirty="0" err="1">
-                <a:solidFill>
-                  <a:srgbClr val="0070C0"/>
-                </a:solidFill>
-                <a:latin typeface="Menlo" panose="020B0609030804020204" pitchFamily="49" charset="0"/>
-                <a:ea typeface="Menlo" panose="020B0609030804020204" pitchFamily="49" charset="0"/>
-                <a:cs typeface="Menlo" panose="020B0609030804020204" pitchFamily="49" charset="0"/>
-              </a:rPr>
-              <a:t>sklearn.model_selection</a:t>
-            </a:r>
-            <a:r>
-              <a:rPr lang="en-US" sz="1100" dirty="0">
-                <a:solidFill>
-                  <a:srgbClr val="0070C0"/>
-                </a:solidFill>
-                <a:latin typeface="Menlo" panose="020B0609030804020204" pitchFamily="49" charset="0"/>
-                <a:ea typeface="Menlo" panose="020B0609030804020204" pitchFamily="49" charset="0"/>
-                <a:cs typeface="Menlo" panose="020B0609030804020204" pitchFamily="49" charset="0"/>
-              </a:rPr>
-              <a:t> import </a:t>
-            </a:r>
-            <a:r>
-              <a:rPr lang="en-US" sz="1100" dirty="0" err="1">
-                <a:solidFill>
-                  <a:srgbClr val="0070C0"/>
-                </a:solidFill>
-                <a:latin typeface="Menlo" panose="020B0609030804020204" pitchFamily="49" charset="0"/>
-                <a:ea typeface="Menlo" panose="020B0609030804020204" pitchFamily="49" charset="0"/>
-                <a:cs typeface="Menlo" panose="020B0609030804020204" pitchFamily="49" charset="0"/>
-              </a:rPr>
-              <a:t>train_test_split</a:t>
-            </a:r>
-            <a:r>
-              <a:rPr lang="en-US" sz="1100" dirty="0">
-                <a:solidFill>
-                  <a:srgbClr val="0070C0"/>
-                </a:solidFill>
-                <a:latin typeface="Menlo" panose="020B0609030804020204" pitchFamily="49" charset="0"/>
-                <a:ea typeface="Menlo" panose="020B0609030804020204" pitchFamily="49" charset="0"/>
-                <a:cs typeface="Menlo" panose="020B0609030804020204" pitchFamily="49" charset="0"/>
-              </a:rPr>
-              <a:t> </a:t>
-            </a:r>
-          </a:p>
-          <a:p>
-            <a:r>
-              <a:rPr lang="en-US" sz="1100" dirty="0">
-                <a:solidFill>
-                  <a:srgbClr val="0070C0"/>
-                </a:solidFill>
-                <a:latin typeface="Menlo" panose="020B0609030804020204" pitchFamily="49" charset="0"/>
-                <a:ea typeface="Menlo" panose="020B0609030804020204" pitchFamily="49" charset="0"/>
-                <a:cs typeface="Menlo" panose="020B0609030804020204" pitchFamily="49" charset="0"/>
-              </a:rPr>
-              <a:t>data = </a:t>
-            </a:r>
-            <a:r>
-              <a:rPr lang="en-US" sz="1100" dirty="0" err="1">
-                <a:solidFill>
-                  <a:srgbClr val="0070C0"/>
-                </a:solidFill>
-                <a:latin typeface="Menlo" panose="020B0609030804020204" pitchFamily="49" charset="0"/>
-                <a:ea typeface="Menlo" panose="020B0609030804020204" pitchFamily="49" charset="0"/>
-                <a:cs typeface="Menlo" panose="020B0609030804020204" pitchFamily="49" charset="0"/>
-              </a:rPr>
-              <a:t>np.random.random</a:t>
-            </a:r>
-            <a:r>
-              <a:rPr lang="en-US" sz="1100" dirty="0">
-                <a:solidFill>
-                  <a:srgbClr val="0070C0"/>
-                </a:solidFill>
-                <a:latin typeface="Menlo" panose="020B0609030804020204" pitchFamily="49" charset="0"/>
-                <a:ea typeface="Menlo" panose="020B0609030804020204" pitchFamily="49" charset="0"/>
-                <a:cs typeface="Menlo" panose="020B0609030804020204" pitchFamily="49" charset="0"/>
-              </a:rPr>
-              <a:t>(2*N)</a:t>
-            </a:r>
-          </a:p>
-          <a:p>
-            <a:endParaRPr lang="en-US" sz="1100" dirty="0">
-              <a:solidFill>
-                <a:srgbClr val="0070C0"/>
-              </a:solidFill>
-              <a:latin typeface="Menlo" panose="020B0609030804020204" pitchFamily="49" charset="0"/>
-              <a:ea typeface="Menlo" panose="020B0609030804020204" pitchFamily="49" charset="0"/>
-              <a:cs typeface="Menlo" panose="020B0609030804020204" pitchFamily="49" charset="0"/>
-            </a:endParaRPr>
-          </a:p>
-          <a:p>
-            <a:r>
-              <a:rPr lang="en-US" sz="1100" dirty="0">
-                <a:solidFill>
-                  <a:srgbClr val="00B050"/>
-                </a:solidFill>
-                <a:latin typeface="Menlo" panose="020B0609030804020204" pitchFamily="49" charset="0"/>
-                <a:ea typeface="Menlo" panose="020B0609030804020204" pitchFamily="49" charset="0"/>
-                <a:cs typeface="Menlo" panose="020B0609030804020204" pitchFamily="49" charset="0"/>
-              </a:rPr>
-              <a:t># shuffle using </a:t>
-            </a:r>
-            <a:r>
-              <a:rPr lang="en-US" sz="1100" dirty="0" err="1">
-                <a:solidFill>
-                  <a:srgbClr val="00B050"/>
-                </a:solidFill>
-                <a:latin typeface="Menlo" panose="020B0609030804020204" pitchFamily="49" charset="0"/>
-                <a:ea typeface="Menlo" panose="020B0609030804020204" pitchFamily="49" charset="0"/>
-                <a:cs typeface="Menlo" panose="020B0609030804020204" pitchFamily="49" charset="0"/>
-              </a:rPr>
-              <a:t>sklearn</a:t>
-            </a:r>
-            <a:r>
-              <a:rPr lang="en-US" sz="1100" dirty="0">
-                <a:solidFill>
-                  <a:srgbClr val="00B050"/>
-                </a:solidFill>
-                <a:latin typeface="Menlo" panose="020B0609030804020204" pitchFamily="49" charset="0"/>
-                <a:ea typeface="Menlo" panose="020B0609030804020204" pitchFamily="49" charset="0"/>
-                <a:cs typeface="Menlo" panose="020B0609030804020204" pitchFamily="49" charset="0"/>
-              </a:rPr>
-              <a:t> </a:t>
-            </a:r>
-            <a:r>
-              <a:rPr lang="en-US" sz="1100" dirty="0" err="1">
-                <a:solidFill>
-                  <a:srgbClr val="00B050"/>
-                </a:solidFill>
-                <a:latin typeface="Menlo" panose="020B0609030804020204" pitchFamily="49" charset="0"/>
-                <a:ea typeface="Menlo" panose="020B0609030804020204" pitchFamily="49" charset="0"/>
-                <a:cs typeface="Menlo" panose="020B0609030804020204" pitchFamily="49" charset="0"/>
-              </a:rPr>
-              <a:t>train_test_split</a:t>
-            </a:r>
-            <a:r>
-              <a:rPr lang="en-US" sz="1100" dirty="0">
-                <a:solidFill>
-                  <a:srgbClr val="00B050"/>
-                </a:solidFill>
-                <a:latin typeface="Menlo" panose="020B0609030804020204" pitchFamily="49" charset="0"/>
-                <a:ea typeface="Menlo" panose="020B0609030804020204" pitchFamily="49" charset="0"/>
-                <a:cs typeface="Menlo" panose="020B0609030804020204" pitchFamily="49" charset="0"/>
-              </a:rPr>
-              <a:t>()</a:t>
-            </a:r>
-          </a:p>
-          <a:p>
-            <a:r>
-              <a:rPr lang="en-US" sz="1100" dirty="0">
-                <a:solidFill>
-                  <a:srgbClr val="0070C0"/>
-                </a:solidFill>
-                <a:latin typeface="Menlo" panose="020B0609030804020204" pitchFamily="49" charset="0"/>
-                <a:ea typeface="Menlo" panose="020B0609030804020204" pitchFamily="49" charset="0"/>
-                <a:cs typeface="Menlo" panose="020B0609030804020204" pitchFamily="49" charset="0"/>
-              </a:rPr>
-              <a:t>X1, X2 = </a:t>
-            </a:r>
-            <a:r>
-              <a:rPr lang="en-US" sz="1100" dirty="0" err="1">
-                <a:solidFill>
-                  <a:srgbClr val="0070C0"/>
-                </a:solidFill>
-                <a:latin typeface="Menlo" panose="020B0609030804020204" pitchFamily="49" charset="0"/>
-                <a:ea typeface="Menlo" panose="020B0609030804020204" pitchFamily="49" charset="0"/>
-                <a:cs typeface="Menlo" panose="020B0609030804020204" pitchFamily="49" charset="0"/>
-              </a:rPr>
-              <a:t>train_test_split</a:t>
-            </a:r>
-            <a:r>
-              <a:rPr lang="en-US" sz="1100" dirty="0">
-                <a:solidFill>
-                  <a:srgbClr val="0070C0"/>
-                </a:solidFill>
-                <a:latin typeface="Menlo" panose="020B0609030804020204" pitchFamily="49" charset="0"/>
-                <a:ea typeface="Menlo" panose="020B0609030804020204" pitchFamily="49" charset="0"/>
-                <a:cs typeface="Menlo" panose="020B0609030804020204" pitchFamily="49" charset="0"/>
-              </a:rPr>
-              <a:t>(data, </a:t>
-            </a:r>
-            <a:r>
-              <a:rPr lang="en-US" sz="1100" dirty="0" err="1">
-                <a:solidFill>
-                  <a:srgbClr val="0070C0"/>
-                </a:solidFill>
-                <a:latin typeface="Menlo" panose="020B0609030804020204" pitchFamily="49" charset="0"/>
-                <a:ea typeface="Menlo" panose="020B0609030804020204" pitchFamily="49" charset="0"/>
-                <a:cs typeface="Menlo" panose="020B0609030804020204" pitchFamily="49" charset="0"/>
-              </a:rPr>
-              <a:t>test_size</a:t>
-            </a:r>
-            <a:r>
-              <a:rPr lang="en-US" sz="1100" dirty="0">
-                <a:solidFill>
-                  <a:srgbClr val="0070C0"/>
-                </a:solidFill>
-                <a:latin typeface="Menlo" panose="020B0609030804020204" pitchFamily="49" charset="0"/>
-                <a:ea typeface="Menlo" panose="020B0609030804020204" pitchFamily="49" charset="0"/>
-                <a:cs typeface="Menlo" panose="020B0609030804020204" pitchFamily="49" charset="0"/>
-              </a:rPr>
-              <a:t>=N)</a:t>
-            </a:r>
-          </a:p>
-          <a:p>
-            <a:endParaRPr lang="en-US" sz="1100" dirty="0">
-              <a:solidFill>
-                <a:srgbClr val="0070C0"/>
-              </a:solidFill>
-              <a:latin typeface="Menlo" panose="020B0609030804020204" pitchFamily="49" charset="0"/>
-              <a:ea typeface="Menlo" panose="020B0609030804020204" pitchFamily="49" charset="0"/>
-              <a:cs typeface="Menlo" panose="020B0609030804020204" pitchFamily="49" charset="0"/>
-            </a:endParaRPr>
-          </a:p>
-          <a:p>
-            <a:r>
-              <a:rPr lang="en-US" sz="1100" dirty="0">
-                <a:solidFill>
-                  <a:srgbClr val="00B050"/>
-                </a:solidFill>
-                <a:latin typeface="Menlo" panose="020B0609030804020204" pitchFamily="49" charset="0"/>
-                <a:ea typeface="Menlo" panose="020B0609030804020204" pitchFamily="49" charset="0"/>
-                <a:cs typeface="Menlo" panose="020B0609030804020204" pitchFamily="49" charset="0"/>
-              </a:rPr>
-              <a:t># shuffle using only </a:t>
-            </a:r>
-            <a:r>
-              <a:rPr lang="en-US" sz="1100" dirty="0" err="1">
-                <a:solidFill>
-                  <a:srgbClr val="00B050"/>
-                </a:solidFill>
-                <a:latin typeface="Menlo" panose="020B0609030804020204" pitchFamily="49" charset="0"/>
-                <a:ea typeface="Menlo" panose="020B0609030804020204" pitchFamily="49" charset="0"/>
-                <a:cs typeface="Menlo" panose="020B0609030804020204" pitchFamily="49" charset="0"/>
-              </a:rPr>
-              <a:t>Numpy</a:t>
-            </a:r>
-            <a:r>
-              <a:rPr lang="en-US" sz="1100" dirty="0">
-                <a:solidFill>
-                  <a:srgbClr val="00B050"/>
-                </a:solidFill>
-                <a:latin typeface="Menlo" panose="020B0609030804020204" pitchFamily="49" charset="0"/>
-                <a:ea typeface="Menlo" panose="020B0609030804020204" pitchFamily="49" charset="0"/>
-                <a:cs typeface="Menlo" panose="020B0609030804020204" pitchFamily="49" charset="0"/>
-              </a:rPr>
-              <a:t>:</a:t>
-            </a:r>
-          </a:p>
-          <a:p>
-            <a:r>
-              <a:rPr lang="en-US" sz="1100" dirty="0">
-                <a:solidFill>
-                  <a:srgbClr val="0070C0"/>
-                </a:solidFill>
-                <a:latin typeface="Menlo" panose="020B0609030804020204" pitchFamily="49" charset="0"/>
-                <a:ea typeface="Menlo" panose="020B0609030804020204" pitchFamily="49" charset="0"/>
-                <a:cs typeface="Menlo" panose="020B0609030804020204" pitchFamily="49" charset="0"/>
-              </a:rPr>
-              <a:t>s1 = </a:t>
-            </a:r>
-            <a:r>
-              <a:rPr lang="en-US" sz="1100" dirty="0" err="1">
-                <a:solidFill>
-                  <a:srgbClr val="0070C0"/>
-                </a:solidFill>
-                <a:latin typeface="Menlo" panose="020B0609030804020204" pitchFamily="49" charset="0"/>
-                <a:ea typeface="Menlo" panose="020B0609030804020204" pitchFamily="49" charset="0"/>
-                <a:cs typeface="Menlo" panose="020B0609030804020204" pitchFamily="49" charset="0"/>
-              </a:rPr>
-              <a:t>np.random.choice</a:t>
-            </a:r>
-            <a:r>
-              <a:rPr lang="en-US" sz="1100" dirty="0">
-                <a:solidFill>
-                  <a:srgbClr val="0070C0"/>
-                </a:solidFill>
-                <a:latin typeface="Menlo" panose="020B0609030804020204" pitchFamily="49" charset="0"/>
-                <a:ea typeface="Menlo" panose="020B0609030804020204" pitchFamily="49" charset="0"/>
-                <a:cs typeface="Menlo" panose="020B0609030804020204" pitchFamily="49" charset="0"/>
-              </a:rPr>
-              <a:t>(2*N, N, replace=False)</a:t>
-            </a:r>
-          </a:p>
-          <a:p>
-            <a:r>
-              <a:rPr lang="en-US" sz="1100" dirty="0">
-                <a:solidFill>
-                  <a:srgbClr val="0070C0"/>
-                </a:solidFill>
-                <a:latin typeface="Menlo" panose="020B0609030804020204" pitchFamily="49" charset="0"/>
-                <a:ea typeface="Menlo" panose="020B0609030804020204" pitchFamily="49" charset="0"/>
-                <a:cs typeface="Menlo" panose="020B0609030804020204" pitchFamily="49" charset="0"/>
-              </a:rPr>
-              <a:t>s2 = list( set(range(2*N)) - set(s1) )</a:t>
-            </a:r>
-          </a:p>
-          <a:p>
-            <a:r>
-              <a:rPr lang="en-US" sz="1100" dirty="0">
-                <a:solidFill>
-                  <a:srgbClr val="0070C0"/>
-                </a:solidFill>
-                <a:latin typeface="Menlo" panose="020B0609030804020204" pitchFamily="49" charset="0"/>
-                <a:ea typeface="Menlo" panose="020B0609030804020204" pitchFamily="49" charset="0"/>
-                <a:cs typeface="Menlo" panose="020B0609030804020204" pitchFamily="49" charset="0"/>
-              </a:rPr>
-              <a:t>split1 = data[s1]</a:t>
-            </a:r>
-          </a:p>
-          <a:p>
-            <a:r>
-              <a:rPr lang="en-US" sz="1100" dirty="0">
-                <a:solidFill>
-                  <a:srgbClr val="0070C0"/>
-                </a:solidFill>
-                <a:latin typeface="Menlo" panose="020B0609030804020204" pitchFamily="49" charset="0"/>
-                <a:ea typeface="Menlo" panose="020B0609030804020204" pitchFamily="49" charset="0"/>
-                <a:cs typeface="Menlo" panose="020B0609030804020204" pitchFamily="49" charset="0"/>
-              </a:rPr>
-              <a:t>split2 = data[s2]</a:t>
-            </a:r>
-          </a:p>
-        </p:txBody>
-      </p:sp>
-    </p:spTree>
-    <p:extLst>
-      <p:ext uri="{BB962C8B-B14F-4D97-AF65-F5344CB8AC3E}">
-        <p14:creationId xmlns:p14="http://schemas.microsoft.com/office/powerpoint/2010/main" val="274343235"/>
-      </p:ext>
-    </p:extLst>
-  </p:cSld>
-  <p:clrMapOvr>
-    <a:masterClrMapping/>
-  </p:clrMapOvr>
-</p:sld>
-</file>
-
-<file path=ppt/slides/slide4.xml><?xml version="1.0" encoding="utf-8"?>
-<p:sld xmlns:a="http://schemas.openxmlformats.org/drawingml/2006/main" xmlns:r="http://schemas.openxmlformats.org/officeDocument/2006/relationships" xmlns:p="http://schemas.openxmlformats.org/presentationml/2006/main">
-  <p:cSld>
-    <p:spTree>
-      <p:nvGrpSpPr>
-        <p:cNvPr id="1" name=""/>
-        <p:cNvGrpSpPr/>
-        <p:nvPr/>
-      </p:nvGrpSpPr>
-      <p:grpSpPr>
-        <a:xfrm>
-          <a:off x="0" y="0"/>
-          <a:ext cx="0" cy="0"/>
-          <a:chOff x="0" y="0"/>
-          <a:chExt cx="0" cy="0"/>
-        </a:xfrm>
-      </p:grpSpPr>
-      <p:sp>
-        <p:nvSpPr>
-          <p:cNvPr id="2" name="TextBox 1">
-            <a:extLst>
-              <a:ext uri="{FF2B5EF4-FFF2-40B4-BE49-F238E27FC236}">
-                <a16:creationId xmlns:a16="http://schemas.microsoft.com/office/drawing/2014/main" id="{FFF755FE-9EC5-2243-8B9B-E4A9E7CEC3D9}"/>
-              </a:ext>
-            </a:extLst>
-          </p:cNvPr>
-          <p:cNvSpPr txBox="1"/>
-          <p:nvPr/>
-        </p:nvSpPr>
-        <p:spPr>
-          <a:xfrm>
-            <a:off x="0" y="0"/>
-            <a:ext cx="5833241" cy="830997"/>
-          </a:xfrm>
-          <a:prstGeom prst="rect">
-            <a:avLst/>
-          </a:prstGeom>
-          <a:noFill/>
-        </p:spPr>
-        <p:txBody>
-          <a:bodyPr wrap="square" rtlCol="0">
-            <a:spAutoFit/>
-          </a:bodyPr>
-          <a:lstStyle/>
-          <a:p>
-            <a:r>
-              <a:rPr lang="en-US" sz="2400" b="1" dirty="0">
-                <a:latin typeface="Calibri" panose="020F0502020204030204" pitchFamily="34" charset="0"/>
-                <a:cs typeface="Calibri" panose="020F0502020204030204" pitchFamily="34" charset="0"/>
-              </a:rPr>
-              <a:t>If A/B difference statistically significant?</a:t>
-            </a:r>
-            <a:br>
-              <a:rPr lang="en-US" sz="2400" b="1" dirty="0">
-                <a:latin typeface="Calibri" panose="020F0502020204030204" pitchFamily="34" charset="0"/>
-                <a:cs typeface="Calibri" panose="020F0502020204030204" pitchFamily="34" charset="0"/>
-              </a:rPr>
-            </a:br>
-            <a:r>
-              <a:rPr lang="en-US" sz="2400" b="1" dirty="0">
-                <a:latin typeface="Calibri" panose="020F0502020204030204" pitchFamily="34" charset="0"/>
-                <a:cs typeface="Calibri" panose="020F0502020204030204" pitchFamily="34" charset="0"/>
-              </a:rPr>
-              <a:t>Answer Using Shuffling (hacking !!)</a:t>
-            </a:r>
-          </a:p>
-        </p:txBody>
-      </p:sp>
-      <p:sp>
-        <p:nvSpPr>
-          <p:cNvPr id="3" name="TextBox 2">
-            <a:extLst>
-              <a:ext uri="{FF2B5EF4-FFF2-40B4-BE49-F238E27FC236}">
-                <a16:creationId xmlns:a16="http://schemas.microsoft.com/office/drawing/2014/main" id="{B4214305-FB5A-AA42-89E0-5393ADEB579E}"/>
-              </a:ext>
-            </a:extLst>
-          </p:cNvPr>
-          <p:cNvSpPr txBox="1"/>
-          <p:nvPr/>
-        </p:nvSpPr>
-        <p:spPr>
-          <a:xfrm>
-            <a:off x="31775" y="922609"/>
-            <a:ext cx="8417282" cy="738664"/>
-          </a:xfrm>
-          <a:prstGeom prst="rect">
-            <a:avLst/>
-          </a:prstGeom>
-          <a:noFill/>
-        </p:spPr>
-        <p:txBody>
-          <a:bodyPr wrap="square" rtlCol="0">
-            <a:spAutoFit/>
-          </a:bodyPr>
-          <a:lstStyle/>
-          <a:p>
-            <a:pPr marL="285750" indent="-285750">
-              <a:buFont typeface="Arial" panose="020B0604020202020204" pitchFamily="34" charset="0"/>
-              <a:buChar char="•"/>
-            </a:pPr>
-            <a:r>
-              <a:rPr lang="en-US" sz="1400" dirty="0">
-                <a:solidFill>
-                  <a:srgbClr val="00B050"/>
-                </a:solidFill>
-                <a:latin typeface="Menlo" panose="020B0609030804020204" pitchFamily="49" charset="0"/>
-                <a:ea typeface="Menlo" panose="020B0609030804020204" pitchFamily="49" charset="0"/>
-                <a:cs typeface="Menlo" panose="020B0609030804020204" pitchFamily="49" charset="0"/>
-              </a:rPr>
-              <a:t>Shuffling works when the Null Hypothesis assumes two groups are equivalent</a:t>
-            </a:r>
-          </a:p>
-          <a:p>
-            <a:pPr marL="285750" indent="-285750">
-              <a:buFont typeface="Arial" panose="020B0604020202020204" pitchFamily="34" charset="0"/>
-              <a:buChar char="•"/>
-            </a:pPr>
-            <a:r>
-              <a:rPr lang="en-US" sz="1400" dirty="0">
-                <a:solidFill>
-                  <a:srgbClr val="00B050"/>
-                </a:solidFill>
-                <a:latin typeface="Menlo" panose="020B0609030804020204" pitchFamily="49" charset="0"/>
-                <a:ea typeface="Menlo" panose="020B0609030804020204" pitchFamily="49" charset="0"/>
-                <a:cs typeface="Menlo" panose="020B0609030804020204" pitchFamily="49" charset="0"/>
-              </a:rPr>
-              <a:t>Only works when there is no selection biases</a:t>
-            </a:r>
-          </a:p>
-          <a:p>
-            <a:pPr marL="285750" indent="-285750">
-              <a:buFont typeface="Arial" panose="020B0604020202020204" pitchFamily="34" charset="0"/>
-              <a:buChar char="•"/>
-            </a:pPr>
-            <a:r>
-              <a:rPr lang="en-US" sz="1400" dirty="0">
-                <a:solidFill>
-                  <a:srgbClr val="00B050"/>
-                </a:solidFill>
-                <a:latin typeface="Menlo" panose="020B0609030804020204" pitchFamily="49" charset="0"/>
-                <a:ea typeface="Menlo" panose="020B0609030804020204" pitchFamily="49" charset="0"/>
-                <a:cs typeface="Menlo" panose="020B0609030804020204" pitchFamily="49" charset="0"/>
-              </a:rPr>
-              <a:t>The trials must be independent (!)</a:t>
-            </a:r>
-          </a:p>
-        </p:txBody>
-      </p:sp>
-      <p:sp>
-        <p:nvSpPr>
-          <p:cNvPr id="4" name="TextBox 3">
-            <a:extLst>
-              <a:ext uri="{FF2B5EF4-FFF2-40B4-BE49-F238E27FC236}">
-                <a16:creationId xmlns:a16="http://schemas.microsoft.com/office/drawing/2014/main" id="{70E595A3-403F-6749-95B4-96B9355C9FC4}"/>
-              </a:ext>
-            </a:extLst>
-          </p:cNvPr>
-          <p:cNvSpPr txBox="1"/>
-          <p:nvPr/>
-        </p:nvSpPr>
-        <p:spPr>
-          <a:xfrm>
-            <a:off x="1160734" y="1769600"/>
-            <a:ext cx="3566009" cy="369332"/>
-          </a:xfrm>
-          <a:prstGeom prst="rect">
-            <a:avLst/>
-          </a:prstGeom>
-          <a:noFill/>
-        </p:spPr>
-        <p:txBody>
-          <a:bodyPr wrap="square" rtlCol="0">
-            <a:spAutoFit/>
-          </a:bodyPr>
-          <a:lstStyle/>
-          <a:p>
-            <a:r>
-              <a:rPr lang="en-US" sz="1600" dirty="0">
-                <a:solidFill>
-                  <a:srgbClr val="0070C0"/>
-                </a:solidFill>
-                <a:latin typeface="Menlo" panose="020B0609030804020204" pitchFamily="49" charset="0"/>
-                <a:ea typeface="Menlo" panose="020B0609030804020204" pitchFamily="49" charset="0"/>
-                <a:cs typeface="Menlo" panose="020B0609030804020204" pitchFamily="49" charset="0"/>
-              </a:rPr>
-              <a:t>Example</a:t>
-            </a:r>
-            <a:r>
-              <a:rPr lang="en-US" sz="1800" dirty="0">
-                <a:solidFill>
-                  <a:srgbClr val="0070C0"/>
-                </a:solidFill>
-                <a:latin typeface="Menlo" panose="020B0609030804020204" pitchFamily="49" charset="0"/>
-                <a:ea typeface="Menlo" panose="020B0609030804020204" pitchFamily="49" charset="0"/>
-                <a:cs typeface="Menlo" panose="020B0609030804020204" pitchFamily="49" charset="0"/>
-              </a:rPr>
-              <a:t>: A/B Split Test</a:t>
-            </a:r>
-          </a:p>
-        </p:txBody>
-      </p:sp>
-      <p:pic>
-        <p:nvPicPr>
-          <p:cNvPr id="5" name="Picture 4">
-            <a:extLst>
-              <a:ext uri="{FF2B5EF4-FFF2-40B4-BE49-F238E27FC236}">
-                <a16:creationId xmlns:a16="http://schemas.microsoft.com/office/drawing/2014/main" id="{44670FF3-E80B-EB4A-8B34-22B9059C788F}"/>
-              </a:ext>
-            </a:extLst>
-          </p:cNvPr>
-          <p:cNvPicPr>
-            <a:picLocks noChangeAspect="1"/>
-          </p:cNvPicPr>
-          <p:nvPr/>
-        </p:nvPicPr>
-        <p:blipFill>
-          <a:blip r:embed="rId2" cstate="email">
-            <a:extLst>
-              <a:ext uri="{28A0092B-C50C-407E-A947-70E740481C1C}">
-                <a14:useLocalDpi xmlns:a14="http://schemas.microsoft.com/office/drawing/2010/main"/>
-              </a:ext>
-            </a:extLst>
-          </a:blip>
-          <a:stretch>
-            <a:fillRect/>
-          </a:stretch>
-        </p:blipFill>
-        <p:spPr>
-          <a:xfrm>
-            <a:off x="592857" y="2166917"/>
-            <a:ext cx="2079355" cy="1046718"/>
-          </a:xfrm>
-          <a:prstGeom prst="rect">
-            <a:avLst/>
-          </a:prstGeom>
-        </p:spPr>
-      </p:pic>
-      <p:pic>
-        <p:nvPicPr>
-          <p:cNvPr id="6" name="Picture 5">
-            <a:extLst>
-              <a:ext uri="{FF2B5EF4-FFF2-40B4-BE49-F238E27FC236}">
-                <a16:creationId xmlns:a16="http://schemas.microsoft.com/office/drawing/2014/main" id="{5996D345-1AD7-C44B-A5D5-921040892604}"/>
-              </a:ext>
-            </a:extLst>
-          </p:cNvPr>
-          <p:cNvPicPr>
-            <a:picLocks noChangeAspect="1"/>
-          </p:cNvPicPr>
-          <p:nvPr/>
-        </p:nvPicPr>
-        <p:blipFill>
-          <a:blip r:embed="rId3" cstate="email">
-            <a:extLst>
-              <a:ext uri="{28A0092B-C50C-407E-A947-70E740481C1C}">
-                <a14:useLocalDpi xmlns:a14="http://schemas.microsoft.com/office/drawing/2010/main"/>
-              </a:ext>
-            </a:extLst>
-          </a:blip>
-          <a:stretch>
-            <a:fillRect/>
-          </a:stretch>
-        </p:blipFill>
-        <p:spPr>
-          <a:xfrm>
-            <a:off x="2773051" y="2166917"/>
-            <a:ext cx="2079355" cy="1046718"/>
-          </a:xfrm>
-          <a:prstGeom prst="rect">
-            <a:avLst/>
-          </a:prstGeom>
-        </p:spPr>
-      </p:pic>
-      <p:sp>
-        <p:nvSpPr>
-          <p:cNvPr id="7" name="TextBox 6">
-            <a:extLst>
-              <a:ext uri="{FF2B5EF4-FFF2-40B4-BE49-F238E27FC236}">
-                <a16:creationId xmlns:a16="http://schemas.microsoft.com/office/drawing/2014/main" id="{BA7671ED-AC2B-434A-B53F-6906D1E2DAB3}"/>
-              </a:ext>
-            </a:extLst>
-          </p:cNvPr>
-          <p:cNvSpPr txBox="1"/>
-          <p:nvPr/>
-        </p:nvSpPr>
-        <p:spPr>
-          <a:xfrm>
-            <a:off x="153198" y="2492287"/>
-            <a:ext cx="411405" cy="369332"/>
-          </a:xfrm>
-          <a:prstGeom prst="rect">
-            <a:avLst/>
-          </a:prstGeom>
-          <a:noFill/>
-        </p:spPr>
-        <p:txBody>
-          <a:bodyPr wrap="square" rtlCol="0">
-            <a:spAutoFit/>
-          </a:bodyPr>
-          <a:lstStyle/>
-          <a:p>
-            <a:r>
-              <a:rPr lang="en-US" sz="1800" b="1" dirty="0">
-                <a:solidFill>
-                  <a:srgbClr val="00B050"/>
-                </a:solidFill>
-                <a:latin typeface="Menlo" panose="020B0609030804020204" pitchFamily="49" charset="0"/>
-                <a:ea typeface="Menlo" panose="020B0609030804020204" pitchFamily="49" charset="0"/>
-                <a:cs typeface="Menlo" panose="020B0609030804020204" pitchFamily="49" charset="0"/>
-              </a:rPr>
-              <a:t>A</a:t>
-            </a:r>
-          </a:p>
-        </p:txBody>
-      </p:sp>
-      <p:sp>
-        <p:nvSpPr>
-          <p:cNvPr id="8" name="TextBox 7">
-            <a:extLst>
-              <a:ext uri="{FF2B5EF4-FFF2-40B4-BE49-F238E27FC236}">
-                <a16:creationId xmlns:a16="http://schemas.microsoft.com/office/drawing/2014/main" id="{FEEB07CE-582A-044D-9FC6-EF4B1DC52B88}"/>
-              </a:ext>
-            </a:extLst>
-          </p:cNvPr>
-          <p:cNvSpPr txBox="1"/>
-          <p:nvPr/>
-        </p:nvSpPr>
-        <p:spPr>
-          <a:xfrm>
-            <a:off x="4962134" y="2492287"/>
-            <a:ext cx="411405" cy="369332"/>
-          </a:xfrm>
-          <a:prstGeom prst="rect">
-            <a:avLst/>
-          </a:prstGeom>
-          <a:noFill/>
-        </p:spPr>
-        <p:txBody>
-          <a:bodyPr wrap="square" rtlCol="0">
-            <a:spAutoFit/>
-          </a:bodyPr>
-          <a:lstStyle/>
-          <a:p>
-            <a:r>
-              <a:rPr lang="en-US" sz="1800" b="1" dirty="0">
-                <a:solidFill>
-                  <a:srgbClr val="00B050"/>
-                </a:solidFill>
-                <a:latin typeface="Menlo" panose="020B0609030804020204" pitchFamily="49" charset="0"/>
-                <a:ea typeface="Menlo" panose="020B0609030804020204" pitchFamily="49" charset="0"/>
-                <a:cs typeface="Menlo" panose="020B0609030804020204" pitchFamily="49" charset="0"/>
-              </a:rPr>
-              <a:t>B</a:t>
-            </a:r>
-          </a:p>
-        </p:txBody>
-      </p:sp>
-      <p:sp>
-        <p:nvSpPr>
-          <p:cNvPr id="10" name="Rectangle 9">
-            <a:extLst>
-              <a:ext uri="{FF2B5EF4-FFF2-40B4-BE49-F238E27FC236}">
-                <a16:creationId xmlns:a16="http://schemas.microsoft.com/office/drawing/2014/main" id="{9CD7ACBE-9D26-1F4C-A0EA-9DEA5B58888A}"/>
-              </a:ext>
-            </a:extLst>
-          </p:cNvPr>
-          <p:cNvSpPr/>
-          <p:nvPr/>
-        </p:nvSpPr>
-        <p:spPr>
-          <a:xfrm>
-            <a:off x="7074665" y="1675006"/>
-            <a:ext cx="5158912" cy="5170646"/>
-          </a:xfrm>
-          <a:prstGeom prst="rect">
-            <a:avLst/>
-          </a:prstGeom>
-        </p:spPr>
-        <p:txBody>
-          <a:bodyPr wrap="square">
-            <a:spAutoFit/>
-          </a:bodyPr>
-          <a:lstStyle/>
-          <a:p>
-            <a:r>
-              <a:rPr lang="en-US" sz="1100" dirty="0">
-                <a:solidFill>
-                  <a:srgbClr val="0070C0"/>
-                </a:solidFill>
-                <a:latin typeface="Menlo" panose="020B0609030804020204" pitchFamily="49" charset="0"/>
-                <a:ea typeface="Menlo" panose="020B0609030804020204" pitchFamily="49" charset="0"/>
-                <a:cs typeface="Menlo" panose="020B0609030804020204" pitchFamily="49" charset="0"/>
-              </a:rPr>
-              <a:t>N=10000</a:t>
-            </a:r>
-          </a:p>
-          <a:p>
-            <a:r>
-              <a:rPr lang="en-US" sz="1100" dirty="0">
-                <a:solidFill>
-                  <a:srgbClr val="0070C0"/>
-                </a:solidFill>
-                <a:latin typeface="Menlo" panose="020B0609030804020204" pitchFamily="49" charset="0"/>
-                <a:ea typeface="Menlo" panose="020B0609030804020204" pitchFamily="49" charset="0"/>
-                <a:cs typeface="Menlo" panose="020B0609030804020204" pitchFamily="49" charset="0"/>
-              </a:rPr>
-              <a:t>A = </a:t>
-            </a:r>
-            <a:r>
-              <a:rPr lang="en-US" sz="1100" dirty="0" err="1">
-                <a:solidFill>
-                  <a:srgbClr val="0070C0"/>
-                </a:solidFill>
-                <a:latin typeface="Menlo" panose="020B0609030804020204" pitchFamily="49" charset="0"/>
-                <a:ea typeface="Menlo" panose="020B0609030804020204" pitchFamily="49" charset="0"/>
-                <a:cs typeface="Menlo" panose="020B0609030804020204" pitchFamily="49" charset="0"/>
-              </a:rPr>
-              <a:t>np.random.exponential</a:t>
-            </a:r>
-            <a:r>
-              <a:rPr lang="en-US" sz="1100" dirty="0">
-                <a:solidFill>
-                  <a:srgbClr val="0070C0"/>
-                </a:solidFill>
-                <a:latin typeface="Menlo" panose="020B0609030804020204" pitchFamily="49" charset="0"/>
-                <a:ea typeface="Menlo" panose="020B0609030804020204" pitchFamily="49" charset="0"/>
-                <a:cs typeface="Menlo" panose="020B0609030804020204" pitchFamily="49" charset="0"/>
-              </a:rPr>
-              <a:t>(scale=2.0, size=N)</a:t>
-            </a:r>
-          </a:p>
-          <a:p>
-            <a:r>
-              <a:rPr lang="en-US" sz="1100" dirty="0">
-                <a:solidFill>
-                  <a:srgbClr val="0070C0"/>
-                </a:solidFill>
-                <a:latin typeface="Menlo" panose="020B0609030804020204" pitchFamily="49" charset="0"/>
-                <a:ea typeface="Menlo" panose="020B0609030804020204" pitchFamily="49" charset="0"/>
-                <a:cs typeface="Menlo" panose="020B0609030804020204" pitchFamily="49" charset="0"/>
-              </a:rPr>
-              <a:t>B = </a:t>
-            </a:r>
-            <a:r>
-              <a:rPr lang="en-US" sz="1100" dirty="0" err="1">
-                <a:solidFill>
-                  <a:srgbClr val="0070C0"/>
-                </a:solidFill>
-                <a:latin typeface="Menlo" panose="020B0609030804020204" pitchFamily="49" charset="0"/>
-                <a:ea typeface="Menlo" panose="020B0609030804020204" pitchFamily="49" charset="0"/>
-                <a:cs typeface="Menlo" panose="020B0609030804020204" pitchFamily="49" charset="0"/>
-              </a:rPr>
-              <a:t>np.random.exponential</a:t>
-            </a:r>
-            <a:r>
-              <a:rPr lang="en-US" sz="1100" dirty="0">
-                <a:solidFill>
-                  <a:srgbClr val="0070C0"/>
-                </a:solidFill>
-                <a:latin typeface="Menlo" panose="020B0609030804020204" pitchFamily="49" charset="0"/>
-                <a:ea typeface="Menlo" panose="020B0609030804020204" pitchFamily="49" charset="0"/>
-                <a:cs typeface="Menlo" panose="020B0609030804020204" pitchFamily="49" charset="0"/>
-              </a:rPr>
-              <a:t>(scale=2.4, size=N)</a:t>
-            </a:r>
-          </a:p>
-          <a:p>
-            <a:r>
-              <a:rPr lang="en-US" sz="1100" dirty="0">
-                <a:solidFill>
-                  <a:srgbClr val="0070C0"/>
-                </a:solidFill>
-                <a:latin typeface="Menlo" panose="020B0609030804020204" pitchFamily="49" charset="0"/>
-                <a:ea typeface="Menlo" panose="020B0609030804020204" pitchFamily="49" charset="0"/>
-                <a:cs typeface="Menlo" panose="020B0609030804020204" pitchFamily="49" charset="0"/>
-              </a:rPr>
-              <a:t>C = </a:t>
-            </a:r>
-            <a:r>
-              <a:rPr lang="en-US" sz="1100" dirty="0" err="1">
-                <a:solidFill>
-                  <a:srgbClr val="0070C0"/>
-                </a:solidFill>
-                <a:latin typeface="Menlo" panose="020B0609030804020204" pitchFamily="49" charset="0"/>
-                <a:ea typeface="Menlo" panose="020B0609030804020204" pitchFamily="49" charset="0"/>
-                <a:cs typeface="Menlo" panose="020B0609030804020204" pitchFamily="49" charset="0"/>
-              </a:rPr>
-              <a:t>np.concatenate</a:t>
-            </a:r>
-            <a:r>
-              <a:rPr lang="en-US" sz="1100" dirty="0">
-                <a:solidFill>
-                  <a:srgbClr val="0070C0"/>
-                </a:solidFill>
-                <a:latin typeface="Menlo" panose="020B0609030804020204" pitchFamily="49" charset="0"/>
-                <a:ea typeface="Menlo" panose="020B0609030804020204" pitchFamily="49" charset="0"/>
-                <a:cs typeface="Menlo" panose="020B0609030804020204" pitchFamily="49" charset="0"/>
-              </a:rPr>
-              <a:t>((A,B))</a:t>
-            </a:r>
-            <a:r>
-              <a:rPr lang="en-US" sz="1100" dirty="0">
-                <a:solidFill>
-                  <a:srgbClr val="00B050"/>
-                </a:solidFill>
-                <a:latin typeface="Menlo" panose="020B0609030804020204" pitchFamily="49" charset="0"/>
-                <a:ea typeface="Menlo" panose="020B0609030804020204" pitchFamily="49" charset="0"/>
-                <a:cs typeface="Menlo" panose="020B0609030804020204" pitchFamily="49" charset="0"/>
-              </a:rPr>
-              <a:t> # Combined</a:t>
-            </a:r>
-          </a:p>
-          <a:p>
-            <a:r>
-              <a:rPr lang="en-US" sz="1100" dirty="0" err="1">
-                <a:solidFill>
-                  <a:srgbClr val="0070C0"/>
-                </a:solidFill>
-                <a:latin typeface="Menlo" panose="020B0609030804020204" pitchFamily="49" charset="0"/>
-                <a:ea typeface="Menlo" panose="020B0609030804020204" pitchFamily="49" charset="0"/>
-                <a:cs typeface="Menlo" panose="020B0609030804020204" pitchFamily="49" charset="0"/>
-              </a:rPr>
-              <a:t>diff_AB</a:t>
-            </a:r>
-            <a:r>
-              <a:rPr lang="en-US" sz="1100" dirty="0">
-                <a:solidFill>
-                  <a:srgbClr val="0070C0"/>
-                </a:solidFill>
-                <a:latin typeface="Menlo" panose="020B0609030804020204" pitchFamily="49" charset="0"/>
-                <a:ea typeface="Menlo" panose="020B0609030804020204" pitchFamily="49" charset="0"/>
-                <a:cs typeface="Menlo" panose="020B0609030804020204" pitchFamily="49" charset="0"/>
-              </a:rPr>
-              <a:t> = </a:t>
-            </a:r>
-            <a:r>
-              <a:rPr lang="en-US" sz="1100" dirty="0" err="1">
-                <a:solidFill>
-                  <a:srgbClr val="0070C0"/>
-                </a:solidFill>
-                <a:latin typeface="Menlo" panose="020B0609030804020204" pitchFamily="49" charset="0"/>
-                <a:ea typeface="Menlo" panose="020B0609030804020204" pitchFamily="49" charset="0"/>
-                <a:cs typeface="Menlo" panose="020B0609030804020204" pitchFamily="49" charset="0"/>
-              </a:rPr>
-              <a:t>np.mean</a:t>
-            </a:r>
-            <a:r>
-              <a:rPr lang="en-US" sz="1100" dirty="0">
-                <a:solidFill>
-                  <a:srgbClr val="0070C0"/>
-                </a:solidFill>
-                <a:latin typeface="Menlo" panose="020B0609030804020204" pitchFamily="49" charset="0"/>
-                <a:ea typeface="Menlo" panose="020B0609030804020204" pitchFamily="49" charset="0"/>
-                <a:cs typeface="Menlo" panose="020B0609030804020204" pitchFamily="49" charset="0"/>
-              </a:rPr>
-              <a:t>(A) - </a:t>
-            </a:r>
-            <a:r>
-              <a:rPr lang="en-US" sz="1100" dirty="0" err="1">
-                <a:solidFill>
-                  <a:srgbClr val="0070C0"/>
-                </a:solidFill>
-                <a:latin typeface="Menlo" panose="020B0609030804020204" pitchFamily="49" charset="0"/>
-                <a:ea typeface="Menlo" panose="020B0609030804020204" pitchFamily="49" charset="0"/>
-                <a:cs typeface="Menlo" panose="020B0609030804020204" pitchFamily="49" charset="0"/>
-              </a:rPr>
-              <a:t>np.mean</a:t>
-            </a:r>
-            <a:r>
-              <a:rPr lang="en-US" sz="1100" dirty="0">
-                <a:solidFill>
-                  <a:srgbClr val="0070C0"/>
-                </a:solidFill>
-                <a:latin typeface="Menlo" panose="020B0609030804020204" pitchFamily="49" charset="0"/>
-                <a:ea typeface="Menlo" panose="020B0609030804020204" pitchFamily="49" charset="0"/>
-                <a:cs typeface="Menlo" panose="020B0609030804020204" pitchFamily="49" charset="0"/>
-              </a:rPr>
-              <a:t>(B)</a:t>
-            </a:r>
-          </a:p>
-          <a:p>
-            <a:endParaRPr lang="en-US" sz="1100" dirty="0">
-              <a:solidFill>
-                <a:srgbClr val="0070C0"/>
-              </a:solidFill>
-              <a:latin typeface="Menlo" panose="020B0609030804020204" pitchFamily="49" charset="0"/>
-              <a:ea typeface="Menlo" panose="020B0609030804020204" pitchFamily="49" charset="0"/>
-              <a:cs typeface="Menlo" panose="020B0609030804020204" pitchFamily="49" charset="0"/>
-            </a:endParaRPr>
-          </a:p>
-          <a:p>
-            <a:r>
-              <a:rPr lang="en-US" sz="1100" dirty="0" err="1">
-                <a:solidFill>
-                  <a:srgbClr val="0070C0"/>
-                </a:solidFill>
-                <a:latin typeface="Menlo" panose="020B0609030804020204" pitchFamily="49" charset="0"/>
-                <a:ea typeface="Menlo" panose="020B0609030804020204" pitchFamily="49" charset="0"/>
-                <a:cs typeface="Menlo" panose="020B0609030804020204" pitchFamily="49" charset="0"/>
-              </a:rPr>
-              <a:t>N_shuf</a:t>
-            </a:r>
-            <a:r>
-              <a:rPr lang="en-US" sz="1100" dirty="0">
-                <a:solidFill>
-                  <a:srgbClr val="0070C0"/>
-                </a:solidFill>
-                <a:latin typeface="Menlo" panose="020B0609030804020204" pitchFamily="49" charset="0"/>
-                <a:ea typeface="Menlo" panose="020B0609030804020204" pitchFamily="49" charset="0"/>
-                <a:cs typeface="Menlo" panose="020B0609030804020204" pitchFamily="49" charset="0"/>
-              </a:rPr>
-              <a:t> = 5000</a:t>
-            </a:r>
-          </a:p>
-          <a:p>
-            <a:r>
-              <a:rPr lang="en-US" sz="1100" dirty="0">
-                <a:solidFill>
-                  <a:srgbClr val="0070C0"/>
-                </a:solidFill>
-                <a:latin typeface="Menlo" panose="020B0609030804020204" pitchFamily="49" charset="0"/>
-                <a:ea typeface="Menlo" panose="020B0609030804020204" pitchFamily="49" charset="0"/>
-                <a:cs typeface="Menlo" panose="020B0609030804020204" pitchFamily="49" charset="0"/>
-              </a:rPr>
-              <a:t>counter = 1</a:t>
-            </a:r>
-          </a:p>
-          <a:p>
-            <a:r>
-              <a:rPr lang="en-US" sz="1100" dirty="0">
-                <a:solidFill>
-                  <a:srgbClr val="0070C0"/>
-                </a:solidFill>
-                <a:latin typeface="Menlo" panose="020B0609030804020204" pitchFamily="49" charset="0"/>
-                <a:ea typeface="Menlo" panose="020B0609030804020204" pitchFamily="49" charset="0"/>
-                <a:cs typeface="Menlo" panose="020B0609030804020204" pitchFamily="49" charset="0"/>
-              </a:rPr>
-              <a:t>diffs = </a:t>
-            </a:r>
-            <a:r>
-              <a:rPr lang="en-US" sz="1100" dirty="0" err="1">
-                <a:solidFill>
-                  <a:srgbClr val="0070C0"/>
-                </a:solidFill>
-                <a:latin typeface="Menlo" panose="020B0609030804020204" pitchFamily="49" charset="0"/>
-                <a:ea typeface="Menlo" panose="020B0609030804020204" pitchFamily="49" charset="0"/>
-                <a:cs typeface="Menlo" panose="020B0609030804020204" pitchFamily="49" charset="0"/>
-              </a:rPr>
-              <a:t>np.zeros</a:t>
-            </a:r>
-            <a:r>
-              <a:rPr lang="en-US" sz="1100" dirty="0">
-                <a:solidFill>
-                  <a:srgbClr val="0070C0"/>
-                </a:solidFill>
-                <a:latin typeface="Menlo" panose="020B0609030804020204" pitchFamily="49" charset="0"/>
-                <a:ea typeface="Menlo" panose="020B0609030804020204" pitchFamily="49" charset="0"/>
-                <a:cs typeface="Menlo" panose="020B0609030804020204" pitchFamily="49" charset="0"/>
-              </a:rPr>
-              <a:t>(</a:t>
-            </a:r>
-            <a:r>
-              <a:rPr lang="en-US" sz="1100" dirty="0" err="1">
-                <a:solidFill>
-                  <a:srgbClr val="0070C0"/>
-                </a:solidFill>
-                <a:latin typeface="Menlo" panose="020B0609030804020204" pitchFamily="49" charset="0"/>
-                <a:ea typeface="Menlo" panose="020B0609030804020204" pitchFamily="49" charset="0"/>
-                <a:cs typeface="Menlo" panose="020B0609030804020204" pitchFamily="49" charset="0"/>
-              </a:rPr>
-              <a:t>N_shuf</a:t>
-            </a:r>
-            <a:r>
-              <a:rPr lang="en-US" sz="1100" dirty="0">
-                <a:solidFill>
-                  <a:srgbClr val="0070C0"/>
-                </a:solidFill>
-                <a:latin typeface="Menlo" panose="020B0609030804020204" pitchFamily="49" charset="0"/>
-                <a:ea typeface="Menlo" panose="020B0609030804020204" pitchFamily="49" charset="0"/>
-                <a:cs typeface="Menlo" panose="020B0609030804020204" pitchFamily="49" charset="0"/>
-              </a:rPr>
-              <a:t>, </a:t>
-            </a:r>
-            <a:r>
-              <a:rPr lang="en-US" sz="1100" dirty="0" err="1">
-                <a:solidFill>
-                  <a:srgbClr val="0070C0"/>
-                </a:solidFill>
-                <a:latin typeface="Menlo" panose="020B0609030804020204" pitchFamily="49" charset="0"/>
-                <a:ea typeface="Menlo" panose="020B0609030804020204" pitchFamily="49" charset="0"/>
-                <a:cs typeface="Menlo" panose="020B0609030804020204" pitchFamily="49" charset="0"/>
-              </a:rPr>
-              <a:t>dtype</a:t>
-            </a:r>
-            <a:r>
-              <a:rPr lang="en-US" sz="1100" dirty="0">
-                <a:solidFill>
-                  <a:srgbClr val="0070C0"/>
-                </a:solidFill>
-                <a:latin typeface="Menlo" panose="020B0609030804020204" pitchFamily="49" charset="0"/>
-                <a:ea typeface="Menlo" panose="020B0609030804020204" pitchFamily="49" charset="0"/>
-                <a:cs typeface="Menlo" panose="020B0609030804020204" pitchFamily="49" charset="0"/>
-              </a:rPr>
-              <a:t>=float)</a:t>
-            </a:r>
-          </a:p>
-          <a:p>
-            <a:r>
-              <a:rPr lang="en-US" sz="1100" dirty="0" err="1">
-                <a:solidFill>
-                  <a:srgbClr val="0070C0"/>
-                </a:solidFill>
-                <a:latin typeface="Menlo" panose="020B0609030804020204" pitchFamily="49" charset="0"/>
-                <a:ea typeface="Menlo" panose="020B0609030804020204" pitchFamily="49" charset="0"/>
-                <a:cs typeface="Menlo" panose="020B0609030804020204" pitchFamily="49" charset="0"/>
-              </a:rPr>
-              <a:t>rng</a:t>
-            </a:r>
-            <a:r>
-              <a:rPr lang="en-US" sz="1100" dirty="0">
-                <a:solidFill>
-                  <a:srgbClr val="0070C0"/>
-                </a:solidFill>
-                <a:latin typeface="Menlo" panose="020B0609030804020204" pitchFamily="49" charset="0"/>
-                <a:ea typeface="Menlo" panose="020B0609030804020204" pitchFamily="49" charset="0"/>
-                <a:cs typeface="Menlo" panose="020B0609030804020204" pitchFamily="49" charset="0"/>
-              </a:rPr>
-              <a:t> = </a:t>
-            </a:r>
-            <a:r>
-              <a:rPr lang="en-US" sz="1100" dirty="0" err="1">
-                <a:solidFill>
-                  <a:srgbClr val="0070C0"/>
-                </a:solidFill>
-                <a:latin typeface="Menlo" panose="020B0609030804020204" pitchFamily="49" charset="0"/>
-                <a:ea typeface="Menlo" panose="020B0609030804020204" pitchFamily="49" charset="0"/>
-                <a:cs typeface="Menlo" panose="020B0609030804020204" pitchFamily="49" charset="0"/>
-              </a:rPr>
-              <a:t>np.random.default_rng</a:t>
-            </a:r>
-            <a:r>
-              <a:rPr lang="en-US" sz="1100" dirty="0">
-                <a:solidFill>
-                  <a:srgbClr val="0070C0"/>
-                </a:solidFill>
-                <a:latin typeface="Menlo" panose="020B0609030804020204" pitchFamily="49" charset="0"/>
-                <a:ea typeface="Menlo" panose="020B0609030804020204" pitchFamily="49" charset="0"/>
-                <a:cs typeface="Menlo" panose="020B0609030804020204" pitchFamily="49" charset="0"/>
-              </a:rPr>
-              <a:t>()</a:t>
-            </a:r>
-          </a:p>
-          <a:p>
-            <a:r>
-              <a:rPr lang="en-US" sz="1100" dirty="0">
-                <a:solidFill>
-                  <a:srgbClr val="0070C0"/>
-                </a:solidFill>
-                <a:latin typeface="Menlo" panose="020B0609030804020204" pitchFamily="49" charset="0"/>
-                <a:ea typeface="Menlo" panose="020B0609030804020204" pitchFamily="49" charset="0"/>
-                <a:cs typeface="Menlo" panose="020B0609030804020204" pitchFamily="49" charset="0"/>
-              </a:rPr>
-              <a:t>for ii in range(</a:t>
-            </a:r>
-            <a:r>
-              <a:rPr lang="en-US" sz="1100" dirty="0" err="1">
-                <a:solidFill>
-                  <a:srgbClr val="0070C0"/>
-                </a:solidFill>
-                <a:latin typeface="Menlo" panose="020B0609030804020204" pitchFamily="49" charset="0"/>
-                <a:ea typeface="Menlo" panose="020B0609030804020204" pitchFamily="49" charset="0"/>
-                <a:cs typeface="Menlo" panose="020B0609030804020204" pitchFamily="49" charset="0"/>
-              </a:rPr>
-              <a:t>N_shuf</a:t>
-            </a:r>
-            <a:r>
-              <a:rPr lang="en-US" sz="1100" dirty="0">
-                <a:solidFill>
-                  <a:srgbClr val="0070C0"/>
-                </a:solidFill>
-                <a:latin typeface="Menlo" panose="020B0609030804020204" pitchFamily="49" charset="0"/>
-                <a:ea typeface="Menlo" panose="020B0609030804020204" pitchFamily="49" charset="0"/>
-                <a:cs typeface="Menlo" panose="020B0609030804020204" pitchFamily="49" charset="0"/>
-              </a:rPr>
-              <a:t>):</a:t>
-            </a:r>
-          </a:p>
-          <a:p>
-            <a:r>
-              <a:rPr lang="en-US" sz="1100" dirty="0">
-                <a:solidFill>
-                  <a:srgbClr val="0070C0"/>
-                </a:solidFill>
-                <a:latin typeface="Menlo" panose="020B0609030804020204" pitchFamily="49" charset="0"/>
-                <a:ea typeface="Menlo" panose="020B0609030804020204" pitchFamily="49" charset="0"/>
-                <a:cs typeface="Menlo" panose="020B0609030804020204" pitchFamily="49" charset="0"/>
-              </a:rPr>
-              <a:t>    </a:t>
-            </a:r>
-            <a:r>
-              <a:rPr lang="en-US" sz="1100" dirty="0" err="1">
-                <a:solidFill>
-                  <a:srgbClr val="0070C0"/>
-                </a:solidFill>
-                <a:latin typeface="Menlo" panose="020B0609030804020204" pitchFamily="49" charset="0"/>
-                <a:ea typeface="Menlo" panose="020B0609030804020204" pitchFamily="49" charset="0"/>
-                <a:cs typeface="Menlo" panose="020B0609030804020204" pitchFamily="49" charset="0"/>
-              </a:rPr>
-              <a:t>rng.shuffle</a:t>
-            </a:r>
-            <a:r>
-              <a:rPr lang="en-US" sz="1100" dirty="0">
-                <a:solidFill>
-                  <a:srgbClr val="0070C0"/>
-                </a:solidFill>
-                <a:latin typeface="Menlo" panose="020B0609030804020204" pitchFamily="49" charset="0"/>
-                <a:ea typeface="Menlo" panose="020B0609030804020204" pitchFamily="49" charset="0"/>
-                <a:cs typeface="Menlo" panose="020B0609030804020204" pitchFamily="49" charset="0"/>
-              </a:rPr>
-              <a:t>(C, axis = 0)</a:t>
-            </a:r>
-          </a:p>
-          <a:p>
-            <a:r>
-              <a:rPr lang="en-US" sz="1100" dirty="0">
-                <a:solidFill>
-                  <a:srgbClr val="0070C0"/>
-                </a:solidFill>
-                <a:latin typeface="Menlo" panose="020B0609030804020204" pitchFamily="49" charset="0"/>
-                <a:ea typeface="Menlo" panose="020B0609030804020204" pitchFamily="49" charset="0"/>
-                <a:cs typeface="Menlo" panose="020B0609030804020204" pitchFamily="49" charset="0"/>
-              </a:rPr>
-              <a:t>    split1 = C[:N]</a:t>
-            </a:r>
-          </a:p>
-          <a:p>
-            <a:r>
-              <a:rPr lang="en-US" sz="1100" dirty="0">
-                <a:solidFill>
-                  <a:srgbClr val="0070C0"/>
-                </a:solidFill>
-                <a:latin typeface="Menlo" panose="020B0609030804020204" pitchFamily="49" charset="0"/>
-                <a:ea typeface="Menlo" panose="020B0609030804020204" pitchFamily="49" charset="0"/>
-                <a:cs typeface="Menlo" panose="020B0609030804020204" pitchFamily="49" charset="0"/>
-              </a:rPr>
-              <a:t>    split2 = C[N:]</a:t>
-            </a:r>
-          </a:p>
-          <a:p>
-            <a:r>
-              <a:rPr lang="en-US" sz="1100" dirty="0">
-                <a:solidFill>
-                  <a:srgbClr val="0070C0"/>
-                </a:solidFill>
-                <a:latin typeface="Menlo" panose="020B0609030804020204" pitchFamily="49" charset="0"/>
-                <a:ea typeface="Menlo" panose="020B0609030804020204" pitchFamily="49" charset="0"/>
-                <a:cs typeface="Menlo" panose="020B0609030804020204" pitchFamily="49" charset="0"/>
-              </a:rPr>
-              <a:t>    diffs[ii] = </a:t>
-            </a:r>
-            <a:r>
-              <a:rPr lang="en-US" sz="1100" dirty="0" err="1">
-                <a:solidFill>
-                  <a:srgbClr val="0070C0"/>
-                </a:solidFill>
-                <a:latin typeface="Menlo" panose="020B0609030804020204" pitchFamily="49" charset="0"/>
-                <a:ea typeface="Menlo" panose="020B0609030804020204" pitchFamily="49" charset="0"/>
-                <a:cs typeface="Menlo" panose="020B0609030804020204" pitchFamily="49" charset="0"/>
-              </a:rPr>
-              <a:t>np.mean</a:t>
-            </a:r>
-            <a:r>
-              <a:rPr lang="en-US" sz="1100" dirty="0">
-                <a:solidFill>
-                  <a:srgbClr val="0070C0"/>
-                </a:solidFill>
-                <a:latin typeface="Menlo" panose="020B0609030804020204" pitchFamily="49" charset="0"/>
-                <a:ea typeface="Menlo" panose="020B0609030804020204" pitchFamily="49" charset="0"/>
-                <a:cs typeface="Menlo" panose="020B0609030804020204" pitchFamily="49" charset="0"/>
-              </a:rPr>
-              <a:t>(split2) - </a:t>
-            </a:r>
-            <a:r>
-              <a:rPr lang="en-US" sz="1100" dirty="0" err="1">
-                <a:solidFill>
-                  <a:srgbClr val="0070C0"/>
-                </a:solidFill>
-                <a:latin typeface="Menlo" panose="020B0609030804020204" pitchFamily="49" charset="0"/>
-                <a:ea typeface="Menlo" panose="020B0609030804020204" pitchFamily="49" charset="0"/>
-                <a:cs typeface="Menlo" panose="020B0609030804020204" pitchFamily="49" charset="0"/>
-              </a:rPr>
-              <a:t>np.mean</a:t>
-            </a:r>
-            <a:r>
-              <a:rPr lang="en-US" sz="1100" dirty="0">
-                <a:solidFill>
-                  <a:srgbClr val="0070C0"/>
-                </a:solidFill>
-                <a:latin typeface="Menlo" panose="020B0609030804020204" pitchFamily="49" charset="0"/>
-                <a:ea typeface="Menlo" panose="020B0609030804020204" pitchFamily="49" charset="0"/>
-                <a:cs typeface="Menlo" panose="020B0609030804020204" pitchFamily="49" charset="0"/>
-              </a:rPr>
-              <a:t>(split1)</a:t>
-            </a:r>
-          </a:p>
-          <a:p>
-            <a:r>
-              <a:rPr lang="en-US" sz="1100" dirty="0">
-                <a:solidFill>
-                  <a:srgbClr val="0070C0"/>
-                </a:solidFill>
-                <a:latin typeface="Menlo" panose="020B0609030804020204" pitchFamily="49" charset="0"/>
-                <a:ea typeface="Menlo" panose="020B0609030804020204" pitchFamily="49" charset="0"/>
-                <a:cs typeface="Menlo" panose="020B0609030804020204" pitchFamily="49" charset="0"/>
-              </a:rPr>
-              <a:t>    if diffs[ii] &lt;= </a:t>
-            </a:r>
-            <a:r>
-              <a:rPr lang="en-US" sz="1100" dirty="0" err="1">
-                <a:solidFill>
-                  <a:srgbClr val="0070C0"/>
-                </a:solidFill>
-                <a:latin typeface="Menlo" panose="020B0609030804020204" pitchFamily="49" charset="0"/>
-                <a:ea typeface="Menlo" panose="020B0609030804020204" pitchFamily="49" charset="0"/>
-                <a:cs typeface="Menlo" panose="020B0609030804020204" pitchFamily="49" charset="0"/>
-              </a:rPr>
-              <a:t>diff_AB</a:t>
-            </a:r>
-            <a:r>
-              <a:rPr lang="en-US" sz="1100" dirty="0">
-                <a:solidFill>
-                  <a:srgbClr val="0070C0"/>
-                </a:solidFill>
-                <a:latin typeface="Menlo" panose="020B0609030804020204" pitchFamily="49" charset="0"/>
-                <a:ea typeface="Menlo" panose="020B0609030804020204" pitchFamily="49" charset="0"/>
-                <a:cs typeface="Menlo" panose="020B0609030804020204" pitchFamily="49" charset="0"/>
-              </a:rPr>
-              <a:t>:</a:t>
-            </a:r>
-          </a:p>
-          <a:p>
-            <a:r>
-              <a:rPr lang="en-US" sz="1100" dirty="0">
-                <a:solidFill>
-                  <a:srgbClr val="0070C0"/>
-                </a:solidFill>
-                <a:latin typeface="Menlo" panose="020B0609030804020204" pitchFamily="49" charset="0"/>
-                <a:ea typeface="Menlo" panose="020B0609030804020204" pitchFamily="49" charset="0"/>
-                <a:cs typeface="Menlo" panose="020B0609030804020204" pitchFamily="49" charset="0"/>
-              </a:rPr>
-              <a:t>        counter += 1</a:t>
-            </a:r>
-          </a:p>
-          <a:p>
-            <a:endParaRPr lang="en-US" sz="1100" dirty="0">
-              <a:solidFill>
-                <a:srgbClr val="0070C0"/>
-              </a:solidFill>
-              <a:latin typeface="Menlo" panose="020B0609030804020204" pitchFamily="49" charset="0"/>
-              <a:ea typeface="Menlo" panose="020B0609030804020204" pitchFamily="49" charset="0"/>
-              <a:cs typeface="Menlo" panose="020B0609030804020204" pitchFamily="49" charset="0"/>
-            </a:endParaRPr>
-          </a:p>
-          <a:p>
-            <a:r>
-              <a:rPr lang="en-US" sz="1100" dirty="0" err="1">
-                <a:solidFill>
-                  <a:srgbClr val="0070C0"/>
-                </a:solidFill>
-                <a:latin typeface="Menlo" panose="020B0609030804020204" pitchFamily="49" charset="0"/>
-                <a:ea typeface="Menlo" panose="020B0609030804020204" pitchFamily="49" charset="0"/>
-                <a:cs typeface="Menlo" panose="020B0609030804020204" pitchFamily="49" charset="0"/>
-              </a:rPr>
-              <a:t>diffs_mean</a:t>
-            </a:r>
-            <a:r>
-              <a:rPr lang="en-US" sz="1100" dirty="0">
-                <a:solidFill>
-                  <a:srgbClr val="0070C0"/>
-                </a:solidFill>
-                <a:latin typeface="Menlo" panose="020B0609030804020204" pitchFamily="49" charset="0"/>
-                <a:ea typeface="Menlo" panose="020B0609030804020204" pitchFamily="49" charset="0"/>
-                <a:cs typeface="Menlo" panose="020B0609030804020204" pitchFamily="49" charset="0"/>
-              </a:rPr>
-              <a:t> = </a:t>
-            </a:r>
-            <a:r>
-              <a:rPr lang="en-US" sz="1100" dirty="0" err="1">
-                <a:solidFill>
-                  <a:srgbClr val="0070C0"/>
-                </a:solidFill>
-                <a:latin typeface="Menlo" panose="020B0609030804020204" pitchFamily="49" charset="0"/>
-                <a:ea typeface="Menlo" panose="020B0609030804020204" pitchFamily="49" charset="0"/>
-                <a:cs typeface="Menlo" panose="020B0609030804020204" pitchFamily="49" charset="0"/>
-              </a:rPr>
-              <a:t>np.mean</a:t>
-            </a:r>
-            <a:r>
-              <a:rPr lang="en-US" sz="1100" dirty="0">
-                <a:solidFill>
-                  <a:srgbClr val="0070C0"/>
-                </a:solidFill>
-                <a:latin typeface="Menlo" panose="020B0609030804020204" pitchFamily="49" charset="0"/>
-                <a:ea typeface="Menlo" panose="020B0609030804020204" pitchFamily="49" charset="0"/>
-                <a:cs typeface="Menlo" panose="020B0609030804020204" pitchFamily="49" charset="0"/>
-              </a:rPr>
-              <a:t>(diffs)   </a:t>
-            </a:r>
-          </a:p>
-          <a:p>
-            <a:r>
-              <a:rPr lang="en-US" sz="1100" dirty="0" err="1">
-                <a:solidFill>
-                  <a:srgbClr val="0070C0"/>
-                </a:solidFill>
-                <a:latin typeface="Menlo" panose="020B0609030804020204" pitchFamily="49" charset="0"/>
-                <a:ea typeface="Menlo" panose="020B0609030804020204" pitchFamily="49" charset="0"/>
-                <a:cs typeface="Menlo" panose="020B0609030804020204" pitchFamily="49" charset="0"/>
-              </a:rPr>
-              <a:t>diffs_std</a:t>
-            </a:r>
-            <a:r>
-              <a:rPr lang="en-US" sz="1100" dirty="0">
-                <a:solidFill>
-                  <a:srgbClr val="0070C0"/>
-                </a:solidFill>
-                <a:latin typeface="Menlo" panose="020B0609030804020204" pitchFamily="49" charset="0"/>
-                <a:ea typeface="Menlo" panose="020B0609030804020204" pitchFamily="49" charset="0"/>
-                <a:cs typeface="Menlo" panose="020B0609030804020204" pitchFamily="49" charset="0"/>
-              </a:rPr>
-              <a:t>  = </a:t>
-            </a:r>
-            <a:r>
-              <a:rPr lang="en-US" sz="1100" dirty="0" err="1">
-                <a:solidFill>
-                  <a:srgbClr val="0070C0"/>
-                </a:solidFill>
-                <a:latin typeface="Menlo" panose="020B0609030804020204" pitchFamily="49" charset="0"/>
-                <a:ea typeface="Menlo" panose="020B0609030804020204" pitchFamily="49" charset="0"/>
-                <a:cs typeface="Menlo" panose="020B0609030804020204" pitchFamily="49" charset="0"/>
-              </a:rPr>
-              <a:t>np.std</a:t>
-            </a:r>
-            <a:r>
-              <a:rPr lang="en-US" sz="1100" dirty="0">
-                <a:solidFill>
-                  <a:srgbClr val="0070C0"/>
-                </a:solidFill>
-                <a:latin typeface="Menlo" panose="020B0609030804020204" pitchFamily="49" charset="0"/>
-                <a:ea typeface="Menlo" panose="020B0609030804020204" pitchFamily="49" charset="0"/>
-                <a:cs typeface="Menlo" panose="020B0609030804020204" pitchFamily="49" charset="0"/>
-              </a:rPr>
-              <a:t>(diffs)</a:t>
-            </a:r>
-          </a:p>
-          <a:p>
-            <a:r>
-              <a:rPr lang="en-US" sz="1100" dirty="0">
-                <a:solidFill>
-                  <a:srgbClr val="0070C0"/>
-                </a:solidFill>
-                <a:latin typeface="Menlo" panose="020B0609030804020204" pitchFamily="49" charset="0"/>
-                <a:ea typeface="Menlo" panose="020B0609030804020204" pitchFamily="49" charset="0"/>
-                <a:cs typeface="Menlo" panose="020B0609030804020204" pitchFamily="49" charset="0"/>
-              </a:rPr>
-              <a:t>print(</a:t>
-            </a:r>
-            <a:r>
-              <a:rPr lang="en-US" sz="1100" dirty="0" err="1">
-                <a:solidFill>
-                  <a:srgbClr val="0070C0"/>
-                </a:solidFill>
-                <a:latin typeface="Menlo" panose="020B0609030804020204" pitchFamily="49" charset="0"/>
-                <a:ea typeface="Menlo" panose="020B0609030804020204" pitchFamily="49" charset="0"/>
-                <a:cs typeface="Menlo" panose="020B0609030804020204" pitchFamily="49" charset="0"/>
-              </a:rPr>
-              <a:t>f"diff_AB</a:t>
-            </a:r>
-            <a:r>
-              <a:rPr lang="en-US" sz="1100" dirty="0">
-                <a:solidFill>
-                  <a:srgbClr val="0070C0"/>
-                </a:solidFill>
-                <a:latin typeface="Menlo" panose="020B0609030804020204" pitchFamily="49" charset="0"/>
-                <a:ea typeface="Menlo" panose="020B0609030804020204" pitchFamily="49" charset="0"/>
-                <a:cs typeface="Menlo" panose="020B0609030804020204" pitchFamily="49" charset="0"/>
-              </a:rPr>
-              <a:t>    = {diff_AB:.5f}")   </a:t>
-            </a:r>
-            <a:r>
-              <a:rPr lang="en-US" sz="1100" dirty="0">
-                <a:solidFill>
-                  <a:srgbClr val="00B050"/>
-                </a:solidFill>
-                <a:latin typeface="Menlo" panose="020B0609030804020204" pitchFamily="49" charset="0"/>
-                <a:ea typeface="Menlo" panose="020B0609030804020204" pitchFamily="49" charset="0"/>
-                <a:cs typeface="Menlo" panose="020B0609030804020204" pitchFamily="49" charset="0"/>
-              </a:rPr>
-              <a:t>  # 0.4</a:t>
-            </a:r>
-          </a:p>
-          <a:p>
-            <a:r>
-              <a:rPr lang="en-US" sz="1100" dirty="0">
-                <a:solidFill>
-                  <a:srgbClr val="0070C0"/>
-                </a:solidFill>
-                <a:latin typeface="Menlo" panose="020B0609030804020204" pitchFamily="49" charset="0"/>
-                <a:ea typeface="Menlo" panose="020B0609030804020204" pitchFamily="49" charset="0"/>
-                <a:cs typeface="Menlo" panose="020B0609030804020204" pitchFamily="49" charset="0"/>
-              </a:rPr>
-              <a:t>print(</a:t>
-            </a:r>
-            <a:r>
-              <a:rPr lang="en-US" sz="1100" dirty="0" err="1">
-                <a:solidFill>
-                  <a:srgbClr val="0070C0"/>
-                </a:solidFill>
-                <a:latin typeface="Menlo" panose="020B0609030804020204" pitchFamily="49" charset="0"/>
-                <a:ea typeface="Menlo" panose="020B0609030804020204" pitchFamily="49" charset="0"/>
-                <a:cs typeface="Menlo" panose="020B0609030804020204" pitchFamily="49" charset="0"/>
-              </a:rPr>
-              <a:t>f"diffs</a:t>
-            </a:r>
-            <a:r>
-              <a:rPr lang="en-US" sz="1100" dirty="0">
-                <a:solidFill>
-                  <a:srgbClr val="0070C0"/>
-                </a:solidFill>
-                <a:latin typeface="Menlo" panose="020B0609030804020204" pitchFamily="49" charset="0"/>
-                <a:ea typeface="Menlo" panose="020B0609030804020204" pitchFamily="49" charset="0"/>
-                <a:cs typeface="Menlo" panose="020B0609030804020204" pitchFamily="49" charset="0"/>
-              </a:rPr>
-              <a:t> mean = {diffs_mean:.5f}")</a:t>
-            </a:r>
-            <a:r>
-              <a:rPr lang="en-US" sz="1100" dirty="0">
-                <a:solidFill>
-                  <a:srgbClr val="00B050"/>
-                </a:solidFill>
-                <a:latin typeface="Menlo" panose="020B0609030804020204" pitchFamily="49" charset="0"/>
-                <a:ea typeface="Menlo" panose="020B0609030804020204" pitchFamily="49" charset="0"/>
-                <a:cs typeface="Menlo" panose="020B0609030804020204" pitchFamily="49" charset="0"/>
-              </a:rPr>
-              <a:t>  # 0</a:t>
-            </a:r>
-          </a:p>
-          <a:p>
-            <a:r>
-              <a:rPr lang="en-US" sz="1100" dirty="0">
-                <a:solidFill>
-                  <a:srgbClr val="0070C0"/>
-                </a:solidFill>
-                <a:latin typeface="Menlo" panose="020B0609030804020204" pitchFamily="49" charset="0"/>
-                <a:ea typeface="Menlo" panose="020B0609030804020204" pitchFamily="49" charset="0"/>
-                <a:cs typeface="Menlo" panose="020B0609030804020204" pitchFamily="49" charset="0"/>
-              </a:rPr>
-              <a:t>print(</a:t>
-            </a:r>
-            <a:r>
-              <a:rPr lang="en-US" sz="1100" dirty="0" err="1">
-                <a:solidFill>
-                  <a:srgbClr val="0070C0"/>
-                </a:solidFill>
-                <a:latin typeface="Menlo" panose="020B0609030804020204" pitchFamily="49" charset="0"/>
-                <a:ea typeface="Menlo" panose="020B0609030804020204" pitchFamily="49" charset="0"/>
-                <a:cs typeface="Menlo" panose="020B0609030804020204" pitchFamily="49" charset="0"/>
-              </a:rPr>
-              <a:t>f"diffs</a:t>
-            </a:r>
-            <a:r>
-              <a:rPr lang="en-US" sz="1100" dirty="0">
-                <a:solidFill>
-                  <a:srgbClr val="0070C0"/>
-                </a:solidFill>
-                <a:latin typeface="Menlo" panose="020B0609030804020204" pitchFamily="49" charset="0"/>
-                <a:ea typeface="Menlo" panose="020B0609030804020204" pitchFamily="49" charset="0"/>
-                <a:cs typeface="Menlo" panose="020B0609030804020204" pitchFamily="49" charset="0"/>
-              </a:rPr>
-              <a:t> std  = {diffs_std:.5f}") </a:t>
-            </a:r>
-            <a:r>
-              <a:rPr lang="en-US" sz="1100" dirty="0">
-                <a:solidFill>
-                  <a:srgbClr val="00B050"/>
-                </a:solidFill>
-                <a:latin typeface="Menlo" panose="020B0609030804020204" pitchFamily="49" charset="0"/>
-                <a:ea typeface="Menlo" panose="020B0609030804020204" pitchFamily="49" charset="0"/>
-                <a:cs typeface="Menlo" panose="020B0609030804020204" pitchFamily="49" charset="0"/>
-              </a:rPr>
-              <a:t>  # 0.03</a:t>
-            </a:r>
-          </a:p>
-          <a:p>
-            <a:r>
-              <a:rPr lang="en-US" sz="1100" dirty="0">
-                <a:solidFill>
-                  <a:srgbClr val="0070C0"/>
-                </a:solidFill>
-                <a:latin typeface="Menlo" panose="020B0609030804020204" pitchFamily="49" charset="0"/>
-                <a:ea typeface="Menlo" panose="020B0609030804020204" pitchFamily="49" charset="0"/>
-                <a:cs typeface="Menlo" panose="020B0609030804020204" pitchFamily="49" charset="0"/>
-              </a:rPr>
-              <a:t>print(</a:t>
-            </a:r>
-            <a:r>
-              <a:rPr lang="en-US" sz="1100" dirty="0" err="1">
-                <a:solidFill>
-                  <a:srgbClr val="0070C0"/>
-                </a:solidFill>
-                <a:latin typeface="Menlo" panose="020B0609030804020204" pitchFamily="49" charset="0"/>
-                <a:ea typeface="Menlo" panose="020B0609030804020204" pitchFamily="49" charset="0"/>
-                <a:cs typeface="Menlo" panose="020B0609030804020204" pitchFamily="49" charset="0"/>
-              </a:rPr>
-              <a:t>f"P</a:t>
-            </a:r>
-            <a:r>
-              <a:rPr lang="en-US" sz="1100" dirty="0">
-                <a:solidFill>
-                  <a:srgbClr val="0070C0"/>
-                </a:solidFill>
-                <a:latin typeface="Menlo" panose="020B0609030804020204" pitchFamily="49" charset="0"/>
-                <a:ea typeface="Menlo" panose="020B0609030804020204" pitchFamily="49" charset="0"/>
-                <a:cs typeface="Menlo" panose="020B0609030804020204" pitchFamily="49" charset="0"/>
-              </a:rPr>
-              <a:t>-value    = {counter/</a:t>
-            </a:r>
-            <a:r>
-              <a:rPr lang="en-US" sz="1100" dirty="0" err="1">
-                <a:solidFill>
-                  <a:srgbClr val="0070C0"/>
-                </a:solidFill>
-                <a:latin typeface="Menlo" panose="020B0609030804020204" pitchFamily="49" charset="0"/>
-                <a:ea typeface="Menlo" panose="020B0609030804020204" pitchFamily="49" charset="0"/>
-                <a:cs typeface="Menlo" panose="020B0609030804020204" pitchFamily="49" charset="0"/>
-              </a:rPr>
-              <a:t>N_shuf</a:t>
-            </a:r>
-            <a:r>
-              <a:rPr lang="en-US" sz="1100" dirty="0">
-                <a:solidFill>
-                  <a:srgbClr val="0070C0"/>
-                </a:solidFill>
-                <a:latin typeface="Menlo" panose="020B0609030804020204" pitchFamily="49" charset="0"/>
-                <a:ea typeface="Menlo" panose="020B0609030804020204" pitchFamily="49" charset="0"/>
-                <a:cs typeface="Menlo" panose="020B0609030804020204" pitchFamily="49" charset="0"/>
-              </a:rPr>
-              <a:t>}") </a:t>
-            </a:r>
-            <a:r>
-              <a:rPr lang="en-US" sz="1100" dirty="0">
-                <a:solidFill>
-                  <a:srgbClr val="00B050"/>
-                </a:solidFill>
-                <a:latin typeface="Menlo" panose="020B0609030804020204" pitchFamily="49" charset="0"/>
-                <a:ea typeface="Menlo" panose="020B0609030804020204" pitchFamily="49" charset="0"/>
-                <a:cs typeface="Menlo" panose="020B0609030804020204" pitchFamily="49" charset="0"/>
-              </a:rPr>
-              <a:t> # 0.0002</a:t>
-            </a:r>
-          </a:p>
-          <a:p>
-            <a:endParaRPr lang="en-US" sz="1100" dirty="0">
-              <a:solidFill>
-                <a:srgbClr val="0070C0"/>
-              </a:solidFill>
-              <a:latin typeface="Menlo" panose="020B0609030804020204" pitchFamily="49" charset="0"/>
-              <a:ea typeface="Menlo" panose="020B0609030804020204" pitchFamily="49" charset="0"/>
-              <a:cs typeface="Menlo" panose="020B0609030804020204" pitchFamily="49" charset="0"/>
-            </a:endParaRPr>
-          </a:p>
-          <a:p>
-            <a:r>
-              <a:rPr lang="en-US" sz="1100" dirty="0" err="1">
-                <a:solidFill>
-                  <a:srgbClr val="0070C0"/>
-                </a:solidFill>
-                <a:latin typeface="Menlo" panose="020B0609030804020204" pitchFamily="49" charset="0"/>
-                <a:ea typeface="Menlo" panose="020B0609030804020204" pitchFamily="49" charset="0"/>
-                <a:cs typeface="Menlo" panose="020B0609030804020204" pitchFamily="49" charset="0"/>
-              </a:rPr>
-              <a:t>plt.rcParams</a:t>
-            </a:r>
-            <a:r>
-              <a:rPr lang="en-US" sz="1100" dirty="0">
-                <a:solidFill>
-                  <a:srgbClr val="0070C0"/>
-                </a:solidFill>
-                <a:latin typeface="Menlo" panose="020B0609030804020204" pitchFamily="49" charset="0"/>
-                <a:ea typeface="Menlo" panose="020B0609030804020204" pitchFamily="49" charset="0"/>
-                <a:cs typeface="Menlo" panose="020B0609030804020204" pitchFamily="49" charset="0"/>
-              </a:rPr>
-              <a:t>["</a:t>
-            </a:r>
-            <a:r>
-              <a:rPr lang="en-US" sz="1100" dirty="0" err="1">
-                <a:solidFill>
-                  <a:srgbClr val="0070C0"/>
-                </a:solidFill>
-                <a:latin typeface="Menlo" panose="020B0609030804020204" pitchFamily="49" charset="0"/>
-                <a:ea typeface="Menlo" panose="020B0609030804020204" pitchFamily="49" charset="0"/>
-                <a:cs typeface="Menlo" panose="020B0609030804020204" pitchFamily="49" charset="0"/>
-              </a:rPr>
-              <a:t>figure.figsize</a:t>
-            </a:r>
-            <a:r>
-              <a:rPr lang="en-US" sz="1100" dirty="0">
-                <a:solidFill>
-                  <a:srgbClr val="0070C0"/>
-                </a:solidFill>
-                <a:latin typeface="Menlo" panose="020B0609030804020204" pitchFamily="49" charset="0"/>
-                <a:ea typeface="Menlo" panose="020B0609030804020204" pitchFamily="49" charset="0"/>
-                <a:cs typeface="Menlo" panose="020B0609030804020204" pitchFamily="49" charset="0"/>
-              </a:rPr>
-              <a:t>"] = (8, 4) </a:t>
-            </a:r>
-            <a:r>
-              <a:rPr lang="en-US" sz="1100" dirty="0">
-                <a:solidFill>
-                  <a:srgbClr val="00B050"/>
-                </a:solidFill>
-                <a:latin typeface="Menlo" panose="020B0609030804020204" pitchFamily="49" charset="0"/>
-                <a:ea typeface="Menlo" panose="020B0609030804020204" pitchFamily="49" charset="0"/>
-                <a:cs typeface="Menlo" panose="020B0609030804020204" pitchFamily="49" charset="0"/>
-              </a:rPr>
-              <a:t># (width, height)</a:t>
-            </a:r>
-          </a:p>
-          <a:p>
-            <a:r>
-              <a:rPr lang="en-US" sz="1100" dirty="0">
-                <a:solidFill>
-                  <a:srgbClr val="0070C0"/>
-                </a:solidFill>
-                <a:latin typeface="Menlo" panose="020B0609030804020204" pitchFamily="49" charset="0"/>
-                <a:ea typeface="Menlo" panose="020B0609030804020204" pitchFamily="49" charset="0"/>
-                <a:cs typeface="Menlo" panose="020B0609030804020204" pitchFamily="49" charset="0"/>
-              </a:rPr>
-              <a:t>fig, ax = </a:t>
-            </a:r>
-            <a:r>
-              <a:rPr lang="en-US" sz="1100" dirty="0" err="1">
-                <a:solidFill>
-                  <a:srgbClr val="0070C0"/>
-                </a:solidFill>
-                <a:latin typeface="Menlo" panose="020B0609030804020204" pitchFamily="49" charset="0"/>
-                <a:ea typeface="Menlo" panose="020B0609030804020204" pitchFamily="49" charset="0"/>
-                <a:cs typeface="Menlo" panose="020B0609030804020204" pitchFamily="49" charset="0"/>
-              </a:rPr>
-              <a:t>plt.subplots</a:t>
-            </a:r>
-            <a:r>
-              <a:rPr lang="en-US" sz="1100" dirty="0">
-                <a:solidFill>
-                  <a:srgbClr val="0070C0"/>
-                </a:solidFill>
-                <a:latin typeface="Menlo" panose="020B0609030804020204" pitchFamily="49" charset="0"/>
-                <a:ea typeface="Menlo" panose="020B0609030804020204" pitchFamily="49" charset="0"/>
-                <a:cs typeface="Menlo" panose="020B0609030804020204" pitchFamily="49" charset="0"/>
-              </a:rPr>
-              <a:t>(</a:t>
-            </a:r>
-            <a:r>
-              <a:rPr lang="en-US" sz="1100" dirty="0" err="1">
-                <a:solidFill>
-                  <a:srgbClr val="0070C0"/>
-                </a:solidFill>
-                <a:latin typeface="Menlo" panose="020B0609030804020204" pitchFamily="49" charset="0"/>
-                <a:ea typeface="Menlo" panose="020B0609030804020204" pitchFamily="49" charset="0"/>
-                <a:cs typeface="Menlo" panose="020B0609030804020204" pitchFamily="49" charset="0"/>
-              </a:rPr>
-              <a:t>nrows</a:t>
-            </a:r>
-            <a:r>
-              <a:rPr lang="en-US" sz="1100" dirty="0">
-                <a:solidFill>
-                  <a:srgbClr val="0070C0"/>
-                </a:solidFill>
-                <a:latin typeface="Menlo" panose="020B0609030804020204" pitchFamily="49" charset="0"/>
-                <a:ea typeface="Menlo" panose="020B0609030804020204" pitchFamily="49" charset="0"/>
-                <a:cs typeface="Menlo" panose="020B0609030804020204" pitchFamily="49" charset="0"/>
-              </a:rPr>
-              <a:t>=1, </a:t>
-            </a:r>
-            <a:r>
-              <a:rPr lang="en-US" sz="1100" dirty="0" err="1">
-                <a:solidFill>
-                  <a:srgbClr val="0070C0"/>
-                </a:solidFill>
-                <a:latin typeface="Menlo" panose="020B0609030804020204" pitchFamily="49" charset="0"/>
-                <a:ea typeface="Menlo" panose="020B0609030804020204" pitchFamily="49" charset="0"/>
-                <a:cs typeface="Menlo" panose="020B0609030804020204" pitchFamily="49" charset="0"/>
-              </a:rPr>
-              <a:t>ncols</a:t>
-            </a:r>
-            <a:r>
-              <a:rPr lang="en-US" sz="1100" dirty="0">
-                <a:solidFill>
-                  <a:srgbClr val="0070C0"/>
-                </a:solidFill>
-                <a:latin typeface="Menlo" panose="020B0609030804020204" pitchFamily="49" charset="0"/>
-                <a:ea typeface="Menlo" panose="020B0609030804020204" pitchFamily="49" charset="0"/>
-                <a:cs typeface="Menlo" panose="020B0609030804020204" pitchFamily="49" charset="0"/>
-              </a:rPr>
-              <a:t>=1)</a:t>
-            </a:r>
-          </a:p>
-          <a:p>
-            <a:r>
-              <a:rPr lang="en-US" sz="1100" dirty="0" err="1">
-                <a:solidFill>
-                  <a:srgbClr val="0070C0"/>
-                </a:solidFill>
-                <a:latin typeface="Menlo" panose="020B0609030804020204" pitchFamily="49" charset="0"/>
-                <a:ea typeface="Menlo" panose="020B0609030804020204" pitchFamily="49" charset="0"/>
-                <a:cs typeface="Menlo" panose="020B0609030804020204" pitchFamily="49" charset="0"/>
-              </a:rPr>
-              <a:t>ax.hist</a:t>
-            </a:r>
-            <a:r>
-              <a:rPr lang="en-US" sz="1100" dirty="0">
-                <a:solidFill>
-                  <a:srgbClr val="0070C0"/>
-                </a:solidFill>
-                <a:latin typeface="Menlo" panose="020B0609030804020204" pitchFamily="49" charset="0"/>
-                <a:ea typeface="Menlo" panose="020B0609030804020204" pitchFamily="49" charset="0"/>
-                <a:cs typeface="Menlo" panose="020B0609030804020204" pitchFamily="49" charset="0"/>
-              </a:rPr>
-              <a:t>(</a:t>
-            </a:r>
-            <a:r>
-              <a:rPr lang="en-US" sz="1100" dirty="0" err="1">
-                <a:solidFill>
-                  <a:srgbClr val="0070C0"/>
-                </a:solidFill>
-                <a:latin typeface="Menlo" panose="020B0609030804020204" pitchFamily="49" charset="0"/>
-                <a:ea typeface="Menlo" panose="020B0609030804020204" pitchFamily="49" charset="0"/>
-                <a:cs typeface="Menlo" panose="020B0609030804020204" pitchFamily="49" charset="0"/>
-              </a:rPr>
-              <a:t>diffs,bins</a:t>
-            </a:r>
-            <a:r>
-              <a:rPr lang="en-US" sz="1100" dirty="0">
-                <a:solidFill>
-                  <a:srgbClr val="0070C0"/>
-                </a:solidFill>
-                <a:latin typeface="Menlo" panose="020B0609030804020204" pitchFamily="49" charset="0"/>
-                <a:ea typeface="Menlo" panose="020B0609030804020204" pitchFamily="49" charset="0"/>
-                <a:cs typeface="Menlo" panose="020B0609030804020204" pitchFamily="49" charset="0"/>
-              </a:rPr>
-              <a:t>=100)</a:t>
-            </a:r>
-          </a:p>
-          <a:p>
-            <a:r>
-              <a:rPr lang="en-US" sz="1100" dirty="0" err="1">
-                <a:solidFill>
-                  <a:srgbClr val="0070C0"/>
-                </a:solidFill>
-                <a:latin typeface="Menlo" panose="020B0609030804020204" pitchFamily="49" charset="0"/>
-                <a:ea typeface="Menlo" panose="020B0609030804020204" pitchFamily="49" charset="0"/>
-                <a:cs typeface="Menlo" panose="020B0609030804020204" pitchFamily="49" charset="0"/>
-              </a:rPr>
-              <a:t>ax.set_xlim</a:t>
-            </a:r>
-            <a:r>
-              <a:rPr lang="en-US" sz="1100" dirty="0">
-                <a:solidFill>
-                  <a:srgbClr val="0070C0"/>
-                </a:solidFill>
-                <a:latin typeface="Menlo" panose="020B0609030804020204" pitchFamily="49" charset="0"/>
-                <a:ea typeface="Menlo" panose="020B0609030804020204" pitchFamily="49" charset="0"/>
-                <a:cs typeface="Menlo" panose="020B0609030804020204" pitchFamily="49" charset="0"/>
-              </a:rPr>
-              <a:t>(left=0,right=0.2)</a:t>
-            </a:r>
-          </a:p>
-          <a:p>
-            <a:r>
-              <a:rPr lang="en-US" sz="1100" dirty="0" err="1">
-                <a:solidFill>
-                  <a:srgbClr val="0070C0"/>
-                </a:solidFill>
-                <a:latin typeface="Menlo" panose="020B0609030804020204" pitchFamily="49" charset="0"/>
-                <a:ea typeface="Menlo" panose="020B0609030804020204" pitchFamily="49" charset="0"/>
-                <a:cs typeface="Menlo" panose="020B0609030804020204" pitchFamily="49" charset="0"/>
-              </a:rPr>
-              <a:t>plt.show</a:t>
-            </a:r>
-            <a:r>
-              <a:rPr lang="en-US" sz="1100" dirty="0">
-                <a:solidFill>
-                  <a:srgbClr val="0070C0"/>
-                </a:solidFill>
-                <a:latin typeface="Menlo" panose="020B0609030804020204" pitchFamily="49" charset="0"/>
-                <a:ea typeface="Menlo" panose="020B0609030804020204" pitchFamily="49" charset="0"/>
-                <a:cs typeface="Menlo" panose="020B0609030804020204" pitchFamily="49" charset="0"/>
-              </a:rPr>
-              <a:t>();</a:t>
-            </a:r>
-          </a:p>
-        </p:txBody>
-      </p:sp>
-      <p:pic>
-        <p:nvPicPr>
-          <p:cNvPr id="11" name="Picture 10">
-            <a:extLst>
-              <a:ext uri="{FF2B5EF4-FFF2-40B4-BE49-F238E27FC236}">
-                <a16:creationId xmlns:a16="http://schemas.microsoft.com/office/drawing/2014/main" id="{819CECB9-FA40-2B4A-8E80-911C091D3BD6}"/>
-              </a:ext>
-            </a:extLst>
-          </p:cNvPr>
-          <p:cNvPicPr>
-            <a:picLocks noChangeAspect="1"/>
-          </p:cNvPicPr>
-          <p:nvPr/>
-        </p:nvPicPr>
-        <p:blipFill>
-          <a:blip r:embed="rId4" cstate="email">
-            <a:extLst>
-              <a:ext uri="{28A0092B-C50C-407E-A947-70E740481C1C}">
-                <a14:useLocalDpi xmlns:a14="http://schemas.microsoft.com/office/drawing/2010/main"/>
-              </a:ext>
-            </a:extLst>
-          </a:blip>
-          <a:stretch>
-            <a:fillRect/>
-          </a:stretch>
-        </p:blipFill>
-        <p:spPr>
-          <a:xfrm>
-            <a:off x="1707699" y="3579188"/>
-            <a:ext cx="2130703" cy="1072566"/>
-          </a:xfrm>
-          <a:prstGeom prst="rect">
-            <a:avLst/>
-          </a:prstGeom>
-        </p:spPr>
-      </p:pic>
-      <p:sp>
-        <p:nvSpPr>
-          <p:cNvPr id="12" name="TextBox 11">
-            <a:extLst>
-              <a:ext uri="{FF2B5EF4-FFF2-40B4-BE49-F238E27FC236}">
-                <a16:creationId xmlns:a16="http://schemas.microsoft.com/office/drawing/2014/main" id="{99770D08-03F1-D24C-A73C-37974E179C5F}"/>
-              </a:ext>
-            </a:extLst>
-          </p:cNvPr>
-          <p:cNvSpPr txBox="1"/>
-          <p:nvPr/>
-        </p:nvSpPr>
-        <p:spPr>
-          <a:xfrm>
-            <a:off x="977854" y="3242523"/>
-            <a:ext cx="3566009" cy="307777"/>
-          </a:xfrm>
-          <a:prstGeom prst="rect">
-            <a:avLst/>
-          </a:prstGeom>
-          <a:noFill/>
-        </p:spPr>
-        <p:txBody>
-          <a:bodyPr wrap="square" rtlCol="0">
-            <a:spAutoFit/>
-          </a:bodyPr>
-          <a:lstStyle/>
-          <a:p>
-            <a:pPr algn="ctr"/>
-            <a:r>
-              <a:rPr lang="en-US" dirty="0">
-                <a:solidFill>
-                  <a:srgbClr val="0070C0"/>
-                </a:solidFill>
-                <a:latin typeface="+mj-lt"/>
-                <a:ea typeface="Menlo" panose="020B0609030804020204" pitchFamily="49" charset="0"/>
-                <a:cs typeface="Menlo" panose="020B0609030804020204" pitchFamily="49" charset="0"/>
-              </a:rPr>
-              <a:t>Distribution of diffs of shuffled parts</a:t>
-            </a:r>
-          </a:p>
-        </p:txBody>
-      </p:sp>
-      <p:sp>
-        <p:nvSpPr>
-          <p:cNvPr id="13" name="TextBox 12">
-            <a:extLst>
-              <a:ext uri="{FF2B5EF4-FFF2-40B4-BE49-F238E27FC236}">
-                <a16:creationId xmlns:a16="http://schemas.microsoft.com/office/drawing/2014/main" id="{86023C08-35C4-CF4E-B4AF-CFB2312D7594}"/>
-              </a:ext>
-            </a:extLst>
-          </p:cNvPr>
-          <p:cNvSpPr txBox="1"/>
-          <p:nvPr/>
-        </p:nvSpPr>
-        <p:spPr>
-          <a:xfrm>
-            <a:off x="5520585" y="4322989"/>
-            <a:ext cx="1478290" cy="461665"/>
-          </a:xfrm>
-          <a:prstGeom prst="rect">
-            <a:avLst/>
-          </a:prstGeom>
-          <a:noFill/>
-        </p:spPr>
-        <p:txBody>
-          <a:bodyPr wrap="none" rtlCol="0">
-            <a:spAutoFit/>
-          </a:bodyPr>
-          <a:lstStyle/>
-          <a:p>
-            <a:r>
-              <a:rPr lang="en-US" sz="1200" dirty="0">
-                <a:solidFill>
-                  <a:srgbClr val="00B050"/>
-                </a:solidFill>
-                <a:latin typeface="Calibri" panose="020F0502020204030204" pitchFamily="34" charset="0"/>
-                <a:cs typeface="Calibri" panose="020F0502020204030204" pitchFamily="34" charset="0"/>
-              </a:rPr>
-              <a:t>P-value is estimated </a:t>
-            </a:r>
-          </a:p>
-          <a:p>
-            <a:r>
-              <a:rPr lang="en-US" sz="1200" dirty="0">
-                <a:solidFill>
-                  <a:srgbClr val="00B050"/>
-                </a:solidFill>
-                <a:latin typeface="Calibri" panose="020F0502020204030204" pitchFamily="34" charset="0"/>
-                <a:cs typeface="Calibri" panose="020F0502020204030204" pitchFamily="34" charset="0"/>
-              </a:rPr>
-              <a:t>by counting</a:t>
-            </a:r>
-          </a:p>
-        </p:txBody>
-      </p:sp>
-      <p:sp>
-        <p:nvSpPr>
-          <p:cNvPr id="14" name="Right Arrow 13">
-            <a:extLst>
-              <a:ext uri="{FF2B5EF4-FFF2-40B4-BE49-F238E27FC236}">
-                <a16:creationId xmlns:a16="http://schemas.microsoft.com/office/drawing/2014/main" id="{36A8D943-90BE-FB4B-B711-182B969661B6}"/>
-              </a:ext>
-            </a:extLst>
-          </p:cNvPr>
-          <p:cNvSpPr/>
-          <p:nvPr/>
-        </p:nvSpPr>
-        <p:spPr>
-          <a:xfrm>
-            <a:off x="6946317" y="4443055"/>
+            <a:off x="6742130" y="4443055"/>
             <a:ext cx="457532" cy="178375"/>
           </a:xfrm>
           <a:prstGeom prst="rightArrow">
@@ -18563,6 +16726,42 @@
           </a:p>
         </p:txBody>
       </p:sp>
+      <p:pic>
+        <p:nvPicPr>
+          <p:cNvPr id="16" name="Picture 15">
+            <a:extLst>
+              <a:ext uri="{FF2B5EF4-FFF2-40B4-BE49-F238E27FC236}">
+                <a16:creationId xmlns:a16="http://schemas.microsoft.com/office/drawing/2014/main" id="{CDF2A838-1186-FA47-A0D9-76686CFF27DE}"/>
+              </a:ext>
+            </a:extLst>
+          </p:cNvPr>
+          <p:cNvPicPr>
+            <a:picLocks noChangeAspect="1"/>
+          </p:cNvPicPr>
+          <p:nvPr/>
+        </p:nvPicPr>
+        <p:blipFill>
+          <a:blip r:embed="rId5" cstate="email">
+            <a:extLst>
+              <a:ext uri="{28A0092B-C50C-407E-A947-70E740481C1C}">
+                <a14:useLocalDpi xmlns:a14="http://schemas.microsoft.com/office/drawing/2010/main"/>
+              </a:ext>
+            </a:extLst>
+          </a:blip>
+          <a:stretch>
+            <a:fillRect/>
+          </a:stretch>
+        </p:blipFill>
+        <p:spPr>
+          <a:xfrm>
+            <a:off x="4647255" y="906000"/>
+            <a:ext cx="2192237" cy="1221903"/>
+          </a:xfrm>
+          <a:prstGeom prst="rect">
+            <a:avLst/>
+          </a:prstGeom>
+        </p:spPr>
+      </p:pic>
     </p:spTree>
     <p:extLst>
       <p:ext uri="{BB962C8B-B14F-4D97-AF65-F5344CB8AC3E}">
@@ -18576,7 +16775,7 @@
 </p:sld>
 </file>
 
-<file path=ppt/slides/slide5.xml><?xml version="1.0" encoding="utf-8"?>
+<file path=ppt/slides/slide4.xml><?xml version="1.0" encoding="utf-8"?>
 <p:sld xmlns:a="http://schemas.openxmlformats.org/drawingml/2006/main" xmlns:r="http://schemas.openxmlformats.org/officeDocument/2006/relationships" xmlns:p="http://schemas.openxmlformats.org/presentationml/2006/main">
   <p:cSld>
     <p:spTree>
